--- a/a7/packages/A7 Unit 3 - Exponents and Scientific Notation/Lessons/3.06/A7 3.06 Evaluating and Equivalent Expressions - Slides.pptx
+++ b/a7/packages/A7 Unit 3 - Exponents and Scientific Notation/Lessons/3.06/A7 3.06 Evaluating and Equivalent Expressions - Slides.pptx
@@ -3130,7 +3130,7 @@
         </p:nvSpPr>
         <p:spPr>
           <a:xfrm>
-            <a:off x="777240" y="1691640"/>
+            <a:off x="777240" y="2148840"/>
             <a:ext cx="10607040" cy="347472"/>
           </a:xfrm>
           <a:prstGeom prst="rect">
@@ -3165,7 +3165,7 @@
         </p:nvSpPr>
         <p:spPr>
           <a:xfrm>
-            <a:off x="777240" y="2048256"/>
+            <a:off x="777240" y="2505456"/>
             <a:ext cx="10607040" cy="1005840"/>
           </a:xfrm>
           <a:prstGeom prst="rect">
@@ -3200,7 +3200,7 @@
         </p:nvCxnSpPr>
         <p:spPr>
           <a:xfrm>
-            <a:off x="3291840" y="3255264"/>
+            <a:off x="3291840" y="3712464"/>
             <a:ext cx="5577840" cy="0"/>
           </a:xfrm>
           <a:prstGeom prst="line">
@@ -3235,7 +3235,7 @@
         </p:nvCxnSpPr>
         <p:spPr>
           <a:xfrm>
-            <a:off x="3291840" y="3337560"/>
+            <a:off x="3291840" y="3794760"/>
             <a:ext cx="5577840" cy="0"/>
           </a:xfrm>
           <a:prstGeom prst="line">
@@ -3270,7 +3270,7 @@
         </p:nvSpPr>
         <p:spPr>
           <a:xfrm>
-            <a:off x="777240" y="3502152"/>
+            <a:off x="777240" y="3959352"/>
             <a:ext cx="10607040" cy="310896"/>
           </a:xfrm>
           <a:prstGeom prst="rect">
@@ -3305,7 +3305,7 @@
         </p:nvSpPr>
         <p:spPr>
           <a:xfrm>
-            <a:off x="777240" y="3840480"/>
+            <a:off x="777240" y="4297680"/>
             <a:ext cx="10607040" cy="731520"/>
           </a:xfrm>
           <a:prstGeom prst="rect">
@@ -3332,125 +3332,9 @@
           </a:p>
         </p:txBody>
       </p:sp>
-      <p:sp>
-        <p:nvSpPr>
-          <p:cNvPr id="8" name="Rectangle 7"/>
-          <p:cNvSpPr/>
-          <p:nvPr/>
-        </p:nvSpPr>
-        <p:spPr>
-          <a:xfrm>
-            <a:off x="2377440" y="4736592"/>
-            <a:ext cx="7406640" cy="1051560"/>
-          </a:xfrm>
-          <a:prstGeom prst="rect">
-            <a:avLst/>
-          </a:prstGeom>
-          <a:solidFill>
-            <a:srgbClr val="F2F2F0"/>
-          </a:solidFill>
-          <a:ln w="9525">
-            <a:solidFill>
-              <a:srgbClr val="BFBFBF"/>
-            </a:solidFill>
-          </a:ln>
-          <a:effectLst/>
-        </p:spPr>
-        <p:style>
-          <a:lnRef idx="1">
-            <a:schemeClr val="accent1"/>
-          </a:lnRef>
-          <a:fillRef idx="3">
-            <a:schemeClr val="accent1"/>
-          </a:fillRef>
-          <a:effectRef idx="2">
-            <a:schemeClr val="accent1"/>
-          </a:effectRef>
-          <a:fontRef idx="minor">
-            <a:schemeClr val="lt1"/>
-          </a:fontRef>
-        </p:style>
-        <p:txBody>
-          <a:bodyPr rtlCol="0" anchor="ctr"/>
-          <a:lstStyle/>
-          <a:p>
-            <a:pPr algn="ctr"/>
-          </a:p>
-        </p:txBody>
-      </p:sp>
-      <p:sp>
-        <p:nvSpPr>
-          <p:cNvPr id="9" name="TextBox 8"/>
-          <p:cNvSpPr txBox="1"/>
-          <p:nvPr/>
-        </p:nvSpPr>
-        <p:spPr>
-          <a:xfrm>
-            <a:off x="2606040" y="4892040"/>
-            <a:ext cx="6949440" cy="365760"/>
-          </a:xfrm>
-          <a:prstGeom prst="rect">
-            <a:avLst/>
-          </a:prstGeom>
-          <a:noFill/>
-        </p:spPr>
-        <p:txBody>
-          <a:bodyPr wrap="square" lIns="45720" rIns="45720" tIns="18288" bIns="18288" anchor="t">
-            <a:spAutoFit/>
-          </a:bodyPr>
-          <a:lstStyle/>
-          <a:p>
-            <a:pPr algn="ctr"/>
-            <a:r>
-              <a:rPr sz="1700" b="0" i="1">
-                <a:solidFill>
-                  <a:srgbClr val="6B6B6B"/>
-                </a:solidFill>
-                <a:latin typeface="Century Schoolbook"/>
-              </a:rPr>
-              <a:t>So far: every law, every kind of base, every kind of exponent.</a:t>
-            </a:r>
-          </a:p>
-        </p:txBody>
-      </p:sp>
-      <p:sp>
-        <p:nvSpPr>
-          <p:cNvPr id="10" name="TextBox 9"/>
-          <p:cNvSpPr txBox="1"/>
-          <p:nvPr/>
-        </p:nvSpPr>
-        <p:spPr>
-          <a:xfrm>
-            <a:off x="2606040" y="5276088"/>
-            <a:ext cx="6949440" cy="365760"/>
-          </a:xfrm>
-          <a:prstGeom prst="rect">
-            <a:avLst/>
-          </a:prstGeom>
-          <a:noFill/>
-        </p:spPr>
-        <p:txBody>
-          <a:bodyPr wrap="square" lIns="45720" rIns="45720" tIns="18288" bIns="18288" anchor="t">
-            <a:spAutoFit/>
-          </a:bodyPr>
-          <a:lstStyle/>
-          <a:p>
-            <a:pPr algn="ctr"/>
-            <a:r>
-              <a:rPr sz="1700" b="1" i="0">
-                <a:solidFill>
-                  <a:srgbClr val="1A1A1A"/>
-                </a:solidFill>
-                <a:latin typeface="Century Schoolbook"/>
-              </a:rPr>
-              <a:t>Today: use all of it at once — and rewrite bases to compare.</a:t>
-            </a:r>
-          </a:p>
-        </p:txBody>
-      </p:sp>
       <p:cxnSp>
         <p:nvCxnSpPr>
-          <p:cNvPr id="11" name="Connector 10"/>
+          <p:cNvPr id="8" name="Connector 7"/>
           <p:cNvCxnSpPr/>
           <p:nvPr/>
         </p:nvCxnSpPr>
@@ -3485,7 +3369,7 @@
       </p:cxnSp>
       <p:sp>
         <p:nvSpPr>
-          <p:cNvPr id="12" name="TextBox 11"/>
+          <p:cNvPr id="9" name="TextBox 8"/>
           <p:cNvSpPr txBox="1"/>
           <p:nvPr/>
         </p:nvSpPr>
@@ -3520,7 +3404,7 @@
       </p:sp>
       <p:sp>
         <p:nvSpPr>
-          <p:cNvPr id="13" name="TextBox 12"/>
+          <p:cNvPr id="10" name="TextBox 9"/>
           <p:cNvSpPr txBox="1"/>
           <p:nvPr/>
         </p:nvSpPr>
@@ -3676,44 +3560,9 @@
           </a:fontRef>
         </p:style>
       </p:cxnSp>
-      <p:sp>
-        <p:nvSpPr>
-          <p:cNvPr id="5" name="TextBox 4"/>
-          <p:cNvSpPr txBox="1"/>
-          <p:nvPr/>
-        </p:nvSpPr>
-        <p:spPr>
-          <a:xfrm>
-            <a:off x="777240" y="1261872"/>
-            <a:ext cx="10607040" cy="310896"/>
-          </a:xfrm>
-          <a:prstGeom prst="rect">
-            <a:avLst/>
-          </a:prstGeom>
-          <a:noFill/>
-        </p:spPr>
-        <p:txBody>
-          <a:bodyPr wrap="square" lIns="45720" rIns="45720" tIns="18288" bIns="18288" anchor="t">
-            <a:spAutoFit/>
-          </a:bodyPr>
-          <a:lstStyle/>
-          <a:p>
-            <a:pPr algn="l"/>
-            <a:r>
-              <a:rPr sz="1700" b="0" i="1">
-                <a:solidFill>
-                  <a:srgbClr val="6B6B6B"/>
-                </a:solidFill>
-                <a:latin typeface="Century Schoolbook"/>
-              </a:rPr>
-              <a:t>Same steps, your numbers. Boards up when done.</a:t>
-            </a:r>
-          </a:p>
-        </p:txBody>
-      </p:sp>
       <p:cxnSp>
         <p:nvCxnSpPr>
-          <p:cNvPr id="6" name="Connector 5"/>
+          <p:cNvPr id="5" name="Connector 4"/>
           <p:cNvCxnSpPr/>
           <p:nvPr/>
         </p:nvCxnSpPr>
@@ -3748,7 +3597,7 @@
       </p:cxnSp>
       <p:sp>
         <p:nvSpPr>
-          <p:cNvPr id="7" name="TextBox 6"/>
+          <p:cNvPr id="6" name="TextBox 5"/>
           <p:cNvSpPr txBox="1"/>
           <p:nvPr/>
         </p:nvSpPr>
@@ -3783,7 +3632,7 @@
       </p:sp>
       <p:sp>
         <p:nvSpPr>
-          <p:cNvPr id="8" name="TextBox 7"/>
+          <p:cNvPr id="7" name="TextBox 6"/>
           <p:cNvSpPr txBox="1"/>
           <p:nvPr/>
         </p:nvSpPr>
@@ -3818,7 +3667,7 @@
       </p:sp>
       <p:pic>
         <p:nvPicPr>
-          <p:cNvPr id="9" name="Picture 8" descr="b5586861463d6b87.png"/>
+          <p:cNvPr id="8" name="Picture 7" descr="b5586861463d6b87.png"/>
           <p:cNvPicPr>
             <a:picLocks noChangeAspect="1"/>
           </p:cNvPicPr>
@@ -3840,6 +3689,41 @@
           </a:prstGeom>
         </p:spPr>
       </p:pic>
+      <p:sp>
+        <p:nvSpPr>
+          <p:cNvPr id="9" name="TextBox 8"/>
+          <p:cNvSpPr txBox="1"/>
+          <p:nvPr/>
+        </p:nvSpPr>
+        <p:spPr>
+          <a:xfrm>
+            <a:off x="777240" y="3560064"/>
+            <a:ext cx="10607040" cy="429370"/>
+          </a:xfrm>
+          <a:prstGeom prst="rect">
+            <a:avLst/>
+          </a:prstGeom>
+          <a:noFill/>
+        </p:spPr>
+        <p:txBody>
+          <a:bodyPr wrap="square" lIns="45720" rIns="45720" tIns="18288" bIns="18288" anchor="t">
+            <a:spAutoFit/>
+          </a:bodyPr>
+          <a:lstStyle/>
+          <a:p>
+            <a:pPr algn="ctr"/>
+            <a:r>
+              <a:rPr sz="2400" b="1" i="0">
+                <a:solidFill>
+                  <a:srgbClr val="1A1A1A"/>
+                </a:solidFill>
+                <a:latin typeface="Century Schoolbook"/>
+              </a:rPr>
+              <a:t>Find the value.</a:t>
+            </a:r>
+          </a:p>
+        </p:txBody>
+      </p:sp>
     </p:spTree>
   </p:cSld>
   <p:clrMapOvr>
@@ -3963,44 +3847,9 @@
           </a:fontRef>
         </p:style>
       </p:cxnSp>
-      <p:sp>
-        <p:nvSpPr>
-          <p:cNvPr id="5" name="TextBox 4"/>
-          <p:cNvSpPr txBox="1"/>
-          <p:nvPr/>
-        </p:nvSpPr>
-        <p:spPr>
-          <a:xfrm>
-            <a:off x="777240" y="1261872"/>
-            <a:ext cx="10607040" cy="310896"/>
-          </a:xfrm>
-          <a:prstGeom prst="rect">
-            <a:avLst/>
-          </a:prstGeom>
-          <a:noFill/>
-        </p:spPr>
-        <p:txBody>
-          <a:bodyPr wrap="square" lIns="45720" rIns="45720" tIns="18288" bIns="18288" anchor="t">
-            <a:spAutoFit/>
-          </a:bodyPr>
-          <a:lstStyle/>
-          <a:p>
-            <a:pPr algn="l"/>
-            <a:r>
-              <a:rPr sz="1700" b="0" i="1">
-                <a:solidFill>
-                  <a:srgbClr val="6B6B6B"/>
-                </a:solidFill>
-                <a:latin typeface="Century Schoolbook"/>
-              </a:rPr>
-              <a:t>Answer.</a:t>
-            </a:r>
-          </a:p>
-        </p:txBody>
-      </p:sp>
       <p:cxnSp>
         <p:nvCxnSpPr>
-          <p:cNvPr id="6" name="Connector 5"/>
+          <p:cNvPr id="5" name="Connector 4"/>
           <p:cNvCxnSpPr/>
           <p:nvPr/>
         </p:nvCxnSpPr>
@@ -4035,7 +3884,7 @@
       </p:cxnSp>
       <p:sp>
         <p:nvSpPr>
-          <p:cNvPr id="7" name="TextBox 6"/>
+          <p:cNvPr id="6" name="TextBox 5"/>
           <p:cNvSpPr txBox="1"/>
           <p:nvPr/>
         </p:nvSpPr>
@@ -4070,7 +3919,7 @@
       </p:sp>
       <p:sp>
         <p:nvSpPr>
-          <p:cNvPr id="8" name="TextBox 7"/>
+          <p:cNvPr id="7" name="TextBox 6"/>
           <p:cNvSpPr txBox="1"/>
           <p:nvPr/>
         </p:nvSpPr>
@@ -4105,7 +3954,7 @@
       </p:sp>
       <p:pic>
         <p:nvPicPr>
-          <p:cNvPr id="9" name="Picture 8" descr="4ba5d3554b7f430d.png"/>
+          <p:cNvPr id="8" name="Picture 7" descr="4ba5d3554b7f430d.png"/>
           <p:cNvPicPr>
             <a:picLocks noChangeAspect="1"/>
           </p:cNvPicPr>
@@ -4129,13 +3978,13 @@
       </p:pic>
       <p:sp>
         <p:nvSpPr>
-          <p:cNvPr id="10" name="TextBox 9"/>
-          <p:cNvSpPr txBox="1"/>
-          <p:nvPr/>
-        </p:nvSpPr>
-        <p:spPr>
-          <a:xfrm>
-            <a:off x="777240" y="3377184"/>
+          <p:cNvPr id="9" name="TextBox 8"/>
+          <p:cNvSpPr txBox="1"/>
+          <p:nvPr/>
+        </p:nvSpPr>
+        <p:spPr>
+          <a:xfrm>
+            <a:off x="777240" y="3560064"/>
             <a:ext cx="10607040" cy="429370"/>
           </a:xfrm>
           <a:prstGeom prst="rect">
@@ -4151,38 +4000,20 @@
           <a:p>
             <a:pPr algn="ctr"/>
             <a:r>
-              <a:rPr sz="2400" b="0" i="0">
-                <a:solidFill>
-                  <a:srgbClr val="6B6B6B"/>
-                </a:solidFill>
-                <a:latin typeface="Century Schoolbook"/>
-              </a:rPr>
-              <a:t>(5/2)</a:t>
-            </a:r>
-            <a:r>
-              <a:rPr sz="2400" b="0" i="0" baseline="30000">
-                <a:solidFill>
-                  <a:srgbClr val="6B6B6B"/>
-                </a:solidFill>
-                <a:latin typeface="Century Schoolbook"/>
-              </a:rPr>
-              <a:t>2</a:t>
-            </a:r>
-            <a:r>
-              <a:rPr sz="2400" b="0" i="0">
-                <a:solidFill>
-                  <a:srgbClr val="6B6B6B"/>
-                </a:solidFill>
-                <a:latin typeface="Century Schoolbook"/>
-              </a:rPr>
-              <a:t> · 2 = 25/4 · 2</a:t>
-            </a:r>
-          </a:p>
-        </p:txBody>
-      </p:sp>
-      <p:sp>
-        <p:nvSpPr>
-          <p:cNvPr id="11" name="TextBox 10"/>
+              <a:rPr sz="2400" b="1" i="0">
+                <a:solidFill>
+                  <a:srgbClr val="1A1A1A"/>
+                </a:solidFill>
+                <a:latin typeface="Century Schoolbook"/>
+              </a:rPr>
+              <a:t>Find the value.</a:t>
+            </a:r>
+          </a:p>
+        </p:txBody>
+      </p:sp>
+      <p:sp>
+        <p:nvSpPr>
+          <p:cNvPr id="10" name="TextBox 9"/>
           <p:cNvSpPr txBox="1"/>
           <p:nvPr/>
         </p:nvSpPr>
@@ -4217,7 +4048,7 @@
       </p:sp>
       <p:pic>
         <p:nvPicPr>
-          <p:cNvPr id="12" name="Picture 11" descr="3a56cc9ab8e3bbe2.png"/>
+          <p:cNvPr id="11" name="Picture 10" descr="3a56cc9ab8e3bbe2.png"/>
           <p:cNvPicPr>
             <a:picLocks noChangeAspect="1"/>
           </p:cNvPicPr>
@@ -4362,44 +4193,9 @@
           </a:fontRef>
         </p:style>
       </p:cxnSp>
-      <p:sp>
-        <p:nvSpPr>
-          <p:cNvPr id="5" name="TextBox 4"/>
-          <p:cNvSpPr txBox="1"/>
-          <p:nvPr/>
-        </p:nvSpPr>
-        <p:spPr>
-          <a:xfrm>
-            <a:off x="777240" y="1261872"/>
-            <a:ext cx="10607040" cy="310896"/>
-          </a:xfrm>
-          <a:prstGeom prst="rect">
-            <a:avLst/>
-          </a:prstGeom>
-          <a:noFill/>
-        </p:spPr>
-        <p:txBody>
-          <a:bodyPr wrap="square" lIns="45720" rIns="45720" tIns="18288" bIns="18288" anchor="t">
-            <a:spAutoFit/>
-          </a:bodyPr>
-          <a:lstStyle/>
-          <a:p>
-            <a:pPr algn="l"/>
-            <a:r>
-              <a:rPr sz="1700" b="0" i="1">
-                <a:solidFill>
-                  <a:srgbClr val="6B6B6B"/>
-                </a:solidFill>
-                <a:latin typeface="Century Schoolbook"/>
-              </a:rPr>
-              <a:t>Equivalent or not?</a:t>
-            </a:r>
-          </a:p>
-        </p:txBody>
-      </p:sp>
       <p:cxnSp>
         <p:nvCxnSpPr>
-          <p:cNvPr id="6" name="Connector 5"/>
+          <p:cNvPr id="5" name="Connector 4"/>
           <p:cNvCxnSpPr/>
           <p:nvPr/>
         </p:nvCxnSpPr>
@@ -4434,7 +4230,7 @@
       </p:cxnSp>
       <p:sp>
         <p:nvSpPr>
-          <p:cNvPr id="7" name="TextBox 6"/>
+          <p:cNvPr id="6" name="TextBox 5"/>
           <p:cNvSpPr txBox="1"/>
           <p:nvPr/>
         </p:nvSpPr>
@@ -4469,7 +4265,7 @@
       </p:sp>
       <p:sp>
         <p:nvSpPr>
-          <p:cNvPr id="8" name="TextBox 7"/>
+          <p:cNvPr id="7" name="TextBox 6"/>
           <p:cNvSpPr txBox="1"/>
           <p:nvPr/>
         </p:nvSpPr>
@@ -4504,7 +4300,7 @@
       </p:sp>
       <p:sp>
         <p:nvSpPr>
-          <p:cNvPr id="9" name="TextBox 8"/>
+          <p:cNvPr id="8" name="TextBox 7"/>
           <p:cNvSpPr txBox="1"/>
           <p:nvPr/>
         </p:nvSpPr>
@@ -4539,7 +4335,7 @@
       </p:sp>
       <p:pic>
         <p:nvPicPr>
-          <p:cNvPr id="10" name="Picture 9" descr="67df2d652c1a7134.png"/>
+          <p:cNvPr id="9" name="Picture 8" descr="67df2d652c1a7134.png"/>
           <p:cNvPicPr>
             <a:picLocks noChangeAspect="1"/>
           </p:cNvPicPr>
@@ -4563,7 +4359,7 @@
       </p:pic>
       <p:sp>
         <p:nvSpPr>
-          <p:cNvPr id="11" name="TextBox 10"/>
+          <p:cNvPr id="10" name="TextBox 9"/>
           <p:cNvSpPr txBox="1"/>
           <p:nvPr/>
         </p:nvSpPr>
@@ -4598,7 +4394,7 @@
       </p:sp>
       <p:pic>
         <p:nvPicPr>
-          <p:cNvPr id="12" name="Picture 11" descr="69969edd9de46883.png"/>
+          <p:cNvPr id="11" name="Picture 10" descr="69969edd9de46883.png"/>
           <p:cNvPicPr>
             <a:picLocks noChangeAspect="1"/>
           </p:cNvPicPr>
@@ -4622,7 +4418,7 @@
       </p:pic>
       <p:sp>
         <p:nvSpPr>
-          <p:cNvPr id="13" name="TextBox 12"/>
+          <p:cNvPr id="12" name="TextBox 11"/>
           <p:cNvSpPr txBox="1"/>
           <p:nvPr/>
         </p:nvSpPr>
@@ -4657,7 +4453,7 @@
       </p:sp>
       <p:sp>
         <p:nvSpPr>
-          <p:cNvPr id="14" name="TextBox 13"/>
+          <p:cNvPr id="13" name="TextBox 12"/>
           <p:cNvSpPr txBox="1"/>
           <p:nvPr/>
         </p:nvSpPr>
@@ -4813,44 +4609,9 @@
           </a:fontRef>
         </p:style>
       </p:cxnSp>
-      <p:sp>
-        <p:nvSpPr>
-          <p:cNvPr id="5" name="TextBox 4"/>
-          <p:cNvSpPr txBox="1"/>
-          <p:nvPr/>
-        </p:nvSpPr>
-        <p:spPr>
-          <a:xfrm>
-            <a:off x="777240" y="1261872"/>
-            <a:ext cx="10607040" cy="310896"/>
-          </a:xfrm>
-          <a:prstGeom prst="rect">
-            <a:avLst/>
-          </a:prstGeom>
-          <a:noFill/>
-        </p:spPr>
-        <p:txBody>
-          <a:bodyPr wrap="square" lIns="45720" rIns="45720" tIns="18288" bIns="18288" anchor="t">
-            <a:spAutoFit/>
-          </a:bodyPr>
-          <a:lstStyle/>
-          <a:p>
-            <a:pPr algn="l"/>
-            <a:r>
-              <a:rPr sz="1700" b="0" i="1">
-                <a:solidFill>
-                  <a:srgbClr val="6B6B6B"/>
-                </a:solidFill>
-                <a:latin typeface="Century Schoolbook"/>
-              </a:rPr>
-              <a:t>Worked.</a:t>
-            </a:r>
-          </a:p>
-        </p:txBody>
-      </p:sp>
       <p:cxnSp>
         <p:nvCxnSpPr>
-          <p:cNvPr id="6" name="Connector 5"/>
+          <p:cNvPr id="5" name="Connector 4"/>
           <p:cNvCxnSpPr/>
           <p:nvPr/>
         </p:nvCxnSpPr>
@@ -4885,7 +4646,7 @@
       </p:cxnSp>
       <p:sp>
         <p:nvSpPr>
-          <p:cNvPr id="7" name="TextBox 6"/>
+          <p:cNvPr id="6" name="TextBox 5"/>
           <p:cNvSpPr txBox="1"/>
           <p:nvPr/>
         </p:nvSpPr>
@@ -4920,7 +4681,7 @@
       </p:sp>
       <p:sp>
         <p:nvSpPr>
-          <p:cNvPr id="8" name="TextBox 7"/>
+          <p:cNvPr id="7" name="TextBox 6"/>
           <p:cNvSpPr txBox="1"/>
           <p:nvPr/>
         </p:nvSpPr>
@@ -4955,7 +4716,7 @@
       </p:sp>
       <p:pic>
         <p:nvPicPr>
-          <p:cNvPr id="9" name="Picture 8" descr="9dc7ad07cd91fb8a.png"/>
+          <p:cNvPr id="8" name="Picture 7" descr="9dc7ad07cd91fb8a.png"/>
           <p:cNvPicPr>
             <a:picLocks noChangeAspect="1"/>
           </p:cNvPicPr>
@@ -4977,44 +4738,9 @@
           </a:prstGeom>
         </p:spPr>
       </p:pic>
-      <p:sp>
-        <p:nvSpPr>
-          <p:cNvPr id="10" name="TextBox 9"/>
-          <p:cNvSpPr txBox="1"/>
-          <p:nvPr/>
-        </p:nvSpPr>
-        <p:spPr>
-          <a:xfrm>
-            <a:off x="6553200" y="1865376"/>
-            <a:ext cx="4831079" cy="502920"/>
-          </a:xfrm>
-          <a:prstGeom prst="rect">
-            <a:avLst/>
-          </a:prstGeom>
-          <a:noFill/>
-        </p:spPr>
-        <p:txBody>
-          <a:bodyPr wrap="square" lIns="45720" rIns="45720" tIns="18288" bIns="18288" anchor="ctr">
-            <a:spAutoFit/>
-          </a:bodyPr>
-          <a:lstStyle/>
-          <a:p>
-            <a:pPr algn="l"/>
-            <a:r>
-              <a:rPr sz="2100" b="0" i="1">
-                <a:solidFill>
-                  <a:srgbClr val="6B6B6B"/>
-                </a:solidFill>
-                <a:latin typeface="Century Schoolbook"/>
-              </a:rPr>
-              <a:t>power of a product, product of powers</a:t>
-            </a:r>
-          </a:p>
-        </p:txBody>
-      </p:sp>
       <p:pic>
         <p:nvPicPr>
-          <p:cNvPr id="11" name="Picture 10" descr="77d3b6258368a7ab.png"/>
+          <p:cNvPr id="9" name="Picture 8" descr="77d3b6258368a7ab.png"/>
           <p:cNvPicPr>
             <a:picLocks noChangeAspect="1"/>
           </p:cNvPicPr>
@@ -5036,44 +4762,9 @@
           </a:prstGeom>
         </p:spPr>
       </p:pic>
-      <p:sp>
-        <p:nvSpPr>
-          <p:cNvPr id="12" name="TextBox 11"/>
-          <p:cNvSpPr txBox="1"/>
-          <p:nvPr/>
-        </p:nvSpPr>
-        <p:spPr>
-          <a:xfrm>
-            <a:off x="6169152" y="2750820"/>
-            <a:ext cx="5215127" cy="502920"/>
-          </a:xfrm>
-          <a:prstGeom prst="rect">
-            <a:avLst/>
-          </a:prstGeom>
-          <a:noFill/>
-        </p:spPr>
-        <p:txBody>
-          <a:bodyPr wrap="square" lIns="45720" rIns="45720" tIns="18288" bIns="18288" anchor="ctr">
-            <a:spAutoFit/>
-          </a:bodyPr>
-          <a:lstStyle/>
-          <a:p>
-            <a:pPr algn="l"/>
-            <a:r>
-              <a:rPr sz="2100" b="0" i="1">
-                <a:solidFill>
-                  <a:srgbClr val="6B6B6B"/>
-                </a:solidFill>
-                <a:latin typeface="Century Schoolbook"/>
-              </a:rPr>
-              <a:t>power of a product, quotient of powers</a:t>
-            </a:r>
-          </a:p>
-        </p:txBody>
-      </p:sp>
       <p:pic>
         <p:nvPicPr>
-          <p:cNvPr id="13" name="Picture 12" descr="4af5e130ae69dded.png"/>
+          <p:cNvPr id="10" name="Picture 9" descr="4af5e130ae69dded.png"/>
           <p:cNvPicPr>
             <a:picLocks noChangeAspect="1"/>
           </p:cNvPicPr>
@@ -5097,42 +4788,7 @@
       </p:pic>
       <p:sp>
         <p:nvSpPr>
-          <p:cNvPr id="14" name="TextBox 13"/>
-          <p:cNvSpPr txBox="1"/>
-          <p:nvPr/>
-        </p:nvSpPr>
-        <p:spPr>
-          <a:xfrm>
-            <a:off x="4581144" y="3636263"/>
-            <a:ext cx="6400800" cy="502920"/>
-          </a:xfrm>
-          <a:prstGeom prst="rect">
-            <a:avLst/>
-          </a:prstGeom>
-          <a:noFill/>
-        </p:spPr>
-        <p:txBody>
-          <a:bodyPr wrap="square" lIns="45720" rIns="45720" tIns="18288" bIns="18288" anchor="ctr">
-            <a:spAutoFit/>
-          </a:bodyPr>
-          <a:lstStyle/>
-          <a:p>
-            <a:pPr algn="l"/>
-            <a:r>
-              <a:rPr sz="2100" b="0" i="1">
-                <a:solidFill>
-                  <a:srgbClr val="6B6B6B"/>
-                </a:solidFill>
-                <a:latin typeface="Century Schoolbook"/>
-              </a:rPr>
-              <a:t>same bases, same exponents</a:t>
-            </a:r>
-          </a:p>
-        </p:txBody>
-      </p:sp>
-      <p:sp>
-        <p:nvSpPr>
-          <p:cNvPr id="15" name="TextBox 14"/>
+          <p:cNvPr id="11" name="TextBox 10"/>
           <p:cNvSpPr txBox="1"/>
           <p:nvPr/>
         </p:nvSpPr>
@@ -5324,44 +4980,9 @@
           </a:fontRef>
         </p:style>
       </p:cxnSp>
-      <p:sp>
-        <p:nvSpPr>
-          <p:cNvPr id="5" name="TextBox 4"/>
-          <p:cNvSpPr txBox="1"/>
-          <p:nvPr/>
-        </p:nvSpPr>
-        <p:spPr>
-          <a:xfrm>
-            <a:off x="777240" y="1261872"/>
-            <a:ext cx="10607040" cy="310896"/>
-          </a:xfrm>
-          <a:prstGeom prst="rect">
-            <a:avLst/>
-          </a:prstGeom>
-          <a:noFill/>
-        </p:spPr>
-        <p:txBody>
-          <a:bodyPr wrap="square" lIns="45720" rIns="45720" tIns="18288" bIns="18288" anchor="t">
-            <a:spAutoFit/>
-          </a:bodyPr>
-          <a:lstStyle/>
-          <a:p>
-            <a:pPr algn="l"/>
-            <a:r>
-              <a:rPr sz="1700" b="0" i="1">
-                <a:solidFill>
-                  <a:srgbClr val="6B6B6B"/>
-                </a:solidFill>
-                <a:latin typeface="Century Schoolbook"/>
-              </a:rPr>
-              <a:t>Same steps, your numbers. Boards up when done.</a:t>
-            </a:r>
-          </a:p>
-        </p:txBody>
-      </p:sp>
       <p:cxnSp>
         <p:nvCxnSpPr>
-          <p:cNvPr id="6" name="Connector 5"/>
+          <p:cNvPr id="5" name="Connector 4"/>
           <p:cNvCxnSpPr/>
           <p:nvPr/>
         </p:nvCxnSpPr>
@@ -5396,7 +5017,7 @@
       </p:cxnSp>
       <p:sp>
         <p:nvSpPr>
-          <p:cNvPr id="7" name="TextBox 6"/>
+          <p:cNvPr id="6" name="TextBox 5"/>
           <p:cNvSpPr txBox="1"/>
           <p:nvPr/>
         </p:nvSpPr>
@@ -5431,7 +5052,7 @@
       </p:sp>
       <p:sp>
         <p:nvSpPr>
-          <p:cNvPr id="8" name="TextBox 7"/>
+          <p:cNvPr id="7" name="TextBox 6"/>
           <p:cNvSpPr txBox="1"/>
           <p:nvPr/>
         </p:nvSpPr>
@@ -5466,7 +5087,7 @@
       </p:sp>
       <p:sp>
         <p:nvSpPr>
-          <p:cNvPr id="9" name="TextBox 8"/>
+          <p:cNvPr id="8" name="TextBox 7"/>
           <p:cNvSpPr txBox="1"/>
           <p:nvPr/>
         </p:nvSpPr>
@@ -5501,7 +5122,7 @@
       </p:sp>
       <p:pic>
         <p:nvPicPr>
-          <p:cNvPr id="10" name="Picture 9" descr="9b99919743149311.png"/>
+          <p:cNvPr id="9" name="Picture 8" descr="9b99919743149311.png"/>
           <p:cNvPicPr>
             <a:picLocks noChangeAspect="1"/>
           </p:cNvPicPr>
@@ -5525,7 +5146,7 @@
       </p:pic>
       <p:sp>
         <p:nvSpPr>
-          <p:cNvPr id="11" name="TextBox 10"/>
+          <p:cNvPr id="10" name="TextBox 9"/>
           <p:cNvSpPr txBox="1"/>
           <p:nvPr/>
         </p:nvSpPr>
@@ -5560,7 +5181,7 @@
       </p:sp>
       <p:pic>
         <p:nvPicPr>
-          <p:cNvPr id="12" name="Picture 11" descr="e566d1e7830f898c.png"/>
+          <p:cNvPr id="11" name="Picture 10" descr="e566d1e7830f898c.png"/>
           <p:cNvPicPr>
             <a:picLocks noChangeAspect="1"/>
           </p:cNvPicPr>
@@ -5584,7 +5205,7 @@
       </p:pic>
       <p:sp>
         <p:nvSpPr>
-          <p:cNvPr id="13" name="TextBox 12"/>
+          <p:cNvPr id="12" name="TextBox 11"/>
           <p:cNvSpPr txBox="1"/>
           <p:nvPr/>
         </p:nvSpPr>
@@ -5740,44 +5361,9 @@
           </a:fontRef>
         </p:style>
       </p:cxnSp>
-      <p:sp>
-        <p:nvSpPr>
-          <p:cNvPr id="5" name="TextBox 4"/>
-          <p:cNvSpPr txBox="1"/>
-          <p:nvPr/>
-        </p:nvSpPr>
-        <p:spPr>
-          <a:xfrm>
-            <a:off x="777240" y="1261872"/>
-            <a:ext cx="10607040" cy="310896"/>
-          </a:xfrm>
-          <a:prstGeom prst="rect">
-            <a:avLst/>
-          </a:prstGeom>
-          <a:noFill/>
-        </p:spPr>
-        <p:txBody>
-          <a:bodyPr wrap="square" lIns="45720" rIns="45720" tIns="18288" bIns="18288" anchor="t">
-            <a:spAutoFit/>
-          </a:bodyPr>
-          <a:lstStyle/>
-          <a:p>
-            <a:pPr algn="l"/>
-            <a:r>
-              <a:rPr sz="1700" b="0" i="1">
-                <a:solidFill>
-                  <a:srgbClr val="6B6B6B"/>
-                </a:solidFill>
-                <a:latin typeface="Century Schoolbook"/>
-              </a:rPr>
-              <a:t>Answer.</a:t>
-            </a:r>
-          </a:p>
-        </p:txBody>
-      </p:sp>
       <p:cxnSp>
         <p:nvCxnSpPr>
-          <p:cNvPr id="6" name="Connector 5"/>
+          <p:cNvPr id="5" name="Connector 4"/>
           <p:cNvCxnSpPr/>
           <p:nvPr/>
         </p:nvCxnSpPr>
@@ -5812,7 +5398,7 @@
       </p:cxnSp>
       <p:sp>
         <p:nvSpPr>
-          <p:cNvPr id="7" name="TextBox 6"/>
+          <p:cNvPr id="6" name="TextBox 5"/>
           <p:cNvSpPr txBox="1"/>
           <p:nvPr/>
         </p:nvSpPr>
@@ -5847,7 +5433,7 @@
       </p:sp>
       <p:sp>
         <p:nvSpPr>
-          <p:cNvPr id="8" name="TextBox 7"/>
+          <p:cNvPr id="7" name="TextBox 6"/>
           <p:cNvSpPr txBox="1"/>
           <p:nvPr/>
         </p:nvSpPr>
@@ -5882,7 +5468,7 @@
       </p:sp>
       <p:sp>
         <p:nvSpPr>
-          <p:cNvPr id="9" name="TextBox 8"/>
+          <p:cNvPr id="8" name="TextBox 7"/>
           <p:cNvSpPr txBox="1"/>
           <p:nvPr/>
         </p:nvSpPr>
@@ -5917,7 +5503,7 @@
       </p:sp>
       <p:pic>
         <p:nvPicPr>
-          <p:cNvPr id="10" name="Picture 9" descr="7788e03876974ccc.png"/>
+          <p:cNvPr id="9" name="Picture 8" descr="7788e03876974ccc.png"/>
           <p:cNvPicPr>
             <a:picLocks noChangeAspect="1"/>
           </p:cNvPicPr>
@@ -5941,7 +5527,7 @@
       </p:pic>
       <p:sp>
         <p:nvSpPr>
-          <p:cNvPr id="11" name="TextBox 10"/>
+          <p:cNvPr id="10" name="TextBox 9"/>
           <p:cNvSpPr txBox="1"/>
           <p:nvPr/>
         </p:nvSpPr>
@@ -5976,7 +5562,7 @@
       </p:sp>
       <p:pic>
         <p:nvPicPr>
-          <p:cNvPr id="12" name="Picture 11" descr="b7201d2b15f8c86f.png"/>
+          <p:cNvPr id="11" name="Picture 10" descr="b7201d2b15f8c86f.png"/>
           <p:cNvPicPr>
             <a:picLocks noChangeAspect="1"/>
           </p:cNvPicPr>
@@ -6000,7 +5586,7 @@
       </p:pic>
       <p:sp>
         <p:nvSpPr>
-          <p:cNvPr id="13" name="TextBox 12"/>
+          <p:cNvPr id="12" name="TextBox 11"/>
           <p:cNvSpPr txBox="1"/>
           <p:nvPr/>
         </p:nvSpPr>
@@ -6035,69 +5621,7 @@
       </p:sp>
       <p:sp>
         <p:nvSpPr>
-          <p:cNvPr id="14" name="TextBox 13"/>
-          <p:cNvSpPr txBox="1"/>
-          <p:nvPr/>
-        </p:nvSpPr>
-        <p:spPr>
-          <a:xfrm>
-            <a:off x="777240" y="3614928"/>
-            <a:ext cx="10607040" cy="429370"/>
-          </a:xfrm>
-          <a:prstGeom prst="rect">
-            <a:avLst/>
-          </a:prstGeom>
-          <a:noFill/>
-        </p:spPr>
-        <p:txBody>
-          <a:bodyPr wrap="square" lIns="45720" rIns="45720" tIns="18288" bIns="18288" anchor="t">
-            <a:spAutoFit/>
-          </a:bodyPr>
-          <a:lstStyle/>
-          <a:p>
-            <a:pPr algn="ctr"/>
-            <a:r>
-              <a:rPr sz="2400" b="0" i="0">
-                <a:solidFill>
-                  <a:srgbClr val="6B6B6B"/>
-                </a:solidFill>
-                <a:latin typeface="Century Schoolbook"/>
-              </a:rPr>
-              <a:t>both are 2</a:t>
-            </a:r>
-            <a:r>
-              <a:rPr sz="2400" b="0" i="0" baseline="30000">
-                <a:solidFill>
-                  <a:srgbClr val="6B6B6B"/>
-                </a:solidFill>
-                <a:latin typeface="Century Schoolbook"/>
-              </a:rPr>
-              <a:t>5</a:t>
-            </a:r>
-            <a:r>
-              <a:rPr sz="2400" b="0" i="0">
-                <a:solidFill>
-                  <a:srgbClr val="6B6B6B"/>
-                </a:solidFill>
-                <a:latin typeface="Century Schoolbook"/>
-              </a:rPr>
-              <a:t> · 5</a:t>
-            </a:r>
-            <a:r>
-              <a:rPr sz="2400" b="0" i="0" baseline="30000">
-                <a:solidFill>
-                  <a:srgbClr val="6B6B6B"/>
-                </a:solidFill>
-                <a:latin typeface="Century Schoolbook"/>
-              </a:rPr>
-              <a:t>3</a:t>
-            </a:r>
-          </a:p>
-        </p:txBody>
-      </p:sp>
-      <p:sp>
-        <p:nvSpPr>
-          <p:cNvPr id="15" name="TextBox 14"/>
+          <p:cNvPr id="13" name="TextBox 12"/>
           <p:cNvSpPr txBox="1"/>
           <p:nvPr/>
         </p:nvSpPr>
@@ -6289,44 +5813,9 @@
           </a:fontRef>
         </p:style>
       </p:cxnSp>
-      <p:sp>
-        <p:nvSpPr>
-          <p:cNvPr id="5" name="TextBox 4"/>
-          <p:cNvSpPr txBox="1"/>
-          <p:nvPr/>
-        </p:nvSpPr>
-        <p:spPr>
-          <a:xfrm>
-            <a:off x="777240" y="1261872"/>
-            <a:ext cx="10607040" cy="310896"/>
-          </a:xfrm>
-          <a:prstGeom prst="rect">
-            <a:avLst/>
-          </a:prstGeom>
-          <a:noFill/>
-        </p:spPr>
-        <p:txBody>
-          <a:bodyPr wrap="square" lIns="45720" rIns="45720" tIns="18288" bIns="18288" anchor="t">
-            <a:spAutoFit/>
-          </a:bodyPr>
-          <a:lstStyle/>
-          <a:p>
-            <a:pPr algn="l"/>
-            <a:r>
-              <a:rPr sz="1700" b="0" i="1">
-                <a:solidFill>
-                  <a:srgbClr val="6B6B6B"/>
-                </a:solidFill>
-                <a:latin typeface="Century Schoolbook"/>
-              </a:rPr>
-              <a:t>Boards up on three.</a:t>
-            </a:r>
-          </a:p>
-        </p:txBody>
-      </p:sp>
       <p:cxnSp>
         <p:nvCxnSpPr>
-          <p:cNvPr id="6" name="Connector 5"/>
+          <p:cNvPr id="5" name="Connector 4"/>
           <p:cNvCxnSpPr/>
           <p:nvPr/>
         </p:nvCxnSpPr>
@@ -6361,7 +5850,7 @@
       </p:cxnSp>
       <p:sp>
         <p:nvSpPr>
-          <p:cNvPr id="7" name="TextBox 6"/>
+          <p:cNvPr id="6" name="TextBox 5"/>
           <p:cNvSpPr txBox="1"/>
           <p:nvPr/>
         </p:nvSpPr>
@@ -6396,7 +5885,7 @@
       </p:sp>
       <p:sp>
         <p:nvSpPr>
-          <p:cNvPr id="8" name="TextBox 7"/>
+          <p:cNvPr id="7" name="TextBox 6"/>
           <p:cNvSpPr txBox="1"/>
           <p:nvPr/>
         </p:nvSpPr>
@@ -6431,7 +5920,7 @@
       </p:sp>
       <p:pic>
         <p:nvPicPr>
-          <p:cNvPr id="9" name="Picture 8" descr="61e8ec21e00a8963.png"/>
+          <p:cNvPr id="8" name="Picture 7" descr="61e8ec21e00a8963.png"/>
           <p:cNvPicPr>
             <a:picLocks noChangeAspect="1"/>
           </p:cNvPicPr>
@@ -6455,7 +5944,7 @@
       </p:pic>
       <p:sp>
         <p:nvSpPr>
-          <p:cNvPr id="10" name="TextBox 9"/>
+          <p:cNvPr id="9" name="TextBox 8"/>
           <p:cNvSpPr txBox="1"/>
           <p:nvPr/>
         </p:nvSpPr>
@@ -6484,41 +5973,6 @@
                 <a:latin typeface="Century Schoolbook"/>
               </a:rPr>
               <a:t>Answer it.</a:t>
-            </a:r>
-          </a:p>
-        </p:txBody>
-      </p:sp>
-      <p:sp>
-        <p:nvSpPr>
-          <p:cNvPr id="11" name="TextBox 10"/>
-          <p:cNvSpPr txBox="1"/>
-          <p:nvPr/>
-        </p:nvSpPr>
-        <p:spPr>
-          <a:xfrm>
-            <a:off x="777240" y="4828032"/>
-            <a:ext cx="10607040" cy="365760"/>
-          </a:xfrm>
-          <a:prstGeom prst="rect">
-            <a:avLst/>
-          </a:prstGeom>
-          <a:noFill/>
-        </p:spPr>
-        <p:txBody>
-          <a:bodyPr wrap="square" lIns="45720" rIns="45720" tIns="18288" bIns="18288" anchor="t">
-            <a:spAutoFit/>
-          </a:bodyPr>
-          <a:lstStyle/>
-          <a:p>
-            <a:pPr algn="ctr"/>
-            <a:r>
-              <a:rPr sz="1900" b="0" i="1">
-                <a:solidFill>
-                  <a:srgbClr val="6B6B6B"/>
-                </a:solidFill>
-                <a:latin typeface="Century Schoolbook"/>
-              </a:rPr>
-              <a:t>Find the value.</a:t>
             </a:r>
           </a:p>
         </p:txBody>
@@ -6646,44 +6100,9 @@
           </a:fontRef>
         </p:style>
       </p:cxnSp>
-      <p:sp>
-        <p:nvSpPr>
-          <p:cNvPr id="5" name="TextBox 4"/>
-          <p:cNvSpPr txBox="1"/>
-          <p:nvPr/>
-        </p:nvSpPr>
-        <p:spPr>
-          <a:xfrm>
-            <a:off x="777240" y="1261872"/>
-            <a:ext cx="10607040" cy="310896"/>
-          </a:xfrm>
-          <a:prstGeom prst="rect">
-            <a:avLst/>
-          </a:prstGeom>
-          <a:noFill/>
-        </p:spPr>
-        <p:txBody>
-          <a:bodyPr wrap="square" lIns="45720" rIns="45720" tIns="18288" bIns="18288" anchor="t">
-            <a:spAutoFit/>
-          </a:bodyPr>
-          <a:lstStyle/>
-          <a:p>
-            <a:pPr algn="l"/>
-            <a:r>
-              <a:rPr sz="1700" b="0" i="1">
-                <a:solidFill>
-                  <a:srgbClr val="6B6B6B"/>
-                </a:solidFill>
-                <a:latin typeface="Century Schoolbook"/>
-              </a:rPr>
-              <a:t>Answer.</a:t>
-            </a:r>
-          </a:p>
-        </p:txBody>
-      </p:sp>
       <p:cxnSp>
         <p:nvCxnSpPr>
-          <p:cNvPr id="6" name="Connector 5"/>
+          <p:cNvPr id="5" name="Connector 4"/>
           <p:cNvCxnSpPr/>
           <p:nvPr/>
         </p:nvCxnSpPr>
@@ -6718,7 +6137,7 @@
       </p:cxnSp>
       <p:sp>
         <p:nvSpPr>
-          <p:cNvPr id="7" name="TextBox 6"/>
+          <p:cNvPr id="6" name="TextBox 5"/>
           <p:cNvSpPr txBox="1"/>
           <p:nvPr/>
         </p:nvSpPr>
@@ -6753,7 +6172,7 @@
       </p:sp>
       <p:sp>
         <p:nvSpPr>
-          <p:cNvPr id="8" name="TextBox 7"/>
+          <p:cNvPr id="7" name="TextBox 6"/>
           <p:cNvSpPr txBox="1"/>
           <p:nvPr/>
         </p:nvSpPr>
@@ -6788,7 +6207,7 @@
       </p:sp>
       <p:pic>
         <p:nvPicPr>
-          <p:cNvPr id="9" name="Picture 8" descr="956b769eca71d99b.png"/>
+          <p:cNvPr id="8" name="Picture 7" descr="956b769eca71d99b.png"/>
           <p:cNvPicPr>
             <a:picLocks noChangeAspect="1"/>
           </p:cNvPicPr>
@@ -6812,87 +6231,7 @@
       </p:pic>
       <p:sp>
         <p:nvSpPr>
-          <p:cNvPr id="10" name="TextBox 9"/>
-          <p:cNvSpPr txBox="1"/>
-          <p:nvPr/>
-        </p:nvSpPr>
-        <p:spPr>
-          <a:xfrm>
-            <a:off x="1828800" y="3566159"/>
-            <a:ext cx="8503920" cy="548640"/>
-          </a:xfrm>
-          <a:prstGeom prst="rect">
-            <a:avLst/>
-          </a:prstGeom>
-          <a:noFill/>
-        </p:spPr>
-        <p:txBody>
-          <a:bodyPr wrap="square" lIns="45720" rIns="45720" tIns="18288" bIns="18288" anchor="t">
-            <a:spAutoFit/>
-          </a:bodyPr>
-          <a:lstStyle/>
-          <a:p>
-            <a:pPr algn="ctr"/>
-            <a:r>
-              <a:rPr sz="2400" b="0" i="0">
-                <a:solidFill>
-                  <a:srgbClr val="6B6B6B"/>
-                </a:solidFill>
-                <a:latin typeface="Century Schoolbook"/>
-              </a:rPr>
-              <a:t>(−7)</a:t>
-            </a:r>
-            <a:r>
-              <a:rPr sz="2400" b="0" i="0" baseline="30000">
-                <a:solidFill>
-                  <a:srgbClr val="6B6B6B"/>
-                </a:solidFill>
-                <a:latin typeface="Century Schoolbook"/>
-              </a:rPr>
-              <a:t>5</a:t>
-            </a:r>
-            <a:r>
-              <a:rPr sz="2400" b="0" i="0">
-                <a:solidFill>
-                  <a:srgbClr val="6B6B6B"/>
-                </a:solidFill>
-                <a:latin typeface="Century Schoolbook"/>
-              </a:rPr>
-              <a:t> over (−7)</a:t>
-            </a:r>
-            <a:r>
-              <a:rPr sz="2400" b="0" i="0" baseline="30000">
-                <a:solidFill>
-                  <a:srgbClr val="6B6B6B"/>
-                </a:solidFill>
-                <a:latin typeface="Century Schoolbook"/>
-              </a:rPr>
-              <a:t>2</a:t>
-            </a:r>
-            <a:r>
-              <a:rPr sz="2400" b="0" i="0">
-                <a:solidFill>
-                  <a:srgbClr val="6B6B6B"/>
-                </a:solidFill>
-                <a:latin typeface="Century Schoolbook"/>
-              </a:rPr>
-              <a:t>, so (−7)</a:t>
-            </a:r>
-            <a:r>
-              <a:rPr sz="2400" b="0" i="0" baseline="30000">
-                <a:solidFill>
-                  <a:srgbClr val="6B6B6B"/>
-                </a:solidFill>
-                <a:latin typeface="Century Schoolbook"/>
-              </a:rPr>
-              <a:t>3</a:t>
-            </a:r>
-          </a:p>
-        </p:txBody>
-      </p:sp>
-      <p:sp>
-        <p:nvSpPr>
-          <p:cNvPr id="11" name="TextBox 10"/>
+          <p:cNvPr id="9" name="TextBox 8"/>
           <p:cNvSpPr txBox="1"/>
           <p:nvPr/>
         </p:nvSpPr>
@@ -7048,44 +6387,9 @@
           </a:fontRef>
         </p:style>
       </p:cxnSp>
-      <p:sp>
-        <p:nvSpPr>
-          <p:cNvPr id="5" name="TextBox 4"/>
-          <p:cNvSpPr txBox="1"/>
-          <p:nvPr/>
-        </p:nvSpPr>
-        <p:spPr>
-          <a:xfrm>
-            <a:off x="777240" y="1261872"/>
-            <a:ext cx="10607040" cy="310896"/>
-          </a:xfrm>
-          <a:prstGeom prst="rect">
-            <a:avLst/>
-          </a:prstGeom>
-          <a:noFill/>
-        </p:spPr>
-        <p:txBody>
-          <a:bodyPr wrap="square" lIns="45720" rIns="45720" tIns="18288" bIns="18288" anchor="t">
-            <a:spAutoFit/>
-          </a:bodyPr>
-          <a:lstStyle/>
-          <a:p>
-            <a:pPr algn="l"/>
-            <a:r>
-              <a:rPr sz="1700" b="0" i="1">
-                <a:solidFill>
-                  <a:srgbClr val="6B6B6B"/>
-                </a:solidFill>
-                <a:latin typeface="Century Schoolbook"/>
-              </a:rPr>
-              <a:t>Boards up on three.</a:t>
-            </a:r>
-          </a:p>
-        </p:txBody>
-      </p:sp>
       <p:cxnSp>
         <p:nvCxnSpPr>
-          <p:cNvPr id="6" name="Connector 5"/>
+          <p:cNvPr id="5" name="Connector 4"/>
           <p:cNvCxnSpPr/>
           <p:nvPr/>
         </p:nvCxnSpPr>
@@ -7120,7 +6424,7 @@
       </p:cxnSp>
       <p:sp>
         <p:nvSpPr>
-          <p:cNvPr id="7" name="TextBox 6"/>
+          <p:cNvPr id="6" name="TextBox 5"/>
           <p:cNvSpPr txBox="1"/>
           <p:nvPr/>
         </p:nvSpPr>
@@ -7155,7 +6459,7 @@
       </p:sp>
       <p:sp>
         <p:nvSpPr>
-          <p:cNvPr id="8" name="TextBox 7"/>
+          <p:cNvPr id="7" name="TextBox 6"/>
           <p:cNvSpPr txBox="1"/>
           <p:nvPr/>
         </p:nvSpPr>
@@ -7190,7 +6494,7 @@
       </p:sp>
       <p:pic>
         <p:nvPicPr>
-          <p:cNvPr id="9" name="Picture 8" descr="5a81991eb38a0b9a.png"/>
+          <p:cNvPr id="8" name="Picture 7" descr="5a81991eb38a0b9a.png"/>
           <p:cNvPicPr>
             <a:picLocks noChangeAspect="1"/>
           </p:cNvPicPr>
@@ -7214,7 +6518,7 @@
       </p:pic>
       <p:sp>
         <p:nvSpPr>
-          <p:cNvPr id="10" name="TextBox 9"/>
+          <p:cNvPr id="9" name="TextBox 8"/>
           <p:cNvSpPr txBox="1"/>
           <p:nvPr/>
         </p:nvSpPr>
@@ -7243,41 +6547,6 @@
                 <a:latin typeface="Century Schoolbook"/>
               </a:rPr>
               <a:t>Answer it.</a:t>
-            </a:r>
-          </a:p>
-        </p:txBody>
-      </p:sp>
-      <p:sp>
-        <p:nvSpPr>
-          <p:cNvPr id="11" name="TextBox 10"/>
-          <p:cNvSpPr txBox="1"/>
-          <p:nvPr/>
-        </p:nvSpPr>
-        <p:spPr>
-          <a:xfrm>
-            <a:off x="777240" y="4910328"/>
-            <a:ext cx="10607040" cy="365760"/>
-          </a:xfrm>
-          <a:prstGeom prst="rect">
-            <a:avLst/>
-          </a:prstGeom>
-          <a:noFill/>
-        </p:spPr>
-        <p:txBody>
-          <a:bodyPr wrap="square" lIns="45720" rIns="45720" tIns="18288" bIns="18288" anchor="t">
-            <a:spAutoFit/>
-          </a:bodyPr>
-          <a:lstStyle/>
-          <a:p>
-            <a:pPr algn="ctr"/>
-            <a:r>
-              <a:rPr sz="1900" b="0" i="1">
-                <a:solidFill>
-                  <a:srgbClr val="6B6B6B"/>
-                </a:solidFill>
-                <a:latin typeface="Century Schoolbook"/>
-              </a:rPr>
-              <a:t>Find the value.</a:t>
             </a:r>
           </a:p>
         </p:txBody>
@@ -7405,44 +6674,9 @@
           </a:fontRef>
         </p:style>
       </p:cxnSp>
-      <p:sp>
-        <p:nvSpPr>
-          <p:cNvPr id="5" name="TextBox 4"/>
-          <p:cNvSpPr txBox="1"/>
-          <p:nvPr/>
-        </p:nvSpPr>
-        <p:spPr>
-          <a:xfrm>
-            <a:off x="777240" y="1261872"/>
-            <a:ext cx="10607040" cy="310896"/>
-          </a:xfrm>
-          <a:prstGeom prst="rect">
-            <a:avLst/>
-          </a:prstGeom>
-          <a:noFill/>
-        </p:spPr>
-        <p:txBody>
-          <a:bodyPr wrap="square" lIns="45720" rIns="45720" tIns="18288" bIns="18288" anchor="t">
-            <a:spAutoFit/>
-          </a:bodyPr>
-          <a:lstStyle/>
-          <a:p>
-            <a:pPr algn="l"/>
-            <a:r>
-              <a:rPr sz="1700" b="0" i="1">
-                <a:solidFill>
-                  <a:srgbClr val="6B6B6B"/>
-                </a:solidFill>
-                <a:latin typeface="Century Schoolbook"/>
-              </a:rPr>
-              <a:t>Answer.</a:t>
-            </a:r>
-          </a:p>
-        </p:txBody>
-      </p:sp>
       <p:cxnSp>
         <p:nvCxnSpPr>
-          <p:cNvPr id="6" name="Connector 5"/>
+          <p:cNvPr id="5" name="Connector 4"/>
           <p:cNvCxnSpPr/>
           <p:nvPr/>
         </p:nvCxnSpPr>
@@ -7477,7 +6711,7 @@
       </p:cxnSp>
       <p:sp>
         <p:nvSpPr>
-          <p:cNvPr id="7" name="TextBox 6"/>
+          <p:cNvPr id="6" name="TextBox 5"/>
           <p:cNvSpPr txBox="1"/>
           <p:nvPr/>
         </p:nvSpPr>
@@ -7512,7 +6746,7 @@
       </p:sp>
       <p:sp>
         <p:nvSpPr>
-          <p:cNvPr id="8" name="TextBox 7"/>
+          <p:cNvPr id="7" name="TextBox 6"/>
           <p:cNvSpPr txBox="1"/>
           <p:nvPr/>
         </p:nvSpPr>
@@ -7547,7 +6781,7 @@
       </p:sp>
       <p:pic>
         <p:nvPicPr>
-          <p:cNvPr id="9" name="Picture 8" descr="b34bc56ecccd0f00.png"/>
+          <p:cNvPr id="8" name="Picture 7" descr="b34bc56ecccd0f00.png"/>
           <p:cNvPicPr>
             <a:picLocks noChangeAspect="1"/>
           </p:cNvPicPr>
@@ -7571,57 +6805,13 @@
       </p:pic>
       <p:sp>
         <p:nvSpPr>
-          <p:cNvPr id="10" name="TextBox 9"/>
-          <p:cNvSpPr txBox="1"/>
-          <p:nvPr/>
-        </p:nvSpPr>
-        <p:spPr>
-          <a:xfrm>
-            <a:off x="1828800" y="4248912"/>
-            <a:ext cx="8503920" cy="548640"/>
-          </a:xfrm>
-          <a:prstGeom prst="rect">
-            <a:avLst/>
-          </a:prstGeom>
-          <a:noFill/>
-        </p:spPr>
-        <p:txBody>
-          <a:bodyPr wrap="square" lIns="45720" rIns="45720" tIns="18288" bIns="18288" anchor="t">
-            <a:spAutoFit/>
-          </a:bodyPr>
-          <a:lstStyle/>
-          <a:p>
-            <a:pPr algn="ctr"/>
-            <a:r>
-              <a:rPr sz="2400" b="0" i="0">
-                <a:solidFill>
-                  <a:srgbClr val="6B6B6B"/>
-                </a:solidFill>
-                <a:latin typeface="Century Schoolbook"/>
-              </a:rPr>
-              <a:t>−3 − (−2) = −1, so (3/4)</a:t>
-            </a:r>
-            <a:r>
-              <a:rPr sz="2400" b="0" i="0" baseline="30000">
-                <a:solidFill>
-                  <a:srgbClr val="6B6B6B"/>
-                </a:solidFill>
-                <a:latin typeface="Century Schoolbook"/>
-              </a:rPr>
-              <a:t>-1</a:t>
-            </a:r>
-          </a:p>
-        </p:txBody>
-      </p:sp>
-      <p:sp>
-        <p:nvSpPr>
-          <p:cNvPr id="11" name="TextBox 10"/>
-          <p:cNvSpPr txBox="1"/>
-          <p:nvPr/>
-        </p:nvSpPr>
-        <p:spPr>
-          <a:xfrm>
-            <a:off x="4991100" y="5132832"/>
+          <p:cNvPr id="9" name="TextBox 8"/>
+          <p:cNvSpPr txBox="1"/>
+          <p:nvPr/>
+        </p:nvSpPr>
+        <p:spPr>
+          <a:xfrm>
+            <a:off x="4991100" y="4815840"/>
             <a:ext cx="1920240" cy="548640"/>
           </a:xfrm>
           <a:prstGeom prst="rect">
@@ -7650,7 +6840,7 @@
       </p:sp>
       <p:pic>
         <p:nvPicPr>
-          <p:cNvPr id="12" name="Picture 11" descr="6d9a31f1d02f3151.png"/>
+          <p:cNvPr id="10" name="Picture 9" descr="6d9a31f1d02f3151.png"/>
           <p:cNvPicPr>
             <a:picLocks noChangeAspect="1"/>
           </p:cNvPicPr>
@@ -7664,7 +6854,7 @@
         </p:blipFill>
         <p:spPr>
           <a:xfrm>
-            <a:off x="6911340" y="4980432"/>
+            <a:off x="6911340" y="4663440"/>
             <a:ext cx="259080" cy="853440"/>
           </a:xfrm>
           <a:prstGeom prst="rect">
@@ -7795,44 +6985,9 @@
           </a:fontRef>
         </p:style>
       </p:cxnSp>
-      <p:sp>
-        <p:nvSpPr>
-          <p:cNvPr id="5" name="TextBox 4"/>
-          <p:cNvSpPr txBox="1"/>
-          <p:nvPr/>
-        </p:nvSpPr>
-        <p:spPr>
-          <a:xfrm>
-            <a:off x="777240" y="1261872"/>
-            <a:ext cx="10607040" cy="310896"/>
-          </a:xfrm>
-          <a:prstGeom prst="rect">
-            <a:avLst/>
-          </a:prstGeom>
-          <a:noFill/>
-        </p:spPr>
-        <p:txBody>
-          <a:bodyPr wrap="square" lIns="45720" rIns="45720" tIns="18288" bIns="18288" anchor="t">
-            <a:spAutoFit/>
-          </a:bodyPr>
-          <a:lstStyle/>
-          <a:p>
-            <a:pPr algn="l"/>
-            <a:r>
-              <a:rPr sz="1700" b="0" i="1">
-                <a:solidFill>
-                  <a:srgbClr val="6B6B6B"/>
-                </a:solidFill>
-                <a:latin typeface="Century Schoolbook"/>
-              </a:rPr>
-              <a:t>On your own. Four minutes. No notes.</a:t>
-            </a:r>
-          </a:p>
-        </p:txBody>
-      </p:sp>
       <p:cxnSp>
         <p:nvCxnSpPr>
-          <p:cNvPr id="6" name="Connector 5"/>
+          <p:cNvPr id="5" name="Connector 4"/>
           <p:cNvCxnSpPr/>
           <p:nvPr/>
         </p:nvCxnSpPr>
@@ -7867,7 +7022,7 @@
       </p:cxnSp>
       <p:sp>
         <p:nvSpPr>
-          <p:cNvPr id="7" name="TextBox 6"/>
+          <p:cNvPr id="6" name="TextBox 5"/>
           <p:cNvSpPr txBox="1"/>
           <p:nvPr/>
         </p:nvSpPr>
@@ -7902,7 +7057,7 @@
       </p:sp>
       <p:sp>
         <p:nvSpPr>
-          <p:cNvPr id="8" name="TextBox 7"/>
+          <p:cNvPr id="7" name="TextBox 6"/>
           <p:cNvSpPr txBox="1"/>
           <p:nvPr/>
         </p:nvSpPr>
@@ -7937,13 +7092,13 @@
       </p:sp>
       <p:sp>
         <p:nvSpPr>
-          <p:cNvPr id="9" name="TextBox 8"/>
-          <p:cNvSpPr txBox="1"/>
-          <p:nvPr/>
-        </p:nvSpPr>
-        <p:spPr>
-          <a:xfrm>
-            <a:off x="1874519" y="1831848"/>
+          <p:cNvPr id="8" name="TextBox 7"/>
+          <p:cNvSpPr txBox="1"/>
+          <p:nvPr/>
+        </p:nvSpPr>
+        <p:spPr>
+          <a:xfrm>
+            <a:off x="1874519" y="1511808"/>
             <a:ext cx="7804089" cy="457200"/>
           </a:xfrm>
           <a:prstGeom prst="rect">
@@ -7972,7 +7127,7 @@
       </p:sp>
       <p:pic>
         <p:nvPicPr>
-          <p:cNvPr id="10" name="Picture 9" descr="70fd4f7c195b27fd.png"/>
+          <p:cNvPr id="9" name="Picture 8" descr="70fd4f7c195b27fd.png"/>
           <p:cNvPicPr>
             <a:picLocks noChangeAspect="1"/>
           </p:cNvPicPr>
@@ -7986,7 +7141,7 @@
         </p:blipFill>
         <p:spPr>
           <a:xfrm>
-            <a:off x="9541449" y="1783080"/>
+            <a:off x="9541449" y="1463040"/>
             <a:ext cx="795528" cy="554736"/>
           </a:xfrm>
           <a:prstGeom prst="rect">
@@ -7996,13 +7151,13 @@
       </p:pic>
       <p:sp>
         <p:nvSpPr>
-          <p:cNvPr id="11" name="TextBox 10"/>
-          <p:cNvSpPr txBox="1"/>
-          <p:nvPr/>
-        </p:nvSpPr>
-        <p:spPr>
-          <a:xfrm>
-            <a:off x="1874519" y="2613660"/>
+          <p:cNvPr id="10" name="TextBox 9"/>
+          <p:cNvSpPr txBox="1"/>
+          <p:nvPr/>
+        </p:nvSpPr>
+        <p:spPr>
+          <a:xfrm>
+            <a:off x="1874519" y="2293620"/>
             <a:ext cx="3064939" cy="457200"/>
           </a:xfrm>
           <a:prstGeom prst="rect">
@@ -8031,7 +7186,7 @@
       </p:sp>
       <p:pic>
         <p:nvPicPr>
-          <p:cNvPr id="12" name="Picture 11" descr="a4522c3024ca6567.png"/>
+          <p:cNvPr id="11" name="Picture 10" descr="a4522c3024ca6567.png"/>
           <p:cNvPicPr>
             <a:picLocks noChangeAspect="1"/>
           </p:cNvPicPr>
@@ -8045,7 +7200,7 @@
         </p:blipFill>
         <p:spPr>
           <a:xfrm>
-            <a:off x="4802299" y="2538984"/>
+            <a:off x="4802299" y="2218944"/>
             <a:ext cx="463296" cy="606552"/>
           </a:xfrm>
           <a:prstGeom prst="rect">
@@ -8055,13 +7210,13 @@
       </p:pic>
       <p:sp>
         <p:nvSpPr>
-          <p:cNvPr id="13" name="TextBox 12"/>
-          <p:cNvSpPr txBox="1"/>
-          <p:nvPr/>
-        </p:nvSpPr>
-        <p:spPr>
-          <a:xfrm>
-            <a:off x="1874519" y="3451860"/>
+          <p:cNvPr id="12" name="TextBox 11"/>
+          <p:cNvSpPr txBox="1"/>
+          <p:nvPr/>
+        </p:nvSpPr>
+        <p:spPr>
+          <a:xfrm>
+            <a:off x="1874519" y="3131820"/>
             <a:ext cx="3064939" cy="457200"/>
           </a:xfrm>
           <a:prstGeom prst="rect">
@@ -8090,7 +7245,7 @@
       </p:sp>
       <p:pic>
         <p:nvPicPr>
-          <p:cNvPr id="14" name="Picture 13" descr="574a5d3a612aa104.png"/>
+          <p:cNvPr id="13" name="Picture 12" descr="574a5d3a612aa104.png"/>
           <p:cNvPicPr>
             <a:picLocks noChangeAspect="1"/>
           </p:cNvPicPr>
@@ -8104,7 +7259,7 @@
         </p:blipFill>
         <p:spPr>
           <a:xfrm>
-            <a:off x="4802299" y="3346704"/>
+            <a:off x="4802299" y="3026664"/>
             <a:ext cx="469392" cy="667512"/>
           </a:xfrm>
           <a:prstGeom prst="rect">
@@ -8114,13 +7269,13 @@
       </p:pic>
       <p:sp>
         <p:nvSpPr>
-          <p:cNvPr id="15" name="TextBox 14"/>
-          <p:cNvSpPr txBox="1"/>
-          <p:nvPr/>
-        </p:nvSpPr>
-        <p:spPr>
-          <a:xfrm>
-            <a:off x="1874519" y="4192524"/>
+          <p:cNvPr id="14" name="TextBox 13"/>
+          <p:cNvSpPr txBox="1"/>
+          <p:nvPr/>
+        </p:nvSpPr>
+        <p:spPr>
+          <a:xfrm>
+            <a:off x="1874519" y="3872484"/>
             <a:ext cx="6243654" cy="457200"/>
           </a:xfrm>
           <a:prstGeom prst="rect">
@@ -8270,44 +7425,9 @@
           </a:fontRef>
         </p:style>
       </p:cxnSp>
-      <p:sp>
-        <p:nvSpPr>
-          <p:cNvPr id="5" name="TextBox 4"/>
-          <p:cNvSpPr txBox="1"/>
-          <p:nvPr/>
-        </p:nvSpPr>
-        <p:spPr>
-          <a:xfrm>
-            <a:off x="777240" y="1261872"/>
-            <a:ext cx="10607040" cy="310896"/>
-          </a:xfrm>
-          <a:prstGeom prst="rect">
-            <a:avLst/>
-          </a:prstGeom>
-          <a:noFill/>
-        </p:spPr>
-        <p:txBody>
-          <a:bodyPr wrap="square" lIns="45720" rIns="45720" tIns="18288" bIns="18288" anchor="t">
-            <a:spAutoFit/>
-          </a:bodyPr>
-          <a:lstStyle/>
-          <a:p>
-            <a:pPr algn="l"/>
-            <a:r>
-              <a:rPr sz="1700" b="0" i="1">
-                <a:solidFill>
-                  <a:srgbClr val="6B6B6B"/>
-                </a:solidFill>
-                <a:latin typeface="Century Schoolbook"/>
-              </a:rPr>
-              <a:t>Boards up on three.</a:t>
-            </a:r>
-          </a:p>
-        </p:txBody>
-      </p:sp>
       <p:cxnSp>
         <p:nvCxnSpPr>
-          <p:cNvPr id="6" name="Connector 5"/>
+          <p:cNvPr id="5" name="Connector 4"/>
           <p:cNvCxnSpPr/>
           <p:nvPr/>
         </p:nvCxnSpPr>
@@ -8342,7 +7462,7 @@
       </p:cxnSp>
       <p:sp>
         <p:nvSpPr>
-          <p:cNvPr id="7" name="TextBox 6"/>
+          <p:cNvPr id="6" name="TextBox 5"/>
           <p:cNvSpPr txBox="1"/>
           <p:nvPr/>
         </p:nvSpPr>
@@ -8377,7 +7497,7 @@
       </p:sp>
       <p:sp>
         <p:nvSpPr>
-          <p:cNvPr id="8" name="TextBox 7"/>
+          <p:cNvPr id="7" name="TextBox 6"/>
           <p:cNvSpPr txBox="1"/>
           <p:nvPr/>
         </p:nvSpPr>
@@ -8412,7 +7532,7 @@
       </p:sp>
       <p:pic>
         <p:nvPicPr>
-          <p:cNvPr id="9" name="Picture 8" descr="2f8b87745f5bc5af.png"/>
+          <p:cNvPr id="8" name="Picture 7" descr="2f8b87745f5bc5af.png"/>
           <p:cNvPicPr>
             <a:picLocks noChangeAspect="1"/>
           </p:cNvPicPr>
@@ -8436,7 +7556,7 @@
       </p:pic>
       <p:sp>
         <p:nvSpPr>
-          <p:cNvPr id="10" name="TextBox 9"/>
+          <p:cNvPr id="9" name="TextBox 8"/>
           <p:cNvSpPr txBox="1"/>
           <p:nvPr/>
         </p:nvSpPr>
@@ -8465,41 +7585,6 @@
                 <a:latin typeface="Century Schoolbook"/>
               </a:rPr>
               <a:t>Answer it.</a:t>
-            </a:r>
-          </a:p>
-        </p:txBody>
-      </p:sp>
-      <p:sp>
-        <p:nvSpPr>
-          <p:cNvPr id="11" name="TextBox 10"/>
-          <p:cNvSpPr txBox="1"/>
-          <p:nvPr/>
-        </p:nvSpPr>
-        <p:spPr>
-          <a:xfrm>
-            <a:off x="777240" y="4828032"/>
-            <a:ext cx="10607040" cy="365760"/>
-          </a:xfrm>
-          <a:prstGeom prst="rect">
-            <a:avLst/>
-          </a:prstGeom>
-          <a:noFill/>
-        </p:spPr>
-        <p:txBody>
-          <a:bodyPr wrap="square" lIns="45720" rIns="45720" tIns="18288" bIns="18288" anchor="t">
-            <a:spAutoFit/>
-          </a:bodyPr>
-          <a:lstStyle/>
-          <a:p>
-            <a:pPr algn="ctr"/>
-            <a:r>
-              <a:rPr sz="1900" b="0" i="1">
-                <a:solidFill>
-                  <a:srgbClr val="6B6B6B"/>
-                </a:solidFill>
-                <a:latin typeface="Century Schoolbook"/>
-              </a:rPr>
-              <a:t>Find the value.</a:t>
             </a:r>
           </a:p>
         </p:txBody>
@@ -8627,44 +7712,9 @@
           </a:fontRef>
         </p:style>
       </p:cxnSp>
-      <p:sp>
-        <p:nvSpPr>
-          <p:cNvPr id="5" name="TextBox 4"/>
-          <p:cNvSpPr txBox="1"/>
-          <p:nvPr/>
-        </p:nvSpPr>
-        <p:spPr>
-          <a:xfrm>
-            <a:off x="777240" y="1261872"/>
-            <a:ext cx="10607040" cy="310896"/>
-          </a:xfrm>
-          <a:prstGeom prst="rect">
-            <a:avLst/>
-          </a:prstGeom>
-          <a:noFill/>
-        </p:spPr>
-        <p:txBody>
-          <a:bodyPr wrap="square" lIns="45720" rIns="45720" tIns="18288" bIns="18288" anchor="t">
-            <a:spAutoFit/>
-          </a:bodyPr>
-          <a:lstStyle/>
-          <a:p>
-            <a:pPr algn="l"/>
-            <a:r>
-              <a:rPr sz="1700" b="0" i="1">
-                <a:solidFill>
-                  <a:srgbClr val="6B6B6B"/>
-                </a:solidFill>
-                <a:latin typeface="Century Schoolbook"/>
-              </a:rPr>
-              <a:t>Answer.</a:t>
-            </a:r>
-          </a:p>
-        </p:txBody>
-      </p:sp>
       <p:cxnSp>
         <p:nvCxnSpPr>
-          <p:cNvPr id="6" name="Connector 5"/>
+          <p:cNvPr id="5" name="Connector 4"/>
           <p:cNvCxnSpPr/>
           <p:nvPr/>
         </p:nvCxnSpPr>
@@ -8699,7 +7749,7 @@
       </p:cxnSp>
       <p:sp>
         <p:nvSpPr>
-          <p:cNvPr id="7" name="TextBox 6"/>
+          <p:cNvPr id="6" name="TextBox 5"/>
           <p:cNvSpPr txBox="1"/>
           <p:nvPr/>
         </p:nvSpPr>
@@ -8734,7 +7784,7 @@
       </p:sp>
       <p:sp>
         <p:nvSpPr>
-          <p:cNvPr id="8" name="TextBox 7"/>
+          <p:cNvPr id="7" name="TextBox 6"/>
           <p:cNvSpPr txBox="1"/>
           <p:nvPr/>
         </p:nvSpPr>
@@ -8769,7 +7819,7 @@
       </p:sp>
       <p:pic>
         <p:nvPicPr>
-          <p:cNvPr id="9" name="Picture 8" descr="48df33e2a7e48cfd.png"/>
+          <p:cNvPr id="8" name="Picture 7" descr="48df33e2a7e48cfd.png"/>
           <p:cNvPicPr>
             <a:picLocks noChangeAspect="1"/>
           </p:cNvPicPr>
@@ -8793,105 +7843,7 @@
       </p:pic>
       <p:sp>
         <p:nvSpPr>
-          <p:cNvPr id="10" name="TextBox 9"/>
-          <p:cNvSpPr txBox="1"/>
-          <p:nvPr/>
-        </p:nvSpPr>
-        <p:spPr>
-          <a:xfrm>
-            <a:off x="1828800" y="3806952"/>
-            <a:ext cx="8503920" cy="548640"/>
-          </a:xfrm>
-          <a:prstGeom prst="rect">
-            <a:avLst/>
-          </a:prstGeom>
-          <a:noFill/>
-        </p:spPr>
-        <p:txBody>
-          <a:bodyPr wrap="square" lIns="45720" rIns="45720" tIns="18288" bIns="18288" anchor="t">
-            <a:spAutoFit/>
-          </a:bodyPr>
-          <a:lstStyle/>
-          <a:p>
-            <a:pPr algn="ctr"/>
-            <a:r>
-              <a:rPr sz="2400" b="0" i="0">
-                <a:solidFill>
-                  <a:srgbClr val="6B6B6B"/>
-                </a:solidFill>
-                <a:latin typeface="Century Schoolbook"/>
-              </a:rPr>
-              <a:t>2</a:t>
-            </a:r>
-            <a:r>
-              <a:rPr sz="2400" b="0" i="0" baseline="30000">
-                <a:solidFill>
-                  <a:srgbClr val="6B6B6B"/>
-                </a:solidFill>
-                <a:latin typeface="Century Schoolbook"/>
-              </a:rPr>
-              <a:t>-3</a:t>
-            </a:r>
-            <a:r>
-              <a:rPr sz="2400" b="0" i="0">
-                <a:solidFill>
-                  <a:srgbClr val="6B6B6B"/>
-                </a:solidFill>
-                <a:latin typeface="Century Schoolbook"/>
-              </a:rPr>
-              <a:t> · 2</a:t>
-            </a:r>
-            <a:r>
-              <a:rPr sz="2400" b="0" i="0" baseline="30000">
-                <a:solidFill>
-                  <a:srgbClr val="6B6B6B"/>
-                </a:solidFill>
-                <a:latin typeface="Century Schoolbook"/>
-              </a:rPr>
-              <a:t>4</a:t>
-            </a:r>
-            <a:r>
-              <a:rPr sz="2400" b="0" i="0">
-                <a:solidFill>
-                  <a:srgbClr val="6B6B6B"/>
-                </a:solidFill>
-                <a:latin typeface="Century Schoolbook"/>
-              </a:rPr>
-              <a:t> over 2</a:t>
-            </a:r>
-            <a:r>
-              <a:rPr sz="2400" b="0" i="0" baseline="30000">
-                <a:solidFill>
-                  <a:srgbClr val="6B6B6B"/>
-                </a:solidFill>
-                <a:latin typeface="Century Schoolbook"/>
-              </a:rPr>
-              <a:t>3</a:t>
-            </a:r>
-            <a:r>
-              <a:rPr sz="2400" b="0" i="0">
-                <a:solidFill>
-                  <a:srgbClr val="6B6B6B"/>
-                </a:solidFill>
-                <a:latin typeface="Century Schoolbook"/>
-              </a:rPr>
-              <a:t> = 2</a:t>
-            </a:r>
-            <a:r>
-              <a:rPr sz="2400" b="0" i="0" baseline="30000">
-                <a:solidFill>
-                  <a:srgbClr val="6B6B6B"/>
-                </a:solidFill>
-                <a:latin typeface="Century Schoolbook"/>
-              </a:rPr>
-              <a:t>-2</a:t>
-            </a:r>
-          </a:p>
-        </p:txBody>
-      </p:sp>
-      <p:sp>
-        <p:nvSpPr>
-          <p:cNvPr id="11" name="TextBox 10"/>
+          <p:cNvPr id="9" name="TextBox 8"/>
           <p:cNvSpPr txBox="1"/>
           <p:nvPr/>
         </p:nvSpPr>
@@ -8926,7 +7878,7 @@
       </p:sp>
       <p:pic>
         <p:nvPicPr>
-          <p:cNvPr id="12" name="Picture 11" descr="2bb7fdb900ba422d.png"/>
+          <p:cNvPr id="10" name="Picture 9" descr="2bb7fdb900ba422d.png"/>
           <p:cNvPicPr>
             <a:picLocks noChangeAspect="1"/>
           </p:cNvPicPr>
@@ -9071,44 +8023,9 @@
           </a:fontRef>
         </p:style>
       </p:cxnSp>
-      <p:sp>
-        <p:nvSpPr>
-          <p:cNvPr id="5" name="TextBox 4"/>
-          <p:cNvSpPr txBox="1"/>
-          <p:nvPr/>
-        </p:nvSpPr>
-        <p:spPr>
-          <a:xfrm>
-            <a:off x="777240" y="1261872"/>
-            <a:ext cx="10607040" cy="310896"/>
-          </a:xfrm>
-          <a:prstGeom prst="rect">
-            <a:avLst/>
-          </a:prstGeom>
-          <a:noFill/>
-        </p:spPr>
-        <p:txBody>
-          <a:bodyPr wrap="square" lIns="45720" rIns="45720" tIns="18288" bIns="18288" anchor="t">
-            <a:spAutoFit/>
-          </a:bodyPr>
-          <a:lstStyle/>
-          <a:p>
-            <a:pPr algn="l"/>
-            <a:r>
-              <a:rPr sz="1700" b="0" i="1">
-                <a:solidFill>
-                  <a:srgbClr val="6B6B6B"/>
-                </a:solidFill>
-                <a:latin typeface="Century Schoolbook"/>
-              </a:rPr>
-              <a:t>Boards up on three.</a:t>
-            </a:r>
-          </a:p>
-        </p:txBody>
-      </p:sp>
       <p:cxnSp>
         <p:nvCxnSpPr>
-          <p:cNvPr id="6" name="Connector 5"/>
+          <p:cNvPr id="5" name="Connector 4"/>
           <p:cNvCxnSpPr/>
           <p:nvPr/>
         </p:nvCxnSpPr>
@@ -9143,7 +8060,7 @@
       </p:cxnSp>
       <p:sp>
         <p:nvSpPr>
-          <p:cNvPr id="7" name="TextBox 6"/>
+          <p:cNvPr id="6" name="TextBox 5"/>
           <p:cNvSpPr txBox="1"/>
           <p:nvPr/>
         </p:nvSpPr>
@@ -9178,7 +8095,7 @@
       </p:sp>
       <p:sp>
         <p:nvSpPr>
-          <p:cNvPr id="8" name="TextBox 7"/>
+          <p:cNvPr id="7" name="TextBox 6"/>
           <p:cNvSpPr txBox="1"/>
           <p:nvPr/>
         </p:nvSpPr>
@@ -9213,7 +8130,7 @@
       </p:sp>
       <p:sp>
         <p:nvSpPr>
-          <p:cNvPr id="9" name="TextBox 8"/>
+          <p:cNvPr id="8" name="TextBox 7"/>
           <p:cNvSpPr txBox="1"/>
           <p:nvPr/>
         </p:nvSpPr>
@@ -9248,7 +8165,7 @@
       </p:sp>
       <p:pic>
         <p:nvPicPr>
-          <p:cNvPr id="10" name="Picture 9" descr="c591741850325583.png"/>
+          <p:cNvPr id="9" name="Picture 8" descr="c591741850325583.png"/>
           <p:cNvPicPr>
             <a:picLocks noChangeAspect="1"/>
           </p:cNvPicPr>
@@ -9272,7 +8189,7 @@
       </p:pic>
       <p:sp>
         <p:nvSpPr>
-          <p:cNvPr id="11" name="TextBox 10"/>
+          <p:cNvPr id="10" name="TextBox 9"/>
           <p:cNvSpPr txBox="1"/>
           <p:nvPr/>
         </p:nvSpPr>
@@ -9307,7 +8224,7 @@
       </p:sp>
       <p:sp>
         <p:nvSpPr>
-          <p:cNvPr id="12" name="TextBox 11"/>
+          <p:cNvPr id="11" name="TextBox 10"/>
           <p:cNvSpPr txBox="1"/>
           <p:nvPr/>
         </p:nvSpPr>
@@ -9342,7 +8259,7 @@
       </p:sp>
       <p:pic>
         <p:nvPicPr>
-          <p:cNvPr id="13" name="Picture 12" descr="1d8988fc9968dd14.png"/>
+          <p:cNvPr id="12" name="Picture 11" descr="1d8988fc9968dd14.png"/>
           <p:cNvPicPr>
             <a:picLocks noChangeAspect="1"/>
           </p:cNvPicPr>
@@ -9366,7 +8283,7 @@
       </p:pic>
       <p:sp>
         <p:nvSpPr>
-          <p:cNvPr id="14" name="TextBox 13"/>
+          <p:cNvPr id="13" name="TextBox 12"/>
           <p:cNvSpPr txBox="1"/>
           <p:nvPr/>
         </p:nvSpPr>
@@ -9401,7 +8318,7 @@
       </p:sp>
       <p:sp>
         <p:nvSpPr>
-          <p:cNvPr id="15" name="TextBox 14"/>
+          <p:cNvPr id="14" name="TextBox 13"/>
           <p:cNvSpPr txBox="1"/>
           <p:nvPr/>
         </p:nvSpPr>
@@ -9436,7 +8353,7 @@
       </p:sp>
       <p:sp>
         <p:nvSpPr>
-          <p:cNvPr id="16" name="TextBox 15"/>
+          <p:cNvPr id="15" name="TextBox 14"/>
           <p:cNvSpPr txBox="1"/>
           <p:nvPr/>
         </p:nvSpPr>
@@ -9592,44 +8509,9 @@
           </a:fontRef>
         </p:style>
       </p:cxnSp>
-      <p:sp>
-        <p:nvSpPr>
-          <p:cNvPr id="5" name="TextBox 4"/>
-          <p:cNvSpPr txBox="1"/>
-          <p:nvPr/>
-        </p:nvSpPr>
-        <p:spPr>
-          <a:xfrm>
-            <a:off x="777240" y="1261872"/>
-            <a:ext cx="10607040" cy="310896"/>
-          </a:xfrm>
-          <a:prstGeom prst="rect">
-            <a:avLst/>
-          </a:prstGeom>
-          <a:noFill/>
-        </p:spPr>
-        <p:txBody>
-          <a:bodyPr wrap="square" lIns="45720" rIns="45720" tIns="18288" bIns="18288" anchor="t">
-            <a:spAutoFit/>
-          </a:bodyPr>
-          <a:lstStyle/>
-          <a:p>
-            <a:pPr algn="l"/>
-            <a:r>
-              <a:rPr sz="1700" b="0" i="1">
-                <a:solidFill>
-                  <a:srgbClr val="6B6B6B"/>
-                </a:solidFill>
-                <a:latin typeface="Century Schoolbook"/>
-              </a:rPr>
-              <a:t>Answer.</a:t>
-            </a:r>
-          </a:p>
-        </p:txBody>
-      </p:sp>
       <p:cxnSp>
         <p:nvCxnSpPr>
-          <p:cNvPr id="6" name="Connector 5"/>
+          <p:cNvPr id="5" name="Connector 4"/>
           <p:cNvCxnSpPr/>
           <p:nvPr/>
         </p:nvCxnSpPr>
@@ -9664,7 +8546,7 @@
       </p:cxnSp>
       <p:sp>
         <p:nvSpPr>
-          <p:cNvPr id="7" name="TextBox 6"/>
+          <p:cNvPr id="6" name="TextBox 5"/>
           <p:cNvSpPr txBox="1"/>
           <p:nvPr/>
         </p:nvSpPr>
@@ -9699,7 +8581,7 @@
       </p:sp>
       <p:sp>
         <p:nvSpPr>
-          <p:cNvPr id="8" name="TextBox 7"/>
+          <p:cNvPr id="7" name="TextBox 6"/>
           <p:cNvSpPr txBox="1"/>
           <p:nvPr/>
         </p:nvSpPr>
@@ -9734,7 +8616,7 @@
       </p:sp>
       <p:sp>
         <p:nvSpPr>
-          <p:cNvPr id="9" name="TextBox 8"/>
+          <p:cNvPr id="8" name="TextBox 7"/>
           <p:cNvSpPr txBox="1"/>
           <p:nvPr/>
         </p:nvSpPr>
@@ -9769,7 +8651,7 @@
       </p:sp>
       <p:pic>
         <p:nvPicPr>
-          <p:cNvPr id="10" name="Picture 9" descr="b4b5a35a336421b1.png"/>
+          <p:cNvPr id="9" name="Picture 8" descr="b4b5a35a336421b1.png"/>
           <p:cNvPicPr>
             <a:picLocks noChangeAspect="1"/>
           </p:cNvPicPr>
@@ -9793,7 +8675,7 @@
       </p:pic>
       <p:sp>
         <p:nvSpPr>
-          <p:cNvPr id="11" name="TextBox 10"/>
+          <p:cNvPr id="10" name="TextBox 9"/>
           <p:cNvSpPr txBox="1"/>
           <p:nvPr/>
         </p:nvSpPr>
@@ -9828,7 +8710,7 @@
       </p:sp>
       <p:sp>
         <p:nvSpPr>
-          <p:cNvPr id="12" name="TextBox 11"/>
+          <p:cNvPr id="11" name="TextBox 10"/>
           <p:cNvSpPr txBox="1"/>
           <p:nvPr/>
         </p:nvSpPr>
@@ -9863,7 +8745,7 @@
       </p:sp>
       <p:pic>
         <p:nvPicPr>
-          <p:cNvPr id="13" name="Picture 12" descr="e7e94afbdd4008a4.png"/>
+          <p:cNvPr id="12" name="Picture 11" descr="e7e94afbdd4008a4.png"/>
           <p:cNvPicPr>
             <a:picLocks noChangeAspect="1"/>
           </p:cNvPicPr>
@@ -9887,7 +8769,7 @@
       </p:pic>
       <p:sp>
         <p:nvSpPr>
-          <p:cNvPr id="14" name="TextBox 13"/>
+          <p:cNvPr id="13" name="TextBox 12"/>
           <p:cNvSpPr txBox="1"/>
           <p:nvPr/>
         </p:nvSpPr>
@@ -9922,7 +8804,7 @@
       </p:sp>
       <p:sp>
         <p:nvSpPr>
-          <p:cNvPr id="15" name="TextBox 14"/>
+          <p:cNvPr id="14" name="TextBox 13"/>
           <p:cNvSpPr txBox="1"/>
           <p:nvPr/>
         </p:nvSpPr>
@@ -9957,105 +8839,7 @@
       </p:sp>
       <p:sp>
         <p:nvSpPr>
-          <p:cNvPr id="16" name="TextBox 15"/>
-          <p:cNvSpPr txBox="1"/>
-          <p:nvPr/>
-        </p:nvSpPr>
-        <p:spPr>
-          <a:xfrm>
-            <a:off x="1828800" y="3730354"/>
-            <a:ext cx="8503920" cy="548640"/>
-          </a:xfrm>
-          <a:prstGeom prst="rect">
-            <a:avLst/>
-          </a:prstGeom>
-          <a:noFill/>
-        </p:spPr>
-        <p:txBody>
-          <a:bodyPr wrap="square" lIns="45720" rIns="45720" tIns="18288" bIns="18288" anchor="t">
-            <a:spAutoFit/>
-          </a:bodyPr>
-          <a:lstStyle/>
-          <a:p>
-            <a:pPr algn="ctr"/>
-            <a:r>
-              <a:rPr sz="2400" b="0" i="0">
-                <a:solidFill>
-                  <a:srgbClr val="6B6B6B"/>
-                </a:solidFill>
-                <a:latin typeface="Century Schoolbook"/>
-              </a:rPr>
-              <a:t>8 = 2</a:t>
-            </a:r>
-            <a:r>
-              <a:rPr sz="2400" b="0" i="0" baseline="30000">
-                <a:solidFill>
-                  <a:srgbClr val="6B6B6B"/>
-                </a:solidFill>
-                <a:latin typeface="Century Schoolbook"/>
-              </a:rPr>
-              <a:t>3</a:t>
-            </a:r>
-            <a:r>
-              <a:rPr sz="2400" b="0" i="0">
-                <a:solidFill>
-                  <a:srgbClr val="6B6B6B"/>
-                </a:solidFill>
-                <a:latin typeface="Century Schoolbook"/>
-              </a:rPr>
-              <a:t>, so 8</a:t>
-            </a:r>
-            <a:r>
-              <a:rPr sz="2400" b="0" i="0" baseline="30000">
-                <a:solidFill>
-                  <a:srgbClr val="6B6B6B"/>
-                </a:solidFill>
-                <a:latin typeface="Century Schoolbook"/>
-              </a:rPr>
-              <a:t>5</a:t>
-            </a:r>
-            <a:r>
-              <a:rPr sz="2400" b="0" i="0">
-                <a:solidFill>
-                  <a:srgbClr val="6B6B6B"/>
-                </a:solidFill>
-                <a:latin typeface="Century Schoolbook"/>
-              </a:rPr>
-              <a:t> = (2</a:t>
-            </a:r>
-            <a:r>
-              <a:rPr sz="2400" b="0" i="0" baseline="30000">
-                <a:solidFill>
-                  <a:srgbClr val="6B6B6B"/>
-                </a:solidFill>
-                <a:latin typeface="Century Schoolbook"/>
-              </a:rPr>
-              <a:t>3</a:t>
-            </a:r>
-            <a:r>
-              <a:rPr sz="2400" b="0" i="0">
-                <a:solidFill>
-                  <a:srgbClr val="6B6B6B"/>
-                </a:solidFill>
-                <a:latin typeface="Century Schoolbook"/>
-              </a:rPr>
-              <a:t>)</a:t>
-            </a:r>
-            <a:r>
-              <a:rPr sz="2400" b="0" i="0" baseline="30000">
-                <a:solidFill>
-                  <a:srgbClr val="6B6B6B"/>
-                </a:solidFill>
-                <a:latin typeface="Century Schoolbook"/>
-              </a:rPr>
-              <a:t>5</a:t>
-            </a:r>
-          </a:p>
-        </p:txBody>
-      </p:sp>
-      <p:sp>
-        <p:nvSpPr>
-          <p:cNvPr id="17" name="TextBox 16"/>
+          <p:cNvPr id="15" name="TextBox 14"/>
           <p:cNvSpPr txBox="1"/>
           <p:nvPr/>
         </p:nvSpPr>
@@ -10274,44 +9058,9 @@
           </a:fontRef>
         </p:style>
       </p:cxnSp>
-      <p:sp>
-        <p:nvSpPr>
-          <p:cNvPr id="5" name="TextBox 4"/>
-          <p:cNvSpPr txBox="1"/>
-          <p:nvPr/>
-        </p:nvSpPr>
-        <p:spPr>
-          <a:xfrm>
-            <a:off x="777240" y="1261872"/>
-            <a:ext cx="10607040" cy="310896"/>
-          </a:xfrm>
-          <a:prstGeom prst="rect">
-            <a:avLst/>
-          </a:prstGeom>
-          <a:noFill/>
-        </p:spPr>
-        <p:txBody>
-          <a:bodyPr wrap="square" lIns="45720" rIns="45720" tIns="18288" bIns="18288" anchor="t">
-            <a:spAutoFit/>
-          </a:bodyPr>
-          <a:lstStyle/>
-          <a:p>
-            <a:pPr algn="l"/>
-            <a:r>
-              <a:rPr sz="1700" b="0" i="1">
-                <a:solidFill>
-                  <a:srgbClr val="6B6B6B"/>
-                </a:solidFill>
-                <a:latin typeface="Century Schoolbook"/>
-              </a:rPr>
-              <a:t>Boards up on three.</a:t>
-            </a:r>
-          </a:p>
-        </p:txBody>
-      </p:sp>
       <p:cxnSp>
         <p:nvCxnSpPr>
-          <p:cNvPr id="6" name="Connector 5"/>
+          <p:cNvPr id="5" name="Connector 4"/>
           <p:cNvCxnSpPr/>
           <p:nvPr/>
         </p:nvCxnSpPr>
@@ -10346,7 +9095,7 @@
       </p:cxnSp>
       <p:sp>
         <p:nvSpPr>
-          <p:cNvPr id="7" name="TextBox 6"/>
+          <p:cNvPr id="6" name="TextBox 5"/>
           <p:cNvSpPr txBox="1"/>
           <p:nvPr/>
         </p:nvSpPr>
@@ -10381,7 +9130,7 @@
       </p:sp>
       <p:sp>
         <p:nvSpPr>
-          <p:cNvPr id="8" name="TextBox 7"/>
+          <p:cNvPr id="7" name="TextBox 6"/>
           <p:cNvSpPr txBox="1"/>
           <p:nvPr/>
         </p:nvSpPr>
@@ -10416,7 +9165,7 @@
       </p:sp>
       <p:pic>
         <p:nvPicPr>
-          <p:cNvPr id="9" name="Picture 8" descr="39fbeb40e62d1228.png"/>
+          <p:cNvPr id="8" name="Picture 7" descr="39fbeb40e62d1228.png"/>
           <p:cNvPicPr>
             <a:picLocks noChangeAspect="1"/>
           </p:cNvPicPr>
@@ -10440,7 +9189,7 @@
       </p:pic>
       <p:sp>
         <p:nvSpPr>
-          <p:cNvPr id="10" name="TextBox 9"/>
+          <p:cNvPr id="9" name="TextBox 8"/>
           <p:cNvSpPr txBox="1"/>
           <p:nvPr/>
         </p:nvSpPr>
@@ -10475,7 +9224,7 @@
       </p:sp>
       <p:sp>
         <p:nvSpPr>
-          <p:cNvPr id="11" name="TextBox 10"/>
+          <p:cNvPr id="10" name="TextBox 9"/>
           <p:cNvSpPr txBox="1"/>
           <p:nvPr/>
         </p:nvSpPr>
@@ -10528,7 +9277,7 @@
       </p:sp>
       <p:sp>
         <p:nvSpPr>
-          <p:cNvPr id="12" name="TextBox 11"/>
+          <p:cNvPr id="11" name="TextBox 10"/>
           <p:cNvSpPr txBox="1"/>
           <p:nvPr/>
         </p:nvSpPr>
@@ -10581,7 +9330,7 @@
       </p:sp>
       <p:sp>
         <p:nvSpPr>
-          <p:cNvPr id="13" name="TextBox 12"/>
+          <p:cNvPr id="12" name="TextBox 11"/>
           <p:cNvSpPr txBox="1"/>
           <p:nvPr/>
         </p:nvSpPr>
@@ -10634,7 +9383,7 @@
       </p:sp>
       <p:sp>
         <p:nvSpPr>
-          <p:cNvPr id="14" name="TextBox 13"/>
+          <p:cNvPr id="13" name="TextBox 12"/>
           <p:cNvSpPr txBox="1"/>
           <p:nvPr/>
         </p:nvSpPr>
@@ -10687,7 +9436,7 @@
       </p:sp>
       <p:sp>
         <p:nvSpPr>
-          <p:cNvPr id="15" name="TextBox 14"/>
+          <p:cNvPr id="14" name="TextBox 13"/>
           <p:cNvSpPr txBox="1"/>
           <p:nvPr/>
         </p:nvSpPr>
@@ -10843,44 +9592,9 @@
           </a:fontRef>
         </p:style>
       </p:cxnSp>
-      <p:sp>
-        <p:nvSpPr>
-          <p:cNvPr id="5" name="TextBox 4"/>
-          <p:cNvSpPr txBox="1"/>
-          <p:nvPr/>
-        </p:nvSpPr>
-        <p:spPr>
-          <a:xfrm>
-            <a:off x="777240" y="1261872"/>
-            <a:ext cx="10607040" cy="310896"/>
-          </a:xfrm>
-          <a:prstGeom prst="rect">
-            <a:avLst/>
-          </a:prstGeom>
-          <a:noFill/>
-        </p:spPr>
-        <p:txBody>
-          <a:bodyPr wrap="square" lIns="45720" rIns="45720" tIns="18288" bIns="18288" anchor="t">
-            <a:spAutoFit/>
-          </a:bodyPr>
-          <a:lstStyle/>
-          <a:p>
-            <a:pPr algn="l"/>
-            <a:r>
-              <a:rPr sz="1700" b="0" i="1">
-                <a:solidFill>
-                  <a:srgbClr val="6B6B6B"/>
-                </a:solidFill>
-                <a:latin typeface="Century Schoolbook"/>
-              </a:rPr>
-              <a:t>Answer.</a:t>
-            </a:r>
-          </a:p>
-        </p:txBody>
-      </p:sp>
       <p:cxnSp>
         <p:nvCxnSpPr>
-          <p:cNvPr id="6" name="Connector 5"/>
+          <p:cNvPr id="5" name="Connector 4"/>
           <p:cNvCxnSpPr/>
           <p:nvPr/>
         </p:nvCxnSpPr>
@@ -10915,7 +9629,7 @@
       </p:cxnSp>
       <p:sp>
         <p:nvSpPr>
-          <p:cNvPr id="7" name="TextBox 6"/>
+          <p:cNvPr id="6" name="TextBox 5"/>
           <p:cNvSpPr txBox="1"/>
           <p:nvPr/>
         </p:nvSpPr>
@@ -10950,7 +9664,7 @@
       </p:sp>
       <p:sp>
         <p:nvSpPr>
-          <p:cNvPr id="8" name="TextBox 7"/>
+          <p:cNvPr id="7" name="TextBox 6"/>
           <p:cNvSpPr txBox="1"/>
           <p:nvPr/>
         </p:nvSpPr>
@@ -10985,7 +9699,7 @@
       </p:sp>
       <p:pic>
         <p:nvPicPr>
-          <p:cNvPr id="9" name="Picture 8" descr="2a82b5b2f64aa285.png"/>
+          <p:cNvPr id="8" name="Picture 7" descr="2a82b5b2f64aa285.png"/>
           <p:cNvPicPr>
             <a:picLocks noChangeAspect="1"/>
           </p:cNvPicPr>
@@ -11009,7 +9723,7 @@
       </p:pic>
       <p:sp>
         <p:nvSpPr>
-          <p:cNvPr id="10" name="TextBox 9"/>
+          <p:cNvPr id="9" name="TextBox 8"/>
           <p:cNvSpPr txBox="1"/>
           <p:nvPr/>
         </p:nvSpPr>
@@ -11044,7 +9758,7 @@
       </p:sp>
       <p:sp>
         <p:nvSpPr>
-          <p:cNvPr id="11" name="TextBox 10"/>
+          <p:cNvPr id="10" name="TextBox 9"/>
           <p:cNvSpPr txBox="1"/>
           <p:nvPr/>
         </p:nvSpPr>
@@ -11097,7 +9811,7 @@
       </p:sp>
       <p:sp>
         <p:nvSpPr>
-          <p:cNvPr id="12" name="TextBox 11"/>
+          <p:cNvPr id="11" name="TextBox 10"/>
           <p:cNvSpPr txBox="1"/>
           <p:nvPr/>
         </p:nvSpPr>
@@ -11150,7 +9864,7 @@
       </p:sp>
       <p:sp>
         <p:nvSpPr>
-          <p:cNvPr id="13" name="TextBox 12"/>
+          <p:cNvPr id="12" name="TextBox 11"/>
           <p:cNvSpPr txBox="1"/>
           <p:nvPr/>
         </p:nvSpPr>
@@ -11203,7 +9917,7 @@
       </p:sp>
       <p:sp>
         <p:nvSpPr>
-          <p:cNvPr id="14" name="TextBox 13"/>
+          <p:cNvPr id="13" name="TextBox 12"/>
           <p:cNvSpPr txBox="1"/>
           <p:nvPr/>
         </p:nvSpPr>
@@ -11256,7 +9970,7 @@
       </p:sp>
       <p:sp>
         <p:nvSpPr>
-          <p:cNvPr id="15" name="TextBox 14"/>
+          <p:cNvPr id="14" name="TextBox 13"/>
           <p:cNvSpPr txBox="1"/>
           <p:nvPr/>
         </p:nvSpPr>
@@ -11421,44 +10135,9 @@
           </a:fontRef>
         </p:style>
       </p:cxnSp>
-      <p:sp>
-        <p:nvSpPr>
-          <p:cNvPr id="5" name="TextBox 4"/>
-          <p:cNvSpPr txBox="1"/>
-          <p:nvPr/>
-        </p:nvSpPr>
-        <p:spPr>
-          <a:xfrm>
-            <a:off x="777240" y="1261872"/>
-            <a:ext cx="10607040" cy="310896"/>
-          </a:xfrm>
-          <a:prstGeom prst="rect">
-            <a:avLst/>
-          </a:prstGeom>
-          <a:noFill/>
-        </p:spPr>
-        <p:txBody>
-          <a:bodyPr wrap="square" lIns="45720" rIns="45720" tIns="18288" bIns="18288" anchor="t">
-            <a:spAutoFit/>
-          </a:bodyPr>
-          <a:lstStyle/>
-          <a:p>
-            <a:pPr algn="l"/>
-            <a:r>
-              <a:rPr sz="1700" b="0" i="1">
-                <a:solidFill>
-                  <a:srgbClr val="6B6B6B"/>
-                </a:solidFill>
-                <a:latin typeface="Century Schoolbook"/>
-              </a:rPr>
-              <a:t>Boards up on three.</a:t>
-            </a:r>
-          </a:p>
-        </p:txBody>
-      </p:sp>
       <p:cxnSp>
         <p:nvCxnSpPr>
-          <p:cNvPr id="6" name="Connector 5"/>
+          <p:cNvPr id="5" name="Connector 4"/>
           <p:cNvCxnSpPr/>
           <p:nvPr/>
         </p:nvCxnSpPr>
@@ -11493,7 +10172,7 @@
       </p:cxnSp>
       <p:sp>
         <p:nvSpPr>
-          <p:cNvPr id="7" name="TextBox 6"/>
+          <p:cNvPr id="6" name="TextBox 5"/>
           <p:cNvSpPr txBox="1"/>
           <p:nvPr/>
         </p:nvSpPr>
@@ -11528,7 +10207,7 @@
       </p:sp>
       <p:sp>
         <p:nvSpPr>
-          <p:cNvPr id="8" name="TextBox 7"/>
+          <p:cNvPr id="7" name="TextBox 6"/>
           <p:cNvSpPr txBox="1"/>
           <p:nvPr/>
         </p:nvSpPr>
@@ -11563,7 +10242,7 @@
       </p:sp>
       <p:pic>
         <p:nvPicPr>
-          <p:cNvPr id="9" name="Picture 8" descr="78733fd3b94c8799.png"/>
+          <p:cNvPr id="8" name="Picture 7" descr="78733fd3b94c8799.png"/>
           <p:cNvPicPr>
             <a:picLocks noChangeAspect="1"/>
           </p:cNvPicPr>
@@ -11587,7 +10266,7 @@
       </p:pic>
       <p:sp>
         <p:nvSpPr>
-          <p:cNvPr id="10" name="TextBox 9"/>
+          <p:cNvPr id="9" name="TextBox 8"/>
           <p:cNvSpPr txBox="1"/>
           <p:nvPr/>
         </p:nvSpPr>
@@ -11622,7 +10301,7 @@
       </p:sp>
       <p:sp>
         <p:nvSpPr>
-          <p:cNvPr id="11" name="TextBox 10"/>
+          <p:cNvPr id="10" name="TextBox 9"/>
           <p:cNvSpPr txBox="1"/>
           <p:nvPr/>
         </p:nvSpPr>
@@ -11675,7 +10354,7 @@
       </p:sp>
       <p:sp>
         <p:nvSpPr>
-          <p:cNvPr id="12" name="TextBox 11"/>
+          <p:cNvPr id="11" name="TextBox 10"/>
           <p:cNvSpPr txBox="1"/>
           <p:nvPr/>
         </p:nvSpPr>
@@ -11728,7 +10407,7 @@
       </p:sp>
       <p:sp>
         <p:nvSpPr>
-          <p:cNvPr id="13" name="TextBox 12"/>
+          <p:cNvPr id="12" name="TextBox 11"/>
           <p:cNvSpPr txBox="1"/>
           <p:nvPr/>
         </p:nvSpPr>
@@ -11781,7 +10460,7 @@
       </p:sp>
       <p:sp>
         <p:nvSpPr>
-          <p:cNvPr id="14" name="TextBox 13"/>
+          <p:cNvPr id="13" name="TextBox 12"/>
           <p:cNvSpPr txBox="1"/>
           <p:nvPr/>
         </p:nvSpPr>
@@ -11834,7 +10513,7 @@
       </p:sp>
       <p:sp>
         <p:nvSpPr>
-          <p:cNvPr id="15" name="TextBox 14"/>
+          <p:cNvPr id="14" name="TextBox 13"/>
           <p:cNvSpPr txBox="1"/>
           <p:nvPr/>
         </p:nvSpPr>
@@ -11990,44 +10669,9 @@
           </a:fontRef>
         </p:style>
       </p:cxnSp>
-      <p:sp>
-        <p:nvSpPr>
-          <p:cNvPr id="5" name="TextBox 4"/>
-          <p:cNvSpPr txBox="1"/>
-          <p:nvPr/>
-        </p:nvSpPr>
-        <p:spPr>
-          <a:xfrm>
-            <a:off x="777240" y="1261872"/>
-            <a:ext cx="10607040" cy="310896"/>
-          </a:xfrm>
-          <a:prstGeom prst="rect">
-            <a:avLst/>
-          </a:prstGeom>
-          <a:noFill/>
-        </p:spPr>
-        <p:txBody>
-          <a:bodyPr wrap="square" lIns="45720" rIns="45720" tIns="18288" bIns="18288" anchor="t">
-            <a:spAutoFit/>
-          </a:bodyPr>
-          <a:lstStyle/>
-          <a:p>
-            <a:pPr algn="l"/>
-            <a:r>
-              <a:rPr sz="1700" b="0" i="1">
-                <a:solidFill>
-                  <a:srgbClr val="6B6B6B"/>
-                </a:solidFill>
-                <a:latin typeface="Century Schoolbook"/>
-              </a:rPr>
-              <a:t>Answer.</a:t>
-            </a:r>
-          </a:p>
-        </p:txBody>
-      </p:sp>
       <p:cxnSp>
         <p:nvCxnSpPr>
-          <p:cNvPr id="6" name="Connector 5"/>
+          <p:cNvPr id="5" name="Connector 4"/>
           <p:cNvCxnSpPr/>
           <p:nvPr/>
         </p:nvCxnSpPr>
@@ -12062,7 +10706,7 @@
       </p:cxnSp>
       <p:sp>
         <p:nvSpPr>
-          <p:cNvPr id="7" name="TextBox 6"/>
+          <p:cNvPr id="6" name="TextBox 5"/>
           <p:cNvSpPr txBox="1"/>
           <p:nvPr/>
         </p:nvSpPr>
@@ -12097,7 +10741,7 @@
       </p:sp>
       <p:sp>
         <p:nvSpPr>
-          <p:cNvPr id="8" name="TextBox 7"/>
+          <p:cNvPr id="7" name="TextBox 6"/>
           <p:cNvSpPr txBox="1"/>
           <p:nvPr/>
         </p:nvSpPr>
@@ -12132,7 +10776,7 @@
       </p:sp>
       <p:pic>
         <p:nvPicPr>
-          <p:cNvPr id="9" name="Picture 8" descr="4ef405027ff61918.png"/>
+          <p:cNvPr id="8" name="Picture 7" descr="4ef405027ff61918.png"/>
           <p:cNvPicPr>
             <a:picLocks noChangeAspect="1"/>
           </p:cNvPicPr>
@@ -12156,7 +10800,7 @@
       </p:pic>
       <p:sp>
         <p:nvSpPr>
-          <p:cNvPr id="10" name="TextBox 9"/>
+          <p:cNvPr id="9" name="TextBox 8"/>
           <p:cNvSpPr txBox="1"/>
           <p:nvPr/>
         </p:nvSpPr>
@@ -12191,7 +10835,7 @@
       </p:sp>
       <p:sp>
         <p:nvSpPr>
-          <p:cNvPr id="11" name="TextBox 10"/>
+          <p:cNvPr id="10" name="TextBox 9"/>
           <p:cNvSpPr txBox="1"/>
           <p:nvPr/>
         </p:nvSpPr>
@@ -12244,7 +10888,7 @@
       </p:sp>
       <p:sp>
         <p:nvSpPr>
-          <p:cNvPr id="12" name="TextBox 11"/>
+          <p:cNvPr id="11" name="TextBox 10"/>
           <p:cNvSpPr txBox="1"/>
           <p:nvPr/>
         </p:nvSpPr>
@@ -12297,7 +10941,7 @@
       </p:sp>
       <p:sp>
         <p:nvSpPr>
-          <p:cNvPr id="13" name="TextBox 12"/>
+          <p:cNvPr id="12" name="TextBox 11"/>
           <p:cNvSpPr txBox="1"/>
           <p:nvPr/>
         </p:nvSpPr>
@@ -12350,7 +10994,7 @@
       </p:sp>
       <p:sp>
         <p:nvSpPr>
-          <p:cNvPr id="14" name="TextBox 13"/>
+          <p:cNvPr id="13" name="TextBox 12"/>
           <p:cNvSpPr txBox="1"/>
           <p:nvPr/>
         </p:nvSpPr>
@@ -12403,7 +11047,7 @@
       </p:sp>
       <p:sp>
         <p:nvSpPr>
-          <p:cNvPr id="15" name="TextBox 14"/>
+          <p:cNvPr id="14" name="TextBox 13"/>
           <p:cNvSpPr txBox="1"/>
           <p:nvPr/>
         </p:nvSpPr>
@@ -12568,44 +11212,9 @@
           </a:fontRef>
         </p:style>
       </p:cxnSp>
-      <p:sp>
-        <p:nvSpPr>
-          <p:cNvPr id="5" name="TextBox 4"/>
-          <p:cNvSpPr txBox="1"/>
-          <p:nvPr/>
-        </p:nvSpPr>
-        <p:spPr>
-          <a:xfrm>
-            <a:off x="777240" y="1261872"/>
-            <a:ext cx="10607040" cy="310896"/>
-          </a:xfrm>
-          <a:prstGeom prst="rect">
-            <a:avLst/>
-          </a:prstGeom>
-          <a:noFill/>
-        </p:spPr>
-        <p:txBody>
-          <a:bodyPr wrap="square" lIns="45720" rIns="45720" tIns="18288" bIns="18288" anchor="t">
-            <a:spAutoFit/>
-          </a:bodyPr>
-          <a:lstStyle/>
-          <a:p>
-            <a:pPr algn="l"/>
-            <a:r>
-              <a:rPr sz="1700" b="0" i="1">
-                <a:solidFill>
-                  <a:srgbClr val="6B6B6B"/>
-                </a:solidFill>
-                <a:latin typeface="Century Schoolbook"/>
-              </a:rPr>
-              <a:t>Boards up on three.</a:t>
-            </a:r>
-          </a:p>
-        </p:txBody>
-      </p:sp>
       <p:cxnSp>
         <p:nvCxnSpPr>
-          <p:cNvPr id="6" name="Connector 5"/>
+          <p:cNvPr id="5" name="Connector 4"/>
           <p:cNvCxnSpPr/>
           <p:nvPr/>
         </p:nvCxnSpPr>
@@ -12640,7 +11249,7 @@
       </p:cxnSp>
       <p:sp>
         <p:nvSpPr>
-          <p:cNvPr id="7" name="TextBox 6"/>
+          <p:cNvPr id="6" name="TextBox 5"/>
           <p:cNvSpPr txBox="1"/>
           <p:nvPr/>
         </p:nvSpPr>
@@ -12675,7 +11284,7 @@
       </p:sp>
       <p:sp>
         <p:nvSpPr>
-          <p:cNvPr id="8" name="TextBox 7"/>
+          <p:cNvPr id="7" name="TextBox 6"/>
           <p:cNvSpPr txBox="1"/>
           <p:nvPr/>
         </p:nvSpPr>
@@ -12710,7 +11319,7 @@
       </p:sp>
       <p:pic>
         <p:nvPicPr>
-          <p:cNvPr id="9" name="Picture 8" descr="11b1cae12f4ad7a2.png"/>
+          <p:cNvPr id="8" name="Picture 7" descr="11b1cae12f4ad7a2.png"/>
           <p:cNvPicPr>
             <a:picLocks noChangeAspect="1"/>
           </p:cNvPicPr>
@@ -12734,7 +11343,7 @@
       </p:pic>
       <p:sp>
         <p:nvSpPr>
-          <p:cNvPr id="10" name="TextBox 9"/>
+          <p:cNvPr id="9" name="TextBox 8"/>
           <p:cNvSpPr txBox="1"/>
           <p:nvPr/>
         </p:nvSpPr>
@@ -12763,41 +11372,6 @@
                 <a:latin typeface="Century Schoolbook"/>
               </a:rPr>
               <a:t>Answer it.</a:t>
-            </a:r>
-          </a:p>
-        </p:txBody>
-      </p:sp>
-      <p:sp>
-        <p:nvSpPr>
-          <p:cNvPr id="11" name="TextBox 10"/>
-          <p:cNvSpPr txBox="1"/>
-          <p:nvPr/>
-        </p:nvSpPr>
-        <p:spPr>
-          <a:xfrm>
-            <a:off x="777240" y="4828032"/>
-            <a:ext cx="10607040" cy="365760"/>
-          </a:xfrm>
-          <a:prstGeom prst="rect">
-            <a:avLst/>
-          </a:prstGeom>
-          <a:noFill/>
-        </p:spPr>
-        <p:txBody>
-          <a:bodyPr wrap="square" lIns="45720" rIns="45720" tIns="18288" bIns="18288" anchor="t">
-            <a:spAutoFit/>
-          </a:bodyPr>
-          <a:lstStyle/>
-          <a:p>
-            <a:pPr algn="ctr"/>
-            <a:r>
-              <a:rPr sz="1900" b="0" i="1">
-                <a:solidFill>
-                  <a:srgbClr val="6B6B6B"/>
-                </a:solidFill>
-                <a:latin typeface="Century Schoolbook"/>
-              </a:rPr>
-              <a:t>Write it as one power of 2.</a:t>
             </a:r>
           </a:p>
         </p:txBody>
@@ -12925,44 +11499,9 @@
           </a:fontRef>
         </p:style>
       </p:cxnSp>
-      <p:sp>
-        <p:nvSpPr>
-          <p:cNvPr id="5" name="TextBox 4"/>
-          <p:cNvSpPr txBox="1"/>
-          <p:nvPr/>
-        </p:nvSpPr>
-        <p:spPr>
-          <a:xfrm>
-            <a:off x="777240" y="1261872"/>
-            <a:ext cx="10607040" cy="310896"/>
-          </a:xfrm>
-          <a:prstGeom prst="rect">
-            <a:avLst/>
-          </a:prstGeom>
-          <a:noFill/>
-        </p:spPr>
-        <p:txBody>
-          <a:bodyPr wrap="square" lIns="45720" rIns="45720" tIns="18288" bIns="18288" anchor="t">
-            <a:spAutoFit/>
-          </a:bodyPr>
-          <a:lstStyle/>
-          <a:p>
-            <a:pPr algn="l"/>
-            <a:r>
-              <a:rPr sz="1700" b="0" i="1">
-                <a:solidFill>
-                  <a:srgbClr val="6B6B6B"/>
-                </a:solidFill>
-                <a:latin typeface="Century Schoolbook"/>
-              </a:rPr>
-              <a:t>Answer.</a:t>
-            </a:r>
-          </a:p>
-        </p:txBody>
-      </p:sp>
       <p:cxnSp>
         <p:nvCxnSpPr>
-          <p:cNvPr id="6" name="Connector 5"/>
+          <p:cNvPr id="5" name="Connector 4"/>
           <p:cNvCxnSpPr/>
           <p:nvPr/>
         </p:nvCxnSpPr>
@@ -12997,7 +11536,7 @@
       </p:cxnSp>
       <p:sp>
         <p:nvSpPr>
-          <p:cNvPr id="7" name="TextBox 6"/>
+          <p:cNvPr id="6" name="TextBox 5"/>
           <p:cNvSpPr txBox="1"/>
           <p:nvPr/>
         </p:nvSpPr>
@@ -13032,7 +11571,7 @@
       </p:sp>
       <p:sp>
         <p:nvSpPr>
-          <p:cNvPr id="8" name="TextBox 7"/>
+          <p:cNvPr id="7" name="TextBox 6"/>
           <p:cNvSpPr txBox="1"/>
           <p:nvPr/>
         </p:nvSpPr>
@@ -13067,7 +11606,7 @@
       </p:sp>
       <p:pic>
         <p:nvPicPr>
-          <p:cNvPr id="9" name="Picture 8" descr="9a83df8a23e93975.png"/>
+          <p:cNvPr id="8" name="Picture 7" descr="9a83df8a23e93975.png"/>
           <p:cNvPicPr>
             <a:picLocks noChangeAspect="1"/>
           </p:cNvPicPr>
@@ -13091,105 +11630,7 @@
       </p:pic>
       <p:sp>
         <p:nvSpPr>
-          <p:cNvPr id="10" name="TextBox 9"/>
-          <p:cNvSpPr txBox="1"/>
-          <p:nvPr/>
-        </p:nvSpPr>
-        <p:spPr>
-          <a:xfrm>
-            <a:off x="1828800" y="2798063"/>
-            <a:ext cx="8503920" cy="548640"/>
-          </a:xfrm>
-          <a:prstGeom prst="rect">
-            <a:avLst/>
-          </a:prstGeom>
-          <a:noFill/>
-        </p:spPr>
-        <p:txBody>
-          <a:bodyPr wrap="square" lIns="45720" rIns="45720" tIns="18288" bIns="18288" anchor="t">
-            <a:spAutoFit/>
-          </a:bodyPr>
-          <a:lstStyle/>
-          <a:p>
-            <a:pPr algn="ctr"/>
-            <a:r>
-              <a:rPr sz="2400" b="0" i="0">
-                <a:solidFill>
-                  <a:srgbClr val="6B6B6B"/>
-                </a:solidFill>
-                <a:latin typeface="Century Schoolbook"/>
-              </a:rPr>
-              <a:t>4</a:t>
-            </a:r>
-            <a:r>
-              <a:rPr sz="2400" b="0" i="0" baseline="30000">
-                <a:solidFill>
-                  <a:srgbClr val="6B6B6B"/>
-                </a:solidFill>
-                <a:latin typeface="Century Schoolbook"/>
-              </a:rPr>
-              <a:t>3</a:t>
-            </a:r>
-            <a:r>
-              <a:rPr sz="2400" b="0" i="0">
-                <a:solidFill>
-                  <a:srgbClr val="6B6B6B"/>
-                </a:solidFill>
-                <a:latin typeface="Century Schoolbook"/>
-              </a:rPr>
-              <a:t> = (2</a:t>
-            </a:r>
-            <a:r>
-              <a:rPr sz="2400" b="0" i="0" baseline="30000">
-                <a:solidFill>
-                  <a:srgbClr val="6B6B6B"/>
-                </a:solidFill>
-                <a:latin typeface="Century Schoolbook"/>
-              </a:rPr>
-              <a:t>2</a:t>
-            </a:r>
-            <a:r>
-              <a:rPr sz="2400" b="0" i="0">
-                <a:solidFill>
-                  <a:srgbClr val="6B6B6B"/>
-                </a:solidFill>
-                <a:latin typeface="Century Schoolbook"/>
-              </a:rPr>
-              <a:t>)</a:t>
-            </a:r>
-            <a:r>
-              <a:rPr sz="2400" b="0" i="0" baseline="30000">
-                <a:solidFill>
-                  <a:srgbClr val="6B6B6B"/>
-                </a:solidFill>
-                <a:latin typeface="Century Schoolbook"/>
-              </a:rPr>
-              <a:t>3</a:t>
-            </a:r>
-            <a:r>
-              <a:rPr sz="2400" b="0" i="0">
-                <a:solidFill>
-                  <a:srgbClr val="6B6B6B"/>
-                </a:solidFill>
-                <a:latin typeface="Century Schoolbook"/>
-              </a:rPr>
-              <a:t> = 2</a:t>
-            </a:r>
-            <a:r>
-              <a:rPr sz="2400" b="0" i="0" baseline="30000">
-                <a:solidFill>
-                  <a:srgbClr val="6B6B6B"/>
-                </a:solidFill>
-                <a:latin typeface="Century Schoolbook"/>
-              </a:rPr>
-              <a:t>6</a:t>
-            </a:r>
-          </a:p>
-        </p:txBody>
-      </p:sp>
-      <p:sp>
-        <p:nvSpPr>
-          <p:cNvPr id="11" name="TextBox 10"/>
+          <p:cNvPr id="9" name="TextBox 8"/>
           <p:cNvSpPr txBox="1"/>
           <p:nvPr/>
         </p:nvSpPr>
@@ -13224,7 +11665,7 @@
       </p:sp>
       <p:pic>
         <p:nvPicPr>
-          <p:cNvPr id="12" name="Picture 11" descr="474833020a971499.png"/>
+          <p:cNvPr id="10" name="Picture 9" descr="474833020a971499.png"/>
           <p:cNvPicPr>
             <a:picLocks noChangeAspect="1"/>
           </p:cNvPicPr>
@@ -13369,44 +11810,9 @@
           </a:fontRef>
         </p:style>
       </p:cxnSp>
-      <p:sp>
-        <p:nvSpPr>
-          <p:cNvPr id="5" name="TextBox 4"/>
-          <p:cNvSpPr txBox="1"/>
-          <p:nvPr/>
-        </p:nvSpPr>
-        <p:spPr>
-          <a:xfrm>
-            <a:off x="777240" y="1261872"/>
-            <a:ext cx="10607040" cy="310896"/>
-          </a:xfrm>
-          <a:prstGeom prst="rect">
-            <a:avLst/>
-          </a:prstGeom>
-          <a:noFill/>
-        </p:spPr>
-        <p:txBody>
-          <a:bodyPr wrap="square" lIns="45720" rIns="45720" tIns="18288" bIns="18288" anchor="t">
-            <a:spAutoFit/>
-          </a:bodyPr>
-          <a:lstStyle/>
-          <a:p>
-            <a:pPr algn="l"/>
-            <a:r>
-              <a:rPr sz="1700" b="0" i="1">
-                <a:solidFill>
-                  <a:srgbClr val="6B6B6B"/>
-                </a:solidFill>
-                <a:latin typeface="Century Schoolbook"/>
-              </a:rPr>
-              <a:t>Answers.</a:t>
-            </a:r>
-          </a:p>
-        </p:txBody>
-      </p:sp>
       <p:cxnSp>
         <p:nvCxnSpPr>
-          <p:cNvPr id="6" name="Connector 5"/>
+          <p:cNvPr id="5" name="Connector 4"/>
           <p:cNvCxnSpPr/>
           <p:nvPr/>
         </p:nvCxnSpPr>
@@ -13441,7 +11847,7 @@
       </p:cxnSp>
       <p:sp>
         <p:nvSpPr>
-          <p:cNvPr id="7" name="TextBox 6"/>
+          <p:cNvPr id="6" name="TextBox 5"/>
           <p:cNvSpPr txBox="1"/>
           <p:nvPr/>
         </p:nvSpPr>
@@ -13476,7 +11882,7 @@
       </p:sp>
       <p:sp>
         <p:nvSpPr>
-          <p:cNvPr id="8" name="TextBox 7"/>
+          <p:cNvPr id="7" name="TextBox 6"/>
           <p:cNvSpPr txBox="1"/>
           <p:nvPr/>
         </p:nvSpPr>
@@ -13511,13 +11917,13 @@
       </p:sp>
       <p:sp>
         <p:nvSpPr>
-          <p:cNvPr id="9" name="TextBox 8"/>
-          <p:cNvSpPr txBox="1"/>
-          <p:nvPr/>
-        </p:nvSpPr>
-        <p:spPr>
-          <a:xfrm>
-            <a:off x="1874519" y="1831848"/>
+          <p:cNvPr id="8" name="TextBox 7"/>
+          <p:cNvSpPr txBox="1"/>
+          <p:nvPr/>
+        </p:nvSpPr>
+        <p:spPr>
+          <a:xfrm>
+            <a:off x="1874519" y="1511808"/>
             <a:ext cx="7804089" cy="457200"/>
           </a:xfrm>
           <a:prstGeom prst="rect">
@@ -13546,7 +11952,7 @@
       </p:sp>
       <p:pic>
         <p:nvPicPr>
-          <p:cNvPr id="10" name="Picture 9" descr="70fd4f7c195b27fd.png"/>
+          <p:cNvPr id="9" name="Picture 8" descr="70fd4f7c195b27fd.png"/>
           <p:cNvPicPr>
             <a:picLocks noChangeAspect="1"/>
           </p:cNvPicPr>
@@ -13560,7 +11966,7 @@
         </p:blipFill>
         <p:spPr>
           <a:xfrm>
-            <a:off x="9541449" y="1783080"/>
+            <a:off x="9541449" y="1463040"/>
             <a:ext cx="795528" cy="554736"/>
           </a:xfrm>
           <a:prstGeom prst="rect">
@@ -13570,7 +11976,7 @@
       </p:pic>
       <p:pic>
         <p:nvPicPr>
-          <p:cNvPr id="11" name="Picture 10" descr="b2f9cb953a93e9cc.png"/>
+          <p:cNvPr id="10" name="Picture 9" descr="b2f9cb953a93e9cc.png"/>
           <p:cNvPicPr>
             <a:picLocks noChangeAspect="1"/>
           </p:cNvPicPr>
@@ -13584,7 +11990,7 @@
         </p:blipFill>
         <p:spPr>
           <a:xfrm>
-            <a:off x="2606040" y="2383536"/>
+            <a:off x="2606040" y="2063496"/>
             <a:ext cx="1152144" cy="557784"/>
           </a:xfrm>
           <a:prstGeom prst="rect">
@@ -13594,13 +12000,13 @@
       </p:pic>
       <p:sp>
         <p:nvSpPr>
-          <p:cNvPr id="12" name="TextBox 11"/>
-          <p:cNvSpPr txBox="1"/>
-          <p:nvPr/>
-        </p:nvSpPr>
-        <p:spPr>
-          <a:xfrm>
-            <a:off x="1874519" y="3217164"/>
+          <p:cNvPr id="11" name="TextBox 10"/>
+          <p:cNvSpPr txBox="1"/>
+          <p:nvPr/>
+        </p:nvSpPr>
+        <p:spPr>
+          <a:xfrm>
+            <a:off x="1874519" y="2897124"/>
             <a:ext cx="3064939" cy="457200"/>
           </a:xfrm>
           <a:prstGeom prst="rect">
@@ -13629,7 +12035,7 @@
       </p:sp>
       <p:pic>
         <p:nvPicPr>
-          <p:cNvPr id="13" name="Picture 12" descr="a4522c3024ca6567.png"/>
+          <p:cNvPr id="12" name="Picture 11" descr="a4522c3024ca6567.png"/>
           <p:cNvPicPr>
             <a:picLocks noChangeAspect="1"/>
           </p:cNvPicPr>
@@ -13643,7 +12049,7 @@
         </p:blipFill>
         <p:spPr>
           <a:xfrm>
-            <a:off x="4802299" y="3142488"/>
+            <a:off x="4802299" y="2822448"/>
             <a:ext cx="463296" cy="606552"/>
           </a:xfrm>
           <a:prstGeom prst="rect">
@@ -13653,13 +12059,13 @@
       </p:pic>
       <p:sp>
         <p:nvSpPr>
-          <p:cNvPr id="14" name="TextBox 13"/>
-          <p:cNvSpPr txBox="1"/>
-          <p:nvPr/>
-        </p:nvSpPr>
-        <p:spPr>
-          <a:xfrm>
-            <a:off x="5814235" y="3119628"/>
+          <p:cNvPr id="13" name="TextBox 12"/>
+          <p:cNvSpPr txBox="1"/>
+          <p:nvPr/>
+        </p:nvSpPr>
+        <p:spPr>
+          <a:xfrm>
+            <a:off x="5814235" y="2799588"/>
             <a:ext cx="565792" cy="457200"/>
           </a:xfrm>
           <a:prstGeom prst="rect">
@@ -13688,13 +12094,13 @@
       </p:sp>
       <p:sp>
         <p:nvSpPr>
-          <p:cNvPr id="15" name="TextBox 14"/>
-          <p:cNvSpPr txBox="1"/>
-          <p:nvPr/>
-        </p:nvSpPr>
-        <p:spPr>
-          <a:xfrm>
-            <a:off x="1874519" y="4055363"/>
+          <p:cNvPr id="14" name="TextBox 13"/>
+          <p:cNvSpPr txBox="1"/>
+          <p:nvPr/>
+        </p:nvSpPr>
+        <p:spPr>
+          <a:xfrm>
+            <a:off x="1874519" y="3735324"/>
             <a:ext cx="3064939" cy="457200"/>
           </a:xfrm>
           <a:prstGeom prst="rect">
@@ -13723,7 +12129,7 @@
       </p:sp>
       <p:pic>
         <p:nvPicPr>
-          <p:cNvPr id="16" name="Picture 15" descr="574a5d3a612aa104.png"/>
+          <p:cNvPr id="15" name="Picture 14" descr="574a5d3a612aa104.png"/>
           <p:cNvPicPr>
             <a:picLocks noChangeAspect="1"/>
           </p:cNvPicPr>
@@ -13737,7 +12143,7 @@
         </p:blipFill>
         <p:spPr>
           <a:xfrm>
-            <a:off x="4802299" y="3950207"/>
+            <a:off x="4802299" y="3630168"/>
             <a:ext cx="469392" cy="667512"/>
           </a:xfrm>
           <a:prstGeom prst="rect">
@@ -13747,13 +12153,13 @@
       </p:pic>
       <p:sp>
         <p:nvSpPr>
-          <p:cNvPr id="17" name="TextBox 16"/>
-          <p:cNvSpPr txBox="1"/>
-          <p:nvPr/>
-        </p:nvSpPr>
-        <p:spPr>
-          <a:xfrm>
-            <a:off x="5820331" y="3927347"/>
+          <p:cNvPr id="16" name="TextBox 15"/>
+          <p:cNvSpPr txBox="1"/>
+          <p:nvPr/>
+        </p:nvSpPr>
+        <p:spPr>
+          <a:xfrm>
+            <a:off x="5820331" y="3607308"/>
             <a:ext cx="743533" cy="457200"/>
           </a:xfrm>
           <a:prstGeom prst="rect">
@@ -13782,13 +12188,13 @@
       </p:sp>
       <p:sp>
         <p:nvSpPr>
-          <p:cNvPr id="18" name="TextBox 17"/>
-          <p:cNvSpPr txBox="1"/>
-          <p:nvPr/>
-        </p:nvSpPr>
-        <p:spPr>
-          <a:xfrm>
-            <a:off x="1874519" y="4796027"/>
+          <p:cNvPr id="17" name="TextBox 16"/>
+          <p:cNvSpPr txBox="1"/>
+          <p:nvPr/>
+        </p:nvSpPr>
+        <p:spPr>
+          <a:xfrm>
+            <a:off x="1874519" y="4475988"/>
             <a:ext cx="6243654" cy="457200"/>
           </a:xfrm>
           <a:prstGeom prst="rect">
@@ -13817,7 +12223,7 @@
       </p:sp>
       <p:pic>
         <p:nvPicPr>
-          <p:cNvPr id="19" name="Picture 18" descr="b2c477a7a0fb52e7.png"/>
+          <p:cNvPr id="18" name="Picture 17" descr="b2c477a7a0fb52e7.png"/>
           <p:cNvPicPr>
             <a:picLocks noChangeAspect="1"/>
           </p:cNvPicPr>
@@ -13831,7 +12237,7 @@
         </p:blipFill>
         <p:spPr>
           <a:xfrm>
-            <a:off x="8529654" y="4887467"/>
+            <a:off x="8529654" y="4567428"/>
             <a:ext cx="268224" cy="274320"/>
           </a:xfrm>
           <a:prstGeom prst="rect">
@@ -13841,13 +12247,13 @@
       </p:pic>
       <p:sp>
         <p:nvSpPr>
-          <p:cNvPr id="20" name="TextBox 19"/>
-          <p:cNvSpPr txBox="1"/>
-          <p:nvPr/>
-        </p:nvSpPr>
-        <p:spPr>
-          <a:xfrm>
-            <a:off x="8797878" y="4796027"/>
+          <p:cNvPr id="19" name="TextBox 18"/>
+          <p:cNvSpPr txBox="1"/>
+          <p:nvPr/>
+        </p:nvSpPr>
+        <p:spPr>
+          <a:xfrm>
+            <a:off x="8797878" y="4475988"/>
             <a:ext cx="474135" cy="457200"/>
           </a:xfrm>
           <a:prstGeom prst="rect">
@@ -13876,7 +12282,7 @@
       </p:sp>
       <p:pic>
         <p:nvPicPr>
-          <p:cNvPr id="21" name="Picture 20" descr="555a2ab77fff0fec.png"/>
+          <p:cNvPr id="20" name="Picture 19" descr="555a2ab77fff0fec.png"/>
           <p:cNvPicPr>
             <a:picLocks noChangeAspect="1"/>
           </p:cNvPicPr>
@@ -13890,7 +12296,7 @@
         </p:blipFill>
         <p:spPr>
           <a:xfrm>
-            <a:off x="9134854" y="4887467"/>
+            <a:off x="9134854" y="4567428"/>
             <a:ext cx="265176" cy="274320"/>
           </a:xfrm>
           <a:prstGeom prst="rect">
@@ -13900,13 +12306,13 @@
       </p:pic>
       <p:sp>
         <p:nvSpPr>
-          <p:cNvPr id="22" name="TextBox 21"/>
-          <p:cNvSpPr txBox="1"/>
-          <p:nvPr/>
-        </p:nvSpPr>
-        <p:spPr>
-          <a:xfrm>
-            <a:off x="9400030" y="4796027"/>
+          <p:cNvPr id="21" name="TextBox 20"/>
+          <p:cNvSpPr txBox="1"/>
+          <p:nvPr/>
+        </p:nvSpPr>
+        <p:spPr>
+          <a:xfrm>
+            <a:off x="9400030" y="4475988"/>
             <a:ext cx="474135" cy="457200"/>
           </a:xfrm>
           <a:prstGeom prst="rect">
@@ -13935,7 +12341,7 @@
       </p:sp>
       <p:pic>
         <p:nvPicPr>
-          <p:cNvPr id="23" name="Picture 22" descr="f2c3dde86c5203ac.png"/>
+          <p:cNvPr id="22" name="Picture 21" descr="f2c3dde86c5203ac.png"/>
           <p:cNvPicPr>
             <a:picLocks noChangeAspect="1"/>
           </p:cNvPicPr>
@@ -13949,7 +12355,7 @@
         </p:blipFill>
         <p:spPr>
           <a:xfrm>
-            <a:off x="9737005" y="4884419"/>
+            <a:off x="9737005" y="4564380"/>
             <a:ext cx="259080" cy="280416"/>
           </a:xfrm>
           <a:prstGeom prst="rect">
@@ -14080,44 +12486,9 @@
           </a:fontRef>
         </p:style>
       </p:cxnSp>
-      <p:sp>
-        <p:nvSpPr>
-          <p:cNvPr id="5" name="TextBox 4"/>
-          <p:cNvSpPr txBox="1"/>
-          <p:nvPr/>
-        </p:nvSpPr>
-        <p:spPr>
-          <a:xfrm>
-            <a:off x="777240" y="1261872"/>
-            <a:ext cx="10607040" cy="310896"/>
-          </a:xfrm>
-          <a:prstGeom prst="rect">
-            <a:avLst/>
-          </a:prstGeom>
-          <a:noFill/>
-        </p:spPr>
-        <p:txBody>
-          <a:bodyPr wrap="square" lIns="45720" rIns="45720" tIns="18288" bIns="18288" anchor="t">
-            <a:spAutoFit/>
-          </a:bodyPr>
-          <a:lstStyle/>
-          <a:p>
-            <a:pPr algn="l"/>
-            <a:r>
-              <a:rPr sz="1700" b="0" i="1">
-                <a:solidFill>
-                  <a:srgbClr val="6B6B6B"/>
-                </a:solidFill>
-                <a:latin typeface="Century Schoolbook"/>
-              </a:rPr>
-              <a:t>Boards up on three.</a:t>
-            </a:r>
-          </a:p>
-        </p:txBody>
-      </p:sp>
       <p:cxnSp>
         <p:nvCxnSpPr>
-          <p:cNvPr id="6" name="Connector 5"/>
+          <p:cNvPr id="5" name="Connector 4"/>
           <p:cNvCxnSpPr/>
           <p:nvPr/>
         </p:nvCxnSpPr>
@@ -14152,7 +12523,7 @@
       </p:cxnSp>
       <p:sp>
         <p:nvSpPr>
-          <p:cNvPr id="7" name="TextBox 6"/>
+          <p:cNvPr id="6" name="TextBox 5"/>
           <p:cNvSpPr txBox="1"/>
           <p:nvPr/>
         </p:nvSpPr>
@@ -14187,7 +12558,7 @@
       </p:sp>
       <p:sp>
         <p:nvSpPr>
-          <p:cNvPr id="8" name="TextBox 7"/>
+          <p:cNvPr id="7" name="TextBox 6"/>
           <p:cNvSpPr txBox="1"/>
           <p:nvPr/>
         </p:nvSpPr>
@@ -14222,7 +12593,7 @@
       </p:sp>
       <p:pic>
         <p:nvPicPr>
-          <p:cNvPr id="9" name="Picture 8" descr="cd86dc37fd0c05fc.png"/>
+          <p:cNvPr id="8" name="Picture 7" descr="cd86dc37fd0c05fc.png"/>
           <p:cNvPicPr>
             <a:picLocks noChangeAspect="1"/>
           </p:cNvPicPr>
@@ -14246,7 +12617,7 @@
       </p:pic>
       <p:sp>
         <p:nvSpPr>
-          <p:cNvPr id="10" name="TextBox 9"/>
+          <p:cNvPr id="9" name="TextBox 8"/>
           <p:cNvSpPr txBox="1"/>
           <p:nvPr/>
         </p:nvSpPr>
@@ -14275,41 +12646,6 @@
                 <a:latin typeface="Century Schoolbook"/>
               </a:rPr>
               <a:t>Answer it.</a:t>
-            </a:r>
-          </a:p>
-        </p:txBody>
-      </p:sp>
-      <p:sp>
-        <p:nvSpPr>
-          <p:cNvPr id="11" name="TextBox 10"/>
-          <p:cNvSpPr txBox="1"/>
-          <p:nvPr/>
-        </p:nvSpPr>
-        <p:spPr>
-          <a:xfrm>
-            <a:off x="777240" y="4828032"/>
-            <a:ext cx="10607040" cy="365760"/>
-          </a:xfrm>
-          <a:prstGeom prst="rect">
-            <a:avLst/>
-          </a:prstGeom>
-          <a:noFill/>
-        </p:spPr>
-        <p:txBody>
-          <a:bodyPr wrap="square" lIns="45720" rIns="45720" tIns="18288" bIns="18288" anchor="t">
-            <a:spAutoFit/>
-          </a:bodyPr>
-          <a:lstStyle/>
-          <a:p>
-            <a:pPr algn="ctr"/>
-            <a:r>
-              <a:rPr sz="1900" b="0" i="1">
-                <a:solidFill>
-                  <a:srgbClr val="6B6B6B"/>
-                </a:solidFill>
-                <a:latin typeface="Century Schoolbook"/>
-              </a:rPr>
-              <a:t>Write it as one power of 2.</a:t>
             </a:r>
           </a:p>
         </p:txBody>
@@ -14437,44 +12773,9 @@
           </a:fontRef>
         </p:style>
       </p:cxnSp>
-      <p:sp>
-        <p:nvSpPr>
-          <p:cNvPr id="5" name="TextBox 4"/>
-          <p:cNvSpPr txBox="1"/>
-          <p:nvPr/>
-        </p:nvSpPr>
-        <p:spPr>
-          <a:xfrm>
-            <a:off x="777240" y="1261872"/>
-            <a:ext cx="10607040" cy="310896"/>
-          </a:xfrm>
-          <a:prstGeom prst="rect">
-            <a:avLst/>
-          </a:prstGeom>
-          <a:noFill/>
-        </p:spPr>
-        <p:txBody>
-          <a:bodyPr wrap="square" lIns="45720" rIns="45720" tIns="18288" bIns="18288" anchor="t">
-            <a:spAutoFit/>
-          </a:bodyPr>
-          <a:lstStyle/>
-          <a:p>
-            <a:pPr algn="l"/>
-            <a:r>
-              <a:rPr sz="1700" b="0" i="1">
-                <a:solidFill>
-                  <a:srgbClr val="6B6B6B"/>
-                </a:solidFill>
-                <a:latin typeface="Century Schoolbook"/>
-              </a:rPr>
-              <a:t>Answer.</a:t>
-            </a:r>
-          </a:p>
-        </p:txBody>
-      </p:sp>
       <p:cxnSp>
         <p:nvCxnSpPr>
-          <p:cNvPr id="6" name="Connector 5"/>
+          <p:cNvPr id="5" name="Connector 4"/>
           <p:cNvCxnSpPr/>
           <p:nvPr/>
         </p:nvCxnSpPr>
@@ -14509,7 +12810,7 @@
       </p:cxnSp>
       <p:sp>
         <p:nvSpPr>
-          <p:cNvPr id="7" name="TextBox 6"/>
+          <p:cNvPr id="6" name="TextBox 5"/>
           <p:cNvSpPr txBox="1"/>
           <p:nvPr/>
         </p:nvSpPr>
@@ -14544,7 +12845,7 @@
       </p:sp>
       <p:sp>
         <p:nvSpPr>
-          <p:cNvPr id="8" name="TextBox 7"/>
+          <p:cNvPr id="7" name="TextBox 6"/>
           <p:cNvSpPr txBox="1"/>
           <p:nvPr/>
         </p:nvSpPr>
@@ -14579,7 +12880,7 @@
       </p:sp>
       <p:pic>
         <p:nvPicPr>
-          <p:cNvPr id="9" name="Picture 8" descr="a58ef65a72479a64.png"/>
+          <p:cNvPr id="8" name="Picture 7" descr="a58ef65a72479a64.png"/>
           <p:cNvPicPr>
             <a:picLocks noChangeAspect="1"/>
           </p:cNvPicPr>
@@ -14603,87 +12904,7 @@
       </p:pic>
       <p:sp>
         <p:nvSpPr>
-          <p:cNvPr id="10" name="TextBox 9"/>
-          <p:cNvSpPr txBox="1"/>
-          <p:nvPr/>
-        </p:nvSpPr>
-        <p:spPr>
-          <a:xfrm>
-            <a:off x="1828800" y="2801111"/>
-            <a:ext cx="8503920" cy="548640"/>
-          </a:xfrm>
-          <a:prstGeom prst="rect">
-            <a:avLst/>
-          </a:prstGeom>
-          <a:noFill/>
-        </p:spPr>
-        <p:txBody>
-          <a:bodyPr wrap="square" lIns="45720" rIns="45720" tIns="18288" bIns="18288" anchor="t">
-            <a:spAutoFit/>
-          </a:bodyPr>
-          <a:lstStyle/>
-          <a:p>
-            <a:pPr algn="ctr"/>
-            <a:r>
-              <a:rPr sz="2400" b="0" i="0">
-                <a:solidFill>
-                  <a:srgbClr val="6B6B6B"/>
-                </a:solidFill>
-                <a:latin typeface="Century Schoolbook"/>
-              </a:rPr>
-              <a:t>4</a:t>
-            </a:r>
-            <a:r>
-              <a:rPr sz="2400" b="0" i="0" baseline="30000">
-                <a:solidFill>
-                  <a:srgbClr val="6B6B6B"/>
-                </a:solidFill>
-                <a:latin typeface="Century Schoolbook"/>
-              </a:rPr>
-              <a:t>5</a:t>
-            </a:r>
-            <a:r>
-              <a:rPr sz="2400" b="0" i="0">
-                <a:solidFill>
-                  <a:srgbClr val="6B6B6B"/>
-                </a:solidFill>
-                <a:latin typeface="Century Schoolbook"/>
-              </a:rPr>
-              <a:t> = (2</a:t>
-            </a:r>
-            <a:r>
-              <a:rPr sz="2400" b="0" i="0" baseline="30000">
-                <a:solidFill>
-                  <a:srgbClr val="6B6B6B"/>
-                </a:solidFill>
-                <a:latin typeface="Century Schoolbook"/>
-              </a:rPr>
-              <a:t>2</a:t>
-            </a:r>
-            <a:r>
-              <a:rPr sz="2400" b="0" i="0">
-                <a:solidFill>
-                  <a:srgbClr val="6B6B6B"/>
-                </a:solidFill>
-                <a:latin typeface="Century Schoolbook"/>
-              </a:rPr>
-              <a:t>)</a:t>
-            </a:r>
-            <a:r>
-              <a:rPr sz="2400" b="0" i="0" baseline="30000">
-                <a:solidFill>
-                  <a:srgbClr val="6B6B6B"/>
-                </a:solidFill>
-                <a:latin typeface="Century Schoolbook"/>
-              </a:rPr>
-              <a:t>5</a:t>
-            </a:r>
-          </a:p>
-        </p:txBody>
-      </p:sp>
-      <p:sp>
-        <p:nvSpPr>
-          <p:cNvPr id="11" name="TextBox 10"/>
+          <p:cNvPr id="9" name="TextBox 8"/>
           <p:cNvSpPr txBox="1"/>
           <p:nvPr/>
         </p:nvSpPr>
@@ -14718,7 +12939,7 @@
       </p:sp>
       <p:pic>
         <p:nvPicPr>
-          <p:cNvPr id="12" name="Picture 11" descr="c9101e99983c701b.png"/>
+          <p:cNvPr id="10" name="Picture 9" descr="c9101e99983c701b.png"/>
           <p:cNvPicPr>
             <a:picLocks noChangeAspect="1"/>
           </p:cNvPicPr>
@@ -14863,44 +13084,9 @@
           </a:fontRef>
         </p:style>
       </p:cxnSp>
-      <p:sp>
-        <p:nvSpPr>
-          <p:cNvPr id="5" name="TextBox 4"/>
-          <p:cNvSpPr txBox="1"/>
-          <p:nvPr/>
-        </p:nvSpPr>
-        <p:spPr>
-          <a:xfrm>
-            <a:off x="777240" y="1261872"/>
-            <a:ext cx="10607040" cy="310896"/>
-          </a:xfrm>
-          <a:prstGeom prst="rect">
-            <a:avLst/>
-          </a:prstGeom>
-          <a:noFill/>
-        </p:spPr>
-        <p:txBody>
-          <a:bodyPr wrap="square" lIns="45720" rIns="45720" tIns="18288" bIns="18288" anchor="t">
-            <a:spAutoFit/>
-          </a:bodyPr>
-          <a:lstStyle/>
-          <a:p>
-            <a:pPr algn="l"/>
-            <a:r>
-              <a:rPr sz="1700" b="0" i="1">
-                <a:solidFill>
-                  <a:srgbClr val="6B6B6B"/>
-                </a:solidFill>
-                <a:latin typeface="Century Schoolbook"/>
-              </a:rPr>
-              <a:t>Take your time. Boards up when you have written it.</a:t>
-            </a:r>
-          </a:p>
-        </p:txBody>
-      </p:sp>
       <p:cxnSp>
         <p:nvCxnSpPr>
-          <p:cNvPr id="6" name="Connector 5"/>
+          <p:cNvPr id="5" name="Connector 4"/>
           <p:cNvCxnSpPr/>
           <p:nvPr/>
         </p:nvCxnSpPr>
@@ -14935,7 +13121,7 @@
       </p:cxnSp>
       <p:sp>
         <p:nvSpPr>
-          <p:cNvPr id="7" name="TextBox 6"/>
+          <p:cNvPr id="6" name="TextBox 5"/>
           <p:cNvSpPr txBox="1"/>
           <p:nvPr/>
         </p:nvSpPr>
@@ -14970,7 +13156,7 @@
       </p:sp>
       <p:sp>
         <p:nvSpPr>
-          <p:cNvPr id="8" name="TextBox 7"/>
+          <p:cNvPr id="7" name="TextBox 6"/>
           <p:cNvSpPr txBox="1"/>
           <p:nvPr/>
         </p:nvSpPr>
@@ -15005,7 +13191,7 @@
       </p:sp>
       <p:sp>
         <p:nvSpPr>
-          <p:cNvPr id="9" name="TextBox 8"/>
+          <p:cNvPr id="8" name="TextBox 7"/>
           <p:cNvSpPr txBox="1"/>
           <p:nvPr/>
         </p:nvSpPr>
@@ -15040,7 +13226,7 @@
       </p:sp>
       <p:pic>
         <p:nvPicPr>
-          <p:cNvPr id="10" name="Picture 9" descr="928a3b4f052209d4.png"/>
+          <p:cNvPr id="9" name="Picture 8" descr="928a3b4f052209d4.png"/>
           <p:cNvPicPr>
             <a:picLocks noChangeAspect="1"/>
           </p:cNvPicPr>
@@ -15064,7 +13250,7 @@
       </p:pic>
       <p:sp>
         <p:nvSpPr>
-          <p:cNvPr id="11" name="TextBox 10"/>
+          <p:cNvPr id="10" name="TextBox 9"/>
           <p:cNvSpPr txBox="1"/>
           <p:nvPr/>
         </p:nvSpPr>
@@ -15099,7 +13285,7 @@
       </p:sp>
       <p:pic>
         <p:nvPicPr>
-          <p:cNvPr id="12" name="Picture 11" descr="b84e4faf30935505.png"/>
+          <p:cNvPr id="11" name="Picture 10" descr="b84e4faf30935505.png"/>
           <p:cNvPicPr>
             <a:picLocks noChangeAspect="1"/>
           </p:cNvPicPr>
@@ -15123,7 +13309,7 @@
       </p:pic>
       <p:sp>
         <p:nvSpPr>
-          <p:cNvPr id="13" name="TextBox 12"/>
+          <p:cNvPr id="12" name="TextBox 11"/>
           <p:cNvSpPr txBox="1"/>
           <p:nvPr/>
         </p:nvSpPr>
@@ -15158,7 +13344,7 @@
       </p:sp>
       <p:sp>
         <p:nvSpPr>
-          <p:cNvPr id="14" name="TextBox 13"/>
+          <p:cNvPr id="13" name="TextBox 12"/>
           <p:cNvSpPr txBox="1"/>
           <p:nvPr/>
         </p:nvSpPr>
@@ -15193,7 +13379,7 @@
       </p:sp>
       <p:pic>
         <p:nvPicPr>
-          <p:cNvPr id="15" name="Picture 14" descr="c9adefc290aa5b44.png"/>
+          <p:cNvPr id="14" name="Picture 13" descr="c9adefc290aa5b44.png"/>
           <p:cNvPicPr>
             <a:picLocks noChangeAspect="1"/>
           </p:cNvPicPr>
@@ -15217,7 +13403,7 @@
       </p:pic>
       <p:sp>
         <p:nvSpPr>
-          <p:cNvPr id="16" name="TextBox 15"/>
+          <p:cNvPr id="15" name="TextBox 14"/>
           <p:cNvSpPr txBox="1"/>
           <p:nvPr/>
         </p:nvSpPr>
@@ -15252,7 +13438,7 @@
       </p:sp>
       <p:sp>
         <p:nvSpPr>
-          <p:cNvPr id="17" name="TextBox 16"/>
+          <p:cNvPr id="16" name="TextBox 15"/>
           <p:cNvSpPr txBox="1"/>
           <p:nvPr/>
         </p:nvSpPr>
@@ -15281,41 +13467,6 @@
                 <a:latin typeface="Century Schoolbook"/>
               </a:rPr>
               <a:t>Write your answer in sentences.</a:t>
-            </a:r>
-          </a:p>
-        </p:txBody>
-      </p:sp>
-      <p:sp>
-        <p:nvSpPr>
-          <p:cNvPr id="18" name="TextBox 17"/>
-          <p:cNvSpPr txBox="1"/>
-          <p:nvPr/>
-        </p:nvSpPr>
-        <p:spPr>
-          <a:xfrm>
-            <a:off x="777240" y="4828032"/>
-            <a:ext cx="10607040" cy="365760"/>
-          </a:xfrm>
-          <a:prstGeom prst="rect">
-            <a:avLst/>
-          </a:prstGeom>
-          <a:noFill/>
-        </p:spPr>
-        <p:txBody>
-          <a:bodyPr wrap="square" lIns="45720" rIns="45720" tIns="18288" bIns="18288" anchor="t">
-            <a:spAutoFit/>
-          </a:bodyPr>
-          <a:lstStyle/>
-          <a:p>
-            <a:pPr algn="ctr"/>
-            <a:r>
-              <a:rPr sz="1900" b="0" i="1">
-                <a:solidFill>
-                  <a:srgbClr val="6B6B6B"/>
-                </a:solidFill>
-                <a:latin typeface="Century Schoolbook"/>
-              </a:rPr>
-              <a:t>Rewrite each with base 2, and say what you find.</a:t>
             </a:r>
           </a:p>
         </p:txBody>
@@ -15443,44 +13594,9 @@
           </a:fontRef>
         </p:style>
       </p:cxnSp>
-      <p:sp>
-        <p:nvSpPr>
-          <p:cNvPr id="5" name="TextBox 4"/>
-          <p:cNvSpPr txBox="1"/>
-          <p:nvPr/>
-        </p:nvSpPr>
-        <p:spPr>
-          <a:xfrm>
-            <a:off x="777240" y="1261872"/>
-            <a:ext cx="10607040" cy="310896"/>
-          </a:xfrm>
-          <a:prstGeom prst="rect">
-            <a:avLst/>
-          </a:prstGeom>
-          <a:noFill/>
-        </p:spPr>
-        <p:txBody>
-          <a:bodyPr wrap="square" lIns="45720" rIns="45720" tIns="18288" bIns="18288" anchor="t">
-            <a:spAutoFit/>
-          </a:bodyPr>
-          <a:lstStyle/>
-          <a:p>
-            <a:pPr algn="l"/>
-            <a:r>
-              <a:rPr sz="1700" b="0" i="1">
-                <a:solidFill>
-                  <a:srgbClr val="6B6B6B"/>
-                </a:solidFill>
-                <a:latin typeface="Century Schoolbook"/>
-              </a:rPr>
-              <a:t>Answer.</a:t>
-            </a:r>
-          </a:p>
-        </p:txBody>
-      </p:sp>
       <p:cxnSp>
         <p:nvCxnSpPr>
-          <p:cNvPr id="6" name="Connector 5"/>
+          <p:cNvPr id="5" name="Connector 4"/>
           <p:cNvCxnSpPr/>
           <p:nvPr/>
         </p:nvCxnSpPr>
@@ -15515,7 +13631,7 @@
       </p:cxnSp>
       <p:sp>
         <p:nvSpPr>
-          <p:cNvPr id="7" name="TextBox 6"/>
+          <p:cNvPr id="6" name="TextBox 5"/>
           <p:cNvSpPr txBox="1"/>
           <p:nvPr/>
         </p:nvSpPr>
@@ -15550,7 +13666,7 @@
       </p:sp>
       <p:sp>
         <p:nvSpPr>
-          <p:cNvPr id="8" name="TextBox 7"/>
+          <p:cNvPr id="7" name="TextBox 6"/>
           <p:cNvSpPr txBox="1"/>
           <p:nvPr/>
         </p:nvSpPr>
@@ -15585,7 +13701,7 @@
       </p:sp>
       <p:sp>
         <p:nvSpPr>
-          <p:cNvPr id="9" name="TextBox 8"/>
+          <p:cNvPr id="8" name="TextBox 7"/>
           <p:cNvSpPr txBox="1"/>
           <p:nvPr/>
         </p:nvSpPr>
@@ -15620,7 +13736,7 @@
       </p:sp>
       <p:pic>
         <p:nvPicPr>
-          <p:cNvPr id="10" name="Picture 9" descr="5cc8e379c9f0fb79.png"/>
+          <p:cNvPr id="9" name="Picture 8" descr="5cc8e379c9f0fb79.png"/>
           <p:cNvPicPr>
             <a:picLocks noChangeAspect="1"/>
           </p:cNvPicPr>
@@ -15644,7 +13760,7 @@
       </p:pic>
       <p:sp>
         <p:nvSpPr>
-          <p:cNvPr id="11" name="TextBox 10"/>
+          <p:cNvPr id="10" name="TextBox 9"/>
           <p:cNvSpPr txBox="1"/>
           <p:nvPr/>
         </p:nvSpPr>
@@ -15679,7 +13795,7 @@
       </p:sp>
       <p:pic>
         <p:nvPicPr>
-          <p:cNvPr id="12" name="Picture 11" descr="3544f9e4eb8bbbf6.png"/>
+          <p:cNvPr id="11" name="Picture 10" descr="3544f9e4eb8bbbf6.png"/>
           <p:cNvPicPr>
             <a:picLocks noChangeAspect="1"/>
           </p:cNvPicPr>
@@ -15703,7 +13819,7 @@
       </p:pic>
       <p:sp>
         <p:nvSpPr>
-          <p:cNvPr id="13" name="TextBox 12"/>
+          <p:cNvPr id="12" name="TextBox 11"/>
           <p:cNvSpPr txBox="1"/>
           <p:nvPr/>
         </p:nvSpPr>
@@ -15738,7 +13854,7 @@
       </p:sp>
       <p:sp>
         <p:nvSpPr>
-          <p:cNvPr id="14" name="TextBox 13"/>
+          <p:cNvPr id="13" name="TextBox 12"/>
           <p:cNvSpPr txBox="1"/>
           <p:nvPr/>
         </p:nvSpPr>
@@ -15773,7 +13889,7 @@
       </p:sp>
       <p:pic>
         <p:nvPicPr>
-          <p:cNvPr id="15" name="Picture 14" descr="afdbc5b48ef250ed.png"/>
+          <p:cNvPr id="14" name="Picture 13" descr="afdbc5b48ef250ed.png"/>
           <p:cNvPicPr>
             <a:picLocks noChangeAspect="1"/>
           </p:cNvPicPr>
@@ -15797,7 +13913,7 @@
       </p:pic>
       <p:sp>
         <p:nvSpPr>
-          <p:cNvPr id="16" name="TextBox 15"/>
+          <p:cNvPr id="15" name="TextBox 14"/>
           <p:cNvSpPr txBox="1"/>
           <p:nvPr/>
         </p:nvSpPr>
@@ -15832,69 +13948,7 @@
       </p:sp>
       <p:sp>
         <p:nvSpPr>
-          <p:cNvPr id="17" name="TextBox 16"/>
-          <p:cNvSpPr txBox="1"/>
-          <p:nvPr/>
-        </p:nvSpPr>
-        <p:spPr>
-          <a:xfrm>
-            <a:off x="1828800" y="3785615"/>
-            <a:ext cx="8503920" cy="548640"/>
-          </a:xfrm>
-          <a:prstGeom prst="rect">
-            <a:avLst/>
-          </a:prstGeom>
-          <a:noFill/>
-        </p:spPr>
-        <p:txBody>
-          <a:bodyPr wrap="square" lIns="45720" rIns="45720" tIns="18288" bIns="18288" anchor="t">
-            <a:spAutoFit/>
-          </a:bodyPr>
-          <a:lstStyle/>
-          <a:p>
-            <a:pPr algn="ctr"/>
-            <a:r>
-              <a:rPr sz="2400" b="0" i="0">
-                <a:solidFill>
-                  <a:srgbClr val="6B6B6B"/>
-                </a:solidFill>
-                <a:latin typeface="Century Schoolbook"/>
-              </a:rPr>
-              <a:t>2</a:t>
-            </a:r>
-            <a:r>
-              <a:rPr sz="2400" b="0" i="0" baseline="30000">
-                <a:solidFill>
-                  <a:srgbClr val="6B6B6B"/>
-                </a:solidFill>
-                <a:latin typeface="Century Schoolbook"/>
-              </a:rPr>
-              <a:t>-7</a:t>
-            </a:r>
-            <a:r>
-              <a:rPr sz="2400" b="0" i="0">
-                <a:solidFill>
-                  <a:srgbClr val="6B6B6B"/>
-                </a:solidFill>
-                <a:latin typeface="Century Schoolbook"/>
-              </a:rPr>
-              <a:t> and 2</a:t>
-            </a:r>
-            <a:r>
-              <a:rPr sz="2400" b="0" i="0" baseline="30000">
-                <a:solidFill>
-                  <a:srgbClr val="6B6B6B"/>
-                </a:solidFill>
-                <a:latin typeface="Century Schoolbook"/>
-              </a:rPr>
-              <a:t>-6</a:t>
-            </a:r>
-          </a:p>
-        </p:txBody>
-      </p:sp>
-      <p:sp>
-        <p:nvSpPr>
-          <p:cNvPr id="18" name="TextBox 17"/>
+          <p:cNvPr id="16" name="TextBox 15"/>
           <p:cNvSpPr txBox="1"/>
           <p:nvPr/>
         </p:nvSpPr>
@@ -16077,44 +14131,9 @@
           </a:fontRef>
         </p:style>
       </p:cxnSp>
-      <p:sp>
-        <p:nvSpPr>
-          <p:cNvPr id="5" name="TextBox 4"/>
-          <p:cNvSpPr txBox="1"/>
-          <p:nvPr/>
-        </p:nvSpPr>
-        <p:spPr>
-          <a:xfrm>
-            <a:off x="777240" y="1261872"/>
-            <a:ext cx="10607040" cy="310896"/>
-          </a:xfrm>
-          <a:prstGeom prst="rect">
-            <a:avLst/>
-          </a:prstGeom>
-          <a:noFill/>
-        </p:spPr>
-        <p:txBody>
-          <a:bodyPr wrap="square" lIns="45720" rIns="45720" tIns="18288" bIns="18288" anchor="t">
-            <a:spAutoFit/>
-          </a:bodyPr>
-          <a:lstStyle/>
-          <a:p>
-            <a:pPr algn="l"/>
-            <a:r>
-              <a:rPr sz="1700" b="0" i="1">
-                <a:solidFill>
-                  <a:srgbClr val="6B6B6B"/>
-                </a:solidFill>
-                <a:latin typeface="Century Schoolbook"/>
-              </a:rPr>
-              <a:t>Six questions. On your own, in silence.</a:t>
-            </a:r>
-          </a:p>
-        </p:txBody>
-      </p:sp>
       <p:cxnSp>
         <p:nvCxnSpPr>
-          <p:cNvPr id="6" name="Connector 5"/>
+          <p:cNvPr id="5" name="Connector 4"/>
           <p:cNvCxnSpPr/>
           <p:nvPr/>
         </p:nvCxnSpPr>
@@ -16149,7 +14168,7 @@
       </p:cxnSp>
       <p:sp>
         <p:nvSpPr>
-          <p:cNvPr id="7" name="TextBox 6"/>
+          <p:cNvPr id="6" name="TextBox 5"/>
           <p:cNvSpPr txBox="1"/>
           <p:nvPr/>
         </p:nvSpPr>
@@ -16184,7 +14203,7 @@
       </p:sp>
       <p:sp>
         <p:nvSpPr>
-          <p:cNvPr id="8" name="TextBox 7"/>
+          <p:cNvPr id="7" name="TextBox 6"/>
           <p:cNvSpPr txBox="1"/>
           <p:nvPr/>
         </p:nvSpPr>
@@ -16219,7 +14238,7 @@
       </p:sp>
       <p:sp>
         <p:nvSpPr>
-          <p:cNvPr id="9" name="TextBox 8"/>
+          <p:cNvPr id="8" name="TextBox 7"/>
           <p:cNvSpPr txBox="1"/>
           <p:nvPr/>
         </p:nvSpPr>
@@ -16254,7 +14273,7 @@
       </p:sp>
       <p:sp>
         <p:nvSpPr>
-          <p:cNvPr id="10" name="TextBox 9"/>
+          <p:cNvPr id="9" name="TextBox 8"/>
           <p:cNvSpPr txBox="1"/>
           <p:nvPr/>
         </p:nvSpPr>
@@ -16289,7 +14308,7 @@
       </p:sp>
       <p:sp>
         <p:nvSpPr>
-          <p:cNvPr id="11" name="TextBox 10"/>
+          <p:cNvPr id="10" name="TextBox 9"/>
           <p:cNvSpPr txBox="1"/>
           <p:nvPr/>
         </p:nvSpPr>
@@ -16324,7 +14343,7 @@
       </p:sp>
       <p:sp>
         <p:nvSpPr>
-          <p:cNvPr id="12" name="TextBox 11"/>
+          <p:cNvPr id="11" name="TextBox 10"/>
           <p:cNvSpPr txBox="1"/>
           <p:nvPr/>
         </p:nvSpPr>
@@ -16359,7 +14378,7 @@
       </p:sp>
       <p:sp>
         <p:nvSpPr>
-          <p:cNvPr id="13" name="TextBox 12"/>
+          <p:cNvPr id="12" name="TextBox 11"/>
           <p:cNvSpPr txBox="1"/>
           <p:nvPr/>
         </p:nvSpPr>
@@ -16394,7 +14413,7 @@
       </p:sp>
       <p:sp>
         <p:nvSpPr>
-          <p:cNvPr id="14" name="TextBox 13"/>
+          <p:cNvPr id="13" name="TextBox 12"/>
           <p:cNvSpPr txBox="1"/>
           <p:nvPr/>
         </p:nvSpPr>
@@ -16550,44 +14569,9 @@
           </a:fontRef>
         </p:style>
       </p:cxnSp>
-      <p:sp>
-        <p:nvSpPr>
-          <p:cNvPr id="5" name="TextBox 4"/>
-          <p:cNvSpPr txBox="1"/>
-          <p:nvPr/>
-        </p:nvSpPr>
-        <p:spPr>
-          <a:xfrm>
-            <a:off x="777240" y="1261872"/>
-            <a:ext cx="10607040" cy="310896"/>
-          </a:xfrm>
-          <a:prstGeom prst="rect">
-            <a:avLst/>
-          </a:prstGeom>
-          <a:noFill/>
-        </p:spPr>
-        <p:txBody>
-          <a:bodyPr wrap="square" lIns="45720" rIns="45720" tIns="18288" bIns="18288" anchor="t">
-            <a:spAutoFit/>
-          </a:bodyPr>
-          <a:lstStyle/>
-          <a:p>
-            <a:pPr algn="l"/>
-            <a:r>
-              <a:rPr sz="1700" b="0" i="1">
-                <a:solidFill>
-                  <a:srgbClr val="6B6B6B"/>
-                </a:solidFill>
-                <a:latin typeface="Century Schoolbook"/>
-              </a:rPr>
-              <a:t>Last five minutes.</a:t>
-            </a:r>
-          </a:p>
-        </p:txBody>
-      </p:sp>
       <p:cxnSp>
         <p:nvCxnSpPr>
-          <p:cNvPr id="6" name="Connector 5"/>
+          <p:cNvPr id="5" name="Connector 4"/>
           <p:cNvCxnSpPr/>
           <p:nvPr/>
         </p:nvCxnSpPr>
@@ -16622,7 +14606,7 @@
       </p:cxnSp>
       <p:sp>
         <p:nvSpPr>
-          <p:cNvPr id="7" name="TextBox 6"/>
+          <p:cNvPr id="6" name="TextBox 5"/>
           <p:cNvSpPr txBox="1"/>
           <p:nvPr/>
         </p:nvSpPr>
@@ -16657,7 +14641,7 @@
       </p:sp>
       <p:sp>
         <p:nvSpPr>
-          <p:cNvPr id="8" name="TextBox 7"/>
+          <p:cNvPr id="7" name="TextBox 6"/>
           <p:cNvSpPr txBox="1"/>
           <p:nvPr/>
         </p:nvSpPr>
@@ -16692,7 +14676,7 @@
       </p:sp>
       <p:sp>
         <p:nvSpPr>
-          <p:cNvPr id="9" name="TextBox 8"/>
+          <p:cNvPr id="8" name="TextBox 7"/>
           <p:cNvSpPr txBox="1"/>
           <p:nvPr/>
         </p:nvSpPr>
@@ -16727,7 +14711,7 @@
       </p:sp>
       <p:sp>
         <p:nvSpPr>
-          <p:cNvPr id="10" name="TextBox 9"/>
+          <p:cNvPr id="9" name="TextBox 8"/>
           <p:cNvSpPr txBox="1"/>
           <p:nvPr/>
         </p:nvSpPr>
@@ -16762,7 +14746,7 @@
       </p:sp>
       <p:sp>
         <p:nvSpPr>
-          <p:cNvPr id="11" name="TextBox 10"/>
+          <p:cNvPr id="10" name="TextBox 9"/>
           <p:cNvSpPr txBox="1"/>
           <p:nvPr/>
         </p:nvSpPr>
@@ -16797,7 +14781,7 @@
       </p:sp>
       <p:sp>
         <p:nvSpPr>
-          <p:cNvPr id="12" name="TextBox 11"/>
+          <p:cNvPr id="11" name="TextBox 10"/>
           <p:cNvSpPr txBox="1"/>
           <p:nvPr/>
         </p:nvSpPr>
@@ -16832,7 +14816,7 @@
       </p:sp>
       <p:sp>
         <p:nvSpPr>
-          <p:cNvPr id="13" name="TextBox 12"/>
+          <p:cNvPr id="12" name="TextBox 11"/>
           <p:cNvSpPr txBox="1"/>
           <p:nvPr/>
         </p:nvSpPr>
@@ -16867,7 +14851,7 @@
       </p:sp>
       <p:sp>
         <p:nvSpPr>
-          <p:cNvPr id="14" name="TextBox 13"/>
+          <p:cNvPr id="13" name="TextBox 12"/>
           <p:cNvSpPr txBox="1"/>
           <p:nvPr/>
         </p:nvSpPr>
@@ -16902,7 +14886,7 @@
       </p:sp>
       <p:sp>
         <p:nvSpPr>
-          <p:cNvPr id="15" name="TextBox 14"/>
+          <p:cNvPr id="14" name="TextBox 13"/>
           <p:cNvSpPr txBox="1"/>
           <p:nvPr/>
         </p:nvSpPr>
@@ -16937,7 +14921,7 @@
       </p:sp>
       <p:sp>
         <p:nvSpPr>
-          <p:cNvPr id="16" name="TextBox 15"/>
+          <p:cNvPr id="15" name="TextBox 14"/>
           <p:cNvSpPr txBox="1"/>
           <p:nvPr/>
         </p:nvSpPr>
@@ -16972,7 +14956,7 @@
       </p:sp>
       <p:sp>
         <p:nvSpPr>
-          <p:cNvPr id="17" name="TextBox 16"/>
+          <p:cNvPr id="16" name="TextBox 15"/>
           <p:cNvSpPr txBox="1"/>
           <p:nvPr/>
         </p:nvSpPr>
@@ -17241,7 +15225,7 @@
         </p:nvSpPr>
         <p:spPr>
           <a:xfrm>
-            <a:off x="777240" y="1737360"/>
+            <a:off x="777240" y="1389888"/>
             <a:ext cx="10607040" cy="402336"/>
           </a:xfrm>
           <a:prstGeom prst="rect">
@@ -17276,7 +15260,7 @@
         </p:nvCxnSpPr>
         <p:spPr>
           <a:xfrm>
-            <a:off x="777240" y="2176272"/>
+            <a:off x="777240" y="1828800"/>
             <a:ext cx="10607040" cy="0"/>
           </a:xfrm>
           <a:prstGeom prst="line">
@@ -17311,7 +15295,7 @@
         </p:nvSpPr>
         <p:spPr>
           <a:xfrm>
-            <a:off x="3452836" y="2491740"/>
+            <a:off x="3452836" y="2144268"/>
             <a:ext cx="1811606" cy="457200"/>
           </a:xfrm>
           <a:prstGeom prst="rect">
@@ -17354,7 +15338,7 @@
         </p:blipFill>
         <p:spPr>
           <a:xfrm>
-            <a:off x="5127283" y="2340864"/>
+            <a:off x="5127283" y="1993392"/>
             <a:ext cx="3581400" cy="758952"/>
           </a:xfrm>
           <a:prstGeom prst="rect">
@@ -17370,7 +15354,7 @@
         </p:nvSpPr>
         <p:spPr>
           <a:xfrm>
-            <a:off x="2790638" y="3694176"/>
+            <a:off x="2790638" y="3346704"/>
             <a:ext cx="1712587" cy="457200"/>
           </a:xfrm>
           <a:prstGeom prst="rect">
@@ -17413,7 +15397,7 @@
         </p:blipFill>
         <p:spPr>
           <a:xfrm>
-            <a:off x="4366065" y="3374136"/>
+            <a:off x="4366065" y="3026664"/>
             <a:ext cx="5004816" cy="1097280"/>
           </a:xfrm>
           <a:prstGeom prst="rect">
@@ -17429,7 +15413,7 @@
         </p:nvSpPr>
         <p:spPr>
           <a:xfrm>
-            <a:off x="987552" y="4809744"/>
+            <a:off x="987552" y="4462272"/>
             <a:ext cx="10131551" cy="950976"/>
           </a:xfrm>
           <a:prstGeom prst="rect">
@@ -17579,44 +15563,9 @@
           </a:fontRef>
         </p:style>
       </p:cxnSp>
-      <p:sp>
-        <p:nvSpPr>
-          <p:cNvPr id="5" name="TextBox 4"/>
-          <p:cNvSpPr txBox="1"/>
-          <p:nvPr/>
-        </p:nvSpPr>
-        <p:spPr>
-          <a:xfrm>
-            <a:off x="777240" y="1261872"/>
-            <a:ext cx="10607040" cy="310896"/>
-          </a:xfrm>
-          <a:prstGeom prst="rect">
-            <a:avLst/>
-          </a:prstGeom>
-          <a:noFill/>
-        </p:spPr>
-        <p:txBody>
-          <a:bodyPr wrap="square" lIns="45720" rIns="45720" tIns="18288" bIns="18288" anchor="t">
-            <a:spAutoFit/>
-          </a:bodyPr>
-          <a:lstStyle/>
-          <a:p>
-            <a:pPr algn="l"/>
-            <a:r>
-              <a:rPr sz="1700" b="0" i="1">
-                <a:solidFill>
-                  <a:srgbClr val="6B6B6B"/>
-                </a:solidFill>
-                <a:latin typeface="Century Schoolbook"/>
-              </a:rPr>
-              <a:t>Copy the worked line.</a:t>
-            </a:r>
-          </a:p>
-        </p:txBody>
-      </p:sp>
       <p:cxnSp>
         <p:nvCxnSpPr>
-          <p:cNvPr id="6" name="Connector 5"/>
+          <p:cNvPr id="5" name="Connector 4"/>
           <p:cNvCxnSpPr/>
           <p:nvPr/>
         </p:nvCxnSpPr>
@@ -17651,7 +15600,7 @@
       </p:cxnSp>
       <p:sp>
         <p:nvSpPr>
-          <p:cNvPr id="7" name="TextBox 6"/>
+          <p:cNvPr id="6" name="TextBox 5"/>
           <p:cNvSpPr txBox="1"/>
           <p:nvPr/>
         </p:nvSpPr>
@@ -17686,7 +15635,7 @@
       </p:sp>
       <p:sp>
         <p:nvSpPr>
-          <p:cNvPr id="8" name="TextBox 7"/>
+          <p:cNvPr id="7" name="TextBox 6"/>
           <p:cNvSpPr txBox="1"/>
           <p:nvPr/>
         </p:nvSpPr>
@@ -17721,13 +15670,13 @@
       </p:sp>
       <p:sp>
         <p:nvSpPr>
-          <p:cNvPr id="9" name="TextBox 8"/>
-          <p:cNvSpPr txBox="1"/>
-          <p:nvPr/>
-        </p:nvSpPr>
-        <p:spPr>
-          <a:xfrm>
-            <a:off x="777240" y="1737360"/>
+          <p:cNvPr id="8" name="TextBox 7"/>
+          <p:cNvSpPr txBox="1"/>
+          <p:nvPr/>
+        </p:nvSpPr>
+        <p:spPr>
+          <a:xfrm>
+            <a:off x="777240" y="1389888"/>
             <a:ext cx="10607040" cy="402336"/>
           </a:xfrm>
           <a:prstGeom prst="rect">
@@ -17756,13 +15705,13 @@
       </p:sp>
       <p:cxnSp>
         <p:nvCxnSpPr>
-          <p:cNvPr id="10" name="Connector 9"/>
+          <p:cNvPr id="9" name="Connector 8"/>
           <p:cNvCxnSpPr/>
           <p:nvPr/>
         </p:nvCxnSpPr>
         <p:spPr>
           <a:xfrm>
-            <a:off x="777240" y="2176272"/>
+            <a:off x="777240" y="1828800"/>
             <a:ext cx="10607040" cy="0"/>
           </a:xfrm>
           <a:prstGeom prst="line">
@@ -17791,7 +15740,7 @@
       </p:cxnSp>
       <p:pic>
         <p:nvPicPr>
-          <p:cNvPr id="11" name="Picture 10" descr="059ee1a209667ed2.png"/>
+          <p:cNvPr id="10" name="Picture 9" descr="059ee1a209667ed2.png"/>
           <p:cNvPicPr>
             <a:picLocks noChangeAspect="1"/>
           </p:cNvPicPr>
@@ -17805,7 +15754,7 @@
         </p:blipFill>
         <p:spPr>
           <a:xfrm>
-            <a:off x="3386328" y="2340864"/>
+            <a:off x="3386328" y="1993392"/>
             <a:ext cx="5388864" cy="880872"/>
           </a:xfrm>
           <a:prstGeom prst="rect">
@@ -17815,13 +15764,13 @@
       </p:pic>
       <p:sp>
         <p:nvSpPr>
-          <p:cNvPr id="12" name="TextBox 11"/>
-          <p:cNvSpPr txBox="1"/>
-          <p:nvPr/>
-        </p:nvSpPr>
-        <p:spPr>
-          <a:xfrm>
-            <a:off x="987552" y="3560064"/>
+          <p:cNvPr id="11" name="TextBox 10"/>
+          <p:cNvSpPr txBox="1"/>
+          <p:nvPr/>
+        </p:nvSpPr>
+        <p:spPr>
+          <a:xfrm>
+            <a:off x="987552" y="3212592"/>
             <a:ext cx="10131551" cy="475488"/>
           </a:xfrm>
           <a:prstGeom prst="rect">
@@ -17850,7 +15799,7 @@
       </p:sp>
       <p:pic>
         <p:nvPicPr>
-          <p:cNvPr id="13" name="Picture 12" descr="6c3d06b279be60fc.png"/>
+          <p:cNvPr id="12" name="Picture 11" descr="6c3d06b279be60fc.png"/>
           <p:cNvPicPr>
             <a:picLocks noChangeAspect="1"/>
           </p:cNvPicPr>
@@ -17864,7 +15813,7 @@
         </p:blipFill>
         <p:spPr>
           <a:xfrm>
-            <a:off x="987552" y="4273296"/>
+            <a:off x="987552" y="3925823"/>
             <a:ext cx="3535680" cy="685800"/>
           </a:xfrm>
           <a:prstGeom prst="rect">
@@ -17874,13 +15823,13 @@
       </p:pic>
       <p:sp>
         <p:nvSpPr>
-          <p:cNvPr id="14" name="TextBox 13"/>
-          <p:cNvSpPr txBox="1"/>
-          <p:nvPr/>
-        </p:nvSpPr>
-        <p:spPr>
-          <a:xfrm>
-            <a:off x="4523232" y="4387596"/>
+          <p:cNvPr id="13" name="TextBox 12"/>
+          <p:cNvSpPr txBox="1"/>
+          <p:nvPr/>
+        </p:nvSpPr>
+        <p:spPr>
+          <a:xfrm>
+            <a:off x="4523232" y="4040123"/>
             <a:ext cx="4614173" cy="457200"/>
           </a:xfrm>
           <a:prstGeom prst="rect">
@@ -17909,7 +15858,7 @@
       </p:sp>
       <p:pic>
         <p:nvPicPr>
-          <p:cNvPr id="15" name="Picture 14" descr="e9e6240f6a5ac6c4.png"/>
+          <p:cNvPr id="14" name="Picture 13" descr="e9e6240f6a5ac6c4.png"/>
           <p:cNvPicPr>
             <a:picLocks noChangeAspect="1"/>
           </p:cNvPicPr>
@@ -17923,7 +15872,7 @@
         </p:blipFill>
         <p:spPr>
           <a:xfrm>
-            <a:off x="9000245" y="4273296"/>
+            <a:off x="9000245" y="3925823"/>
             <a:ext cx="792480" cy="685800"/>
           </a:xfrm>
           <a:prstGeom prst="rect">
@@ -17933,7 +15882,7 @@
       </p:pic>
       <p:pic>
         <p:nvPicPr>
-          <p:cNvPr id="16" name="Picture 15" descr="b45588bb7e9f0712.png"/>
+          <p:cNvPr id="15" name="Picture 14" descr="b45588bb7e9f0712.png"/>
           <p:cNvPicPr>
             <a:picLocks noChangeAspect="1"/>
           </p:cNvPicPr>
@@ -17947,7 +15896,7 @@
         </p:blipFill>
         <p:spPr>
           <a:xfrm>
-            <a:off x="987552" y="5215128"/>
+            <a:off x="987552" y="4867656"/>
             <a:ext cx="1965960" cy="804672"/>
           </a:xfrm>
           <a:prstGeom prst="rect">
@@ -17957,13 +15906,13 @@
       </p:pic>
       <p:sp>
         <p:nvSpPr>
-          <p:cNvPr id="17" name="TextBox 16"/>
-          <p:cNvSpPr txBox="1"/>
-          <p:nvPr/>
-        </p:nvSpPr>
-        <p:spPr>
-          <a:xfrm>
-            <a:off x="2953512" y="5388864"/>
+          <p:cNvPr id="16" name="TextBox 15"/>
+          <p:cNvSpPr txBox="1"/>
+          <p:nvPr/>
+        </p:nvSpPr>
+        <p:spPr>
+          <a:xfrm>
+            <a:off x="2953512" y="5041392"/>
             <a:ext cx="6270420" cy="457200"/>
           </a:xfrm>
           <a:prstGeom prst="rect">
@@ -17992,7 +15941,7 @@
       </p:sp>
       <p:pic>
         <p:nvPicPr>
-          <p:cNvPr id="18" name="Picture 17" descr="d631bf12f968ff99.png"/>
+          <p:cNvPr id="17" name="Picture 16" descr="d631bf12f968ff99.png"/>
           <p:cNvPicPr>
             <a:picLocks noChangeAspect="1"/>
           </p:cNvPicPr>
@@ -18006,7 +15955,7 @@
         </p:blipFill>
         <p:spPr>
           <a:xfrm>
-            <a:off x="9086772" y="5276088"/>
+            <a:off x="9086772" y="4928616"/>
             <a:ext cx="777240" cy="682752"/>
           </a:xfrm>
           <a:prstGeom prst="rect">
@@ -18250,7 +16199,7 @@
         </p:nvSpPr>
         <p:spPr>
           <a:xfrm>
-            <a:off x="777240" y="1737360"/>
+            <a:off x="777240" y="1389888"/>
             <a:ext cx="10607040" cy="402336"/>
           </a:xfrm>
           <a:prstGeom prst="rect">
@@ -18285,7 +16234,7 @@
         </p:nvCxnSpPr>
         <p:spPr>
           <a:xfrm>
-            <a:off x="777240" y="2176272"/>
+            <a:off x="777240" y="1828800"/>
             <a:ext cx="10607040" cy="0"/>
           </a:xfrm>
           <a:prstGeom prst="line">
@@ -18321,7 +16270,7 @@
           <p:nvPr/>
         </p:nvGraphicFramePr>
         <p:xfrm>
-          <a:off x="2377439" y="2340864"/>
+          <a:off x="2377439" y="1993392"/>
           <a:ext cx="7406640" cy="1536192"/>
         </p:xfrm>
         <a:graphic>
@@ -19278,7 +17227,7 @@
         </p:blipFill>
         <p:spPr>
           <a:xfrm>
-            <a:off x="3295896" y="4105656"/>
+            <a:off x="3295896" y="3758184"/>
             <a:ext cx="2423160" cy="411480"/>
           </a:xfrm>
           <a:prstGeom prst="rect">
@@ -19294,7 +17243,7 @@
         </p:nvSpPr>
         <p:spPr>
           <a:xfrm>
-            <a:off x="5719056" y="4082796"/>
+            <a:off x="5719056" y="3735324"/>
             <a:ext cx="988583" cy="457200"/>
           </a:xfrm>
           <a:prstGeom prst="rect">
@@ -19337,7 +17286,7 @@
         </p:blipFill>
         <p:spPr>
           <a:xfrm>
-            <a:off x="6570479" y="4105656"/>
+            <a:off x="6570479" y="3758184"/>
             <a:ext cx="2295144" cy="411480"/>
           </a:xfrm>
           <a:prstGeom prst="rect">
@@ -19361,7 +17310,7 @@
         </p:blipFill>
         <p:spPr>
           <a:xfrm>
-            <a:off x="3643884" y="4791456"/>
+            <a:off x="3643884" y="4443984"/>
             <a:ext cx="4873752" cy="411480"/>
           </a:xfrm>
           <a:prstGeom prst="rect">
@@ -19605,7 +17554,7 @@
         </p:nvSpPr>
         <p:spPr>
           <a:xfrm>
-            <a:off x="777240" y="1737360"/>
+            <a:off x="777240" y="1389888"/>
             <a:ext cx="10607040" cy="402336"/>
           </a:xfrm>
           <a:prstGeom prst="rect">
@@ -19640,7 +17589,7 @@
         </p:nvCxnSpPr>
         <p:spPr>
           <a:xfrm>
-            <a:off x="777240" y="2176272"/>
+            <a:off x="777240" y="1828800"/>
             <a:ext cx="10607040" cy="0"/>
           </a:xfrm>
           <a:prstGeom prst="line">
@@ -19683,7 +17632,7 @@
         </p:blipFill>
         <p:spPr>
           <a:xfrm>
-            <a:off x="1260084" y="2340864"/>
+            <a:off x="1260084" y="1993392"/>
             <a:ext cx="4294632" cy="676656"/>
           </a:xfrm>
           <a:prstGeom prst="rect">
@@ -19699,7 +17648,7 @@
         </p:nvSpPr>
         <p:spPr>
           <a:xfrm>
-            <a:off x="5554716" y="2450592"/>
+            <a:off x="5554716" y="2103120"/>
             <a:ext cx="1183151" cy="457200"/>
           </a:xfrm>
           <a:prstGeom prst="rect">
@@ -19742,7 +17691,7 @@
         </p:blipFill>
         <p:spPr>
           <a:xfrm>
-            <a:off x="6600707" y="2340864"/>
+            <a:off x="6600707" y="1993392"/>
             <a:ext cx="4300728" cy="676656"/>
           </a:xfrm>
           <a:prstGeom prst="rect">
@@ -19758,7 +17707,7 @@
         </p:nvSpPr>
         <p:spPr>
           <a:xfrm>
-            <a:off x="987552" y="3355847"/>
+            <a:off x="987552" y="3008375"/>
             <a:ext cx="10131551" cy="475488"/>
           </a:xfrm>
           <a:prstGeom prst="rect">
@@ -19801,7 +17750,7 @@
         </p:blipFill>
         <p:spPr>
           <a:xfrm>
-            <a:off x="987552" y="4073651"/>
+            <a:off x="987552" y="3726179"/>
             <a:ext cx="1487424" cy="402336"/>
           </a:xfrm>
           <a:prstGeom prst="rect">
@@ -19817,7 +17766,7 @@
         </p:nvSpPr>
         <p:spPr>
           <a:xfrm>
-            <a:off x="2474976" y="4046219"/>
+            <a:off x="2474976" y="3698747"/>
             <a:ext cx="3404171" cy="457200"/>
           </a:xfrm>
           <a:prstGeom prst="rect">
@@ -19967,44 +17916,9 @@
           </a:fontRef>
         </p:style>
       </p:cxnSp>
-      <p:sp>
-        <p:nvSpPr>
-          <p:cNvPr id="5" name="TextBox 4"/>
-          <p:cNvSpPr txBox="1"/>
-          <p:nvPr/>
-        </p:nvSpPr>
-        <p:spPr>
-          <a:xfrm>
-            <a:off x="777240" y="1261872"/>
-            <a:ext cx="10607040" cy="310896"/>
-          </a:xfrm>
-          <a:prstGeom prst="rect">
-            <a:avLst/>
-          </a:prstGeom>
-          <a:noFill/>
-        </p:spPr>
-        <p:txBody>
-          <a:bodyPr wrap="square" lIns="45720" rIns="45720" tIns="18288" bIns="18288" anchor="t">
-            <a:spAutoFit/>
-          </a:bodyPr>
-          <a:lstStyle/>
-          <a:p>
-            <a:pPr algn="l"/>
-            <a:r>
-              <a:rPr sz="1700" b="0" i="1">
-                <a:solidFill>
-                  <a:srgbClr val="6B6B6B"/>
-                </a:solidFill>
-                <a:latin typeface="Century Schoolbook"/>
-              </a:rPr>
-              <a:t>Evaluate.</a:t>
-            </a:r>
-          </a:p>
-        </p:txBody>
-      </p:sp>
       <p:cxnSp>
         <p:nvCxnSpPr>
-          <p:cNvPr id="6" name="Connector 5"/>
+          <p:cNvPr id="5" name="Connector 4"/>
           <p:cNvCxnSpPr/>
           <p:nvPr/>
         </p:nvCxnSpPr>
@@ -20039,7 +17953,7 @@
       </p:cxnSp>
       <p:sp>
         <p:nvSpPr>
-          <p:cNvPr id="7" name="TextBox 6"/>
+          <p:cNvPr id="6" name="TextBox 5"/>
           <p:cNvSpPr txBox="1"/>
           <p:nvPr/>
         </p:nvSpPr>
@@ -20074,7 +17988,7 @@
       </p:sp>
       <p:sp>
         <p:nvSpPr>
-          <p:cNvPr id="8" name="TextBox 7"/>
+          <p:cNvPr id="7" name="TextBox 6"/>
           <p:cNvSpPr txBox="1"/>
           <p:nvPr/>
         </p:nvSpPr>
@@ -20109,7 +18023,7 @@
       </p:sp>
       <p:pic>
         <p:nvPicPr>
-          <p:cNvPr id="9" name="Picture 8" descr="2d16e4daaa9b6d11.png"/>
+          <p:cNvPr id="8" name="Picture 7" descr="2d16e4daaa9b6d11.png"/>
           <p:cNvPicPr>
             <a:picLocks noChangeAspect="1"/>
           </p:cNvPicPr>
@@ -20133,7 +18047,7 @@
       </p:pic>
       <p:sp>
         <p:nvSpPr>
-          <p:cNvPr id="10" name="TextBox 9"/>
+          <p:cNvPr id="9" name="TextBox 8"/>
           <p:cNvSpPr txBox="1"/>
           <p:nvPr/>
         </p:nvSpPr>
@@ -20289,44 +18203,9 @@
           </a:fontRef>
         </p:style>
       </p:cxnSp>
-      <p:sp>
-        <p:nvSpPr>
-          <p:cNvPr id="5" name="TextBox 4"/>
-          <p:cNvSpPr txBox="1"/>
-          <p:nvPr/>
-        </p:nvSpPr>
-        <p:spPr>
-          <a:xfrm>
-            <a:off x="777240" y="1261872"/>
-            <a:ext cx="10607040" cy="310896"/>
-          </a:xfrm>
-          <a:prstGeom prst="rect">
-            <a:avLst/>
-          </a:prstGeom>
-          <a:noFill/>
-        </p:spPr>
-        <p:txBody>
-          <a:bodyPr wrap="square" lIns="45720" rIns="45720" tIns="18288" bIns="18288" anchor="t">
-            <a:spAutoFit/>
-          </a:bodyPr>
-          <a:lstStyle/>
-          <a:p>
-            <a:pPr algn="l"/>
-            <a:r>
-              <a:rPr sz="1700" b="0" i="1">
-                <a:solidFill>
-                  <a:srgbClr val="6B6B6B"/>
-                </a:solidFill>
-                <a:latin typeface="Century Schoolbook"/>
-              </a:rPr>
-              <a:t>Worked.</a:t>
-            </a:r>
-          </a:p>
-        </p:txBody>
-      </p:sp>
       <p:cxnSp>
         <p:nvCxnSpPr>
-          <p:cNvPr id="6" name="Connector 5"/>
+          <p:cNvPr id="5" name="Connector 4"/>
           <p:cNvCxnSpPr/>
           <p:nvPr/>
         </p:nvCxnSpPr>
@@ -20361,7 +18240,7 @@
       </p:cxnSp>
       <p:sp>
         <p:nvSpPr>
-          <p:cNvPr id="7" name="TextBox 6"/>
+          <p:cNvPr id="6" name="TextBox 5"/>
           <p:cNvSpPr txBox="1"/>
           <p:nvPr/>
         </p:nvSpPr>
@@ -20396,7 +18275,7 @@
       </p:sp>
       <p:sp>
         <p:nvSpPr>
-          <p:cNvPr id="8" name="TextBox 7"/>
+          <p:cNvPr id="7" name="TextBox 6"/>
           <p:cNvSpPr txBox="1"/>
           <p:nvPr/>
         </p:nvSpPr>
@@ -20431,7 +18310,7 @@
       </p:sp>
       <p:pic>
         <p:nvPicPr>
-          <p:cNvPr id="9" name="Picture 8" descr="1ca1397ffa03d47c.png"/>
+          <p:cNvPr id="8" name="Picture 7" descr="1ca1397ffa03d47c.png"/>
           <p:cNvPicPr>
             <a:picLocks noChangeAspect="1"/>
           </p:cNvPicPr>
@@ -20453,44 +18332,9 @@
           </a:prstGeom>
         </p:spPr>
       </p:pic>
-      <p:sp>
-        <p:nvSpPr>
-          <p:cNvPr id="10" name="TextBox 9"/>
-          <p:cNvSpPr txBox="1"/>
-          <p:nvPr/>
-        </p:nvSpPr>
-        <p:spPr>
-          <a:xfrm>
-            <a:off x="5398008" y="2036064"/>
-            <a:ext cx="5986271" cy="502920"/>
-          </a:xfrm>
-          <a:prstGeom prst="rect">
-            <a:avLst/>
-          </a:prstGeom>
-          <a:noFill/>
-        </p:spPr>
-        <p:txBody>
-          <a:bodyPr wrap="square" lIns="45720" rIns="45720" tIns="18288" bIns="18288" anchor="ctr">
-            <a:spAutoFit/>
-          </a:bodyPr>
-          <a:lstStyle/>
-          <a:p>
-            <a:pPr algn="l"/>
-            <a:r>
-              <a:rPr sz="2100" b="0" i="1">
-                <a:solidFill>
-                  <a:srgbClr val="6B6B6B"/>
-                </a:solidFill>
-                <a:latin typeface="Century Schoolbook"/>
-              </a:rPr>
-              <a:t>negative exponent: flip</a:t>
-            </a:r>
-          </a:p>
-        </p:txBody>
-      </p:sp>
       <p:pic>
         <p:nvPicPr>
-          <p:cNvPr id="11" name="Picture 10" descr="f25419565ed35dc9.png"/>
+          <p:cNvPr id="9" name="Picture 8" descr="f25419565ed35dc9.png"/>
           <p:cNvPicPr>
             <a:picLocks noChangeAspect="1"/>
           </p:cNvPicPr>
@@ -20514,42 +18358,7 @@
       </p:pic>
       <p:sp>
         <p:nvSpPr>
-          <p:cNvPr id="12" name="TextBox 11"/>
-          <p:cNvSpPr txBox="1"/>
-          <p:nvPr/>
-        </p:nvSpPr>
-        <p:spPr>
-          <a:xfrm>
-            <a:off x="3983736" y="3003804"/>
-            <a:ext cx="6400800" cy="502920"/>
-          </a:xfrm>
-          <a:prstGeom prst="rect">
-            <a:avLst/>
-          </a:prstGeom>
-          <a:noFill/>
-        </p:spPr>
-        <p:txBody>
-          <a:bodyPr wrap="square" lIns="45720" rIns="45720" tIns="18288" bIns="18288" anchor="ctr">
-            <a:spAutoFit/>
-          </a:bodyPr>
-          <a:lstStyle/>
-          <a:p>
-            <a:pPr algn="l"/>
-            <a:r>
-              <a:rPr sz="2100" b="0" i="1">
-                <a:solidFill>
-                  <a:srgbClr val="6B6B6B"/>
-                </a:solidFill>
-                <a:latin typeface="Century Schoolbook"/>
-              </a:rPr>
-              <a:t>power of a quotient, then multiply</a:t>
-            </a:r>
-          </a:p>
-        </p:txBody>
-      </p:sp>
-      <p:sp>
-        <p:nvSpPr>
-          <p:cNvPr id="13" name="TextBox 12"/>
+          <p:cNvPr id="10" name="TextBox 9"/>
           <p:cNvSpPr txBox="1"/>
           <p:nvPr/>
         </p:nvSpPr>

--- a/a7/packages/A7 Unit 3 - Exponents and Scientific Notation/Lessons/3.06/A7 3.06 Evaluating and Equivalent Expressions - Slides.pptx
+++ b/a7/packages/A7 Unit 3 - Exponents and Scientific Notation/Lessons/3.06/A7 3.06 Evaluating and Equivalent Expressions - Slides.pptx
@@ -14244,23 +14244,23 @@
         </p:nvSpPr>
         <p:spPr>
           <a:xfrm>
-            <a:off x="960120" y="2011680"/>
-            <a:ext cx="548640" cy="356616"/>
-          </a:xfrm>
-          <a:prstGeom prst="rect">
-            <a:avLst/>
-          </a:prstGeom>
-          <a:noFill/>
-        </p:spPr>
-        <p:txBody>
-          <a:bodyPr wrap="square" lIns="45720" rIns="45720" tIns="18288" bIns="18288" anchor="t">
+            <a:off x="960120" y="1677924"/>
+            <a:ext cx="548640" cy="457200"/>
+          </a:xfrm>
+          <a:prstGeom prst="rect">
+            <a:avLst/>
+          </a:prstGeom>
+          <a:noFill/>
+        </p:spPr>
+        <p:txBody>
+          <a:bodyPr wrap="square" lIns="45720" rIns="45720" tIns="18288" bIns="18288" anchor="ctr">
             <a:spAutoFit/>
           </a:bodyPr>
           <a:lstStyle/>
           <a:p>
             <a:pPr algn="l"/>
             <a:r>
-              <a:rPr sz="2100" b="1" i="0">
+              <a:rPr sz="2300" b="1" i="0">
                 <a:solidFill>
                   <a:srgbClr val="0B5394"/>
                 </a:solidFill>
@@ -14279,173 +14279,621 @@
         </p:nvSpPr>
         <p:spPr>
           <a:xfrm>
-            <a:off x="1554480" y="2011680"/>
-            <a:ext cx="9829800" cy="411480"/>
-          </a:xfrm>
-          <a:prstGeom prst="rect">
-            <a:avLst/>
-          </a:prstGeom>
-          <a:noFill/>
-        </p:spPr>
-        <p:txBody>
-          <a:bodyPr wrap="square" lIns="45720" rIns="45720" tIns="18288" bIns="18288" anchor="t">
+            <a:off x="1554480" y="1677924"/>
+            <a:ext cx="2548440" cy="457200"/>
+          </a:xfrm>
+          <a:prstGeom prst="rect">
+            <a:avLst/>
+          </a:prstGeom>
+          <a:noFill/>
+        </p:spPr>
+        <p:txBody>
+          <a:bodyPr wrap="none" lIns="45720" rIns="45720" tIns="18288" bIns="18288" anchor="ctr">
+            <a:noAutofit/>
+          </a:bodyPr>
+          <a:lstStyle/>
+          <a:p>
+            <a:pPr algn="l"/>
+            <a:r>
+              <a:rPr sz="2300" b="0" i="0">
+                <a:solidFill>
+                  <a:srgbClr val="1A1A1A"/>
+                </a:solidFill>
+                <a:latin typeface="Century Schoolbook"/>
+              </a:rPr>
+              <a:t>Find the value.  </a:t>
+            </a:r>
+          </a:p>
+        </p:txBody>
+      </p:sp>
+      <p:pic>
+        <p:nvPicPr>
+          <p:cNvPr id="10" name="Picture 9" descr="ea8eebb3a97fa0e6.png"/>
+          <p:cNvPicPr>
+            <a:picLocks noChangeAspect="1"/>
+          </p:cNvPicPr>
+          <p:nvPr/>
+        </p:nvPicPr>
+        <p:blipFill>
+          <a:blip r:embed="rId2"/>
+          <a:stretch>
+            <a:fillRect/>
+          </a:stretch>
+        </p:blipFill>
+        <p:spPr>
+          <a:xfrm>
+            <a:off x="3965760" y="1517904"/>
+            <a:ext cx="1688592" cy="777240"/>
+          </a:xfrm>
+          <a:prstGeom prst="rect">
+            <a:avLst/>
+          </a:prstGeom>
+        </p:spPr>
+      </p:pic>
+      <p:sp>
+        <p:nvSpPr>
+          <p:cNvPr id="11" name="TextBox 10"/>
+          <p:cNvSpPr txBox="1"/>
+          <p:nvPr/>
+        </p:nvSpPr>
+        <p:spPr>
+          <a:xfrm>
+            <a:off x="960120" y="2526792"/>
+            <a:ext cx="548640" cy="457200"/>
+          </a:xfrm>
+          <a:prstGeom prst="rect">
+            <a:avLst/>
+          </a:prstGeom>
+          <a:noFill/>
+        </p:spPr>
+        <p:txBody>
+          <a:bodyPr wrap="square" lIns="45720" rIns="45720" tIns="18288" bIns="18288" anchor="ctr">
             <a:spAutoFit/>
           </a:bodyPr>
           <a:lstStyle/>
           <a:p>
             <a:pPr algn="l"/>
             <a:r>
-              <a:rPr sz="2100" b="0" i="0">
+              <a:rPr sz="2300" b="1" i="0">
+                <a:solidFill>
+                  <a:srgbClr val="0B5394"/>
+                </a:solidFill>
+                <a:latin typeface="Century Schoolbook"/>
+              </a:rPr>
+              <a:t>2.</a:t>
+            </a:r>
+          </a:p>
+        </p:txBody>
+      </p:sp>
+      <p:sp>
+        <p:nvSpPr>
+          <p:cNvPr id="12" name="TextBox 11"/>
+          <p:cNvSpPr txBox="1"/>
+          <p:nvPr/>
+        </p:nvSpPr>
+        <p:spPr>
+          <a:xfrm>
+            <a:off x="1554480" y="2526792"/>
+            <a:ext cx="2548440" cy="457200"/>
+          </a:xfrm>
+          <a:prstGeom prst="rect">
+            <a:avLst/>
+          </a:prstGeom>
+          <a:noFill/>
+        </p:spPr>
+        <p:txBody>
+          <a:bodyPr wrap="none" lIns="45720" rIns="45720" tIns="18288" bIns="18288" anchor="ctr">
+            <a:noAutofit/>
+          </a:bodyPr>
+          <a:lstStyle/>
+          <a:p>
+            <a:pPr algn="l"/>
+            <a:r>
+              <a:rPr sz="2300" b="0" i="0">
                 <a:solidFill>
                   <a:srgbClr val="1A1A1A"/>
                 </a:solidFill>
                 <a:latin typeface="Century Schoolbook"/>
               </a:rPr>
-              <a:t>Six questions. Work down the page.</a:t>
-            </a:r>
-          </a:p>
-        </p:txBody>
-      </p:sp>
-      <p:sp>
-        <p:nvSpPr>
-          <p:cNvPr id="10" name="TextBox 9"/>
-          <p:cNvSpPr txBox="1"/>
-          <p:nvPr/>
-        </p:nvSpPr>
-        <p:spPr>
-          <a:xfrm>
-            <a:off x="960120" y="2551176"/>
-            <a:ext cx="548640" cy="356616"/>
-          </a:xfrm>
-          <a:prstGeom prst="rect">
-            <a:avLst/>
-          </a:prstGeom>
-          <a:noFill/>
-        </p:spPr>
-        <p:txBody>
-          <a:bodyPr wrap="square" lIns="45720" rIns="45720" tIns="18288" bIns="18288" anchor="t">
+              <a:t>Find the value.  </a:t>
+            </a:r>
+          </a:p>
+        </p:txBody>
+      </p:sp>
+      <p:pic>
+        <p:nvPicPr>
+          <p:cNvPr id="13" name="Picture 12" descr="8ac5f19cf038a316.png"/>
+          <p:cNvPicPr>
+            <a:picLocks noChangeAspect="1"/>
+          </p:cNvPicPr>
+          <p:nvPr/>
+        </p:nvPicPr>
+        <p:blipFill>
+          <a:blip r:embed="rId3"/>
+          <a:stretch>
+            <a:fillRect/>
+          </a:stretch>
+        </p:blipFill>
+        <p:spPr>
+          <a:xfrm>
+            <a:off x="3965760" y="2478024"/>
+            <a:ext cx="1676400" cy="554736"/>
+          </a:xfrm>
+          <a:prstGeom prst="rect">
+            <a:avLst/>
+          </a:prstGeom>
+        </p:spPr>
+      </p:pic>
+      <p:sp>
+        <p:nvSpPr>
+          <p:cNvPr id="14" name="TextBox 13"/>
+          <p:cNvSpPr txBox="1"/>
+          <p:nvPr/>
+        </p:nvSpPr>
+        <p:spPr>
+          <a:xfrm>
+            <a:off x="960120" y="3192780"/>
+            <a:ext cx="548640" cy="457200"/>
+          </a:xfrm>
+          <a:prstGeom prst="rect">
+            <a:avLst/>
+          </a:prstGeom>
+          <a:noFill/>
+        </p:spPr>
+        <p:txBody>
+          <a:bodyPr wrap="square" lIns="45720" rIns="45720" tIns="18288" bIns="18288" anchor="ctr">
             <a:spAutoFit/>
           </a:bodyPr>
           <a:lstStyle/>
           <a:p>
             <a:pPr algn="l"/>
             <a:r>
-              <a:rPr sz="2100" b="1" i="0">
+              <a:rPr sz="2300" b="1" i="0">
                 <a:solidFill>
                   <a:srgbClr val="0B5394"/>
                 </a:solidFill>
                 <a:latin typeface="Century Schoolbook"/>
               </a:rPr>
-              <a:t>2.</a:t>
-            </a:r>
-          </a:p>
-        </p:txBody>
-      </p:sp>
-      <p:sp>
-        <p:nvSpPr>
-          <p:cNvPr id="11" name="TextBox 10"/>
-          <p:cNvSpPr txBox="1"/>
-          <p:nvPr/>
-        </p:nvSpPr>
-        <p:spPr>
-          <a:xfrm>
-            <a:off x="1554480" y="2551176"/>
-            <a:ext cx="9829800" cy="411480"/>
-          </a:xfrm>
-          <a:prstGeom prst="rect">
-            <a:avLst/>
-          </a:prstGeom>
-          <a:noFill/>
-        </p:spPr>
-        <p:txBody>
-          <a:bodyPr wrap="square" lIns="45720" rIns="45720" tIns="18288" bIns="18288" anchor="t">
+              <a:t>3.</a:t>
+            </a:r>
+          </a:p>
+        </p:txBody>
+      </p:sp>
+      <p:sp>
+        <p:nvSpPr>
+          <p:cNvPr id="15" name="TextBox 14"/>
+          <p:cNvSpPr txBox="1"/>
+          <p:nvPr/>
+        </p:nvSpPr>
+        <p:spPr>
+          <a:xfrm>
+            <a:off x="1554480" y="3192780"/>
+            <a:ext cx="3467011" cy="457200"/>
+          </a:xfrm>
+          <a:prstGeom prst="rect">
+            <a:avLst/>
+          </a:prstGeom>
+          <a:noFill/>
+        </p:spPr>
+        <p:txBody>
+          <a:bodyPr wrap="none" lIns="45720" rIns="45720" tIns="18288" bIns="18288" anchor="ctr">
+            <a:noAutofit/>
+          </a:bodyPr>
+          <a:lstStyle/>
+          <a:p>
+            <a:pPr algn="l"/>
+            <a:r>
+              <a:rPr sz="2300" b="0" i="0">
+                <a:solidFill>
+                  <a:srgbClr val="1A1A1A"/>
+                </a:solidFill>
+                <a:latin typeface="Century Schoolbook"/>
+              </a:rPr>
+              <a:t>Write as a power of 2.  </a:t>
+            </a:r>
+          </a:p>
+        </p:txBody>
+      </p:sp>
+      <p:pic>
+        <p:nvPicPr>
+          <p:cNvPr id="16" name="Picture 15" descr="f8e949f0e98d161f.png"/>
+          <p:cNvPicPr>
+            <a:picLocks noChangeAspect="1"/>
+          </p:cNvPicPr>
+          <p:nvPr/>
+        </p:nvPicPr>
+        <p:blipFill>
+          <a:blip r:embed="rId4"/>
+          <a:stretch>
+            <a:fillRect/>
+          </a:stretch>
+        </p:blipFill>
+        <p:spPr>
+          <a:xfrm>
+            <a:off x="4884331" y="3281172"/>
+            <a:ext cx="399288" cy="280416"/>
+          </a:xfrm>
+          <a:prstGeom prst="rect">
+            <a:avLst/>
+          </a:prstGeom>
+        </p:spPr>
+      </p:pic>
+      <p:sp>
+        <p:nvSpPr>
+          <p:cNvPr id="17" name="TextBox 16"/>
+          <p:cNvSpPr txBox="1"/>
+          <p:nvPr/>
+        </p:nvSpPr>
+        <p:spPr>
+          <a:xfrm>
+            <a:off x="960120" y="3787139"/>
+            <a:ext cx="548640" cy="457200"/>
+          </a:xfrm>
+          <a:prstGeom prst="rect">
+            <a:avLst/>
+          </a:prstGeom>
+          <a:noFill/>
+        </p:spPr>
+        <p:txBody>
+          <a:bodyPr wrap="square" lIns="45720" rIns="45720" tIns="18288" bIns="18288" anchor="ctr">
             <a:spAutoFit/>
           </a:bodyPr>
           <a:lstStyle/>
           <a:p>
             <a:pPr algn="l"/>
             <a:r>
-              <a:rPr sz="2100" b="0" i="0">
+              <a:rPr sz="2300" b="1" i="0">
+                <a:solidFill>
+                  <a:srgbClr val="0B5394"/>
+                </a:solidFill>
+                <a:latin typeface="Century Schoolbook"/>
+              </a:rPr>
+              <a:t>4.</a:t>
+            </a:r>
+          </a:p>
+        </p:txBody>
+      </p:sp>
+      <p:sp>
+        <p:nvSpPr>
+          <p:cNvPr id="18" name="TextBox 17"/>
+          <p:cNvSpPr txBox="1"/>
+          <p:nvPr/>
+        </p:nvSpPr>
+        <p:spPr>
+          <a:xfrm>
+            <a:off x="1554480" y="3787139"/>
+            <a:ext cx="3467011" cy="457200"/>
+          </a:xfrm>
+          <a:prstGeom prst="rect">
+            <a:avLst/>
+          </a:prstGeom>
+          <a:noFill/>
+        </p:spPr>
+        <p:txBody>
+          <a:bodyPr wrap="none" lIns="45720" rIns="45720" tIns="18288" bIns="18288" anchor="ctr">
+            <a:noAutofit/>
+          </a:bodyPr>
+          <a:lstStyle/>
+          <a:p>
+            <a:pPr algn="l"/>
+            <a:r>
+              <a:rPr sz="2300" b="0" i="0">
                 <a:solidFill>
                   <a:srgbClr val="1A1A1A"/>
                 </a:solidFill>
                 <a:latin typeface="Century Schoolbook"/>
               </a:rPr>
-              <a:t>Show the step that does the work, not just the answer.</a:t>
-            </a:r>
-          </a:p>
-        </p:txBody>
-      </p:sp>
-      <p:sp>
-        <p:nvSpPr>
-          <p:cNvPr id="12" name="TextBox 11"/>
-          <p:cNvSpPr txBox="1"/>
-          <p:nvPr/>
-        </p:nvSpPr>
-        <p:spPr>
-          <a:xfrm>
-            <a:off x="960120" y="3090672"/>
-            <a:ext cx="548640" cy="356616"/>
-          </a:xfrm>
-          <a:prstGeom prst="rect">
-            <a:avLst/>
-          </a:prstGeom>
-          <a:noFill/>
-        </p:spPr>
-        <p:txBody>
-          <a:bodyPr wrap="square" lIns="45720" rIns="45720" tIns="18288" bIns="18288" anchor="t">
+              <a:t>Write as a power of 3.  </a:t>
+            </a:r>
+          </a:p>
+        </p:txBody>
+      </p:sp>
+      <p:pic>
+        <p:nvPicPr>
+          <p:cNvPr id="19" name="Picture 18" descr="7d1829112605dc0a.png"/>
+          <p:cNvPicPr>
+            <a:picLocks noChangeAspect="1"/>
+          </p:cNvPicPr>
+          <p:nvPr/>
+        </p:nvPicPr>
+        <p:blipFill>
+          <a:blip r:embed="rId5"/>
+          <a:stretch>
+            <a:fillRect/>
+          </a:stretch>
+        </p:blipFill>
+        <p:spPr>
+          <a:xfrm>
+            <a:off x="4884331" y="3875531"/>
+            <a:ext cx="798576" cy="280416"/>
+          </a:xfrm>
+          <a:prstGeom prst="rect">
+            <a:avLst/>
+          </a:prstGeom>
+        </p:spPr>
+      </p:pic>
+      <p:sp>
+        <p:nvSpPr>
+          <p:cNvPr id="20" name="TextBox 19"/>
+          <p:cNvSpPr txBox="1"/>
+          <p:nvPr/>
+        </p:nvSpPr>
+        <p:spPr>
+          <a:xfrm>
+            <a:off x="960120" y="4381499"/>
+            <a:ext cx="548640" cy="457200"/>
+          </a:xfrm>
+          <a:prstGeom prst="rect">
+            <a:avLst/>
+          </a:prstGeom>
+          <a:noFill/>
+        </p:spPr>
+        <p:txBody>
+          <a:bodyPr wrap="square" lIns="45720" rIns="45720" tIns="18288" bIns="18288" anchor="ctr">
             <a:spAutoFit/>
           </a:bodyPr>
           <a:lstStyle/>
           <a:p>
             <a:pPr algn="l"/>
             <a:r>
-              <a:rPr sz="2100" b="1" i="0">
+              <a:rPr sz="2300" b="1" i="0">
                 <a:solidFill>
                   <a:srgbClr val="0B5394"/>
                 </a:solidFill>
                 <a:latin typeface="Century Schoolbook"/>
               </a:rPr>
-              <a:t>3.</a:t>
-            </a:r>
-          </a:p>
-        </p:txBody>
-      </p:sp>
-      <p:sp>
-        <p:nvSpPr>
-          <p:cNvPr id="13" name="TextBox 12"/>
-          <p:cNvSpPr txBox="1"/>
-          <p:nvPr/>
-        </p:nvSpPr>
-        <p:spPr>
-          <a:xfrm>
-            <a:off x="1554480" y="3090672"/>
-            <a:ext cx="9829800" cy="411480"/>
-          </a:xfrm>
-          <a:prstGeom prst="rect">
-            <a:avLst/>
-          </a:prstGeom>
-          <a:noFill/>
-        </p:spPr>
-        <p:txBody>
-          <a:bodyPr wrap="square" lIns="45720" rIns="45720" tIns="18288" bIns="18288" anchor="t">
+              <a:t>5.</a:t>
+            </a:r>
+          </a:p>
+        </p:txBody>
+      </p:sp>
+      <p:sp>
+        <p:nvSpPr>
+          <p:cNvPr id="21" name="TextBox 20"/>
+          <p:cNvSpPr txBox="1"/>
+          <p:nvPr/>
+        </p:nvSpPr>
+        <p:spPr>
+          <a:xfrm>
+            <a:off x="1554480" y="4381499"/>
+            <a:ext cx="898293" cy="457200"/>
+          </a:xfrm>
+          <a:prstGeom prst="rect">
+            <a:avLst/>
+          </a:prstGeom>
+          <a:noFill/>
+        </p:spPr>
+        <p:txBody>
+          <a:bodyPr wrap="none" lIns="45720" rIns="45720" tIns="18288" bIns="18288" anchor="ctr">
+            <a:noAutofit/>
+          </a:bodyPr>
+          <a:lstStyle/>
+          <a:p>
+            <a:pPr algn="l"/>
+            <a:r>
+              <a:rPr sz="2300" b="0" i="0">
+                <a:solidFill>
+                  <a:srgbClr val="1A1A1A"/>
+                </a:solidFill>
+                <a:latin typeface="Century Schoolbook"/>
+              </a:rPr>
+              <a:t>Are  </a:t>
+            </a:r>
+          </a:p>
+        </p:txBody>
+      </p:sp>
+      <p:pic>
+        <p:nvPicPr>
+          <p:cNvPr id="22" name="Picture 21" descr="2548b15b1d35bdbd.png"/>
+          <p:cNvPicPr>
+            <a:picLocks noChangeAspect="1"/>
+          </p:cNvPicPr>
+          <p:nvPr/>
+        </p:nvPicPr>
+        <p:blipFill>
+          <a:blip r:embed="rId6"/>
+          <a:stretch>
+            <a:fillRect/>
+          </a:stretch>
+        </p:blipFill>
+        <p:spPr>
+          <a:xfrm>
+            <a:off x="2315613" y="4472940"/>
+            <a:ext cx="432816" cy="274320"/>
+          </a:xfrm>
+          <a:prstGeom prst="rect">
+            <a:avLst/>
+          </a:prstGeom>
+        </p:spPr>
+      </p:pic>
+      <p:sp>
+        <p:nvSpPr>
+          <p:cNvPr id="23" name="TextBox 22"/>
+          <p:cNvSpPr txBox="1"/>
+          <p:nvPr/>
+        </p:nvSpPr>
+        <p:spPr>
+          <a:xfrm>
+            <a:off x="2748429" y="4381499"/>
+            <a:ext cx="1093755" cy="457200"/>
+          </a:xfrm>
+          <a:prstGeom prst="rect">
+            <a:avLst/>
+          </a:prstGeom>
+          <a:noFill/>
+        </p:spPr>
+        <p:txBody>
+          <a:bodyPr wrap="none" lIns="45720" rIns="45720" tIns="18288" bIns="18288" anchor="ctr">
+            <a:noAutofit/>
+          </a:bodyPr>
+          <a:lstStyle/>
+          <a:p>
+            <a:pPr algn="l"/>
+            <a:r>
+              <a:rPr sz="2300" b="0" i="0">
+                <a:solidFill>
+                  <a:srgbClr val="1A1A1A"/>
+                </a:solidFill>
+                <a:latin typeface="Century Schoolbook"/>
+              </a:rPr>
+              <a:t>  and  </a:t>
+            </a:r>
+          </a:p>
+        </p:txBody>
+      </p:sp>
+      <p:pic>
+        <p:nvPicPr>
+          <p:cNvPr id="24" name="Picture 23" descr="08acdadc8f4ac353.png"/>
+          <p:cNvPicPr>
+            <a:picLocks noChangeAspect="1"/>
+          </p:cNvPicPr>
+          <p:nvPr/>
+        </p:nvPicPr>
+        <p:blipFill>
+          <a:blip r:embed="rId7"/>
+          <a:stretch>
+            <a:fillRect/>
+          </a:stretch>
+        </p:blipFill>
+        <p:spPr>
+          <a:xfrm>
+            <a:off x="3705025" y="4471416"/>
+            <a:ext cx="426720" cy="277368"/>
+          </a:xfrm>
+          <a:prstGeom prst="rect">
+            <a:avLst/>
+          </a:prstGeom>
+        </p:spPr>
+      </p:pic>
+      <p:sp>
+        <p:nvSpPr>
+          <p:cNvPr id="25" name="TextBox 24"/>
+          <p:cNvSpPr txBox="1"/>
+          <p:nvPr/>
+        </p:nvSpPr>
+        <p:spPr>
+          <a:xfrm>
+            <a:off x="4131745" y="4381499"/>
+            <a:ext cx="3612937" cy="457200"/>
+          </a:xfrm>
+          <a:prstGeom prst="rect">
+            <a:avLst/>
+          </a:prstGeom>
+          <a:noFill/>
+        </p:spPr>
+        <p:txBody>
+          <a:bodyPr wrap="none" lIns="45720" rIns="45720" tIns="18288" bIns="18288" anchor="ctr">
+            <a:noAutofit/>
+          </a:bodyPr>
+          <a:lstStyle/>
+          <a:p>
+            <a:pPr algn="l"/>
+            <a:r>
+              <a:rPr sz="2300" b="0" i="0">
+                <a:solidFill>
+                  <a:srgbClr val="1A1A1A"/>
+                </a:solidFill>
+                <a:latin typeface="Century Schoolbook"/>
+              </a:rPr>
+              <a:t>  equivalent? Show why.</a:t>
+            </a:r>
+          </a:p>
+        </p:txBody>
+      </p:sp>
+      <p:sp>
+        <p:nvSpPr>
+          <p:cNvPr id="26" name="TextBox 25"/>
+          <p:cNvSpPr txBox="1"/>
+          <p:nvPr/>
+        </p:nvSpPr>
+        <p:spPr>
+          <a:xfrm>
+            <a:off x="960120" y="4975860"/>
+            <a:ext cx="548640" cy="457200"/>
+          </a:xfrm>
+          <a:prstGeom prst="rect">
+            <a:avLst/>
+          </a:prstGeom>
+          <a:noFill/>
+        </p:spPr>
+        <p:txBody>
+          <a:bodyPr wrap="square" lIns="45720" rIns="45720" tIns="18288" bIns="18288" anchor="ctr">
             <a:spAutoFit/>
           </a:bodyPr>
           <a:lstStyle/>
           <a:p>
             <a:pPr algn="l"/>
             <a:r>
-              <a:rPr sz="2100" b="0" i="0">
+              <a:rPr sz="2300" b="1" i="0">
+                <a:solidFill>
+                  <a:srgbClr val="0B5394"/>
+                </a:solidFill>
+                <a:latin typeface="Century Schoolbook"/>
+              </a:rPr>
+              <a:t>6.</a:t>
+            </a:r>
+          </a:p>
+        </p:txBody>
+      </p:sp>
+      <p:sp>
+        <p:nvSpPr>
+          <p:cNvPr id="27" name="TextBox 26"/>
+          <p:cNvSpPr txBox="1"/>
+          <p:nvPr/>
+        </p:nvSpPr>
+        <p:spPr>
+          <a:xfrm>
+            <a:off x="1554480" y="4975860"/>
+            <a:ext cx="2548440" cy="457200"/>
+          </a:xfrm>
+          <a:prstGeom prst="rect">
+            <a:avLst/>
+          </a:prstGeom>
+          <a:noFill/>
+        </p:spPr>
+        <p:txBody>
+          <a:bodyPr wrap="none" lIns="45720" rIns="45720" tIns="18288" bIns="18288" anchor="ctr">
+            <a:noAutofit/>
+          </a:bodyPr>
+          <a:lstStyle/>
+          <a:p>
+            <a:pPr algn="l"/>
+            <a:r>
+              <a:rPr sz="2300" b="0" i="0">
                 <a:solidFill>
                   <a:srgbClr val="1A1A1A"/>
                 </a:solidFill>
                 <a:latin typeface="Century Schoolbook"/>
               </a:rPr>
-              <a:t>Silence until the six minutes are up.</a:t>
-            </a:r>
-          </a:p>
-        </p:txBody>
-      </p:sp>
+              <a:t>Find the value.  </a:t>
+            </a:r>
+          </a:p>
+        </p:txBody>
+      </p:sp>
+      <p:pic>
+        <p:nvPicPr>
+          <p:cNvPr id="28" name="Picture 27" descr="eb89b2f91444568a.png"/>
+          <p:cNvPicPr>
+            <a:picLocks noChangeAspect="1"/>
+          </p:cNvPicPr>
+          <p:nvPr/>
+        </p:nvPicPr>
+        <p:blipFill>
+          <a:blip r:embed="rId8"/>
+          <a:stretch>
+            <a:fillRect/>
+          </a:stretch>
+        </p:blipFill>
+        <p:spPr>
+          <a:xfrm>
+            <a:off x="3965760" y="5036820"/>
+            <a:ext cx="1261872" cy="335280"/>
+          </a:xfrm>
+          <a:prstGeom prst="rect">
+            <a:avLst/>
+          </a:prstGeom>
+        </p:spPr>
+      </p:pic>
     </p:spTree>
   </p:cSld>
   <p:clrMapOvr>

--- a/a7/packages/A7 Unit 3 - Exponents and Scientific Notation/Lessons/3.06/A7 3.06 Evaluating and Equivalent Expressions - Slides.pptx
+++ b/a7/packages/A7 Unit 3 - Exponents and Scientific Notation/Lessons/3.06/A7 3.06 Evaluating and Equivalent Expressions - Slides.pptx
@@ -3146,11 +3146,11 @@
           <a:p>
             <a:pPr algn="ctr"/>
             <a:r>
-              <a:rPr sz="1500" b="0" i="0">
+              <a:rPr sz="1420" b="0" i="0">
                 <a:solidFill>
                   <a:srgbClr val="6B6B6B"/>
                 </a:solidFill>
-                <a:latin typeface="Century Schoolbook"/>
+                <a:latin typeface="Lexend"/>
               </a:rPr>
               <a:t>GRADE 7 ACCELERATED  ·  UNIT 3  ·  LESSONS 6–7</a:t>
             </a:r>
@@ -3181,11 +3181,11 @@
           <a:p>
             <a:pPr algn="ctr"/>
             <a:r>
-              <a:rPr sz="3400" b="1" i="0">
+              <a:rPr sz="3229" b="1" i="0">
                 <a:solidFill>
                   <a:srgbClr val="1A1A1A"/>
                 </a:solidFill>
-                <a:latin typeface="Century Schoolbook"/>
+                <a:latin typeface="Lexend"/>
               </a:rPr>
               <a:t>Evaluating and Equivalent Expressions</a:t>
             </a:r>
@@ -3286,11 +3286,11 @@
           <a:p>
             <a:pPr algn="ctr"/>
             <a:r>
-              <a:rPr sz="1600" b="1" i="0">
+              <a:rPr sz="1520" b="1" i="0">
                 <a:solidFill>
                   <a:srgbClr val="1A1A1A"/>
                 </a:solidFill>
-                <a:latin typeface="Century Schoolbook"/>
+                <a:latin typeface="Lexend"/>
               </a:rPr>
               <a:t>MA.8.NSO.1.3</a:t>
             </a:r>
@@ -3321,11 +3321,11 @@
           <a:p>
             <a:pPr algn="ctr"/>
             <a:r>
-              <a:rPr sz="1900" b="0" i="1">
+              <a:rPr sz="1810" b="0" i="0">
                 <a:solidFill>
                   <a:srgbClr val="1A1A1A"/>
                 </a:solidFill>
-                <a:latin typeface="Century Schoolbook"/>
+                <a:latin typeface="Lexend"/>
               </a:rPr>
               <a:t>I can evaluate an expression with integer exponents using the laws, and decide whether two expressions with different bases are equivalent.</a:t>
             </a:r>
@@ -3391,11 +3391,11 @@
           <a:p>
             <a:pPr algn="l"/>
             <a:r>
-              <a:rPr sz="1100" b="0" i="1">
+              <a:rPr sz="1040" b="0" i="0">
                 <a:solidFill>
                   <a:srgbClr val="6B6B6B"/>
                 </a:solidFill>
-                <a:latin typeface="Century Schoolbook"/>
+                <a:latin typeface="Lexend"/>
               </a:rPr>
               <a:t>Grade 7 Accelerated · Unit 3 · Lessons 6–7 — Evaluating and Equivalent Expressions</a:t>
             </a:r>
@@ -3426,11 +3426,11 @@
           <a:p>
             <a:pPr algn="r"/>
             <a:r>
-              <a:rPr sz="1100" b="0" i="0">
+              <a:rPr sz="1040" b="0" i="0">
                 <a:solidFill>
                   <a:srgbClr val="6B6B6B"/>
                 </a:solidFill>
-                <a:latin typeface="Century Schoolbook"/>
+                <a:latin typeface="Lexend"/>
               </a:rPr>
               <a:t>1</a:t>
             </a:r>
@@ -3479,11 +3479,11 @@
           <a:p>
             <a:pPr algn="l"/>
             <a:r>
-              <a:rPr sz="3600" b="1" i="0">
+              <a:rPr sz="3420" b="1" i="0">
                 <a:solidFill>
                   <a:srgbClr val="1A1A1A"/>
                 </a:solidFill>
-                <a:latin typeface="Century Schoolbook"/>
+                <a:latin typeface="Lexend"/>
               </a:rPr>
               <a:t>Your Turn</a:t>
             </a:r>
@@ -3619,11 +3619,11 @@
           <a:p>
             <a:pPr algn="l"/>
             <a:r>
-              <a:rPr sz="1100" b="0" i="1">
+              <a:rPr sz="1040" b="0" i="0">
                 <a:solidFill>
                   <a:srgbClr val="6B6B6B"/>
                 </a:solidFill>
-                <a:latin typeface="Century Schoolbook"/>
+                <a:latin typeface="Lexend"/>
               </a:rPr>
               <a:t>Grade 7 Accelerated · Unit 3 · Lessons 6–7 — Evaluating and Equivalent Expressions</a:t>
             </a:r>
@@ -3654,11 +3654,11 @@
           <a:p>
             <a:pPr algn="r"/>
             <a:r>
-              <a:rPr sz="1100" b="0" i="0">
+              <a:rPr sz="1040" b="0" i="0">
                 <a:solidFill>
                   <a:srgbClr val="6B6B6B"/>
                 </a:solidFill>
-                <a:latin typeface="Century Schoolbook"/>
+                <a:latin typeface="Lexend"/>
               </a:rPr>
               <a:t>10</a:t>
             </a:r>
@@ -3667,7 +3667,7 @@
       </p:sp>
       <p:pic>
         <p:nvPicPr>
-          <p:cNvPr id="8" name="Picture 7" descr="b5586861463d6b87.png"/>
+          <p:cNvPr id="8" name="Picture 7" descr="3d228ca9c4261fd1.png"/>
           <p:cNvPicPr>
             <a:picLocks noChangeAspect="1"/>
           </p:cNvPicPr>
@@ -3681,8 +3681,8 @@
         </p:blipFill>
         <p:spPr>
           <a:xfrm>
-            <a:off x="5184648" y="2194560"/>
-            <a:ext cx="1792224" cy="862584"/>
+            <a:off x="5202936" y="1600200"/>
+            <a:ext cx="1755648" cy="835152"/>
           </a:xfrm>
           <a:prstGeom prst="rect">
             <a:avLst/>
@@ -3697,7 +3697,7 @@
         </p:nvSpPr>
         <p:spPr>
           <a:xfrm>
-            <a:off x="777240" y="3560064"/>
+            <a:off x="777240" y="2938272"/>
             <a:ext cx="10607040" cy="429370"/>
           </a:xfrm>
           <a:prstGeom prst="rect">
@@ -3713,11 +3713,11 @@
           <a:p>
             <a:pPr algn="ctr"/>
             <a:r>
-              <a:rPr sz="2400" b="1" i="0">
+              <a:rPr sz="2280" b="1" i="0">
                 <a:solidFill>
                   <a:srgbClr val="1A1A1A"/>
                 </a:solidFill>
-                <a:latin typeface="Century Schoolbook"/>
+                <a:latin typeface="Lexend"/>
               </a:rPr>
               <a:t>Find the value.</a:t>
             </a:r>
@@ -3766,11 +3766,11 @@
           <a:p>
             <a:pPr algn="l"/>
             <a:r>
-              <a:rPr sz="3600" b="1" i="0">
+              <a:rPr sz="3420" b="1" i="0">
                 <a:solidFill>
                   <a:srgbClr val="1A1A1A"/>
                 </a:solidFill>
-                <a:latin typeface="Century Schoolbook"/>
+                <a:latin typeface="Lexend"/>
               </a:rPr>
               <a:t>Your Turn</a:t>
             </a:r>
@@ -3906,11 +3906,11 @@
           <a:p>
             <a:pPr algn="l"/>
             <a:r>
-              <a:rPr sz="1100" b="0" i="1">
+              <a:rPr sz="1040" b="0" i="0">
                 <a:solidFill>
                   <a:srgbClr val="6B6B6B"/>
                 </a:solidFill>
-                <a:latin typeface="Century Schoolbook"/>
+                <a:latin typeface="Lexend"/>
               </a:rPr>
               <a:t>Grade 7 Accelerated · Unit 3 · Lessons 6–7 — Evaluating and Equivalent Expressions</a:t>
             </a:r>
@@ -3941,11 +3941,11 @@
           <a:p>
             <a:pPr algn="r"/>
             <a:r>
-              <a:rPr sz="1100" b="0" i="0">
+              <a:rPr sz="1040" b="0" i="0">
                 <a:solidFill>
                   <a:srgbClr val="6B6B6B"/>
                 </a:solidFill>
-                <a:latin typeface="Century Schoolbook"/>
+                <a:latin typeface="Lexend"/>
               </a:rPr>
               <a:t>11</a:t>
             </a:r>
@@ -3954,7 +3954,7 @@
       </p:sp>
       <p:pic>
         <p:nvPicPr>
-          <p:cNvPr id="8" name="Picture 7" descr="4ba5d3554b7f430d.png"/>
+          <p:cNvPr id="8" name="Picture 7" descr="50a8128bf10ae9fc.png"/>
           <p:cNvPicPr>
             <a:picLocks noChangeAspect="1"/>
           </p:cNvPicPr>
@@ -3968,8 +3968,8 @@
         </p:blipFill>
         <p:spPr>
           <a:xfrm>
-            <a:off x="5181599" y="2194560"/>
-            <a:ext cx="1798320" cy="862584"/>
+            <a:off x="5202936" y="1600200"/>
+            <a:ext cx="1755648" cy="835152"/>
           </a:xfrm>
           <a:prstGeom prst="rect">
             <a:avLst/>
@@ -3984,7 +3984,7 @@
         </p:nvSpPr>
         <p:spPr>
           <a:xfrm>
-            <a:off x="777240" y="3560064"/>
+            <a:off x="777240" y="2938272"/>
             <a:ext cx="10607040" cy="429370"/>
           </a:xfrm>
           <a:prstGeom prst="rect">
@@ -4000,11 +4000,11 @@
           <a:p>
             <a:pPr algn="ctr"/>
             <a:r>
-              <a:rPr sz="2400" b="1" i="0">
+              <a:rPr sz="2280" b="1" i="0">
                 <a:solidFill>
                   <a:srgbClr val="1A1A1A"/>
                 </a:solidFill>
-                <a:latin typeface="Century Schoolbook"/>
+                <a:latin typeface="Lexend"/>
               </a:rPr>
               <a:t>Find the value.</a:t>
             </a:r>
@@ -4019,36 +4019,36 @@
         </p:nvSpPr>
         <p:spPr>
           <a:xfrm>
-            <a:off x="4864607" y="4637532"/>
-            <a:ext cx="1920240" cy="548640"/>
-          </a:xfrm>
-          <a:prstGeom prst="rect">
-            <a:avLst/>
-          </a:prstGeom>
-          <a:noFill/>
-        </p:spPr>
-        <p:txBody>
-          <a:bodyPr wrap="square" lIns="45720" rIns="45720" tIns="18288" bIns="18288" anchor="ctr">
-            <a:spAutoFit/>
+            <a:off x="3116638" y="3628246"/>
+            <a:ext cx="3358779" cy="457200"/>
+          </a:xfrm>
+          <a:prstGeom prst="rect">
+            <a:avLst/>
+          </a:prstGeom>
+          <a:noFill/>
+        </p:spPr>
+        <p:txBody>
+          <a:bodyPr wrap="none" lIns="45720" rIns="45720" tIns="18288" bIns="18288" anchor="ctr">
+            <a:noAutofit/>
           </a:bodyPr>
           <a:lstStyle/>
           <a:p>
             <a:pPr algn="l"/>
             <a:r>
-              <a:rPr sz="3200" b="1" i="0">
-                <a:solidFill>
-                  <a:srgbClr val="9E1B32"/>
-                </a:solidFill>
-                <a:latin typeface="Century Schoolbook"/>
-              </a:rPr>
-              <a:t>Answer:</a:t>
+              <a:rPr sz="2750" b="0" i="0">
+                <a:solidFill>
+                  <a:srgbClr val="1A1A1A"/>
+                </a:solidFill>
+                <a:latin typeface="Lexend"/>
+              </a:rPr>
+              <a:t>Flip the fraction:  </a:t>
             </a:r>
           </a:p>
         </p:txBody>
       </p:sp>
       <p:pic>
         <p:nvPicPr>
-          <p:cNvPr id="11" name="Picture 10" descr="3a56cc9ab8e3bbe2.png"/>
+          <p:cNvPr id="11" name="Picture 10" descr="53cd19114de648fc.png"/>
           <p:cNvPicPr>
             <a:picLocks noChangeAspect="1"/>
           </p:cNvPicPr>
@@ -4062,8 +4062,91 @@
         </p:blipFill>
         <p:spPr>
           <a:xfrm>
-            <a:off x="6784848" y="4480560"/>
-            <a:ext cx="512064" cy="862584"/>
+            <a:off x="6338257" y="3550522"/>
+            <a:ext cx="2703576" cy="612648"/>
+          </a:xfrm>
+          <a:prstGeom prst="rect">
+            <a:avLst/>
+          </a:prstGeom>
+        </p:spPr>
+      </p:pic>
+      <p:pic>
+        <p:nvPicPr>
+          <p:cNvPr id="12" name="Picture 11" descr="955d96682c0ead77.png"/>
+          <p:cNvPicPr>
+            <a:picLocks noChangeAspect="1"/>
+          </p:cNvPicPr>
+          <p:nvPr/>
+        </p:nvPicPr>
+        <p:blipFill>
+          <a:blip r:embed="rId4"/>
+          <a:stretch>
+            <a:fillRect/>
+          </a:stretch>
+        </p:blipFill>
+        <p:spPr>
+          <a:xfrm>
+            <a:off x="3171502" y="4291186"/>
+            <a:ext cx="1557528" cy="609600"/>
+          </a:xfrm>
+          <a:prstGeom prst="rect">
+            <a:avLst/>
+          </a:prstGeom>
+        </p:spPr>
+      </p:pic>
+      <p:sp>
+        <p:nvSpPr>
+          <p:cNvPr id="13" name="TextBox 12"/>
+          <p:cNvSpPr txBox="1"/>
+          <p:nvPr/>
+        </p:nvSpPr>
+        <p:spPr>
+          <a:xfrm>
+            <a:off x="4849367" y="5184250"/>
+            <a:ext cx="1920240" cy="548640"/>
+          </a:xfrm>
+          <a:prstGeom prst="rect">
+            <a:avLst/>
+          </a:prstGeom>
+          <a:noFill/>
+        </p:spPr>
+        <p:txBody>
+          <a:bodyPr wrap="square" lIns="45720" rIns="45720" tIns="18288" bIns="18288" anchor="ctr">
+            <a:spAutoFit/>
+          </a:bodyPr>
+          <a:lstStyle/>
+          <a:p>
+            <a:pPr algn="l"/>
+            <a:r>
+              <a:rPr sz="3040" b="1" i="0">
+                <a:solidFill>
+                  <a:srgbClr val="9E1B32"/>
+                </a:solidFill>
+                <a:latin typeface="Lexend"/>
+              </a:rPr>
+              <a:t>Answer:</a:t>
+            </a:r>
+          </a:p>
+        </p:txBody>
+      </p:sp>
+      <p:pic>
+        <p:nvPicPr>
+          <p:cNvPr id="14" name="Picture 13" descr="0d571a7f25ddb595.png"/>
+          <p:cNvPicPr>
+            <a:picLocks noChangeAspect="1"/>
+          </p:cNvPicPr>
+          <p:nvPr/>
+        </p:nvPicPr>
+        <p:blipFill>
+          <a:blip r:embed="rId5"/>
+          <a:stretch>
+            <a:fillRect/>
+          </a:stretch>
+        </p:blipFill>
+        <p:spPr>
+          <a:xfrm>
+            <a:off x="6769607" y="5037946"/>
+            <a:ext cx="542544" cy="841248"/>
           </a:xfrm>
           <a:prstGeom prst="rect">
             <a:avLst/>
@@ -4112,11 +4195,11 @@
           <a:p>
             <a:pPr algn="l"/>
             <a:r>
-              <a:rPr sz="3600" b="1" i="0">
+              <a:rPr sz="3420" b="1" i="0">
                 <a:solidFill>
                   <a:srgbClr val="1A1A1A"/>
                 </a:solidFill>
-                <a:latin typeface="Century Schoolbook"/>
+                <a:latin typeface="Lexend"/>
               </a:rPr>
               <a:t>Example 2</a:t>
             </a:r>
@@ -4252,11 +4335,11 @@
           <a:p>
             <a:pPr algn="l"/>
             <a:r>
-              <a:rPr sz="1100" b="0" i="1">
+              <a:rPr sz="1040" b="0" i="0">
                 <a:solidFill>
                   <a:srgbClr val="6B6B6B"/>
                 </a:solidFill>
-                <a:latin typeface="Century Schoolbook"/>
+                <a:latin typeface="Lexend"/>
               </a:rPr>
               <a:t>Grade 7 Accelerated · Unit 3 · Lessons 6–7 — Evaluating and Equivalent Expressions</a:t>
             </a:r>
@@ -4287,11 +4370,11 @@
           <a:p>
             <a:pPr algn="r"/>
             <a:r>
-              <a:rPr sz="1100" b="0" i="0">
+              <a:rPr sz="1040" b="0" i="0">
                 <a:solidFill>
                   <a:srgbClr val="6B6B6B"/>
                 </a:solidFill>
-                <a:latin typeface="Century Schoolbook"/>
+                <a:latin typeface="Lexend"/>
               </a:rPr>
               <a:t>12</a:t>
             </a:r>
@@ -4306,8 +4389,8 @@
         </p:nvSpPr>
         <p:spPr>
           <a:xfrm>
-            <a:off x="3056109" y="2313432"/>
-            <a:ext cx="988005" cy="457200"/>
+            <a:off x="3052547" y="2304287"/>
+            <a:ext cx="950819" cy="457200"/>
           </a:xfrm>
           <a:prstGeom prst="rect">
             <a:avLst/>
@@ -4322,11 +4405,11 @@
           <a:p>
             <a:pPr algn="l"/>
             <a:r>
-              <a:rPr sz="2600" b="0" i="0">
+              <a:rPr sz="2470" b="0" i="0">
                 <a:solidFill>
                   <a:srgbClr val="1A1A1A"/>
                 </a:solidFill>
-                <a:latin typeface="Century Schoolbook"/>
+                <a:latin typeface="Lexend"/>
               </a:rPr>
               <a:t>Are  </a:t>
             </a:r>
@@ -4335,7 +4418,7 @@
       </p:sp>
       <p:pic>
         <p:nvPicPr>
-          <p:cNvPr id="9" name="Picture 8" descr="67df2d652c1a7134.png"/>
+          <p:cNvPr id="9" name="Picture 8" descr="0d148dfd488325cb.png"/>
           <p:cNvPicPr>
             <a:picLocks noChangeAspect="1"/>
           </p:cNvPicPr>
@@ -4349,8 +4432,8 @@
         </p:blipFill>
         <p:spPr>
           <a:xfrm>
-            <a:off x="3906954" y="2369819"/>
-            <a:ext cx="920495" cy="344424"/>
+            <a:off x="3866206" y="2362199"/>
+            <a:ext cx="947928" cy="341376"/>
           </a:xfrm>
           <a:prstGeom prst="rect">
             <a:avLst/>
@@ -4365,8 +4448,8 @@
         </p:nvSpPr>
         <p:spPr>
           <a:xfrm>
-            <a:off x="4827450" y="2313432"/>
-            <a:ext cx="1208866" cy="457200"/>
+            <a:off x="4814134" y="2304287"/>
+            <a:ext cx="1201901" cy="457200"/>
           </a:xfrm>
           <a:prstGeom prst="rect">
             <a:avLst/>
@@ -4381,11 +4464,11 @@
           <a:p>
             <a:pPr algn="l"/>
             <a:r>
-              <a:rPr sz="2600" b="0" i="0">
+              <a:rPr sz="2470" b="0" i="0">
                 <a:solidFill>
                   <a:srgbClr val="1A1A1A"/>
                 </a:solidFill>
-                <a:latin typeface="Century Schoolbook"/>
+                <a:latin typeface="Lexend"/>
               </a:rPr>
               <a:t>  and  </a:t>
             </a:r>
@@ -4394,7 +4477,7 @@
       </p:sp>
       <p:pic>
         <p:nvPicPr>
-          <p:cNvPr id="11" name="Picture 10" descr="69969edd9de46883.png"/>
+          <p:cNvPr id="11" name="Picture 10" descr="7449bbc668c15f3c.png"/>
           <p:cNvPicPr>
             <a:picLocks noChangeAspect="1"/>
           </p:cNvPicPr>
@@ -4408,8 +4491,8 @@
         </p:blipFill>
         <p:spPr>
           <a:xfrm>
-            <a:off x="5899156" y="2103120"/>
-            <a:ext cx="1082040" cy="877824"/>
+            <a:off x="5878876" y="2103120"/>
+            <a:ext cx="1106424" cy="859536"/>
           </a:xfrm>
           <a:prstGeom prst="rect">
             <a:avLst/>
@@ -4424,8 +4507,8 @@
         </p:nvSpPr>
         <p:spPr>
           <a:xfrm>
-            <a:off x="6981196" y="2313432"/>
-            <a:ext cx="2261373" cy="457200"/>
+            <a:off x="6985300" y="2304287"/>
+            <a:ext cx="2260832" cy="457200"/>
           </a:xfrm>
           <a:prstGeom prst="rect">
             <a:avLst/>
@@ -4440,11 +4523,11 @@
           <a:p>
             <a:pPr algn="l"/>
             <a:r>
-              <a:rPr sz="2600" b="0" i="0">
+              <a:rPr sz="2470" b="0" i="0">
                 <a:solidFill>
                   <a:srgbClr val="1A1A1A"/>
                 </a:solidFill>
-                <a:latin typeface="Century Schoolbook"/>
+                <a:latin typeface="Lexend"/>
               </a:rPr>
               <a:t>  equivalent?</a:t>
             </a:r>
@@ -4459,7 +4542,7 @@
         </p:nvSpPr>
         <p:spPr>
           <a:xfrm>
-            <a:off x="777240" y="3483864"/>
+            <a:off x="777240" y="3465576"/>
             <a:ext cx="10607040" cy="429370"/>
           </a:xfrm>
           <a:prstGeom prst="rect">
@@ -4475,11 +4558,11 @@
           <a:p>
             <a:pPr algn="ctr"/>
             <a:r>
-              <a:rPr sz="2400" b="1" i="0">
+              <a:rPr sz="2280" b="1" i="0">
                 <a:solidFill>
                   <a:srgbClr val="1A1A1A"/>
                 </a:solidFill>
-                <a:latin typeface="Century Schoolbook"/>
+                <a:latin typeface="Lexend"/>
               </a:rPr>
               <a:t>Rewrite both with the bases 3 and 2, then compare.</a:t>
             </a:r>
@@ -4528,11 +4611,11 @@
           <a:p>
             <a:pPr algn="l"/>
             <a:r>
-              <a:rPr sz="3600" b="1" i="0">
+              <a:rPr sz="3420" b="1" i="0">
                 <a:solidFill>
                   <a:srgbClr val="1A1A1A"/>
                 </a:solidFill>
-                <a:latin typeface="Century Schoolbook"/>
+                <a:latin typeface="Lexend"/>
               </a:rPr>
               <a:t>Example 2</a:t>
             </a:r>
@@ -4668,11 +4751,11 @@
           <a:p>
             <a:pPr algn="l"/>
             <a:r>
-              <a:rPr sz="1100" b="0" i="1">
+              <a:rPr sz="1040" b="0" i="0">
                 <a:solidFill>
                   <a:srgbClr val="6B6B6B"/>
                 </a:solidFill>
-                <a:latin typeface="Century Schoolbook"/>
+                <a:latin typeface="Lexend"/>
               </a:rPr>
               <a:t>Grade 7 Accelerated · Unit 3 · Lessons 6–7 — Evaluating and Equivalent Expressions</a:t>
             </a:r>
@@ -4703,11 +4786,11 @@
           <a:p>
             <a:pPr algn="r"/>
             <a:r>
-              <a:rPr sz="1100" b="0" i="0">
+              <a:rPr sz="1040" b="0" i="0">
                 <a:solidFill>
                   <a:srgbClr val="6B6B6B"/>
                 </a:solidFill>
-                <a:latin typeface="Century Schoolbook"/>
+                <a:latin typeface="Lexend"/>
               </a:rPr>
               <a:t>13</a:t>
             </a:r>
@@ -4716,7 +4799,7 @@
       </p:sp>
       <p:pic>
         <p:nvPicPr>
-          <p:cNvPr id="8" name="Picture 7" descr="9dc7ad07cd91fb8a.png"/>
+          <p:cNvPr id="8" name="Picture 7" descr="eb75ca0841ae7db7.png"/>
           <p:cNvPicPr>
             <a:picLocks noChangeAspect="1"/>
           </p:cNvPicPr>
@@ -4731,7 +4814,7 @@
         <p:spPr>
           <a:xfrm>
             <a:off x="1828800" y="1920240"/>
-            <a:ext cx="4267200" cy="347472"/>
+            <a:ext cx="4215384" cy="341376"/>
           </a:xfrm>
           <a:prstGeom prst="rect">
             <a:avLst/>
@@ -4740,7 +4823,7 @@
       </p:pic>
       <p:pic>
         <p:nvPicPr>
-          <p:cNvPr id="9" name="Picture 8" descr="77d3b6258368a7ab.png"/>
+          <p:cNvPr id="9" name="Picture 8" descr="ca38d42fdf4407a8.png"/>
           <p:cNvPicPr>
             <a:picLocks noChangeAspect="1"/>
           </p:cNvPicPr>
@@ -4754,8 +4837,8 @@
         </p:blipFill>
         <p:spPr>
           <a:xfrm>
-            <a:off x="1828800" y="2542032"/>
-            <a:ext cx="3883152" cy="874776"/>
+            <a:off x="1828800" y="2535936"/>
+            <a:ext cx="3864864" cy="859536"/>
           </a:xfrm>
           <a:prstGeom prst="rect">
             <a:avLst/>
@@ -4764,7 +4847,7 @@
       </p:pic>
       <p:pic>
         <p:nvPicPr>
-          <p:cNvPr id="10" name="Picture 9" descr="4af5e130ae69dded.png"/>
+          <p:cNvPr id="10" name="Picture 9" descr="3a6f019e256834ff.png"/>
           <p:cNvPicPr>
             <a:picLocks noChangeAspect="1"/>
           </p:cNvPicPr>
@@ -4778,8 +4861,8 @@
         </p:blipFill>
         <p:spPr>
           <a:xfrm>
-            <a:off x="1828800" y="3691127"/>
-            <a:ext cx="2295144" cy="347472"/>
+            <a:off x="1828800" y="3669792"/>
+            <a:ext cx="2289048" cy="338328"/>
           </a:xfrm>
           <a:prstGeom prst="rect">
             <a:avLst/>
@@ -4810,47 +4893,47 @@
           <a:p>
             <a:pPr algn="ctr"/>
             <a:r>
-              <a:rPr sz="3200" b="1" i="0">
+              <a:rPr sz="3040" b="1" i="0">
                 <a:solidFill>
                   <a:srgbClr val="9E1B32"/>
                 </a:solidFill>
-                <a:latin typeface="Century Schoolbook"/>
+                <a:latin typeface="Lexend"/>
               </a:rPr>
               <a:t>Answer:   Yes — both are 3</a:t>
             </a:r>
             <a:r>
-              <a:rPr sz="3200" b="1" i="0" baseline="30000">
+              <a:rPr sz="3040" b="1" i="0" baseline="30000">
                 <a:solidFill>
                   <a:srgbClr val="9E1B32"/>
                 </a:solidFill>
-                <a:latin typeface="Century Schoolbook"/>
+                <a:latin typeface="Lexend"/>
               </a:rPr>
               <a:t>5</a:t>
             </a:r>
             <a:r>
-              <a:rPr sz="3200" b="1" i="0">
+              <a:rPr sz="3040" b="1" i="0">
                 <a:solidFill>
                   <a:srgbClr val="9E1B32"/>
                 </a:solidFill>
-                <a:latin typeface="Century Schoolbook"/>
+                <a:latin typeface="Lexend"/>
               </a:rPr>
               <a:t> · 2</a:t>
             </a:r>
             <a:r>
-              <a:rPr sz="3200" b="1" i="0" baseline="30000">
+              <a:rPr sz="3040" b="1" i="0" baseline="30000">
                 <a:solidFill>
                   <a:srgbClr val="9E1B32"/>
                 </a:solidFill>
-                <a:latin typeface="Century Schoolbook"/>
+                <a:latin typeface="Lexend"/>
               </a:rPr>
               <a:t>3</a:t>
             </a:r>
             <a:r>
-              <a:rPr sz="3200" b="1" i="0">
+              <a:rPr sz="3040" b="1" i="0">
                 <a:solidFill>
                   <a:srgbClr val="9E1B32"/>
                 </a:solidFill>
-                <a:latin typeface="Century Schoolbook"/>
+                <a:latin typeface="Lexend"/>
               </a:rPr>
               <a:t> = 1944</a:t>
             </a:r>
@@ -4899,11 +4982,11 @@
           <a:p>
             <a:pPr algn="l"/>
             <a:r>
-              <a:rPr sz="3600" b="1" i="0">
+              <a:rPr sz="3420" b="1" i="0">
                 <a:solidFill>
                   <a:srgbClr val="1A1A1A"/>
                 </a:solidFill>
-                <a:latin typeface="Century Schoolbook"/>
+                <a:latin typeface="Lexend"/>
               </a:rPr>
               <a:t>Your Turn</a:t>
             </a:r>
@@ -5039,11 +5122,11 @@
           <a:p>
             <a:pPr algn="l"/>
             <a:r>
-              <a:rPr sz="1100" b="0" i="1">
+              <a:rPr sz="1040" b="0" i="0">
                 <a:solidFill>
                   <a:srgbClr val="6B6B6B"/>
                 </a:solidFill>
-                <a:latin typeface="Century Schoolbook"/>
+                <a:latin typeface="Lexend"/>
               </a:rPr>
               <a:t>Grade 7 Accelerated · Unit 3 · Lessons 6–7 — Evaluating and Equivalent Expressions</a:t>
             </a:r>
@@ -5074,11 +5157,11 @@
           <a:p>
             <a:pPr algn="r"/>
             <a:r>
-              <a:rPr sz="1100" b="0" i="0">
+              <a:rPr sz="1040" b="0" i="0">
                 <a:solidFill>
                   <a:srgbClr val="6B6B6B"/>
                 </a:solidFill>
-                <a:latin typeface="Century Schoolbook"/>
+                <a:latin typeface="Lexend"/>
               </a:rPr>
               <a:t>14</a:t>
             </a:r>
@@ -5093,8 +5176,8 @@
         </p:nvSpPr>
         <p:spPr>
           <a:xfrm>
-            <a:off x="2676633" y="2516124"/>
-            <a:ext cx="988005" cy="457200"/>
+            <a:off x="2657831" y="1909572"/>
+            <a:ext cx="950819" cy="457200"/>
           </a:xfrm>
           <a:prstGeom prst="rect">
             <a:avLst/>
@@ -5109,11 +5192,11 @@
           <a:p>
             <a:pPr algn="l"/>
             <a:r>
-              <a:rPr sz="2600" b="0" i="0">
+              <a:rPr sz="2470" b="0" i="0">
                 <a:solidFill>
                   <a:srgbClr val="1A1A1A"/>
                 </a:solidFill>
-                <a:latin typeface="Century Schoolbook"/>
+                <a:latin typeface="Lexend"/>
               </a:rPr>
               <a:t>Are  </a:t>
             </a:r>
@@ -5122,7 +5205,7 @@
       </p:sp>
       <p:pic>
         <p:nvPicPr>
-          <p:cNvPr id="9" name="Picture 8" descr="9b99919743149311.png"/>
+          <p:cNvPr id="9" name="Picture 8" descr="84aa90b249340bc3.png"/>
           <p:cNvPicPr>
             <a:picLocks noChangeAspect="1"/>
           </p:cNvPicPr>
@@ -5136,8 +5219,8 @@
         </p:blipFill>
         <p:spPr>
           <a:xfrm>
-            <a:off x="3527478" y="2528315"/>
-            <a:ext cx="1411224" cy="432816"/>
+            <a:off x="3471490" y="1926335"/>
+            <a:ext cx="1441704" cy="423672"/>
           </a:xfrm>
           <a:prstGeom prst="rect">
             <a:avLst/>
@@ -5152,8 +5235,8 @@
         </p:nvSpPr>
         <p:spPr>
           <a:xfrm>
-            <a:off x="4938702" y="2516124"/>
-            <a:ext cx="1208866" cy="457200"/>
+            <a:off x="4913194" y="1909572"/>
+            <a:ext cx="1201901" cy="457200"/>
           </a:xfrm>
           <a:prstGeom prst="rect">
             <a:avLst/>
@@ -5168,11 +5251,11 @@
           <a:p>
             <a:pPr algn="l"/>
             <a:r>
-              <a:rPr sz="2600" b="0" i="0">
+              <a:rPr sz="2470" b="0" i="0">
                 <a:solidFill>
                   <a:srgbClr val="1A1A1A"/>
                 </a:solidFill>
-                <a:latin typeface="Century Schoolbook"/>
+                <a:latin typeface="Lexend"/>
               </a:rPr>
               <a:t>  and  </a:t>
             </a:r>
@@ -5181,7 +5264,7 @@
       </p:sp>
       <p:pic>
         <p:nvPicPr>
-          <p:cNvPr id="11" name="Picture 10" descr="e566d1e7830f898c.png"/>
+          <p:cNvPr id="11" name="Picture 10" descr="93c2bf6d51952a81.png"/>
           <p:cNvPicPr>
             <a:picLocks noChangeAspect="1"/>
           </p:cNvPicPr>
@@ -5195,8 +5278,8 @@
         </p:blipFill>
         <p:spPr>
           <a:xfrm>
-            <a:off x="6010408" y="2194560"/>
-            <a:ext cx="1350264" cy="1100328"/>
+            <a:off x="5977936" y="1600200"/>
+            <a:ext cx="1402080" cy="1075944"/>
           </a:xfrm>
           <a:prstGeom prst="rect">
             <a:avLst/>
@@ -5211,8 +5294,8 @@
         </p:nvSpPr>
         <p:spPr>
           <a:xfrm>
-            <a:off x="7360672" y="2516124"/>
-            <a:ext cx="2261373" cy="457200"/>
+            <a:off x="7380016" y="1909572"/>
+            <a:ext cx="2260832" cy="457200"/>
           </a:xfrm>
           <a:prstGeom prst="rect">
             <a:avLst/>
@@ -5227,11 +5310,11 @@
           <a:p>
             <a:pPr algn="l"/>
             <a:r>
-              <a:rPr sz="2600" b="0" i="0">
+              <a:rPr sz="2470" b="0" i="0">
                 <a:solidFill>
                   <a:srgbClr val="1A1A1A"/>
                 </a:solidFill>
-                <a:latin typeface="Century Schoolbook"/>
+                <a:latin typeface="Lexend"/>
               </a:rPr>
               <a:t>  equivalent?</a:t>
             </a:r>
@@ -5280,11 +5363,11 @@
           <a:p>
             <a:pPr algn="l"/>
             <a:r>
-              <a:rPr sz="3600" b="1" i="0">
+              <a:rPr sz="3420" b="1" i="0">
                 <a:solidFill>
                   <a:srgbClr val="1A1A1A"/>
                 </a:solidFill>
-                <a:latin typeface="Century Schoolbook"/>
+                <a:latin typeface="Lexend"/>
               </a:rPr>
               <a:t>Your Turn</a:t>
             </a:r>
@@ -5420,11 +5503,11 @@
           <a:p>
             <a:pPr algn="l"/>
             <a:r>
-              <a:rPr sz="1100" b="0" i="1">
+              <a:rPr sz="1040" b="0" i="0">
                 <a:solidFill>
                   <a:srgbClr val="6B6B6B"/>
                 </a:solidFill>
-                <a:latin typeface="Century Schoolbook"/>
+                <a:latin typeface="Lexend"/>
               </a:rPr>
               <a:t>Grade 7 Accelerated · Unit 3 · Lessons 6–7 — Evaluating and Equivalent Expressions</a:t>
             </a:r>
@@ -5455,11 +5538,11 @@
           <a:p>
             <a:pPr algn="r"/>
             <a:r>
-              <a:rPr sz="1100" b="0" i="0">
+              <a:rPr sz="1040" b="0" i="0">
                 <a:solidFill>
                   <a:srgbClr val="6B6B6B"/>
                 </a:solidFill>
-                <a:latin typeface="Century Schoolbook"/>
+                <a:latin typeface="Lexend"/>
               </a:rPr>
               <a:t>15</a:t>
             </a:r>
@@ -5474,8 +5557,8 @@
         </p:nvSpPr>
         <p:spPr>
           <a:xfrm>
-            <a:off x="2678157" y="2516124"/>
-            <a:ext cx="988005" cy="457200"/>
+            <a:off x="2659355" y="1909572"/>
+            <a:ext cx="950819" cy="457200"/>
           </a:xfrm>
           <a:prstGeom prst="rect">
             <a:avLst/>
@@ -5490,11 +5573,11 @@
           <a:p>
             <a:pPr algn="l"/>
             <a:r>
-              <a:rPr sz="2600" b="0" i="0">
+              <a:rPr sz="2470" b="0" i="0">
                 <a:solidFill>
                   <a:srgbClr val="1A1A1A"/>
                 </a:solidFill>
-                <a:latin typeface="Century Schoolbook"/>
+                <a:latin typeface="Lexend"/>
               </a:rPr>
               <a:t>Are  </a:t>
             </a:r>
@@ -5503,7 +5586,7 @@
       </p:sp>
       <p:pic>
         <p:nvPicPr>
-          <p:cNvPr id="9" name="Picture 8" descr="7788e03876974ccc.png"/>
+          <p:cNvPr id="9" name="Picture 8" descr="6bdebf666f4e845e.png"/>
           <p:cNvPicPr>
             <a:picLocks noChangeAspect="1"/>
           </p:cNvPicPr>
@@ -5517,8 +5600,8 @@
         </p:blipFill>
         <p:spPr>
           <a:xfrm>
-            <a:off x="3529002" y="2529840"/>
-            <a:ext cx="1411224" cy="429768"/>
+            <a:off x="3473014" y="1926335"/>
+            <a:ext cx="1444752" cy="423672"/>
           </a:xfrm>
           <a:prstGeom prst="rect">
             <a:avLst/>
@@ -5533,8 +5616,8 @@
         </p:nvSpPr>
         <p:spPr>
           <a:xfrm>
-            <a:off x="4940226" y="2516124"/>
-            <a:ext cx="1208866" cy="457200"/>
+            <a:off x="4917766" y="1909572"/>
+            <a:ext cx="1201901" cy="457200"/>
           </a:xfrm>
           <a:prstGeom prst="rect">
             <a:avLst/>
@@ -5549,11 +5632,11 @@
           <a:p>
             <a:pPr algn="l"/>
             <a:r>
-              <a:rPr sz="2600" b="0" i="0">
+              <a:rPr sz="2470" b="0" i="0">
                 <a:solidFill>
                   <a:srgbClr val="1A1A1A"/>
                 </a:solidFill>
-                <a:latin typeface="Century Schoolbook"/>
+                <a:latin typeface="Lexend"/>
               </a:rPr>
               <a:t>  and  </a:t>
             </a:r>
@@ -5562,7 +5645,7 @@
       </p:sp>
       <p:pic>
         <p:nvPicPr>
-          <p:cNvPr id="11" name="Picture 10" descr="b7201d2b15f8c86f.png"/>
+          <p:cNvPr id="11" name="Picture 10" descr="11cdaf58cd65ade7.png"/>
           <p:cNvPicPr>
             <a:picLocks noChangeAspect="1"/>
           </p:cNvPicPr>
@@ -5576,8 +5659,8 @@
         </p:blipFill>
         <p:spPr>
           <a:xfrm>
-            <a:off x="6011932" y="2194560"/>
-            <a:ext cx="1347216" cy="1100328"/>
+            <a:off x="5982508" y="1600200"/>
+            <a:ext cx="1395984" cy="1075944"/>
           </a:xfrm>
           <a:prstGeom prst="rect">
             <a:avLst/>
@@ -5592,8 +5675,8 @@
         </p:nvSpPr>
         <p:spPr>
           <a:xfrm>
-            <a:off x="7359148" y="2516124"/>
-            <a:ext cx="2261373" cy="457200"/>
+            <a:off x="7378492" y="1909572"/>
+            <a:ext cx="2260832" cy="457200"/>
           </a:xfrm>
           <a:prstGeom prst="rect">
             <a:avLst/>
@@ -5608,26 +5691,98 @@
           <a:p>
             <a:pPr algn="l"/>
             <a:r>
-              <a:rPr sz="2600" b="0" i="0">
+              <a:rPr sz="2470" b="0" i="0">
                 <a:solidFill>
                   <a:srgbClr val="1A1A1A"/>
                 </a:solidFill>
-                <a:latin typeface="Century Schoolbook"/>
+                <a:latin typeface="Lexend"/>
               </a:rPr>
               <a:t>  equivalent?</a:t>
             </a:r>
           </a:p>
         </p:txBody>
       </p:sp>
-      <p:sp>
-        <p:nvSpPr>
-          <p:cNvPr id="13" name="TextBox 12"/>
-          <p:cNvSpPr txBox="1"/>
-          <p:nvPr/>
-        </p:nvSpPr>
-        <p:spPr>
-          <a:xfrm>
-            <a:off x="777240" y="4572000"/>
+      <p:pic>
+        <p:nvPicPr>
+          <p:cNvPr id="13" name="Picture 12" descr="12bc1171b09321aa.png"/>
+          <p:cNvPicPr>
+            <a:picLocks noChangeAspect="1"/>
+          </p:cNvPicPr>
+          <p:nvPr/>
+        </p:nvPicPr>
+        <p:blipFill>
+          <a:blip r:embed="rId4"/>
+          <a:stretch>
+            <a:fillRect/>
+          </a:stretch>
+        </p:blipFill>
+        <p:spPr>
+          <a:xfrm>
+            <a:off x="4427219" y="3144012"/>
+            <a:ext cx="3416808" cy="262128"/>
+          </a:xfrm>
+          <a:prstGeom prst="rect">
+            <a:avLst/>
+          </a:prstGeom>
+        </p:spPr>
+      </p:pic>
+      <p:pic>
+        <p:nvPicPr>
+          <p:cNvPr id="14" name="Picture 13" descr="971ad3431ee49ffc.png"/>
+          <p:cNvPicPr>
+            <a:picLocks noChangeAspect="1"/>
+          </p:cNvPicPr>
+          <p:nvPr/>
+        </p:nvPicPr>
+        <p:blipFill>
+          <a:blip r:embed="rId5"/>
+          <a:stretch>
+            <a:fillRect/>
+          </a:stretch>
+        </p:blipFill>
+        <p:spPr>
+          <a:xfrm>
+            <a:off x="4427219" y="3572256"/>
+            <a:ext cx="2996184" cy="658368"/>
+          </a:xfrm>
+          <a:prstGeom prst="rect">
+            <a:avLst/>
+          </a:prstGeom>
+        </p:spPr>
+      </p:pic>
+      <p:pic>
+        <p:nvPicPr>
+          <p:cNvPr id="15" name="Picture 14" descr="1bb9b59be4ff3056.png"/>
+          <p:cNvPicPr>
+            <a:picLocks noChangeAspect="1"/>
+          </p:cNvPicPr>
+          <p:nvPr/>
+        </p:nvPicPr>
+        <p:blipFill>
+          <a:blip r:embed="rId6"/>
+          <a:stretch>
+            <a:fillRect/>
+          </a:stretch>
+        </p:blipFill>
+        <p:spPr>
+          <a:xfrm>
+            <a:off x="4427219" y="4372356"/>
+            <a:ext cx="3063240" cy="310896"/>
+          </a:xfrm>
+          <a:prstGeom prst="rect">
+            <a:avLst/>
+          </a:prstGeom>
+        </p:spPr>
+      </p:pic>
+      <p:sp>
+        <p:nvSpPr>
+          <p:cNvPr id="16" name="TextBox 15"/>
+          <p:cNvSpPr txBox="1"/>
+          <p:nvPr/>
+        </p:nvSpPr>
+        <p:spPr>
+          <a:xfrm>
+            <a:off x="777240" y="4870704"/>
             <a:ext cx="10607040" cy="548640"/>
           </a:xfrm>
           <a:prstGeom prst="rect">
@@ -5643,47 +5798,47 @@
           <a:p>
             <a:pPr algn="ctr"/>
             <a:r>
-              <a:rPr sz="3200" b="1" i="0">
+              <a:rPr sz="3040" b="1" i="0">
                 <a:solidFill>
                   <a:srgbClr val="9E1B32"/>
                 </a:solidFill>
-                <a:latin typeface="Century Schoolbook"/>
+                <a:latin typeface="Lexend"/>
               </a:rPr>
               <a:t>Answer:   Yes — 2</a:t>
             </a:r>
             <a:r>
-              <a:rPr sz="3200" b="1" i="0" baseline="30000">
+              <a:rPr sz="3040" b="1" i="0" baseline="30000">
                 <a:solidFill>
                   <a:srgbClr val="9E1B32"/>
                 </a:solidFill>
-                <a:latin typeface="Century Schoolbook"/>
+                <a:latin typeface="Lexend"/>
               </a:rPr>
               <a:t>5</a:t>
             </a:r>
             <a:r>
-              <a:rPr sz="3200" b="1" i="0">
+              <a:rPr sz="3040" b="1" i="0">
                 <a:solidFill>
                   <a:srgbClr val="9E1B32"/>
                 </a:solidFill>
-                <a:latin typeface="Century Schoolbook"/>
+                <a:latin typeface="Lexend"/>
               </a:rPr>
               <a:t> · 5</a:t>
             </a:r>
             <a:r>
-              <a:rPr sz="3200" b="1" i="0" baseline="30000">
+              <a:rPr sz="3040" b="1" i="0" baseline="30000">
                 <a:solidFill>
                   <a:srgbClr val="9E1B32"/>
                 </a:solidFill>
-                <a:latin typeface="Century Schoolbook"/>
+                <a:latin typeface="Lexend"/>
               </a:rPr>
               <a:t>3</a:t>
             </a:r>
             <a:r>
-              <a:rPr sz="3200" b="1" i="0">
+              <a:rPr sz="3040" b="1" i="0">
                 <a:solidFill>
                   <a:srgbClr val="9E1B32"/>
                 </a:solidFill>
-                <a:latin typeface="Century Schoolbook"/>
+                <a:latin typeface="Lexend"/>
               </a:rPr>
               <a:t> = 4000</a:t>
             </a:r>
@@ -5732,11 +5887,11 @@
           <a:p>
             <a:pPr algn="l"/>
             <a:r>
-              <a:rPr sz="3400" b="1" i="0">
+              <a:rPr sz="3229" b="1" i="0">
                 <a:solidFill>
                   <a:srgbClr val="1A1A1A"/>
                 </a:solidFill>
-                <a:latin typeface="Century Schoolbook"/>
+                <a:latin typeface="Lexend"/>
               </a:rPr>
               <a:t>Whiteboards   ·   Question 1 of 9</a:t>
             </a:r>
@@ -5872,11 +6027,11 @@
           <a:p>
             <a:pPr algn="l"/>
             <a:r>
-              <a:rPr sz="1100" b="0" i="1">
+              <a:rPr sz="1040" b="0" i="0">
                 <a:solidFill>
                   <a:srgbClr val="6B6B6B"/>
                 </a:solidFill>
-                <a:latin typeface="Century Schoolbook"/>
+                <a:latin typeface="Lexend"/>
               </a:rPr>
               <a:t>Grade 7 Accelerated · Unit 3 · Lessons 6–7 — Evaluating and Equivalent Expressions</a:t>
             </a:r>
@@ -5907,11 +6062,11 @@
           <a:p>
             <a:pPr algn="r"/>
             <a:r>
-              <a:rPr sz="1100" b="0" i="0">
+              <a:rPr sz="1040" b="0" i="0">
                 <a:solidFill>
                   <a:srgbClr val="6B6B6B"/>
                 </a:solidFill>
-                <a:latin typeface="Century Schoolbook"/>
+                <a:latin typeface="Lexend"/>
               </a:rPr>
               <a:t>16</a:t>
             </a:r>
@@ -5920,7 +6075,7 @@
       </p:sp>
       <p:pic>
         <p:nvPicPr>
-          <p:cNvPr id="8" name="Picture 7" descr="61e8ec21e00a8963.png"/>
+          <p:cNvPr id="8" name="Picture 7" descr="98d5033541346726.png"/>
           <p:cNvPicPr>
             <a:picLocks noChangeAspect="1"/>
           </p:cNvPicPr>
@@ -5934,8 +6089,8 @@
         </p:blipFill>
         <p:spPr>
           <a:xfrm>
-            <a:off x="4783836" y="2194560"/>
-            <a:ext cx="2593848" cy="1188720"/>
+            <a:off x="4823459" y="2194560"/>
+            <a:ext cx="2514600" cy="1164336"/>
           </a:xfrm>
           <a:prstGeom prst="rect">
             <a:avLst/>
@@ -5966,11 +6121,11 @@
           <a:p>
             <a:pPr algn="ctr"/>
             <a:r>
-              <a:rPr sz="2600" b="1" i="0">
+              <a:rPr sz="2470" b="1" i="0">
                 <a:solidFill>
                   <a:srgbClr val="1A1A1A"/>
                 </a:solidFill>
-                <a:latin typeface="Century Schoolbook"/>
+                <a:latin typeface="Lexend"/>
               </a:rPr>
               <a:t>Answer it.</a:t>
             </a:r>
@@ -6019,11 +6174,11 @@
           <a:p>
             <a:pPr algn="l"/>
             <a:r>
-              <a:rPr sz="3400" b="1" i="0">
+              <a:rPr sz="3229" b="1" i="0">
                 <a:solidFill>
                   <a:srgbClr val="1A1A1A"/>
                 </a:solidFill>
-                <a:latin typeface="Century Schoolbook"/>
+                <a:latin typeface="Lexend"/>
               </a:rPr>
               <a:t>Whiteboards   ·   Question 1 of 9</a:t>
             </a:r>
@@ -6159,11 +6314,11 @@
           <a:p>
             <a:pPr algn="l"/>
             <a:r>
-              <a:rPr sz="1100" b="0" i="1">
+              <a:rPr sz="1040" b="0" i="0">
                 <a:solidFill>
                   <a:srgbClr val="6B6B6B"/>
                 </a:solidFill>
-                <a:latin typeface="Century Schoolbook"/>
+                <a:latin typeface="Lexend"/>
               </a:rPr>
               <a:t>Grade 7 Accelerated · Unit 3 · Lessons 6–7 — Evaluating and Equivalent Expressions</a:t>
             </a:r>
@@ -6194,11 +6349,11 @@
           <a:p>
             <a:pPr algn="r"/>
             <a:r>
-              <a:rPr sz="1100" b="0" i="0">
+              <a:rPr sz="1040" b="0" i="0">
                 <a:solidFill>
                   <a:srgbClr val="6B6B6B"/>
                 </a:solidFill>
-                <a:latin typeface="Century Schoolbook"/>
+                <a:latin typeface="Lexend"/>
               </a:rPr>
               <a:t>17</a:t>
             </a:r>
@@ -6207,7 +6362,7 @@
       </p:sp>
       <p:pic>
         <p:nvPicPr>
-          <p:cNvPr id="8" name="Picture 7" descr="956b769eca71d99b.png"/>
+          <p:cNvPr id="8" name="Picture 7" descr="9efbb2c592ceee74.png"/>
           <p:cNvPicPr>
             <a:picLocks noChangeAspect="1"/>
           </p:cNvPicPr>
@@ -6221,8 +6376,8 @@
         </p:blipFill>
         <p:spPr>
           <a:xfrm>
-            <a:off x="4786883" y="2103120"/>
-            <a:ext cx="2587752" cy="1188720"/>
+            <a:off x="4826507" y="2103120"/>
+            <a:ext cx="2508504" cy="1164336"/>
           </a:xfrm>
           <a:prstGeom prst="rect">
             <a:avLst/>
@@ -6237,7 +6392,90 @@
         </p:nvSpPr>
         <p:spPr>
           <a:xfrm>
-            <a:off x="777240" y="4663440"/>
+            <a:off x="3776094" y="3546348"/>
+            <a:ext cx="1835651" cy="457200"/>
+          </a:xfrm>
+          <a:prstGeom prst="rect">
+            <a:avLst/>
+          </a:prstGeom>
+          <a:noFill/>
+        </p:spPr>
+        <p:txBody>
+          <a:bodyPr wrap="none" lIns="45720" rIns="45720" tIns="18288" bIns="18288" anchor="ctr">
+            <a:noAutofit/>
+          </a:bodyPr>
+          <a:lstStyle/>
+          <a:p>
+            <a:pPr algn="l"/>
+            <a:r>
+              <a:rPr sz="2750" b="0" i="0">
+                <a:solidFill>
+                  <a:srgbClr val="1A1A1A"/>
+                </a:solidFill>
+                <a:latin typeface="Lexend"/>
+              </a:rPr>
+              <a:t>Bottom:  </a:t>
+            </a:r>
+          </a:p>
+        </p:txBody>
+      </p:sp>
+      <p:pic>
+        <p:nvPicPr>
+          <p:cNvPr id="10" name="Picture 9" descr="0d57b7d41c345ae0.png"/>
+          <p:cNvPicPr>
+            <a:picLocks noChangeAspect="1"/>
+          </p:cNvPicPr>
+          <p:nvPr/>
+        </p:nvPicPr>
+        <p:blipFill>
+          <a:blip r:embed="rId3"/>
+          <a:stretch>
+            <a:fillRect/>
+          </a:stretch>
+        </p:blipFill>
+        <p:spPr>
+          <a:xfrm>
+            <a:off x="5474585" y="3589020"/>
+            <a:ext cx="2910840" cy="371856"/>
+          </a:xfrm>
+          <a:prstGeom prst="rect">
+            <a:avLst/>
+          </a:prstGeom>
+        </p:spPr>
+      </p:pic>
+      <p:pic>
+        <p:nvPicPr>
+          <p:cNvPr id="11" name="Picture 10" descr="3ca69b29105dbe94.png"/>
+          <p:cNvPicPr>
+            <a:picLocks noChangeAspect="1"/>
+          </p:cNvPicPr>
+          <p:nvPr/>
+        </p:nvPicPr>
+        <p:blipFill>
+          <a:blip r:embed="rId4"/>
+          <a:stretch>
+            <a:fillRect/>
+          </a:stretch>
+        </p:blipFill>
+        <p:spPr>
+          <a:xfrm>
+            <a:off x="3830958" y="4108704"/>
+            <a:ext cx="4559808" cy="847344"/>
+          </a:xfrm>
+          <a:prstGeom prst="rect">
+            <a:avLst/>
+          </a:prstGeom>
+        </p:spPr>
+      </p:pic>
+      <p:sp>
+        <p:nvSpPr>
+          <p:cNvPr id="12" name="TextBox 11"/>
+          <p:cNvSpPr txBox="1"/>
+          <p:nvPr/>
+        </p:nvSpPr>
+        <p:spPr>
+          <a:xfrm>
+            <a:off x="777240" y="5093208"/>
             <a:ext cx="10607040" cy="548640"/>
           </a:xfrm>
           <a:prstGeom prst="rect">
@@ -6253,11 +6491,11 @@
           <a:p>
             <a:pPr algn="ctr"/>
             <a:r>
-              <a:rPr sz="3200" b="1" i="0">
+              <a:rPr sz="3040" b="1" i="0">
                 <a:solidFill>
                   <a:srgbClr val="9E1B32"/>
                 </a:solidFill>
-                <a:latin typeface="Century Schoolbook"/>
+                <a:latin typeface="Lexend"/>
               </a:rPr>
               <a:t>Answer:   −343</a:t>
             </a:r>
@@ -6306,11 +6544,11 @@
           <a:p>
             <a:pPr algn="l"/>
             <a:r>
-              <a:rPr sz="3400" b="1" i="0">
+              <a:rPr sz="3229" b="1" i="0">
                 <a:solidFill>
                   <a:srgbClr val="1A1A1A"/>
                 </a:solidFill>
-                <a:latin typeface="Century Schoolbook"/>
+                <a:latin typeface="Lexend"/>
               </a:rPr>
               <a:t>Whiteboards   ·   Question 2 of 9</a:t>
             </a:r>
@@ -6446,11 +6684,11 @@
           <a:p>
             <a:pPr algn="l"/>
             <a:r>
-              <a:rPr sz="1100" b="0" i="1">
+              <a:rPr sz="1040" b="0" i="0">
                 <a:solidFill>
                   <a:srgbClr val="6B6B6B"/>
                 </a:solidFill>
-                <a:latin typeface="Century Schoolbook"/>
+                <a:latin typeface="Lexend"/>
               </a:rPr>
               <a:t>Grade 7 Accelerated · Unit 3 · Lessons 6–7 — Evaluating and Equivalent Expressions</a:t>
             </a:r>
@@ -6481,11 +6719,11 @@
           <a:p>
             <a:pPr algn="r"/>
             <a:r>
-              <a:rPr sz="1100" b="0" i="0">
+              <a:rPr sz="1040" b="0" i="0">
                 <a:solidFill>
                   <a:srgbClr val="6B6B6B"/>
                 </a:solidFill>
-                <a:latin typeface="Century Schoolbook"/>
+                <a:latin typeface="Lexend"/>
               </a:rPr>
               <a:t>18</a:t>
             </a:r>
@@ -6494,7 +6732,7 @@
       </p:sp>
       <p:pic>
         <p:nvPicPr>
-          <p:cNvPr id="8" name="Picture 7" descr="5a81991eb38a0b9a.png"/>
+          <p:cNvPr id="8" name="Picture 7" descr="f80d8fff5950e22f.png"/>
           <p:cNvPicPr>
             <a:picLocks noChangeAspect="1"/>
           </p:cNvPicPr>
@@ -6508,8 +6746,8 @@
         </p:blipFill>
         <p:spPr>
           <a:xfrm>
-            <a:off x="4733543" y="2194560"/>
-            <a:ext cx="2694432" cy="1865376"/>
+            <a:off x="4724399" y="1645920"/>
+            <a:ext cx="2712720" cy="1819656"/>
           </a:xfrm>
           <a:prstGeom prst="rect">
             <a:avLst/>
@@ -6524,7 +6762,7 @@
         </p:nvSpPr>
         <p:spPr>
           <a:xfrm>
-            <a:off x="777240" y="4425696"/>
+            <a:off x="777240" y="4343400"/>
             <a:ext cx="10607040" cy="457200"/>
           </a:xfrm>
           <a:prstGeom prst="rect">
@@ -6540,11 +6778,11 @@
           <a:p>
             <a:pPr algn="ctr"/>
             <a:r>
-              <a:rPr sz="2600" b="1" i="0">
+              <a:rPr sz="2470" b="1" i="0">
                 <a:solidFill>
                   <a:srgbClr val="1A1A1A"/>
                 </a:solidFill>
-                <a:latin typeface="Century Schoolbook"/>
+                <a:latin typeface="Lexend"/>
               </a:rPr>
               <a:t>Answer it.</a:t>
             </a:r>
@@ -6593,11 +6831,11 @@
           <a:p>
             <a:pPr algn="l"/>
             <a:r>
-              <a:rPr sz="3400" b="1" i="0">
+              <a:rPr sz="3229" b="1" i="0">
                 <a:solidFill>
                   <a:srgbClr val="1A1A1A"/>
                 </a:solidFill>
-                <a:latin typeface="Century Schoolbook"/>
+                <a:latin typeface="Lexend"/>
               </a:rPr>
               <a:t>Whiteboards   ·   Question 2 of 9</a:t>
             </a:r>
@@ -6733,11 +6971,11 @@
           <a:p>
             <a:pPr algn="l"/>
             <a:r>
-              <a:rPr sz="1100" b="0" i="1">
+              <a:rPr sz="1040" b="0" i="0">
                 <a:solidFill>
                   <a:srgbClr val="6B6B6B"/>
                 </a:solidFill>
-                <a:latin typeface="Century Schoolbook"/>
+                <a:latin typeface="Lexend"/>
               </a:rPr>
               <a:t>Grade 7 Accelerated · Unit 3 · Lessons 6–7 — Evaluating and Equivalent Expressions</a:t>
             </a:r>
@@ -6768,11 +7006,11 @@
           <a:p>
             <a:pPr algn="r"/>
             <a:r>
-              <a:rPr sz="1100" b="0" i="0">
+              <a:rPr sz="1040" b="0" i="0">
                 <a:solidFill>
                   <a:srgbClr val="6B6B6B"/>
                 </a:solidFill>
-                <a:latin typeface="Century Schoolbook"/>
+                <a:latin typeface="Lexend"/>
               </a:rPr>
               <a:t>19</a:t>
             </a:r>
@@ -6781,7 +7019,7 @@
       </p:sp>
       <p:pic>
         <p:nvPicPr>
-          <p:cNvPr id="8" name="Picture 7" descr="b34bc56ecccd0f00.png"/>
+          <p:cNvPr id="8" name="Picture 7" descr="18b7b58559baeb07.png"/>
           <p:cNvPicPr>
             <a:picLocks noChangeAspect="1"/>
           </p:cNvPicPr>
@@ -6795,8 +7033,8 @@
         </p:blipFill>
         <p:spPr>
           <a:xfrm>
-            <a:off x="4735067" y="2103120"/>
-            <a:ext cx="2691384" cy="1871472"/>
+            <a:off x="4727448" y="1645920"/>
+            <a:ext cx="2706624" cy="1819656"/>
           </a:xfrm>
           <a:prstGeom prst="rect">
             <a:avLst/>
@@ -6811,36 +7049,36 @@
         </p:nvSpPr>
         <p:spPr>
           <a:xfrm>
-            <a:off x="4991100" y="4815840"/>
-            <a:ext cx="1920240" cy="548640"/>
-          </a:xfrm>
-          <a:prstGeom prst="rect">
-            <a:avLst/>
-          </a:prstGeom>
-          <a:noFill/>
-        </p:spPr>
-        <p:txBody>
-          <a:bodyPr wrap="square" lIns="45720" rIns="45720" tIns="18288" bIns="18288" anchor="ctr">
-            <a:spAutoFit/>
+            <a:off x="3999824" y="3840480"/>
+            <a:ext cx="1141303" cy="457200"/>
+          </a:xfrm>
+          <a:prstGeom prst="rect">
+            <a:avLst/>
+          </a:prstGeom>
+          <a:noFill/>
+        </p:spPr>
+        <p:txBody>
+          <a:bodyPr wrap="none" lIns="45720" rIns="45720" tIns="18288" bIns="18288" anchor="ctr">
+            <a:noAutofit/>
           </a:bodyPr>
           <a:lstStyle/>
           <a:p>
             <a:pPr algn="l"/>
             <a:r>
-              <a:rPr sz="3200" b="1" i="0">
-                <a:solidFill>
-                  <a:srgbClr val="9E1B32"/>
-                </a:solidFill>
-                <a:latin typeface="Century Schoolbook"/>
-              </a:rPr>
-              <a:t>Answer:</a:t>
+              <a:rPr sz="2750" b="0" i="0">
+                <a:solidFill>
+                  <a:srgbClr val="1A1A1A"/>
+                </a:solidFill>
+                <a:latin typeface="Lexend"/>
+              </a:rPr>
+              <a:t>Top:  </a:t>
             </a:r>
           </a:p>
         </p:txBody>
       </p:sp>
       <p:pic>
         <p:nvPicPr>
-          <p:cNvPr id="10" name="Picture 9" descr="6d9a31f1d02f3151.png"/>
+          <p:cNvPr id="10" name="Picture 9" descr="fc033812d8695622.png"/>
           <p:cNvPicPr>
             <a:picLocks noChangeAspect="1"/>
           </p:cNvPicPr>
@@ -6854,8 +7092,91 @@
         </p:blipFill>
         <p:spPr>
           <a:xfrm>
-            <a:off x="6911340" y="4663440"/>
-            <a:ext cx="259080" cy="853440"/>
+            <a:off x="5003967" y="3767328"/>
+            <a:ext cx="3163824" cy="603504"/>
+          </a:xfrm>
+          <a:prstGeom prst="rect">
+            <a:avLst/>
+          </a:prstGeom>
+        </p:spPr>
+      </p:pic>
+      <p:pic>
+        <p:nvPicPr>
+          <p:cNvPr id="11" name="Picture 10" descr="586b82ff05c6f1df.png"/>
+          <p:cNvPicPr>
+            <a:picLocks noChangeAspect="1"/>
+          </p:cNvPicPr>
+          <p:nvPr/>
+        </p:nvPicPr>
+        <p:blipFill>
+          <a:blip r:embed="rId4"/>
+          <a:stretch>
+            <a:fillRect/>
+          </a:stretch>
+        </p:blipFill>
+        <p:spPr>
+          <a:xfrm>
+            <a:off x="4054688" y="4498848"/>
+            <a:ext cx="3377184" cy="606552"/>
+          </a:xfrm>
+          <a:prstGeom prst="rect">
+            <a:avLst/>
+          </a:prstGeom>
+        </p:spPr>
+      </p:pic>
+      <p:sp>
+        <p:nvSpPr>
+          <p:cNvPr id="12" name="TextBox 11"/>
+          <p:cNvSpPr txBox="1"/>
+          <p:nvPr/>
+        </p:nvSpPr>
+        <p:spPr>
+          <a:xfrm>
+            <a:off x="4968239" y="5384292"/>
+            <a:ext cx="1920240" cy="548640"/>
+          </a:xfrm>
+          <a:prstGeom prst="rect">
+            <a:avLst/>
+          </a:prstGeom>
+          <a:noFill/>
+        </p:spPr>
+        <p:txBody>
+          <a:bodyPr wrap="square" lIns="45720" rIns="45720" tIns="18288" bIns="18288" anchor="ctr">
+            <a:spAutoFit/>
+          </a:bodyPr>
+          <a:lstStyle/>
+          <a:p>
+            <a:pPr algn="l"/>
+            <a:r>
+              <a:rPr sz="3040" b="1" i="0">
+                <a:solidFill>
+                  <a:srgbClr val="9E1B32"/>
+                </a:solidFill>
+                <a:latin typeface="Lexend"/>
+              </a:rPr>
+              <a:t>Answer:</a:t>
+            </a:r>
+          </a:p>
+        </p:txBody>
+      </p:sp>
+      <p:pic>
+        <p:nvPicPr>
+          <p:cNvPr id="13" name="Picture 12" descr="84bf2c5ba00215f1.png"/>
+          <p:cNvPicPr>
+            <a:picLocks noChangeAspect="1"/>
+          </p:cNvPicPr>
+          <p:nvPr/>
+        </p:nvPicPr>
+        <p:blipFill>
+          <a:blip r:embed="rId5"/>
+          <a:stretch>
+            <a:fillRect/>
+          </a:stretch>
+        </p:blipFill>
+        <p:spPr>
+          <a:xfrm>
+            <a:off x="6888480" y="5242560"/>
+            <a:ext cx="304800" cy="832104"/>
           </a:xfrm>
           <a:prstGeom prst="rect">
             <a:avLst/>
@@ -6904,11 +7225,11 @@
           <a:p>
             <a:pPr algn="l"/>
             <a:r>
-              <a:rPr sz="3600" b="1" i="0">
+              <a:rPr sz="3420" b="1" i="0">
                 <a:solidFill>
                   <a:srgbClr val="1A1A1A"/>
                 </a:solidFill>
-                <a:latin typeface="Century Schoolbook"/>
+                <a:latin typeface="Lexend"/>
               </a:rPr>
               <a:t>Warm-Up</a:t>
             </a:r>
@@ -7044,11 +7365,11 @@
           <a:p>
             <a:pPr algn="l"/>
             <a:r>
-              <a:rPr sz="1100" b="0" i="1">
+              <a:rPr sz="1040" b="0" i="0">
                 <a:solidFill>
                   <a:srgbClr val="6B6B6B"/>
                 </a:solidFill>
-                <a:latin typeface="Century Schoolbook"/>
+                <a:latin typeface="Lexend"/>
               </a:rPr>
               <a:t>Grade 7 Accelerated · Unit 3 · Lessons 6–7 — Evaluating and Equivalent Expressions</a:t>
             </a:r>
@@ -7079,11 +7400,11 @@
           <a:p>
             <a:pPr algn="r"/>
             <a:r>
-              <a:rPr sz="1100" b="0" i="0">
+              <a:rPr sz="1040" b="0" i="0">
                 <a:solidFill>
                   <a:srgbClr val="6B6B6B"/>
                 </a:solidFill>
-                <a:latin typeface="Century Schoolbook"/>
+                <a:latin typeface="Lexend"/>
               </a:rPr>
               <a:t>2</a:t>
             </a:r>
@@ -7098,8 +7419,8 @@
         </p:nvSpPr>
         <p:spPr>
           <a:xfrm>
-            <a:off x="1874519" y="1511808"/>
-            <a:ext cx="7804089" cy="457200"/>
+            <a:off x="1874519" y="1505712"/>
+            <a:ext cx="7683225" cy="457200"/>
           </a:xfrm>
           <a:prstGeom prst="rect">
             <a:avLst/>
@@ -7114,11 +7435,11 @@
           <a:p>
             <a:pPr algn="l"/>
             <a:r>
-              <a:rPr sz="2300" b="0" i="0">
+              <a:rPr sz="2180" b="0" i="0">
                 <a:solidFill>
                   <a:srgbClr val="1A1A1A"/>
                 </a:solidFill>
-                <a:latin typeface="Century Schoolbook"/>
+                <a:latin typeface="Lexend"/>
               </a:rPr>
               <a:t>1.   Rewrite with a positive exponent, then evaluate:  </a:t>
             </a:r>
@@ -7127,7 +7448,7 @@
       </p:sp>
       <p:pic>
         <p:nvPicPr>
-          <p:cNvPr id="9" name="Picture 8" descr="70fd4f7c195b27fd.png"/>
+          <p:cNvPr id="9" name="Picture 8" descr="f3c8135f85cfec4f.png"/>
           <p:cNvPicPr>
             <a:picLocks noChangeAspect="1"/>
           </p:cNvPicPr>
@@ -7141,8 +7462,8 @@
         </p:blipFill>
         <p:spPr>
           <a:xfrm>
-            <a:off x="9541449" y="1463040"/>
-            <a:ext cx="795528" cy="554736"/>
+            <a:off x="9420585" y="1463040"/>
+            <a:ext cx="765048" cy="542544"/>
           </a:xfrm>
           <a:prstGeom prst="rect">
             <a:avLst/>
@@ -7157,8 +7478,8 @@
         </p:nvSpPr>
         <p:spPr>
           <a:xfrm>
-            <a:off x="1874519" y="2293620"/>
-            <a:ext cx="3064939" cy="457200"/>
+            <a:off x="1874519" y="2275332"/>
+            <a:ext cx="2935946" cy="457200"/>
           </a:xfrm>
           <a:prstGeom prst="rect">
             <a:avLst/>
@@ -7173,11 +7494,11 @@
           <a:p>
             <a:pPr algn="l"/>
             <a:r>
-              <a:rPr sz="2300" b="0" i="0">
+              <a:rPr sz="2180" b="0" i="0">
                 <a:solidFill>
                   <a:srgbClr val="1A1A1A"/>
                 </a:solidFill>
-                <a:latin typeface="Century Schoolbook"/>
+                <a:latin typeface="Lexend"/>
               </a:rPr>
               <a:t>2.   Find the value:  </a:t>
             </a:r>
@@ -7186,7 +7507,7 @@
       </p:sp>
       <p:pic>
         <p:nvPicPr>
-          <p:cNvPr id="11" name="Picture 10" descr="a4522c3024ca6567.png"/>
+          <p:cNvPr id="11" name="Picture 10" descr="eb4b098ae3e189d5.png"/>
           <p:cNvPicPr>
             <a:picLocks noChangeAspect="1"/>
           </p:cNvPicPr>
@@ -7200,8 +7521,8 @@
         </p:blipFill>
         <p:spPr>
           <a:xfrm>
-            <a:off x="4802299" y="2218944"/>
-            <a:ext cx="463296" cy="606552"/>
+            <a:off x="4673306" y="2206752"/>
+            <a:ext cx="441960" cy="594360"/>
           </a:xfrm>
           <a:prstGeom prst="rect">
             <a:avLst/>
@@ -7216,8 +7537,8 @@
         </p:nvSpPr>
         <p:spPr>
           <a:xfrm>
-            <a:off x="1874519" y="3131820"/>
-            <a:ext cx="3064939" cy="457200"/>
+            <a:off x="1874519" y="3096768"/>
+            <a:ext cx="2930351" cy="457200"/>
           </a:xfrm>
           <a:prstGeom prst="rect">
             <a:avLst/>
@@ -7232,11 +7553,11 @@
           <a:p>
             <a:pPr algn="l"/>
             <a:r>
-              <a:rPr sz="2300" b="0" i="0">
+              <a:rPr sz="2180" b="0" i="0">
                 <a:solidFill>
                   <a:srgbClr val="1A1A1A"/>
                 </a:solidFill>
-                <a:latin typeface="Century Schoolbook"/>
+                <a:latin typeface="Lexend"/>
               </a:rPr>
               <a:t>3.   Find the value:  </a:t>
             </a:r>
@@ -7245,7 +7566,7 @@
       </p:sp>
       <p:pic>
         <p:nvPicPr>
-          <p:cNvPr id="13" name="Picture 12" descr="574a5d3a612aa104.png"/>
+          <p:cNvPr id="13" name="Picture 12" descr="c39296e5705a45be.png"/>
           <p:cNvPicPr>
             <a:picLocks noChangeAspect="1"/>
           </p:cNvPicPr>
@@ -7259,8 +7580,8 @@
         </p:blipFill>
         <p:spPr>
           <a:xfrm>
-            <a:off x="4802299" y="3026664"/>
-            <a:ext cx="469392" cy="667512"/>
+            <a:off x="4667711" y="3002280"/>
+            <a:ext cx="499871" cy="646176"/>
           </a:xfrm>
           <a:prstGeom prst="rect">
             <a:avLst/>
@@ -7275,8 +7596,8 @@
         </p:nvSpPr>
         <p:spPr>
           <a:xfrm>
-            <a:off x="1874519" y="3872484"/>
-            <a:ext cx="6243654" cy="457200"/>
+            <a:off x="1874519" y="3826763"/>
+            <a:ext cx="6288636" cy="457200"/>
           </a:xfrm>
           <a:prstGeom prst="rect">
             <a:avLst/>
@@ -7291,11 +7612,11 @@
           <a:p>
             <a:pPr algn="l"/>
             <a:r>
-              <a:rPr sz="2300" b="0" i="0">
+              <a:rPr sz="2180" b="0" i="0">
                 <a:solidFill>
                   <a:srgbClr val="1A1A1A"/>
                 </a:solidFill>
-                <a:latin typeface="Century Schoolbook"/>
+                <a:latin typeface="Lexend"/>
               </a:rPr>
               <a:t>4.   Write 64 as a power of 2, of 4, and of 8.</a:t>
             </a:r>
@@ -7344,11 +7665,11 @@
           <a:p>
             <a:pPr algn="l"/>
             <a:r>
-              <a:rPr sz="3400" b="1" i="0">
+              <a:rPr sz="3229" b="1" i="0">
                 <a:solidFill>
                   <a:srgbClr val="1A1A1A"/>
                 </a:solidFill>
-                <a:latin typeface="Century Schoolbook"/>
+                <a:latin typeface="Lexend"/>
               </a:rPr>
               <a:t>Whiteboards   ·   Question 3 of 9</a:t>
             </a:r>
@@ -7484,11 +7805,11 @@
           <a:p>
             <a:pPr algn="l"/>
             <a:r>
-              <a:rPr sz="1100" b="0" i="1">
+              <a:rPr sz="1040" b="0" i="0">
                 <a:solidFill>
                   <a:srgbClr val="6B6B6B"/>
                 </a:solidFill>
-                <a:latin typeface="Century Schoolbook"/>
+                <a:latin typeface="Lexend"/>
               </a:rPr>
               <a:t>Grade 7 Accelerated · Unit 3 · Lessons 6–7 — Evaluating and Equivalent Expressions</a:t>
             </a:r>
@@ -7519,11 +7840,11 @@
           <a:p>
             <a:pPr algn="r"/>
             <a:r>
-              <a:rPr sz="1100" b="0" i="0">
+              <a:rPr sz="1040" b="0" i="0">
                 <a:solidFill>
                   <a:srgbClr val="6B6B6B"/>
                 </a:solidFill>
-                <a:latin typeface="Century Schoolbook"/>
+                <a:latin typeface="Lexend"/>
               </a:rPr>
               <a:t>20</a:t>
             </a:r>
@@ -7532,7 +7853,7 @@
       </p:sp>
       <p:pic>
         <p:nvPicPr>
-          <p:cNvPr id="8" name="Picture 7" descr="2f8b87745f5bc5af.png"/>
+          <p:cNvPr id="8" name="Picture 7" descr="b967aae4e7c30de2.png"/>
           <p:cNvPicPr>
             <a:picLocks noChangeAspect="1"/>
           </p:cNvPicPr>
@@ -7546,8 +7867,8 @@
         </p:blipFill>
         <p:spPr>
           <a:xfrm>
-            <a:off x="4646675" y="2194560"/>
-            <a:ext cx="2868168" cy="1432560"/>
+            <a:off x="4703063" y="1645920"/>
+            <a:ext cx="2755392" cy="1408176"/>
           </a:xfrm>
           <a:prstGeom prst="rect">
             <a:avLst/>
@@ -7578,11 +7899,11 @@
           <a:p>
             <a:pPr algn="ctr"/>
             <a:r>
-              <a:rPr sz="2600" b="1" i="0">
+              <a:rPr sz="2470" b="1" i="0">
                 <a:solidFill>
                   <a:srgbClr val="1A1A1A"/>
                 </a:solidFill>
-                <a:latin typeface="Century Schoolbook"/>
+                <a:latin typeface="Lexend"/>
               </a:rPr>
               <a:t>Answer it.</a:t>
             </a:r>
@@ -7631,11 +7952,11 @@
           <a:p>
             <a:pPr algn="l"/>
             <a:r>
-              <a:rPr sz="3400" b="1" i="0">
+              <a:rPr sz="3229" b="1" i="0">
                 <a:solidFill>
                   <a:srgbClr val="1A1A1A"/>
                 </a:solidFill>
-                <a:latin typeface="Century Schoolbook"/>
+                <a:latin typeface="Lexend"/>
               </a:rPr>
               <a:t>Whiteboards   ·   Question 3 of 9</a:t>
             </a:r>
@@ -7771,11 +8092,11 @@
           <a:p>
             <a:pPr algn="l"/>
             <a:r>
-              <a:rPr sz="1100" b="0" i="1">
+              <a:rPr sz="1040" b="0" i="0">
                 <a:solidFill>
                   <a:srgbClr val="6B6B6B"/>
                 </a:solidFill>
-                <a:latin typeface="Century Schoolbook"/>
+                <a:latin typeface="Lexend"/>
               </a:rPr>
               <a:t>Grade 7 Accelerated · Unit 3 · Lessons 6–7 — Evaluating and Equivalent Expressions</a:t>
             </a:r>
@@ -7806,11 +8127,11 @@
           <a:p>
             <a:pPr algn="r"/>
             <a:r>
-              <a:rPr sz="1100" b="0" i="0">
+              <a:rPr sz="1040" b="0" i="0">
                 <a:solidFill>
                   <a:srgbClr val="6B6B6B"/>
                 </a:solidFill>
-                <a:latin typeface="Century Schoolbook"/>
+                <a:latin typeface="Lexend"/>
               </a:rPr>
               <a:t>21</a:t>
             </a:r>
@@ -7819,7 +8140,7 @@
       </p:sp>
       <p:pic>
         <p:nvPicPr>
-          <p:cNvPr id="8" name="Picture 7" descr="48df33e2a7e48cfd.png"/>
+          <p:cNvPr id="8" name="Picture 7" descr="548be30c5a85560f.png"/>
           <p:cNvPicPr>
             <a:picLocks noChangeAspect="1"/>
           </p:cNvPicPr>
@@ -7833,8 +8154,8 @@
         </p:blipFill>
         <p:spPr>
           <a:xfrm>
-            <a:off x="4649723" y="2103120"/>
-            <a:ext cx="2862072" cy="1429512"/>
+            <a:off x="4706112" y="1645920"/>
+            <a:ext cx="2749296" cy="1405128"/>
           </a:xfrm>
           <a:prstGeom prst="rect">
             <a:avLst/>
@@ -7849,36 +8170,36 @@
         </p:nvSpPr>
         <p:spPr>
           <a:xfrm>
-            <a:off x="4991100" y="4814316"/>
-            <a:ext cx="1920240" cy="548640"/>
-          </a:xfrm>
-          <a:prstGeom prst="rect">
-            <a:avLst/>
-          </a:prstGeom>
-          <a:noFill/>
-        </p:spPr>
-        <p:txBody>
-          <a:bodyPr wrap="square" lIns="45720" rIns="45720" tIns="18288" bIns="18288" anchor="ctr">
-            <a:spAutoFit/>
+            <a:off x="2495239" y="3381756"/>
+            <a:ext cx="996779" cy="457200"/>
+          </a:xfrm>
+          <a:prstGeom prst="rect">
+            <a:avLst/>
+          </a:prstGeom>
+          <a:noFill/>
+        </p:spPr>
+        <p:txBody>
+          <a:bodyPr wrap="none" lIns="45720" rIns="45720" tIns="18288" bIns="18288" anchor="ctr">
+            <a:noAutofit/>
           </a:bodyPr>
           <a:lstStyle/>
           <a:p>
             <a:pPr algn="l"/>
             <a:r>
-              <a:rPr sz="3200" b="1" i="0">
-                <a:solidFill>
-                  <a:srgbClr val="9E1B32"/>
-                </a:solidFill>
-                <a:latin typeface="Century Schoolbook"/>
-              </a:rPr>
-              <a:t>Answer:</a:t>
+              <a:rPr sz="2330" b="0" i="0">
+                <a:solidFill>
+                  <a:srgbClr val="1A1A1A"/>
+                </a:solidFill>
+                <a:latin typeface="Lexend"/>
+              </a:rPr>
+              <a:t>Top:  </a:t>
             </a:r>
           </a:p>
         </p:txBody>
       </p:sp>
       <p:pic>
         <p:nvPicPr>
-          <p:cNvPr id="10" name="Picture 9" descr="2bb7fdb900ba422d.png"/>
+          <p:cNvPr id="10" name="Picture 9" descr="090145bfb5fa4fca.png"/>
           <p:cNvPicPr>
             <a:picLocks noChangeAspect="1"/>
           </p:cNvPicPr>
@@ -7892,8 +8213,268 @@
         </p:blipFill>
         <p:spPr>
           <a:xfrm>
-            <a:off x="6911340" y="4663440"/>
-            <a:ext cx="259080" cy="850392"/>
+            <a:off x="3354858" y="3453384"/>
+            <a:ext cx="1386840" cy="313944"/>
+          </a:xfrm>
+          <a:prstGeom prst="rect">
+            <a:avLst/>
+          </a:prstGeom>
+        </p:spPr>
+      </p:pic>
+      <p:sp>
+        <p:nvSpPr>
+          <p:cNvPr id="11" name="TextBox 10"/>
+          <p:cNvSpPr txBox="1"/>
+          <p:nvPr/>
+        </p:nvSpPr>
+        <p:spPr>
+          <a:xfrm>
+            <a:off x="4741698" y="3381756"/>
+            <a:ext cx="1320048" cy="457200"/>
+          </a:xfrm>
+          <a:prstGeom prst="rect">
+            <a:avLst/>
+          </a:prstGeom>
+          <a:noFill/>
+        </p:spPr>
+        <p:txBody>
+          <a:bodyPr wrap="none" lIns="45720" rIns="45720" tIns="18288" bIns="18288" anchor="ctr">
+            <a:noAutofit/>
+          </a:bodyPr>
+          <a:lstStyle/>
+          <a:p>
+            <a:pPr algn="l"/>
+            <a:r>
+              <a:rPr sz="2330" b="0" i="0">
+                <a:solidFill>
+                  <a:srgbClr val="1A1A1A"/>
+                </a:solidFill>
+                <a:latin typeface="Lexend"/>
+              </a:rPr>
+              <a:t>   and   </a:t>
+            </a:r>
+          </a:p>
+        </p:txBody>
+      </p:sp>
+      <p:pic>
+        <p:nvPicPr>
+          <p:cNvPr id="12" name="Picture 11" descr="8f1e7bc2c81192ab.png"/>
+          <p:cNvPicPr>
+            <a:picLocks noChangeAspect="1"/>
+          </p:cNvPicPr>
+          <p:nvPr/>
+        </p:nvPicPr>
+        <p:blipFill>
+          <a:blip r:embed="rId4"/>
+          <a:stretch>
+            <a:fillRect/>
+          </a:stretch>
+        </p:blipFill>
+        <p:spPr>
+          <a:xfrm>
+            <a:off x="5924587" y="3352800"/>
+            <a:ext cx="1313688" cy="515112"/>
+          </a:xfrm>
+          <a:prstGeom prst="rect">
+            <a:avLst/>
+          </a:prstGeom>
+        </p:spPr>
+      </p:pic>
+      <p:sp>
+        <p:nvSpPr>
+          <p:cNvPr id="13" name="TextBox 12"/>
+          <p:cNvSpPr txBox="1"/>
+          <p:nvPr/>
+        </p:nvSpPr>
+        <p:spPr>
+          <a:xfrm>
+            <a:off x="7238275" y="3381756"/>
+            <a:ext cx="1163085" cy="457200"/>
+          </a:xfrm>
+          <a:prstGeom prst="rect">
+            <a:avLst/>
+          </a:prstGeom>
+          <a:noFill/>
+        </p:spPr>
+        <p:txBody>
+          <a:bodyPr wrap="none" lIns="45720" rIns="45720" tIns="18288" bIns="18288" anchor="ctr">
+            <a:noAutofit/>
+          </a:bodyPr>
+          <a:lstStyle/>
+          <a:p>
+            <a:pPr algn="l"/>
+            <a:r>
+              <a:rPr sz="2330" b="0" i="0">
+                <a:solidFill>
+                  <a:srgbClr val="1A1A1A"/>
+                </a:solidFill>
+                <a:latin typeface="Lexend"/>
+              </a:rPr>
+              <a:t>,   so   </a:t>
+            </a:r>
+          </a:p>
+        </p:txBody>
+      </p:sp>
+      <p:pic>
+        <p:nvPicPr>
+          <p:cNvPr id="14" name="Picture 13" descr="8c42dc4521855baf.png"/>
+          <p:cNvPicPr>
+            <a:picLocks noChangeAspect="1"/>
+          </p:cNvPicPr>
+          <p:nvPr/>
+        </p:nvPicPr>
+        <p:blipFill>
+          <a:blip r:embed="rId5"/>
+          <a:stretch>
+            <a:fillRect/>
+          </a:stretch>
+        </p:blipFill>
+        <p:spPr>
+          <a:xfrm>
+            <a:off x="8264200" y="3480816"/>
+            <a:ext cx="1405128" cy="259080"/>
+          </a:xfrm>
+          <a:prstGeom prst="rect">
+            <a:avLst/>
+          </a:prstGeom>
+        </p:spPr>
+      </p:pic>
+      <p:sp>
+        <p:nvSpPr>
+          <p:cNvPr id="15" name="TextBox 14"/>
+          <p:cNvSpPr txBox="1"/>
+          <p:nvPr/>
+        </p:nvSpPr>
+        <p:spPr>
+          <a:xfrm>
+            <a:off x="2495239" y="3936491"/>
+            <a:ext cx="1583270" cy="457200"/>
+          </a:xfrm>
+          <a:prstGeom prst="rect">
+            <a:avLst/>
+          </a:prstGeom>
+          <a:noFill/>
+        </p:spPr>
+        <p:txBody>
+          <a:bodyPr wrap="none" lIns="45720" rIns="45720" tIns="18288" bIns="18288" anchor="ctr">
+            <a:noAutofit/>
+          </a:bodyPr>
+          <a:lstStyle/>
+          <a:p>
+            <a:pPr algn="l"/>
+            <a:r>
+              <a:rPr sz="2330" b="0" i="0">
+                <a:solidFill>
+                  <a:srgbClr val="1A1A1A"/>
+                </a:solidFill>
+                <a:latin typeface="Lexend"/>
+              </a:rPr>
+              <a:t>Bottom:  </a:t>
+            </a:r>
+          </a:p>
+        </p:txBody>
+      </p:sp>
+      <p:pic>
+        <p:nvPicPr>
+          <p:cNvPr id="16" name="Picture 15" descr="85dfe78cfc49527b.png"/>
+          <p:cNvPicPr>
+            <a:picLocks noChangeAspect="1"/>
+          </p:cNvPicPr>
+          <p:nvPr/>
+        </p:nvPicPr>
+        <p:blipFill>
+          <a:blip r:embed="rId6"/>
+          <a:stretch>
+            <a:fillRect/>
+          </a:stretch>
+        </p:blipFill>
+        <p:spPr>
+          <a:xfrm>
+            <a:off x="3941349" y="4035552"/>
+            <a:ext cx="1158240" cy="259080"/>
+          </a:xfrm>
+          <a:prstGeom prst="rect">
+            <a:avLst/>
+          </a:prstGeom>
+        </p:spPr>
+      </p:pic>
+      <p:pic>
+        <p:nvPicPr>
+          <p:cNvPr id="17" name="Picture 16" descr="a335dfb088e7c591.png"/>
+          <p:cNvPicPr>
+            <a:picLocks noChangeAspect="1"/>
+          </p:cNvPicPr>
+          <p:nvPr/>
+        </p:nvPicPr>
+        <p:blipFill>
+          <a:blip r:embed="rId7"/>
+          <a:stretch>
+            <a:fillRect/>
+          </a:stretch>
+        </p:blipFill>
+        <p:spPr>
+          <a:xfrm>
+            <a:off x="2550103" y="4462272"/>
+            <a:ext cx="2319528" cy="603504"/>
+          </a:xfrm>
+          <a:prstGeom prst="rect">
+            <a:avLst/>
+          </a:prstGeom>
+        </p:spPr>
+      </p:pic>
+      <p:sp>
+        <p:nvSpPr>
+          <p:cNvPr id="18" name="TextBox 17"/>
+          <p:cNvSpPr txBox="1"/>
+          <p:nvPr/>
+        </p:nvSpPr>
+        <p:spPr>
+          <a:xfrm>
+            <a:off x="4968239" y="5344668"/>
+            <a:ext cx="1920240" cy="548640"/>
+          </a:xfrm>
+          <a:prstGeom prst="rect">
+            <a:avLst/>
+          </a:prstGeom>
+          <a:noFill/>
+        </p:spPr>
+        <p:txBody>
+          <a:bodyPr wrap="square" lIns="45720" rIns="45720" tIns="18288" bIns="18288" anchor="ctr">
+            <a:spAutoFit/>
+          </a:bodyPr>
+          <a:lstStyle/>
+          <a:p>
+            <a:pPr algn="l"/>
+            <a:r>
+              <a:rPr sz="3040" b="1" i="0">
+                <a:solidFill>
+                  <a:srgbClr val="9E1B32"/>
+                </a:solidFill>
+                <a:latin typeface="Lexend"/>
+              </a:rPr>
+              <a:t>Answer:</a:t>
+            </a:r>
+          </a:p>
+        </p:txBody>
+      </p:sp>
+      <p:pic>
+        <p:nvPicPr>
+          <p:cNvPr id="19" name="Picture 18" descr="60f3158f055494fc.png"/>
+          <p:cNvPicPr>
+            <a:picLocks noChangeAspect="1"/>
+          </p:cNvPicPr>
+          <p:nvPr/>
+        </p:nvPicPr>
+        <p:blipFill>
+          <a:blip r:embed="rId8"/>
+          <a:stretch>
+            <a:fillRect/>
+          </a:stretch>
+        </p:blipFill>
+        <p:spPr>
+          <a:xfrm>
+            <a:off x="6888480" y="5202936"/>
+            <a:ext cx="304800" cy="832104"/>
           </a:xfrm>
           <a:prstGeom prst="rect">
             <a:avLst/>
@@ -7942,11 +8523,11 @@
           <a:p>
             <a:pPr algn="l"/>
             <a:r>
-              <a:rPr sz="3400" b="1" i="0">
+              <a:rPr sz="3229" b="1" i="0">
                 <a:solidFill>
                   <a:srgbClr val="1A1A1A"/>
                 </a:solidFill>
-                <a:latin typeface="Century Schoolbook"/>
+                <a:latin typeface="Lexend"/>
               </a:rPr>
               <a:t>Whiteboards   ·   Question 4 of 9</a:t>
             </a:r>
@@ -8082,11 +8663,11 @@
           <a:p>
             <a:pPr algn="l"/>
             <a:r>
-              <a:rPr sz="1100" b="0" i="1">
+              <a:rPr sz="1040" b="0" i="0">
                 <a:solidFill>
                   <a:srgbClr val="6B6B6B"/>
                 </a:solidFill>
-                <a:latin typeface="Century Schoolbook"/>
+                <a:latin typeface="Lexend"/>
               </a:rPr>
               <a:t>Grade 7 Accelerated · Unit 3 · Lessons 6–7 — Evaluating and Equivalent Expressions</a:t>
             </a:r>
@@ -8117,11 +8698,11 @@
           <a:p>
             <a:pPr algn="r"/>
             <a:r>
-              <a:rPr sz="1100" b="0" i="0">
+              <a:rPr sz="1040" b="0" i="0">
                 <a:solidFill>
                   <a:srgbClr val="6B6B6B"/>
                 </a:solidFill>
-                <a:latin typeface="Century Schoolbook"/>
+                <a:latin typeface="Lexend"/>
               </a:rPr>
               <a:t>22</a:t>
             </a:r>
@@ -8137,7 +8718,7 @@
         <p:spPr>
           <a:xfrm>
             <a:off x="1234440" y="1851660"/>
-            <a:ext cx="3547152" cy="457200"/>
+            <a:ext cx="3502804" cy="457200"/>
           </a:xfrm>
           <a:prstGeom prst="rect">
             <a:avLst/>
@@ -8152,11 +8733,11 @@
           <a:p>
             <a:pPr algn="l"/>
             <a:r>
-              <a:rPr sz="2400" b="0" i="0">
+              <a:rPr sz="2280" b="0" i="0">
                 <a:solidFill>
                   <a:srgbClr val="1A1A1A"/>
                 </a:solidFill>
-                <a:latin typeface="Century Schoolbook"/>
+                <a:latin typeface="Lexend"/>
               </a:rPr>
               <a:t>One flash drive holds  </a:t>
             </a:r>
@@ -8165,7 +8746,7 @@
       </p:sp>
       <p:pic>
         <p:nvPicPr>
-          <p:cNvPr id="9" name="Picture 8" descr="c591741850325583.png"/>
+          <p:cNvPr id="9" name="Picture 8" descr="467b1d14e5da28ce.png"/>
           <p:cNvPicPr>
             <a:picLocks noChangeAspect="1"/>
           </p:cNvPicPr>
@@ -8179,8 +8760,8 @@
         </p:blipFill>
         <p:spPr>
           <a:xfrm>
-            <a:off x="4644432" y="1943100"/>
-            <a:ext cx="377952" cy="274320"/>
+            <a:off x="4600084" y="1943100"/>
+            <a:ext cx="381000" cy="274320"/>
           </a:xfrm>
           <a:prstGeom prst="rect">
             <a:avLst/>
@@ -8195,8 +8776,8 @@
         </p:nvSpPr>
         <p:spPr>
           <a:xfrm>
-            <a:off x="5022384" y="1851660"/>
-            <a:ext cx="2063493" cy="457200"/>
+            <a:off x="4981084" y="1851660"/>
+            <a:ext cx="2115358" cy="457200"/>
           </a:xfrm>
           <a:prstGeom prst="rect">
             <a:avLst/>
@@ -8211,11 +8792,11 @@
           <a:p>
             <a:pPr algn="l"/>
             <a:r>
-              <a:rPr sz="2400" b="0" i="0">
+              <a:rPr sz="2280" b="0" i="0">
                 <a:solidFill>
                   <a:srgbClr val="1A1A1A"/>
                 </a:solidFill>
-                <a:latin typeface="Century Schoolbook"/>
+                <a:latin typeface="Lexend"/>
               </a:rPr>
               <a:t>  megabytes.</a:t>
             </a:r>
@@ -8231,7 +8812,7 @@
         <p:spPr>
           <a:xfrm>
             <a:off x="1234440" y="2464308"/>
-            <a:ext cx="2487756" cy="457200"/>
+            <a:ext cx="2445422" cy="457200"/>
           </a:xfrm>
           <a:prstGeom prst="rect">
             <a:avLst/>
@@ -8246,11 +8827,11 @@
           <a:p>
             <a:pPr algn="l"/>
             <a:r>
-              <a:rPr sz="2400" b="0" i="0">
+              <a:rPr sz="2280" b="0" i="0">
                 <a:solidFill>
                   <a:srgbClr val="1A1A1A"/>
                 </a:solidFill>
-                <a:latin typeface="Century Schoolbook"/>
+                <a:latin typeface="Lexend"/>
               </a:rPr>
               <a:t>Another holds  </a:t>
             </a:r>
@@ -8259,7 +8840,7 @@
       </p:sp>
       <p:pic>
         <p:nvPicPr>
-          <p:cNvPr id="12" name="Picture 11" descr="1d8988fc9968dd14.png"/>
+          <p:cNvPr id="12" name="Picture 11" descr="30913582715e4230.png"/>
           <p:cNvPicPr>
             <a:picLocks noChangeAspect="1"/>
           </p:cNvPicPr>
@@ -8273,8 +8854,8 @@
         </p:blipFill>
         <p:spPr>
           <a:xfrm>
-            <a:off x="3585036" y="2552700"/>
-            <a:ext cx="252984" cy="280416"/>
+            <a:off x="3542702" y="2558796"/>
+            <a:ext cx="280416" cy="268224"/>
           </a:xfrm>
           <a:prstGeom prst="rect">
             <a:avLst/>
@@ -8289,8 +8870,8 @@
         </p:nvSpPr>
         <p:spPr>
           <a:xfrm>
-            <a:off x="3838020" y="2464308"/>
-            <a:ext cx="6509265" cy="457200"/>
+            <a:off x="3823118" y="2464308"/>
+            <a:ext cx="6521034" cy="457200"/>
           </a:xfrm>
           <a:prstGeom prst="rect">
             <a:avLst/>
@@ -8305,11 +8886,11 @@
           <a:p>
             <a:pPr algn="l"/>
             <a:r>
-              <a:rPr sz="2400" b="0" i="0">
+              <a:rPr sz="2280" b="0" i="0">
                 <a:solidFill>
                   <a:srgbClr val="1A1A1A"/>
                 </a:solidFill>
-                <a:latin typeface="Century Schoolbook"/>
+                <a:latin typeface="Lexend"/>
               </a:rPr>
               <a:t>  megabytes. The first one costs 45 dollars.</a:t>
             </a:r>
@@ -8340,11 +8921,11 @@
           <a:p>
             <a:pPr algn="l"/>
             <a:r>
-              <a:rPr sz="2400" b="1" i="0">
+              <a:rPr sz="2280" b="1" i="0">
                 <a:solidFill>
                   <a:srgbClr val="1A1A1A"/>
                 </a:solidFill>
-                <a:latin typeface="Century Schoolbook"/>
+                <a:latin typeface="Lexend"/>
               </a:rPr>
               <a:t>Which holds more — or is it the same? Show why.</a:t>
             </a:r>
@@ -8375,11 +8956,11 @@
           <a:p>
             <a:pPr algn="ctr"/>
             <a:r>
-              <a:rPr sz="2600" b="1" i="0">
+              <a:rPr sz="2470" b="1" i="0">
                 <a:solidFill>
                   <a:srgbClr val="1A1A1A"/>
                 </a:solidFill>
-                <a:latin typeface="Century Schoolbook"/>
+                <a:latin typeface="Lexend"/>
               </a:rPr>
               <a:t>Answer it.</a:t>
             </a:r>
@@ -8428,11 +9009,11 @@
           <a:p>
             <a:pPr algn="l"/>
             <a:r>
-              <a:rPr sz="3400" b="1" i="0">
+              <a:rPr sz="3229" b="1" i="0">
                 <a:solidFill>
                   <a:srgbClr val="1A1A1A"/>
                 </a:solidFill>
-                <a:latin typeface="Century Schoolbook"/>
+                <a:latin typeface="Lexend"/>
               </a:rPr>
               <a:t>Whiteboards   ·   Question 4 of 9</a:t>
             </a:r>
@@ -8568,11 +9149,11 @@
           <a:p>
             <a:pPr algn="l"/>
             <a:r>
-              <a:rPr sz="1100" b="0" i="1">
+              <a:rPr sz="1040" b="0" i="0">
                 <a:solidFill>
                   <a:srgbClr val="6B6B6B"/>
                 </a:solidFill>
-                <a:latin typeface="Century Schoolbook"/>
+                <a:latin typeface="Lexend"/>
               </a:rPr>
               <a:t>Grade 7 Accelerated · Unit 3 · Lessons 6–7 — Evaluating and Equivalent Expressions</a:t>
             </a:r>
@@ -8603,11 +9184,11 @@
           <a:p>
             <a:pPr algn="r"/>
             <a:r>
-              <a:rPr sz="1100" b="0" i="0">
+              <a:rPr sz="1040" b="0" i="0">
                 <a:solidFill>
                   <a:srgbClr val="6B6B6B"/>
                 </a:solidFill>
-                <a:latin typeface="Century Schoolbook"/>
+                <a:latin typeface="Lexend"/>
               </a:rPr>
               <a:t>23</a:t>
             </a:r>
@@ -8623,7 +9204,7 @@
         <p:spPr>
           <a:xfrm>
             <a:off x="1234440" y="1851660"/>
-            <a:ext cx="3547152" cy="457200"/>
+            <a:ext cx="3502804" cy="457200"/>
           </a:xfrm>
           <a:prstGeom prst="rect">
             <a:avLst/>
@@ -8638,11 +9219,11 @@
           <a:p>
             <a:pPr algn="l"/>
             <a:r>
-              <a:rPr sz="2400" b="0" i="0">
+              <a:rPr sz="2280" b="0" i="0">
                 <a:solidFill>
                   <a:srgbClr val="1A1A1A"/>
                 </a:solidFill>
-                <a:latin typeface="Century Schoolbook"/>
+                <a:latin typeface="Lexend"/>
               </a:rPr>
               <a:t>One flash drive holds  </a:t>
             </a:r>
@@ -8651,7 +9232,7 @@
       </p:sp>
       <p:pic>
         <p:nvPicPr>
-          <p:cNvPr id="9" name="Picture 8" descr="b4b5a35a336421b1.png"/>
+          <p:cNvPr id="9" name="Picture 8" descr="ae046867a8f4e70e.png"/>
           <p:cNvPicPr>
             <a:picLocks noChangeAspect="1"/>
           </p:cNvPicPr>
@@ -8665,8 +9246,8 @@
         </p:blipFill>
         <p:spPr>
           <a:xfrm>
-            <a:off x="4644432" y="1943100"/>
-            <a:ext cx="381000" cy="274320"/>
+            <a:off x="4600084" y="1943100"/>
+            <a:ext cx="384048" cy="274320"/>
           </a:xfrm>
           <a:prstGeom prst="rect">
             <a:avLst/>
@@ -8681,8 +9262,8 @@
         </p:nvSpPr>
         <p:spPr>
           <a:xfrm>
-            <a:off x="5025432" y="1851660"/>
-            <a:ext cx="2063493" cy="457200"/>
+            <a:off x="4984132" y="1851660"/>
+            <a:ext cx="2115358" cy="457200"/>
           </a:xfrm>
           <a:prstGeom prst="rect">
             <a:avLst/>
@@ -8697,11 +9278,11 @@
           <a:p>
             <a:pPr algn="l"/>
             <a:r>
-              <a:rPr sz="2400" b="0" i="0">
+              <a:rPr sz="2280" b="0" i="0">
                 <a:solidFill>
                   <a:srgbClr val="1A1A1A"/>
                 </a:solidFill>
-                <a:latin typeface="Century Schoolbook"/>
+                <a:latin typeface="Lexend"/>
               </a:rPr>
               <a:t>  megabytes.</a:t>
             </a:r>
@@ -8717,7 +9298,7 @@
         <p:spPr>
           <a:xfrm>
             <a:off x="1234440" y="2464308"/>
-            <a:ext cx="2487756" cy="457200"/>
+            <a:ext cx="2445422" cy="457200"/>
           </a:xfrm>
           <a:prstGeom prst="rect">
             <a:avLst/>
@@ -8732,11 +9313,11 @@
           <a:p>
             <a:pPr algn="l"/>
             <a:r>
-              <a:rPr sz="2400" b="0" i="0">
+              <a:rPr sz="2280" b="0" i="0">
                 <a:solidFill>
                   <a:srgbClr val="1A1A1A"/>
                 </a:solidFill>
-                <a:latin typeface="Century Schoolbook"/>
+                <a:latin typeface="Lexend"/>
               </a:rPr>
               <a:t>Another holds  </a:t>
             </a:r>
@@ -8745,7 +9326,7 @@
       </p:sp>
       <p:pic>
         <p:nvPicPr>
-          <p:cNvPr id="12" name="Picture 11" descr="e7e94afbdd4008a4.png"/>
+          <p:cNvPr id="12" name="Picture 11" descr="4b0d991037dffa6c.png"/>
           <p:cNvPicPr>
             <a:picLocks noChangeAspect="1"/>
           </p:cNvPicPr>
@@ -8759,8 +9340,8 @@
         </p:blipFill>
         <p:spPr>
           <a:xfrm>
-            <a:off x="3585036" y="2552700"/>
-            <a:ext cx="256032" cy="280416"/>
+            <a:off x="3542702" y="2558796"/>
+            <a:ext cx="280416" cy="268224"/>
           </a:xfrm>
           <a:prstGeom prst="rect">
             <a:avLst/>
@@ -8775,8 +9356,8 @@
         </p:nvSpPr>
         <p:spPr>
           <a:xfrm>
-            <a:off x="3841068" y="2464308"/>
-            <a:ext cx="6509265" cy="457200"/>
+            <a:off x="3823118" y="2464308"/>
+            <a:ext cx="6521034" cy="457200"/>
           </a:xfrm>
           <a:prstGeom prst="rect">
             <a:avLst/>
@@ -8791,11 +9372,11 @@
           <a:p>
             <a:pPr algn="l"/>
             <a:r>
-              <a:rPr sz="2400" b="0" i="0">
+              <a:rPr sz="2280" b="0" i="0">
                 <a:solidFill>
                   <a:srgbClr val="1A1A1A"/>
                 </a:solidFill>
-                <a:latin typeface="Century Schoolbook"/>
+                <a:latin typeface="Lexend"/>
               </a:rPr>
               <a:t>  megabytes. The first one costs 45 dollars.</a:t>
             </a:r>
@@ -8826,26 +9407,74 @@
           <a:p>
             <a:pPr algn="l"/>
             <a:r>
-              <a:rPr sz="2400" b="1" i="0">
+              <a:rPr sz="2280" b="1" i="0">
                 <a:solidFill>
                   <a:srgbClr val="1A1A1A"/>
                 </a:solidFill>
-                <a:latin typeface="Century Schoolbook"/>
+                <a:latin typeface="Lexend"/>
               </a:rPr>
               <a:t>Which holds more — or is it the same? Show why.</a:t>
             </a:r>
           </a:p>
         </p:txBody>
       </p:sp>
-      <p:sp>
-        <p:nvSpPr>
-          <p:cNvPr id="15" name="TextBox 14"/>
-          <p:cNvSpPr txBox="1"/>
-          <p:nvPr/>
-        </p:nvSpPr>
-        <p:spPr>
-          <a:xfrm>
-            <a:off x="777240" y="4663440"/>
+      <p:pic>
+        <p:nvPicPr>
+          <p:cNvPr id="15" name="Picture 14" descr="4d73f60d98d62787.png"/>
+          <p:cNvPicPr>
+            <a:picLocks noChangeAspect="1"/>
+          </p:cNvPicPr>
+          <p:nvPr/>
+        </p:nvPicPr>
+        <p:blipFill>
+          <a:blip r:embed="rId4"/>
+          <a:stretch>
+            <a:fillRect/>
+          </a:stretch>
+        </p:blipFill>
+        <p:spPr>
+          <a:xfrm>
+            <a:off x="4575047" y="3812650"/>
+            <a:ext cx="829056" cy="301752"/>
+          </a:xfrm>
+          <a:prstGeom prst="rect">
+            <a:avLst/>
+          </a:prstGeom>
+        </p:spPr>
+      </p:pic>
+      <p:pic>
+        <p:nvPicPr>
+          <p:cNvPr id="16" name="Picture 15" descr="5fb5e30ab5054cad.png"/>
+          <p:cNvPicPr>
+            <a:picLocks noChangeAspect="1"/>
+          </p:cNvPicPr>
+          <p:nvPr/>
+        </p:nvPicPr>
+        <p:blipFill>
+          <a:blip r:embed="rId5"/>
+          <a:stretch>
+            <a:fillRect/>
+          </a:stretch>
+        </p:blipFill>
+        <p:spPr>
+          <a:xfrm>
+            <a:off x="4575047" y="4317094"/>
+            <a:ext cx="3121152" cy="371856"/>
+          </a:xfrm>
+          <a:prstGeom prst="rect">
+            <a:avLst/>
+          </a:prstGeom>
+        </p:spPr>
+      </p:pic>
+      <p:sp>
+        <p:nvSpPr>
+          <p:cNvPr id="17" name="TextBox 16"/>
+          <p:cNvSpPr txBox="1"/>
+          <p:nvPr/>
+        </p:nvSpPr>
+        <p:spPr>
+          <a:xfrm>
+            <a:off x="777240" y="4845922"/>
             <a:ext cx="10607040" cy="548640"/>
           </a:xfrm>
           <a:prstGeom prst="rect">
@@ -8861,74 +9490,74 @@
           <a:p>
             <a:pPr algn="ctr"/>
             <a:r>
-              <a:rPr sz="3200" b="1" i="0">
+              <a:rPr sz="3040" b="1" i="0">
                 <a:solidFill>
                   <a:srgbClr val="9E1B32"/>
                 </a:solidFill>
-                <a:latin typeface="Century Schoolbook"/>
+                <a:latin typeface="Lexend"/>
               </a:rPr>
               <a:t>Answer:   The same: 8</a:t>
             </a:r>
             <a:r>
-              <a:rPr sz="3200" b="1" i="0" baseline="30000">
+              <a:rPr sz="3040" b="1" i="0" baseline="30000">
                 <a:solidFill>
                   <a:srgbClr val="9E1B32"/>
                 </a:solidFill>
-                <a:latin typeface="Century Schoolbook"/>
+                <a:latin typeface="Lexend"/>
               </a:rPr>
               <a:t>5</a:t>
             </a:r>
             <a:r>
-              <a:rPr sz="3200" b="1" i="0">
+              <a:rPr sz="3040" b="1" i="0">
                 <a:solidFill>
                   <a:srgbClr val="9E1B32"/>
                 </a:solidFill>
-                <a:latin typeface="Century Schoolbook"/>
+                <a:latin typeface="Lexend"/>
               </a:rPr>
               <a:t> = (2</a:t>
             </a:r>
             <a:r>
-              <a:rPr sz="3200" b="1" i="0" baseline="30000">
+              <a:rPr sz="3040" b="1" i="0" baseline="30000">
                 <a:solidFill>
                   <a:srgbClr val="9E1B32"/>
                 </a:solidFill>
-                <a:latin typeface="Century Schoolbook"/>
+                <a:latin typeface="Lexend"/>
               </a:rPr>
               <a:t>3</a:t>
             </a:r>
             <a:r>
-              <a:rPr sz="3200" b="1" i="0">
+              <a:rPr sz="3040" b="1" i="0">
                 <a:solidFill>
                   <a:srgbClr val="9E1B32"/>
                 </a:solidFill>
-                <a:latin typeface="Century Schoolbook"/>
+                <a:latin typeface="Lexend"/>
               </a:rPr>
               <a:t>)</a:t>
             </a:r>
             <a:r>
-              <a:rPr sz="3200" b="1" i="0" baseline="30000">
+              <a:rPr sz="3040" b="1" i="0" baseline="30000">
                 <a:solidFill>
                   <a:srgbClr val="9E1B32"/>
                 </a:solidFill>
-                <a:latin typeface="Century Schoolbook"/>
+                <a:latin typeface="Lexend"/>
               </a:rPr>
               <a:t>5</a:t>
             </a:r>
             <a:r>
-              <a:rPr sz="3200" b="1" i="0">
+              <a:rPr sz="3040" b="1" i="0">
                 <a:solidFill>
                   <a:srgbClr val="9E1B32"/>
                 </a:solidFill>
-                <a:latin typeface="Century Schoolbook"/>
+                <a:latin typeface="Lexend"/>
               </a:rPr>
               <a:t> = 2</a:t>
             </a:r>
             <a:r>
-              <a:rPr sz="3200" b="1" i="0" baseline="30000">
+              <a:rPr sz="3040" b="1" i="0" baseline="30000">
                 <a:solidFill>
                   <a:srgbClr val="9E1B32"/>
                 </a:solidFill>
-                <a:latin typeface="Century Schoolbook"/>
+                <a:latin typeface="Lexend"/>
               </a:rPr>
               <a:t>15</a:t>
             </a:r>
@@ -8977,11 +9606,11 @@
           <a:p>
             <a:pPr algn="l"/>
             <a:r>
-              <a:rPr sz="3400" b="1" i="0">
+              <a:rPr sz="3229" b="1" i="0">
                 <a:solidFill>
                   <a:srgbClr val="1A1A1A"/>
                 </a:solidFill>
-                <a:latin typeface="Century Schoolbook"/>
+                <a:latin typeface="Lexend"/>
               </a:rPr>
               <a:t>Whiteboards   ·   Question 5 of 9</a:t>
             </a:r>
@@ -9117,11 +9746,11 @@
           <a:p>
             <a:pPr algn="l"/>
             <a:r>
-              <a:rPr sz="1100" b="0" i="1">
+              <a:rPr sz="1040" b="0" i="0">
                 <a:solidFill>
                   <a:srgbClr val="6B6B6B"/>
                 </a:solidFill>
-                <a:latin typeface="Century Schoolbook"/>
+                <a:latin typeface="Lexend"/>
               </a:rPr>
               <a:t>Grade 7 Accelerated · Unit 3 · Lessons 6–7 — Evaluating and Equivalent Expressions</a:t>
             </a:r>
@@ -9152,11 +9781,11 @@
           <a:p>
             <a:pPr algn="r"/>
             <a:r>
-              <a:rPr sz="1100" b="0" i="0">
+              <a:rPr sz="1040" b="0" i="0">
                 <a:solidFill>
                   <a:srgbClr val="6B6B6B"/>
                 </a:solidFill>
-                <a:latin typeface="Century Schoolbook"/>
+                <a:latin typeface="Lexend"/>
               </a:rPr>
               <a:t>24</a:t>
             </a:r>
@@ -9165,7 +9794,7 @@
       </p:sp>
       <p:pic>
         <p:nvPicPr>
-          <p:cNvPr id="8" name="Picture 7" descr="39fbeb40e62d1228.png"/>
+          <p:cNvPr id="8" name="Picture 7" descr="d4c29a874424d7fe.png"/>
           <p:cNvPicPr>
             <a:picLocks noChangeAspect="1"/>
           </p:cNvPicPr>
@@ -9179,8 +9808,8 @@
         </p:blipFill>
         <p:spPr>
           <a:xfrm>
-            <a:off x="5873496" y="2194560"/>
-            <a:ext cx="414528" cy="438912"/>
+            <a:off x="5855207" y="2194560"/>
+            <a:ext cx="451104" cy="414528"/>
           </a:xfrm>
           <a:prstGeom prst="rect">
             <a:avLst/>
@@ -9195,7 +9824,7 @@
         </p:nvSpPr>
         <p:spPr>
           <a:xfrm>
-            <a:off x="777240" y="2862072"/>
+            <a:off x="777240" y="2837687"/>
             <a:ext cx="10607040" cy="465151"/>
           </a:xfrm>
           <a:prstGeom prst="rect">
@@ -9211,11 +9840,11 @@
           <a:p>
             <a:pPr algn="ctr"/>
             <a:r>
-              <a:rPr sz="2600" b="0" i="0">
+              <a:rPr sz="2470" b="0" i="0">
                 <a:solidFill>
                   <a:srgbClr val="1A1A1A"/>
                 </a:solidFill>
-                <a:latin typeface="Century Schoolbook"/>
+                <a:latin typeface="Lexend"/>
               </a:rPr>
               <a:t>Which expression is equivalent?</a:t>
             </a:r>
@@ -9230,7 +9859,7 @@
         </p:nvSpPr>
         <p:spPr>
           <a:xfrm>
-            <a:off x="1874519" y="3528391"/>
+            <a:off x="1874519" y="3504007"/>
             <a:ext cx="4572000" cy="548640"/>
           </a:xfrm>
           <a:prstGeom prst="rect">
@@ -9246,29 +9875,29 @@
           <a:p>
             <a:pPr algn="l"/>
             <a:r>
-              <a:rPr sz="2400" b="1" i="0">
+              <a:rPr sz="2280" b="1" i="0">
                 <a:solidFill>
                   <a:srgbClr val="1A1A1A"/>
                 </a:solidFill>
-                <a:latin typeface="Century Schoolbook"/>
+                <a:latin typeface="Lexend"/>
               </a:rPr>
               <a:t>A.   </a:t>
             </a:r>
             <a:r>
-              <a:rPr sz="2400" b="0" i="0">
+              <a:rPr sz="2280" b="0" i="0">
                 <a:solidFill>
                   <a:srgbClr val="1A1A1A"/>
                 </a:solidFill>
-                <a:latin typeface="Century Schoolbook"/>
+                <a:latin typeface="Lexend"/>
               </a:rPr>
               <a:t>3</a:t>
             </a:r>
             <a:r>
-              <a:rPr sz="2400" b="0" i="0" baseline="30000">
+              <a:rPr sz="2280" b="0" i="0" baseline="30000">
                 <a:solidFill>
                   <a:srgbClr val="1A1A1A"/>
                 </a:solidFill>
-                <a:latin typeface="Century Schoolbook"/>
+                <a:latin typeface="Lexend"/>
               </a:rPr>
               <a:t>16</a:t>
             </a:r>
@@ -9283,7 +9912,7 @@
         </p:nvSpPr>
         <p:spPr>
           <a:xfrm>
-            <a:off x="6629400" y="3528391"/>
+            <a:off x="6629400" y="3504007"/>
             <a:ext cx="4572000" cy="548640"/>
           </a:xfrm>
           <a:prstGeom prst="rect">
@@ -9299,29 +9928,29 @@
           <a:p>
             <a:pPr algn="l"/>
             <a:r>
-              <a:rPr sz="2400" b="1" i="0">
+              <a:rPr sz="2280" b="1" i="0">
                 <a:solidFill>
                   <a:srgbClr val="1A1A1A"/>
                 </a:solidFill>
-                <a:latin typeface="Century Schoolbook"/>
+                <a:latin typeface="Lexend"/>
               </a:rPr>
               <a:t>B.   </a:t>
             </a:r>
             <a:r>
-              <a:rPr sz="2400" b="0" i="0">
+              <a:rPr sz="2280" b="0" i="0">
                 <a:solidFill>
                   <a:srgbClr val="1A1A1A"/>
                 </a:solidFill>
-                <a:latin typeface="Century Schoolbook"/>
+                <a:latin typeface="Lexend"/>
               </a:rPr>
               <a:t>3</a:t>
             </a:r>
             <a:r>
-              <a:rPr sz="2400" b="0" i="0" baseline="30000">
+              <a:rPr sz="2280" b="0" i="0" baseline="30000">
                 <a:solidFill>
                   <a:srgbClr val="1A1A1A"/>
                 </a:solidFill>
-                <a:latin typeface="Century Schoolbook"/>
+                <a:latin typeface="Lexend"/>
               </a:rPr>
               <a:t>4</a:t>
             </a:r>
@@ -9336,7 +9965,7 @@
         </p:nvSpPr>
         <p:spPr>
           <a:xfrm>
-            <a:off x="1874519" y="4214191"/>
+            <a:off x="1874519" y="4189807"/>
             <a:ext cx="4572000" cy="548640"/>
           </a:xfrm>
           <a:prstGeom prst="rect">
@@ -9352,29 +9981,29 @@
           <a:p>
             <a:pPr algn="l"/>
             <a:r>
-              <a:rPr sz="2400" b="1" i="0">
+              <a:rPr sz="2280" b="1" i="0">
                 <a:solidFill>
                   <a:srgbClr val="1A1A1A"/>
                 </a:solidFill>
-                <a:latin typeface="Century Schoolbook"/>
+                <a:latin typeface="Lexend"/>
               </a:rPr>
               <a:t>C.   </a:t>
             </a:r>
             <a:r>
-              <a:rPr sz="2400" b="0" i="0">
+              <a:rPr sz="2280" b="0" i="0">
                 <a:solidFill>
                   <a:srgbClr val="1A1A1A"/>
                 </a:solidFill>
-                <a:latin typeface="Century Schoolbook"/>
+                <a:latin typeface="Lexend"/>
               </a:rPr>
               <a:t>3</a:t>
             </a:r>
             <a:r>
-              <a:rPr sz="2400" b="0" i="0" baseline="30000">
+              <a:rPr sz="2280" b="0" i="0" baseline="30000">
                 <a:solidFill>
                   <a:srgbClr val="1A1A1A"/>
                 </a:solidFill>
-                <a:latin typeface="Century Schoolbook"/>
+                <a:latin typeface="Lexend"/>
               </a:rPr>
               <a:t>8</a:t>
             </a:r>
@@ -9389,7 +10018,7 @@
         </p:nvSpPr>
         <p:spPr>
           <a:xfrm>
-            <a:off x="6629400" y="4214191"/>
+            <a:off x="6629400" y="4189807"/>
             <a:ext cx="4572000" cy="548640"/>
           </a:xfrm>
           <a:prstGeom prst="rect">
@@ -9405,29 +10034,29 @@
           <a:p>
             <a:pPr algn="l"/>
             <a:r>
-              <a:rPr sz="2400" b="1" i="0">
+              <a:rPr sz="2280" b="1" i="0">
                 <a:solidFill>
                   <a:srgbClr val="1A1A1A"/>
                 </a:solidFill>
-                <a:latin typeface="Century Schoolbook"/>
+                <a:latin typeface="Lexend"/>
               </a:rPr>
               <a:t>D.   </a:t>
             </a:r>
             <a:r>
-              <a:rPr sz="2400" b="0" i="0">
+              <a:rPr sz="2280" b="0" i="0">
                 <a:solidFill>
                   <a:srgbClr val="1A1A1A"/>
                 </a:solidFill>
-                <a:latin typeface="Century Schoolbook"/>
+                <a:latin typeface="Lexend"/>
               </a:rPr>
               <a:t>3</a:t>
             </a:r>
             <a:r>
-              <a:rPr sz="2400" b="0" i="0" baseline="30000">
+              <a:rPr sz="2280" b="0" i="0" baseline="30000">
                 <a:solidFill>
                   <a:srgbClr val="1A1A1A"/>
                 </a:solidFill>
-                <a:latin typeface="Century Schoolbook"/>
+                <a:latin typeface="Lexend"/>
               </a:rPr>
               <a:t>6</a:t>
             </a:r>
@@ -9442,7 +10071,7 @@
         </p:nvSpPr>
         <p:spPr>
           <a:xfrm>
-            <a:off x="777240" y="5220031"/>
+            <a:off x="777240" y="5195647"/>
             <a:ext cx="10607040" cy="457200"/>
           </a:xfrm>
           <a:prstGeom prst="rect">
@@ -9458,11 +10087,11 @@
           <a:p>
             <a:pPr algn="ctr"/>
             <a:r>
-              <a:rPr sz="2600" b="1" i="0">
+              <a:rPr sz="2470" b="1" i="0">
                 <a:solidFill>
                   <a:srgbClr val="1A1A1A"/>
                 </a:solidFill>
-                <a:latin typeface="Century Schoolbook"/>
+                <a:latin typeface="Lexend"/>
               </a:rPr>
               <a:t>Answer it.</a:t>
             </a:r>
@@ -9511,11 +10140,11 @@
           <a:p>
             <a:pPr algn="l"/>
             <a:r>
-              <a:rPr sz="3400" b="1" i="0">
+              <a:rPr sz="3229" b="1" i="0">
                 <a:solidFill>
                   <a:srgbClr val="1A1A1A"/>
                 </a:solidFill>
-                <a:latin typeface="Century Schoolbook"/>
+                <a:latin typeface="Lexend"/>
               </a:rPr>
               <a:t>Whiteboards   ·   Question 5 of 9</a:t>
             </a:r>
@@ -9651,11 +10280,11 @@
           <a:p>
             <a:pPr algn="l"/>
             <a:r>
-              <a:rPr sz="1100" b="0" i="1">
+              <a:rPr sz="1040" b="0" i="0">
                 <a:solidFill>
                   <a:srgbClr val="6B6B6B"/>
                 </a:solidFill>
-                <a:latin typeface="Century Schoolbook"/>
+                <a:latin typeface="Lexend"/>
               </a:rPr>
               <a:t>Grade 7 Accelerated · Unit 3 · Lessons 6–7 — Evaluating and Equivalent Expressions</a:t>
             </a:r>
@@ -9686,11 +10315,11 @@
           <a:p>
             <a:pPr algn="r"/>
             <a:r>
-              <a:rPr sz="1100" b="0" i="0">
+              <a:rPr sz="1040" b="0" i="0">
                 <a:solidFill>
                   <a:srgbClr val="6B6B6B"/>
                 </a:solidFill>
-                <a:latin typeface="Century Schoolbook"/>
+                <a:latin typeface="Lexend"/>
               </a:rPr>
               <a:t>25</a:t>
             </a:r>
@@ -9699,7 +10328,7 @@
       </p:sp>
       <p:pic>
         <p:nvPicPr>
-          <p:cNvPr id="8" name="Picture 7" descr="2a82b5b2f64aa285.png"/>
+          <p:cNvPr id="8" name="Picture 7" descr="ed2e8b94db7fa1f5.png"/>
           <p:cNvPicPr>
             <a:picLocks noChangeAspect="1"/>
           </p:cNvPicPr>
@@ -9713,8 +10342,8 @@
         </p:blipFill>
         <p:spPr>
           <a:xfrm>
-            <a:off x="5871971" y="2103120"/>
-            <a:ext cx="417576" cy="429768"/>
+            <a:off x="5855207" y="2103120"/>
+            <a:ext cx="451104" cy="417576"/>
           </a:xfrm>
           <a:prstGeom prst="rect">
             <a:avLst/>
@@ -9729,7 +10358,7 @@
         </p:nvSpPr>
         <p:spPr>
           <a:xfrm>
-            <a:off x="777240" y="2761487"/>
+            <a:off x="777240" y="2749295"/>
             <a:ext cx="10607040" cy="465151"/>
           </a:xfrm>
           <a:prstGeom prst="rect">
@@ -9745,27 +10374,75 @@
           <a:p>
             <a:pPr algn="ctr"/>
             <a:r>
-              <a:rPr sz="2600" b="0" i="0">
+              <a:rPr sz="2470" b="0" i="0">
                 <a:solidFill>
                   <a:srgbClr val="1A1A1A"/>
                 </a:solidFill>
-                <a:latin typeface="Century Schoolbook"/>
+                <a:latin typeface="Lexend"/>
               </a:rPr>
               <a:t>Which expression is equivalent?</a:t>
             </a:r>
           </a:p>
         </p:txBody>
       </p:sp>
-      <p:sp>
-        <p:nvSpPr>
-          <p:cNvPr id="10" name="TextBox 9"/>
-          <p:cNvSpPr txBox="1"/>
-          <p:nvPr/>
-        </p:nvSpPr>
-        <p:spPr>
-          <a:xfrm>
-            <a:off x="1874519" y="3427807"/>
-            <a:ext cx="4572000" cy="548640"/>
+      <p:pic>
+        <p:nvPicPr>
+          <p:cNvPr id="10" name="Picture 9" descr="78aebac338759846.png"/>
+          <p:cNvPicPr>
+            <a:picLocks noChangeAspect="1"/>
+          </p:cNvPicPr>
+          <p:nvPr/>
+        </p:nvPicPr>
+        <p:blipFill>
+          <a:blip r:embed="rId3"/>
+          <a:stretch>
+            <a:fillRect/>
+          </a:stretch>
+        </p:blipFill>
+        <p:spPr>
+          <a:xfrm>
+            <a:off x="4619243" y="3450667"/>
+            <a:ext cx="822960" cy="304800"/>
+          </a:xfrm>
+          <a:prstGeom prst="rect">
+            <a:avLst/>
+          </a:prstGeom>
+        </p:spPr>
+      </p:pic>
+      <p:pic>
+        <p:nvPicPr>
+          <p:cNvPr id="11" name="Picture 10" descr="04672528a36f35f8.png"/>
+          <p:cNvPicPr>
+            <a:picLocks noChangeAspect="1"/>
+          </p:cNvPicPr>
+          <p:nvPr/>
+        </p:nvPicPr>
+        <p:blipFill>
+          <a:blip r:embed="rId4"/>
+          <a:stretch>
+            <a:fillRect/>
+          </a:stretch>
+        </p:blipFill>
+        <p:spPr>
+          <a:xfrm>
+            <a:off x="4619243" y="3956635"/>
+            <a:ext cx="3029712" cy="371856"/>
+          </a:xfrm>
+          <a:prstGeom prst="rect">
+            <a:avLst/>
+          </a:prstGeom>
+        </p:spPr>
+      </p:pic>
+      <p:sp>
+        <p:nvSpPr>
+          <p:cNvPr id="12" name="TextBox 11"/>
+          <p:cNvSpPr txBox="1"/>
+          <p:nvPr/>
+        </p:nvSpPr>
+        <p:spPr>
+          <a:xfrm>
+            <a:off x="777240" y="4663440"/>
+            <a:ext cx="10607040" cy="548640"/>
           </a:xfrm>
           <a:prstGeom prst="rect">
             <a:avLst/>
@@ -9778,234 +10455,22 @@
           </a:bodyPr>
           <a:lstStyle/>
           <a:p>
-            <a:pPr algn="l"/>
-            <a:r>
-              <a:rPr sz="2400" b="1" i="0">
-                <a:solidFill>
-                  <a:srgbClr val="1A1A1A"/>
-                </a:solidFill>
-                <a:latin typeface="Century Schoolbook"/>
-              </a:rPr>
-              <a:t>A.   </a:t>
-            </a:r>
-            <a:r>
-              <a:rPr sz="2400" b="0" i="0">
-                <a:solidFill>
-                  <a:srgbClr val="1A1A1A"/>
-                </a:solidFill>
-                <a:latin typeface="Century Schoolbook"/>
-              </a:rPr>
-              <a:t>3</a:t>
-            </a:r>
-            <a:r>
-              <a:rPr sz="2400" b="0" i="0" baseline="30000">
-                <a:solidFill>
-                  <a:srgbClr val="1A1A1A"/>
-                </a:solidFill>
-                <a:latin typeface="Century Schoolbook"/>
-              </a:rPr>
-              <a:t>16</a:t>
-            </a:r>
-          </a:p>
-        </p:txBody>
-      </p:sp>
-      <p:sp>
-        <p:nvSpPr>
-          <p:cNvPr id="11" name="TextBox 10"/>
-          <p:cNvSpPr txBox="1"/>
-          <p:nvPr/>
-        </p:nvSpPr>
-        <p:spPr>
-          <a:xfrm>
-            <a:off x="6629400" y="3427807"/>
-            <a:ext cx="4572000" cy="548640"/>
-          </a:xfrm>
-          <a:prstGeom prst="rect">
-            <a:avLst/>
-          </a:prstGeom>
-          <a:noFill/>
-        </p:spPr>
-        <p:txBody>
-          <a:bodyPr wrap="square" lIns="45720" rIns="45720" tIns="18288" bIns="18288" anchor="t">
-            <a:spAutoFit/>
-          </a:bodyPr>
-          <a:lstStyle/>
-          <a:p>
-            <a:pPr algn="l"/>
-            <a:r>
-              <a:rPr sz="2400" b="1" i="0">
-                <a:solidFill>
-                  <a:srgbClr val="1A1A1A"/>
-                </a:solidFill>
-                <a:latin typeface="Century Schoolbook"/>
-              </a:rPr>
-              <a:t>B.   </a:t>
-            </a:r>
-            <a:r>
-              <a:rPr sz="2400" b="0" i="0">
-                <a:solidFill>
-                  <a:srgbClr val="1A1A1A"/>
-                </a:solidFill>
-                <a:latin typeface="Century Schoolbook"/>
-              </a:rPr>
-              <a:t>3</a:t>
-            </a:r>
-            <a:r>
-              <a:rPr sz="2400" b="0" i="0" baseline="30000">
-                <a:solidFill>
-                  <a:srgbClr val="1A1A1A"/>
-                </a:solidFill>
-                <a:latin typeface="Century Schoolbook"/>
-              </a:rPr>
-              <a:t>4</a:t>
-            </a:r>
-          </a:p>
-        </p:txBody>
-      </p:sp>
-      <p:sp>
-        <p:nvSpPr>
-          <p:cNvPr id="12" name="TextBox 11"/>
-          <p:cNvSpPr txBox="1"/>
-          <p:nvPr/>
-        </p:nvSpPr>
-        <p:spPr>
-          <a:xfrm>
-            <a:off x="1874519" y="4113607"/>
-            <a:ext cx="4572000" cy="548640"/>
-          </a:xfrm>
-          <a:prstGeom prst="rect">
-            <a:avLst/>
-          </a:prstGeom>
-          <a:noFill/>
-        </p:spPr>
-        <p:txBody>
-          <a:bodyPr wrap="square" lIns="45720" rIns="45720" tIns="18288" bIns="18288" anchor="t">
-            <a:spAutoFit/>
-          </a:bodyPr>
-          <a:lstStyle/>
-          <a:p>
-            <a:pPr algn="l"/>
-            <a:r>
-              <a:rPr sz="2400" b="1" i="0">
+            <a:pPr algn="ctr"/>
+            <a:r>
+              <a:rPr sz="3040" b="1" i="0">
                 <a:solidFill>
                   <a:srgbClr val="9E1B32"/>
                 </a:solidFill>
-                <a:latin typeface="Century Schoolbook"/>
-              </a:rPr>
-              <a:t>C.   </a:t>
-            </a:r>
-            <a:r>
-              <a:rPr sz="2400" b="1" i="0">
+                <a:latin typeface="Lexend"/>
+              </a:rPr>
+              <a:t>Answer:   C — 3</a:t>
+            </a:r>
+            <a:r>
+              <a:rPr sz="3040" b="1" i="0" baseline="30000">
                 <a:solidFill>
                   <a:srgbClr val="9E1B32"/>
                 </a:solidFill>
-                <a:latin typeface="Century Schoolbook"/>
-              </a:rPr>
-              <a:t>3</a:t>
-            </a:r>
-            <a:r>
-              <a:rPr sz="2400" b="1" i="0" baseline="30000">
-                <a:solidFill>
-                  <a:srgbClr val="9E1B32"/>
-                </a:solidFill>
-                <a:latin typeface="Century Schoolbook"/>
-              </a:rPr>
-              <a:t>8</a:t>
-            </a:r>
-          </a:p>
-        </p:txBody>
-      </p:sp>
-      <p:sp>
-        <p:nvSpPr>
-          <p:cNvPr id="13" name="TextBox 12"/>
-          <p:cNvSpPr txBox="1"/>
-          <p:nvPr/>
-        </p:nvSpPr>
-        <p:spPr>
-          <a:xfrm>
-            <a:off x="6629400" y="4113607"/>
-            <a:ext cx="4572000" cy="548640"/>
-          </a:xfrm>
-          <a:prstGeom prst="rect">
-            <a:avLst/>
-          </a:prstGeom>
-          <a:noFill/>
-        </p:spPr>
-        <p:txBody>
-          <a:bodyPr wrap="square" lIns="45720" rIns="45720" tIns="18288" bIns="18288" anchor="t">
-            <a:spAutoFit/>
-          </a:bodyPr>
-          <a:lstStyle/>
-          <a:p>
-            <a:pPr algn="l"/>
-            <a:r>
-              <a:rPr sz="2400" b="1" i="0">
-                <a:solidFill>
-                  <a:srgbClr val="1A1A1A"/>
-                </a:solidFill>
-                <a:latin typeface="Century Schoolbook"/>
-              </a:rPr>
-              <a:t>D.   </a:t>
-            </a:r>
-            <a:r>
-              <a:rPr sz="2400" b="0" i="0">
-                <a:solidFill>
-                  <a:srgbClr val="1A1A1A"/>
-                </a:solidFill>
-                <a:latin typeface="Century Schoolbook"/>
-              </a:rPr>
-              <a:t>3</a:t>
-            </a:r>
-            <a:r>
-              <a:rPr sz="2400" b="0" i="0" baseline="30000">
-                <a:solidFill>
-                  <a:srgbClr val="1A1A1A"/>
-                </a:solidFill>
-                <a:latin typeface="Century Schoolbook"/>
-              </a:rPr>
-              <a:t>6</a:t>
-            </a:r>
-          </a:p>
-        </p:txBody>
-      </p:sp>
-      <p:sp>
-        <p:nvSpPr>
-          <p:cNvPr id="14" name="TextBox 13"/>
-          <p:cNvSpPr txBox="1"/>
-          <p:nvPr/>
-        </p:nvSpPr>
-        <p:spPr>
-          <a:xfrm>
-            <a:off x="777240" y="5119447"/>
-            <a:ext cx="10607040" cy="548640"/>
-          </a:xfrm>
-          <a:prstGeom prst="rect">
-            <a:avLst/>
-          </a:prstGeom>
-          <a:noFill/>
-        </p:spPr>
-        <p:txBody>
-          <a:bodyPr wrap="square" lIns="45720" rIns="45720" tIns="18288" bIns="18288" anchor="t">
-            <a:spAutoFit/>
-          </a:bodyPr>
-          <a:lstStyle/>
-          <a:p>
-            <a:pPr algn="ctr"/>
-            <a:r>
-              <a:rPr sz="3200" b="1" i="0">
-                <a:solidFill>
-                  <a:srgbClr val="9E1B32"/>
-                </a:solidFill>
-                <a:latin typeface="Century Schoolbook"/>
-              </a:rPr>
-              <a:t>Answer:   C — 3</a:t>
-            </a:r>
-            <a:r>
-              <a:rPr sz="3200" b="1" i="0" baseline="30000">
-                <a:solidFill>
-                  <a:srgbClr val="9E1B32"/>
-                </a:solidFill>
-                <a:latin typeface="Century Schoolbook"/>
+                <a:latin typeface="Lexend"/>
               </a:rPr>
               <a:t>8</a:t>
             </a:r>
@@ -10054,11 +10519,11 @@
           <a:p>
             <a:pPr algn="l"/>
             <a:r>
-              <a:rPr sz="3400" b="1" i="0">
+              <a:rPr sz="3229" b="1" i="0">
                 <a:solidFill>
                   <a:srgbClr val="1A1A1A"/>
                 </a:solidFill>
-                <a:latin typeface="Century Schoolbook"/>
+                <a:latin typeface="Lexend"/>
               </a:rPr>
               <a:t>Whiteboards   ·   Question 6 of 9</a:t>
             </a:r>
@@ -10194,11 +10659,11 @@
           <a:p>
             <a:pPr algn="l"/>
             <a:r>
-              <a:rPr sz="1100" b="0" i="1">
+              <a:rPr sz="1040" b="0" i="0">
                 <a:solidFill>
                   <a:srgbClr val="6B6B6B"/>
                 </a:solidFill>
-                <a:latin typeface="Century Schoolbook"/>
+                <a:latin typeface="Lexend"/>
               </a:rPr>
               <a:t>Grade 7 Accelerated · Unit 3 · Lessons 6–7 — Evaluating and Equivalent Expressions</a:t>
             </a:r>
@@ -10229,11 +10694,11 @@
           <a:p>
             <a:pPr algn="r"/>
             <a:r>
-              <a:rPr sz="1100" b="0" i="0">
+              <a:rPr sz="1040" b="0" i="0">
                 <a:solidFill>
                   <a:srgbClr val="6B6B6B"/>
                 </a:solidFill>
-                <a:latin typeface="Century Schoolbook"/>
+                <a:latin typeface="Lexend"/>
               </a:rPr>
               <a:t>26</a:t>
             </a:r>
@@ -10242,7 +10707,7 @@
       </p:sp>
       <p:pic>
         <p:nvPicPr>
-          <p:cNvPr id="8" name="Picture 7" descr="78733fd3b94c8799.png"/>
+          <p:cNvPr id="8" name="Picture 7" descr="6f49059bfeda6959.png"/>
           <p:cNvPicPr>
             <a:picLocks noChangeAspect="1"/>
           </p:cNvPicPr>
@@ -10257,7 +10722,7 @@
         <p:spPr>
           <a:xfrm>
             <a:off x="5097779" y="2194560"/>
-            <a:ext cx="1965960" cy="853440"/>
+            <a:ext cx="1965960" cy="835152"/>
           </a:xfrm>
           <a:prstGeom prst="rect">
             <a:avLst/>
@@ -10272,7 +10737,7 @@
         </p:nvSpPr>
         <p:spPr>
           <a:xfrm>
-            <a:off x="777240" y="3276599"/>
+            <a:off x="777240" y="3258312"/>
             <a:ext cx="10607040" cy="465151"/>
           </a:xfrm>
           <a:prstGeom prst="rect">
@@ -10288,11 +10753,11 @@
           <a:p>
             <a:pPr algn="ctr"/>
             <a:r>
-              <a:rPr sz="2600" b="0" i="0">
+              <a:rPr sz="2470" b="0" i="0">
                 <a:solidFill>
                   <a:srgbClr val="1A1A1A"/>
                 </a:solidFill>
-                <a:latin typeface="Century Schoolbook"/>
+                <a:latin typeface="Lexend"/>
               </a:rPr>
               <a:t>Which expression is equivalent?</a:t>
             </a:r>
@@ -10307,7 +10772,7 @@
         </p:nvSpPr>
         <p:spPr>
           <a:xfrm>
-            <a:off x="1874519" y="3942919"/>
+            <a:off x="1874519" y="3924631"/>
             <a:ext cx="4572000" cy="548640"/>
           </a:xfrm>
           <a:prstGeom prst="rect">
@@ -10323,29 +10788,29 @@
           <a:p>
             <a:pPr algn="l"/>
             <a:r>
-              <a:rPr sz="2400" b="1" i="0">
+              <a:rPr sz="2280" b="1" i="0">
                 <a:solidFill>
                   <a:srgbClr val="1A1A1A"/>
                 </a:solidFill>
-                <a:latin typeface="Century Schoolbook"/>
+                <a:latin typeface="Lexend"/>
               </a:rPr>
               <a:t>A.   </a:t>
             </a:r>
             <a:r>
-              <a:rPr sz="2400" b="0" i="0">
+              <a:rPr sz="2280" b="0" i="0">
                 <a:solidFill>
                   <a:srgbClr val="1A1A1A"/>
                 </a:solidFill>
-                <a:latin typeface="Century Schoolbook"/>
+                <a:latin typeface="Lexend"/>
               </a:rPr>
               <a:t>2</a:t>
             </a:r>
             <a:r>
-              <a:rPr sz="2400" b="0" i="0" baseline="30000">
+              <a:rPr sz="2280" b="0" i="0" baseline="30000">
                 <a:solidFill>
                   <a:srgbClr val="1A1A1A"/>
                 </a:solidFill>
-                <a:latin typeface="Century Schoolbook"/>
+                <a:latin typeface="Lexend"/>
               </a:rPr>
               <a:t>-7</a:t>
             </a:r>
@@ -10360,7 +10825,7 @@
         </p:nvSpPr>
         <p:spPr>
           <a:xfrm>
-            <a:off x="6629400" y="3942919"/>
+            <a:off x="6629400" y="3924631"/>
             <a:ext cx="4572000" cy="548640"/>
           </a:xfrm>
           <a:prstGeom prst="rect">
@@ -10376,29 +10841,29 @@
           <a:p>
             <a:pPr algn="l"/>
             <a:r>
-              <a:rPr sz="2400" b="1" i="0">
+              <a:rPr sz="2280" b="1" i="0">
                 <a:solidFill>
                   <a:srgbClr val="1A1A1A"/>
                 </a:solidFill>
-                <a:latin typeface="Century Schoolbook"/>
+                <a:latin typeface="Lexend"/>
               </a:rPr>
               <a:t>B.   </a:t>
             </a:r>
             <a:r>
-              <a:rPr sz="2400" b="0" i="0">
+              <a:rPr sz="2280" b="0" i="0">
                 <a:solidFill>
                   <a:srgbClr val="1A1A1A"/>
                 </a:solidFill>
-                <a:latin typeface="Century Schoolbook"/>
+                <a:latin typeface="Lexend"/>
               </a:rPr>
               <a:t>2</a:t>
             </a:r>
             <a:r>
-              <a:rPr sz="2400" b="0" i="0" baseline="30000">
+              <a:rPr sz="2280" b="0" i="0" baseline="30000">
                 <a:solidFill>
                   <a:srgbClr val="1A1A1A"/>
                 </a:solidFill>
-                <a:latin typeface="Century Schoolbook"/>
+                <a:latin typeface="Lexend"/>
               </a:rPr>
               <a:t>7</a:t>
             </a:r>
@@ -10413,7 +10878,7 @@
         </p:nvSpPr>
         <p:spPr>
           <a:xfrm>
-            <a:off x="1874519" y="4628719"/>
+            <a:off x="1874519" y="4610431"/>
             <a:ext cx="4572000" cy="548640"/>
           </a:xfrm>
           <a:prstGeom prst="rect">
@@ -10429,29 +10894,29 @@
           <a:p>
             <a:pPr algn="l"/>
             <a:r>
-              <a:rPr sz="2400" b="1" i="0">
+              <a:rPr sz="2280" b="1" i="0">
                 <a:solidFill>
                   <a:srgbClr val="1A1A1A"/>
                 </a:solidFill>
-                <a:latin typeface="Century Schoolbook"/>
+                <a:latin typeface="Lexend"/>
               </a:rPr>
               <a:t>C.   </a:t>
             </a:r>
             <a:r>
-              <a:rPr sz="2400" b="0" i="0">
+              <a:rPr sz="2280" b="0" i="0">
                 <a:solidFill>
                   <a:srgbClr val="1A1A1A"/>
                 </a:solidFill>
-                <a:latin typeface="Century Schoolbook"/>
+                <a:latin typeface="Lexend"/>
               </a:rPr>
               <a:t>2</a:t>
             </a:r>
             <a:r>
-              <a:rPr sz="2400" b="0" i="0" baseline="30000">
+              <a:rPr sz="2280" b="0" i="0" baseline="30000">
                 <a:solidFill>
                   <a:srgbClr val="1A1A1A"/>
                 </a:solidFill>
-                <a:latin typeface="Century Schoolbook"/>
+                <a:latin typeface="Lexend"/>
               </a:rPr>
               <a:t>-5</a:t>
             </a:r>
@@ -10466,7 +10931,7 @@
         </p:nvSpPr>
         <p:spPr>
           <a:xfrm>
-            <a:off x="6629400" y="4628719"/>
+            <a:off x="6629400" y="4610431"/>
             <a:ext cx="4572000" cy="548640"/>
           </a:xfrm>
           <a:prstGeom prst="rect">
@@ -10482,29 +10947,29 @@
           <a:p>
             <a:pPr algn="l"/>
             <a:r>
-              <a:rPr sz="2400" b="1" i="0">
+              <a:rPr sz="2280" b="1" i="0">
                 <a:solidFill>
                   <a:srgbClr val="1A1A1A"/>
                 </a:solidFill>
-                <a:latin typeface="Century Schoolbook"/>
+                <a:latin typeface="Lexend"/>
               </a:rPr>
               <a:t>D.   </a:t>
             </a:r>
             <a:r>
-              <a:rPr sz="2400" b="0" i="0">
+              <a:rPr sz="2280" b="0" i="0">
                 <a:solidFill>
                   <a:srgbClr val="1A1A1A"/>
                 </a:solidFill>
-                <a:latin typeface="Century Schoolbook"/>
+                <a:latin typeface="Lexend"/>
               </a:rPr>
               <a:t>2</a:t>
             </a:r>
             <a:r>
-              <a:rPr sz="2400" b="0" i="0" baseline="30000">
+              <a:rPr sz="2280" b="0" i="0" baseline="30000">
                 <a:solidFill>
                   <a:srgbClr val="1A1A1A"/>
                 </a:solidFill>
-                <a:latin typeface="Century Schoolbook"/>
+                <a:latin typeface="Lexend"/>
               </a:rPr>
               <a:t>-12</a:t>
             </a:r>
@@ -10519,7 +10984,7 @@
         </p:nvSpPr>
         <p:spPr>
           <a:xfrm>
-            <a:off x="777240" y="5634559"/>
+            <a:off x="777240" y="5616271"/>
             <a:ext cx="10607040" cy="457200"/>
           </a:xfrm>
           <a:prstGeom prst="rect">
@@ -10535,11 +11000,11 @@
           <a:p>
             <a:pPr algn="ctr"/>
             <a:r>
-              <a:rPr sz="2600" b="1" i="0">
+              <a:rPr sz="2470" b="1" i="0">
                 <a:solidFill>
                   <a:srgbClr val="1A1A1A"/>
                 </a:solidFill>
-                <a:latin typeface="Century Schoolbook"/>
+                <a:latin typeface="Lexend"/>
               </a:rPr>
               <a:t>Answer it.</a:t>
             </a:r>
@@ -10588,11 +11053,11 @@
           <a:p>
             <a:pPr algn="l"/>
             <a:r>
-              <a:rPr sz="3400" b="1" i="0">
+              <a:rPr sz="3229" b="1" i="0">
                 <a:solidFill>
                   <a:srgbClr val="1A1A1A"/>
                 </a:solidFill>
-                <a:latin typeface="Century Schoolbook"/>
+                <a:latin typeface="Lexend"/>
               </a:rPr>
               <a:t>Whiteboards   ·   Question 6 of 9</a:t>
             </a:r>
@@ -10728,11 +11193,11 @@
           <a:p>
             <a:pPr algn="l"/>
             <a:r>
-              <a:rPr sz="1100" b="0" i="1">
+              <a:rPr sz="1040" b="0" i="0">
                 <a:solidFill>
                   <a:srgbClr val="6B6B6B"/>
                 </a:solidFill>
-                <a:latin typeface="Century Schoolbook"/>
+                <a:latin typeface="Lexend"/>
               </a:rPr>
               <a:t>Grade 7 Accelerated · Unit 3 · Lessons 6–7 — Evaluating and Equivalent Expressions</a:t>
             </a:r>
@@ -10763,11 +11228,11 @@
           <a:p>
             <a:pPr algn="r"/>
             <a:r>
-              <a:rPr sz="1100" b="0" i="0">
+              <a:rPr sz="1040" b="0" i="0">
                 <a:solidFill>
                   <a:srgbClr val="6B6B6B"/>
                 </a:solidFill>
-                <a:latin typeface="Century Schoolbook"/>
+                <a:latin typeface="Lexend"/>
               </a:rPr>
               <a:t>27</a:t>
             </a:r>
@@ -10776,7 +11241,7 @@
       </p:sp>
       <p:pic>
         <p:nvPicPr>
-          <p:cNvPr id="8" name="Picture 7" descr="4ef405027ff61918.png"/>
+          <p:cNvPr id="8" name="Picture 7" descr="2e484734d8312e16.png"/>
           <p:cNvPicPr>
             <a:picLocks noChangeAspect="1"/>
           </p:cNvPicPr>
@@ -10790,8 +11255,8 @@
         </p:blipFill>
         <p:spPr>
           <a:xfrm>
-            <a:off x="5097779" y="2103120"/>
-            <a:ext cx="1965960" cy="850392"/>
+            <a:off x="5096255" y="2103120"/>
+            <a:ext cx="1969008" cy="835152"/>
           </a:xfrm>
           <a:prstGeom prst="rect">
             <a:avLst/>
@@ -10806,7 +11271,7 @@
         </p:nvSpPr>
         <p:spPr>
           <a:xfrm>
-            <a:off x="777240" y="3182112"/>
+            <a:off x="777240" y="3166871"/>
             <a:ext cx="10607040" cy="465151"/>
           </a:xfrm>
           <a:prstGeom prst="rect">
@@ -10822,27 +11287,75 @@
           <a:p>
             <a:pPr algn="ctr"/>
             <a:r>
-              <a:rPr sz="2600" b="0" i="0">
+              <a:rPr sz="2470" b="0" i="0">
                 <a:solidFill>
                   <a:srgbClr val="1A1A1A"/>
                 </a:solidFill>
-                <a:latin typeface="Century Schoolbook"/>
+                <a:latin typeface="Lexend"/>
               </a:rPr>
               <a:t>Which expression is equivalent?</a:t>
             </a:r>
           </a:p>
         </p:txBody>
       </p:sp>
-      <p:sp>
-        <p:nvSpPr>
-          <p:cNvPr id="10" name="TextBox 9"/>
-          <p:cNvSpPr txBox="1"/>
-          <p:nvPr/>
-        </p:nvSpPr>
-        <p:spPr>
-          <a:xfrm>
-            <a:off x="1874519" y="3848431"/>
-            <a:ext cx="4572000" cy="548640"/>
+      <p:pic>
+        <p:nvPicPr>
+          <p:cNvPr id="10" name="Picture 9" descr="88e579fcfc3dcf6c.png"/>
+          <p:cNvPicPr>
+            <a:picLocks noChangeAspect="1"/>
+          </p:cNvPicPr>
+          <p:nvPr/>
+        </p:nvPicPr>
+        <p:blipFill>
+          <a:blip r:embed="rId3"/>
+          <a:stretch>
+            <a:fillRect/>
+          </a:stretch>
+        </p:blipFill>
+        <p:spPr>
+          <a:xfrm>
+            <a:off x="4399787" y="3814903"/>
+            <a:ext cx="2770632" cy="603504"/>
+          </a:xfrm>
+          <a:prstGeom prst="rect">
+            <a:avLst/>
+          </a:prstGeom>
+        </p:spPr>
+      </p:pic>
+      <p:pic>
+        <p:nvPicPr>
+          <p:cNvPr id="11" name="Picture 10" descr="76ebb55f9259b000.png"/>
+          <p:cNvPicPr>
+            <a:picLocks noChangeAspect="1"/>
+          </p:cNvPicPr>
+          <p:nvPr/>
+        </p:nvPicPr>
+        <p:blipFill>
+          <a:blip r:embed="rId4"/>
+          <a:stretch>
+            <a:fillRect/>
+          </a:stretch>
+        </p:blipFill>
+        <p:spPr>
+          <a:xfrm>
+            <a:off x="4399787" y="4599763"/>
+            <a:ext cx="3471672" cy="304800"/>
+          </a:xfrm>
+          <a:prstGeom prst="rect">
+            <a:avLst/>
+          </a:prstGeom>
+        </p:spPr>
+      </p:pic>
+      <p:sp>
+        <p:nvSpPr>
+          <p:cNvPr id="12" name="TextBox 11"/>
+          <p:cNvSpPr txBox="1"/>
+          <p:nvPr/>
+        </p:nvSpPr>
+        <p:spPr>
+          <a:xfrm>
+            <a:off x="777240" y="5095063"/>
+            <a:ext cx="10607040" cy="548640"/>
           </a:xfrm>
           <a:prstGeom prst="rect">
             <a:avLst/>
@@ -10855,234 +11368,22 @@
           </a:bodyPr>
           <a:lstStyle/>
           <a:p>
-            <a:pPr algn="l"/>
-            <a:r>
-              <a:rPr sz="2400" b="1" i="0">
+            <a:pPr algn="ctr"/>
+            <a:r>
+              <a:rPr sz="3040" b="1" i="0">
                 <a:solidFill>
                   <a:srgbClr val="9E1B32"/>
                 </a:solidFill>
-                <a:latin typeface="Century Schoolbook"/>
-              </a:rPr>
-              <a:t>A.   </a:t>
-            </a:r>
-            <a:r>
-              <a:rPr sz="2400" b="1" i="0">
+                <a:latin typeface="Lexend"/>
+              </a:rPr>
+              <a:t>Answer:   A — 2</a:t>
+            </a:r>
+            <a:r>
+              <a:rPr sz="3040" b="1" i="0" baseline="30000">
                 <a:solidFill>
                   <a:srgbClr val="9E1B32"/>
                 </a:solidFill>
-                <a:latin typeface="Century Schoolbook"/>
-              </a:rPr>
-              <a:t>2</a:t>
-            </a:r>
-            <a:r>
-              <a:rPr sz="2400" b="1" i="0" baseline="30000">
-                <a:solidFill>
-                  <a:srgbClr val="9E1B32"/>
-                </a:solidFill>
-                <a:latin typeface="Century Schoolbook"/>
-              </a:rPr>
-              <a:t>-7</a:t>
-            </a:r>
-          </a:p>
-        </p:txBody>
-      </p:sp>
-      <p:sp>
-        <p:nvSpPr>
-          <p:cNvPr id="11" name="TextBox 10"/>
-          <p:cNvSpPr txBox="1"/>
-          <p:nvPr/>
-        </p:nvSpPr>
-        <p:spPr>
-          <a:xfrm>
-            <a:off x="6629400" y="3848431"/>
-            <a:ext cx="4572000" cy="548640"/>
-          </a:xfrm>
-          <a:prstGeom prst="rect">
-            <a:avLst/>
-          </a:prstGeom>
-          <a:noFill/>
-        </p:spPr>
-        <p:txBody>
-          <a:bodyPr wrap="square" lIns="45720" rIns="45720" tIns="18288" bIns="18288" anchor="t">
-            <a:spAutoFit/>
-          </a:bodyPr>
-          <a:lstStyle/>
-          <a:p>
-            <a:pPr algn="l"/>
-            <a:r>
-              <a:rPr sz="2400" b="1" i="0">
-                <a:solidFill>
-                  <a:srgbClr val="1A1A1A"/>
-                </a:solidFill>
-                <a:latin typeface="Century Schoolbook"/>
-              </a:rPr>
-              <a:t>B.   </a:t>
-            </a:r>
-            <a:r>
-              <a:rPr sz="2400" b="0" i="0">
-                <a:solidFill>
-                  <a:srgbClr val="1A1A1A"/>
-                </a:solidFill>
-                <a:latin typeface="Century Schoolbook"/>
-              </a:rPr>
-              <a:t>2</a:t>
-            </a:r>
-            <a:r>
-              <a:rPr sz="2400" b="0" i="0" baseline="30000">
-                <a:solidFill>
-                  <a:srgbClr val="1A1A1A"/>
-                </a:solidFill>
-                <a:latin typeface="Century Schoolbook"/>
-              </a:rPr>
-              <a:t>7</a:t>
-            </a:r>
-          </a:p>
-        </p:txBody>
-      </p:sp>
-      <p:sp>
-        <p:nvSpPr>
-          <p:cNvPr id="12" name="TextBox 11"/>
-          <p:cNvSpPr txBox="1"/>
-          <p:nvPr/>
-        </p:nvSpPr>
-        <p:spPr>
-          <a:xfrm>
-            <a:off x="1874519" y="4534231"/>
-            <a:ext cx="4572000" cy="548640"/>
-          </a:xfrm>
-          <a:prstGeom prst="rect">
-            <a:avLst/>
-          </a:prstGeom>
-          <a:noFill/>
-        </p:spPr>
-        <p:txBody>
-          <a:bodyPr wrap="square" lIns="45720" rIns="45720" tIns="18288" bIns="18288" anchor="t">
-            <a:spAutoFit/>
-          </a:bodyPr>
-          <a:lstStyle/>
-          <a:p>
-            <a:pPr algn="l"/>
-            <a:r>
-              <a:rPr sz="2400" b="1" i="0">
-                <a:solidFill>
-                  <a:srgbClr val="1A1A1A"/>
-                </a:solidFill>
-                <a:latin typeface="Century Schoolbook"/>
-              </a:rPr>
-              <a:t>C.   </a:t>
-            </a:r>
-            <a:r>
-              <a:rPr sz="2400" b="0" i="0">
-                <a:solidFill>
-                  <a:srgbClr val="1A1A1A"/>
-                </a:solidFill>
-                <a:latin typeface="Century Schoolbook"/>
-              </a:rPr>
-              <a:t>2</a:t>
-            </a:r>
-            <a:r>
-              <a:rPr sz="2400" b="0" i="0" baseline="30000">
-                <a:solidFill>
-                  <a:srgbClr val="1A1A1A"/>
-                </a:solidFill>
-                <a:latin typeface="Century Schoolbook"/>
-              </a:rPr>
-              <a:t>-5</a:t>
-            </a:r>
-          </a:p>
-        </p:txBody>
-      </p:sp>
-      <p:sp>
-        <p:nvSpPr>
-          <p:cNvPr id="13" name="TextBox 12"/>
-          <p:cNvSpPr txBox="1"/>
-          <p:nvPr/>
-        </p:nvSpPr>
-        <p:spPr>
-          <a:xfrm>
-            <a:off x="6629400" y="4534231"/>
-            <a:ext cx="4572000" cy="548640"/>
-          </a:xfrm>
-          <a:prstGeom prst="rect">
-            <a:avLst/>
-          </a:prstGeom>
-          <a:noFill/>
-        </p:spPr>
-        <p:txBody>
-          <a:bodyPr wrap="square" lIns="45720" rIns="45720" tIns="18288" bIns="18288" anchor="t">
-            <a:spAutoFit/>
-          </a:bodyPr>
-          <a:lstStyle/>
-          <a:p>
-            <a:pPr algn="l"/>
-            <a:r>
-              <a:rPr sz="2400" b="1" i="0">
-                <a:solidFill>
-                  <a:srgbClr val="1A1A1A"/>
-                </a:solidFill>
-                <a:latin typeface="Century Schoolbook"/>
-              </a:rPr>
-              <a:t>D.   </a:t>
-            </a:r>
-            <a:r>
-              <a:rPr sz="2400" b="0" i="0">
-                <a:solidFill>
-                  <a:srgbClr val="1A1A1A"/>
-                </a:solidFill>
-                <a:latin typeface="Century Schoolbook"/>
-              </a:rPr>
-              <a:t>2</a:t>
-            </a:r>
-            <a:r>
-              <a:rPr sz="2400" b="0" i="0" baseline="30000">
-                <a:solidFill>
-                  <a:srgbClr val="1A1A1A"/>
-                </a:solidFill>
-                <a:latin typeface="Century Schoolbook"/>
-              </a:rPr>
-              <a:t>-12</a:t>
-            </a:r>
-          </a:p>
-        </p:txBody>
-      </p:sp>
-      <p:sp>
-        <p:nvSpPr>
-          <p:cNvPr id="14" name="TextBox 13"/>
-          <p:cNvSpPr txBox="1"/>
-          <p:nvPr/>
-        </p:nvSpPr>
-        <p:spPr>
-          <a:xfrm>
-            <a:off x="777240" y="5540071"/>
-            <a:ext cx="10607040" cy="548640"/>
-          </a:xfrm>
-          <a:prstGeom prst="rect">
-            <a:avLst/>
-          </a:prstGeom>
-          <a:noFill/>
-        </p:spPr>
-        <p:txBody>
-          <a:bodyPr wrap="square" lIns="45720" rIns="45720" tIns="18288" bIns="18288" anchor="t">
-            <a:spAutoFit/>
-          </a:bodyPr>
-          <a:lstStyle/>
-          <a:p>
-            <a:pPr algn="ctr"/>
-            <a:r>
-              <a:rPr sz="3200" b="1" i="0">
-                <a:solidFill>
-                  <a:srgbClr val="9E1B32"/>
-                </a:solidFill>
-                <a:latin typeface="Century Schoolbook"/>
-              </a:rPr>
-              <a:t>Answer:   A — 2</a:t>
-            </a:r>
-            <a:r>
-              <a:rPr sz="3200" b="1" i="0" baseline="30000">
-                <a:solidFill>
-                  <a:srgbClr val="9E1B32"/>
-                </a:solidFill>
-                <a:latin typeface="Century Schoolbook"/>
+                <a:latin typeface="Lexend"/>
               </a:rPr>
               <a:t>-7</a:t>
             </a:r>
@@ -11131,11 +11432,11 @@
           <a:p>
             <a:pPr algn="l"/>
             <a:r>
-              <a:rPr sz="3400" b="1" i="0">
+              <a:rPr sz="3229" b="1" i="0">
                 <a:solidFill>
                   <a:srgbClr val="1A1A1A"/>
                 </a:solidFill>
-                <a:latin typeface="Century Schoolbook"/>
+                <a:latin typeface="Lexend"/>
               </a:rPr>
               <a:t>Whiteboards   ·   Question 7 of 9</a:t>
             </a:r>
@@ -11271,11 +11572,11 @@
           <a:p>
             <a:pPr algn="l"/>
             <a:r>
-              <a:rPr sz="1100" b="0" i="1">
+              <a:rPr sz="1040" b="0" i="0">
                 <a:solidFill>
                   <a:srgbClr val="6B6B6B"/>
                 </a:solidFill>
-                <a:latin typeface="Century Schoolbook"/>
+                <a:latin typeface="Lexend"/>
               </a:rPr>
               <a:t>Grade 7 Accelerated · Unit 3 · Lessons 6–7 — Evaluating and Equivalent Expressions</a:t>
             </a:r>
@@ -11306,11 +11607,11 @@
           <a:p>
             <a:pPr algn="r"/>
             <a:r>
-              <a:rPr sz="1100" b="0" i="0">
+              <a:rPr sz="1040" b="0" i="0">
                 <a:solidFill>
                   <a:srgbClr val="6B6B6B"/>
                 </a:solidFill>
-                <a:latin typeface="Century Schoolbook"/>
+                <a:latin typeface="Lexend"/>
               </a:rPr>
               <a:t>28</a:t>
             </a:r>
@@ -11319,7 +11620,7 @@
       </p:sp>
       <p:pic>
         <p:nvPicPr>
-          <p:cNvPr id="8" name="Picture 7" descr="11b1cae12f4ad7a2.png"/>
+          <p:cNvPr id="8" name="Picture 7" descr="8aa79e338eec268d.png"/>
           <p:cNvPicPr>
             <a:picLocks noChangeAspect="1"/>
           </p:cNvPicPr>
@@ -11333,8 +11634,8 @@
         </p:blipFill>
         <p:spPr>
           <a:xfrm>
-            <a:off x="5501639" y="2194560"/>
-            <a:ext cx="1158240" cy="420624"/>
+            <a:off x="5480304" y="2194560"/>
+            <a:ext cx="1200912" cy="414528"/>
           </a:xfrm>
           <a:prstGeom prst="rect">
             <a:avLst/>
@@ -11365,11 +11666,11 @@
           <a:p>
             <a:pPr algn="ctr"/>
             <a:r>
-              <a:rPr sz="2600" b="1" i="0">
+              <a:rPr sz="2470" b="1" i="0">
                 <a:solidFill>
                   <a:srgbClr val="1A1A1A"/>
                 </a:solidFill>
-                <a:latin typeface="Century Schoolbook"/>
+                <a:latin typeface="Lexend"/>
               </a:rPr>
               <a:t>Answer it.</a:t>
             </a:r>
@@ -11418,11 +11719,11 @@
           <a:p>
             <a:pPr algn="l"/>
             <a:r>
-              <a:rPr sz="3400" b="1" i="0">
+              <a:rPr sz="3229" b="1" i="0">
                 <a:solidFill>
                   <a:srgbClr val="1A1A1A"/>
                 </a:solidFill>
-                <a:latin typeface="Century Schoolbook"/>
+                <a:latin typeface="Lexend"/>
               </a:rPr>
               <a:t>Whiteboards   ·   Question 7 of 9</a:t>
             </a:r>
@@ -11558,11 +11859,11 @@
           <a:p>
             <a:pPr algn="l"/>
             <a:r>
-              <a:rPr sz="1100" b="0" i="1">
+              <a:rPr sz="1040" b="0" i="0">
                 <a:solidFill>
                   <a:srgbClr val="6B6B6B"/>
                 </a:solidFill>
-                <a:latin typeface="Century Schoolbook"/>
+                <a:latin typeface="Lexend"/>
               </a:rPr>
               <a:t>Grade 7 Accelerated · Unit 3 · Lessons 6–7 — Evaluating and Equivalent Expressions</a:t>
             </a:r>
@@ -11593,11 +11894,11 @@
           <a:p>
             <a:pPr algn="r"/>
             <a:r>
-              <a:rPr sz="1100" b="0" i="0">
+              <a:rPr sz="1040" b="0" i="0">
                 <a:solidFill>
                   <a:srgbClr val="6B6B6B"/>
                 </a:solidFill>
-                <a:latin typeface="Century Schoolbook"/>
+                <a:latin typeface="Lexend"/>
               </a:rPr>
               <a:t>29</a:t>
             </a:r>
@@ -11606,7 +11907,7 @@
       </p:sp>
       <p:pic>
         <p:nvPicPr>
-          <p:cNvPr id="8" name="Picture 7" descr="9a83df8a23e93975.png"/>
+          <p:cNvPr id="8" name="Picture 7" descr="955eff3a17c3a975.png"/>
           <p:cNvPicPr>
             <a:picLocks noChangeAspect="1"/>
           </p:cNvPicPr>
@@ -11620,52 +11921,17 @@
         </p:blipFill>
         <p:spPr>
           <a:xfrm>
-            <a:off x="5501639" y="2103120"/>
-            <a:ext cx="1158240" cy="420624"/>
+            <a:off x="5478780" y="2103120"/>
+            <a:ext cx="1203960" cy="414528"/>
           </a:xfrm>
           <a:prstGeom prst="rect">
             <a:avLst/>
           </a:prstGeom>
         </p:spPr>
       </p:pic>
-      <p:sp>
-        <p:nvSpPr>
-          <p:cNvPr id="9" name="TextBox 8"/>
-          <p:cNvSpPr txBox="1"/>
-          <p:nvPr/>
-        </p:nvSpPr>
-        <p:spPr>
-          <a:xfrm>
-            <a:off x="4914900" y="4602480"/>
-            <a:ext cx="1920240" cy="548640"/>
-          </a:xfrm>
-          <a:prstGeom prst="rect">
-            <a:avLst/>
-          </a:prstGeom>
-          <a:noFill/>
-        </p:spPr>
-        <p:txBody>
-          <a:bodyPr wrap="square" lIns="45720" rIns="45720" tIns="18288" bIns="18288" anchor="ctr">
-            <a:spAutoFit/>
-          </a:bodyPr>
-          <a:lstStyle/>
-          <a:p>
-            <a:pPr algn="l"/>
-            <a:r>
-              <a:rPr sz="3200" b="1" i="0">
-                <a:solidFill>
-                  <a:srgbClr val="9E1B32"/>
-                </a:solidFill>
-                <a:latin typeface="Century Schoolbook"/>
-              </a:rPr>
-              <a:t>Answer:</a:t>
-            </a:r>
-          </a:p>
-        </p:txBody>
-      </p:sp>
       <p:pic>
         <p:nvPicPr>
-          <p:cNvPr id="10" name="Picture 9" descr="474833020a971499.png"/>
+          <p:cNvPr id="9" name="Picture 8" descr="9b88a36b8746eb67.png"/>
           <p:cNvPicPr>
             <a:picLocks noChangeAspect="1"/>
           </p:cNvPicPr>
@@ -11679,8 +11945,91 @@
         </p:blipFill>
         <p:spPr>
           <a:xfrm>
-            <a:off x="6835140" y="4663440"/>
-            <a:ext cx="411480" cy="426720"/>
+            <a:off x="4858511" y="2839211"/>
+            <a:ext cx="2063496" cy="371856"/>
+          </a:xfrm>
+          <a:prstGeom prst="rect">
+            <a:avLst/>
+          </a:prstGeom>
+        </p:spPr>
+      </p:pic>
+      <p:pic>
+        <p:nvPicPr>
+          <p:cNvPr id="10" name="Picture 9" descr="73f533a4d1835daa.png"/>
+          <p:cNvPicPr>
+            <a:picLocks noChangeAspect="1"/>
+          </p:cNvPicPr>
+          <p:nvPr/>
+        </p:nvPicPr>
+        <p:blipFill>
+          <a:blip r:embed="rId4"/>
+          <a:stretch>
+            <a:fillRect/>
+          </a:stretch>
+        </p:blipFill>
+        <p:spPr>
+          <a:xfrm>
+            <a:off x="4858511" y="3410711"/>
+            <a:ext cx="2551176" cy="307848"/>
+          </a:xfrm>
+          <a:prstGeom prst="rect">
+            <a:avLst/>
+          </a:prstGeom>
+        </p:spPr>
+      </p:pic>
+      <p:sp>
+        <p:nvSpPr>
+          <p:cNvPr id="11" name="TextBox 10"/>
+          <p:cNvSpPr txBox="1"/>
+          <p:nvPr/>
+        </p:nvSpPr>
+        <p:spPr>
+          <a:xfrm>
+            <a:off x="4910327" y="4597908"/>
+            <a:ext cx="1920240" cy="548640"/>
+          </a:xfrm>
+          <a:prstGeom prst="rect">
+            <a:avLst/>
+          </a:prstGeom>
+          <a:noFill/>
+        </p:spPr>
+        <p:txBody>
+          <a:bodyPr wrap="square" lIns="45720" rIns="45720" tIns="18288" bIns="18288" anchor="ctr">
+            <a:spAutoFit/>
+          </a:bodyPr>
+          <a:lstStyle/>
+          <a:p>
+            <a:pPr algn="l"/>
+            <a:r>
+              <a:rPr sz="3040" b="1" i="0">
+                <a:solidFill>
+                  <a:srgbClr val="9E1B32"/>
+                </a:solidFill>
+                <a:latin typeface="Lexend"/>
+              </a:rPr>
+              <a:t>Answer:</a:t>
+            </a:r>
+          </a:p>
+        </p:txBody>
+      </p:sp>
+      <p:pic>
+        <p:nvPicPr>
+          <p:cNvPr id="12" name="Picture 11" descr="340250b80ab72834.png"/>
+          <p:cNvPicPr>
+            <a:picLocks noChangeAspect="1"/>
+          </p:cNvPicPr>
+          <p:nvPr/>
+        </p:nvPicPr>
+        <p:blipFill>
+          <a:blip r:embed="rId5"/>
+          <a:stretch>
+            <a:fillRect/>
+          </a:stretch>
+        </p:blipFill>
+        <p:spPr>
+          <a:xfrm>
+            <a:off x="6830567" y="4663440"/>
+            <a:ext cx="420624" cy="417576"/>
           </a:xfrm>
           <a:prstGeom prst="rect">
             <a:avLst/>
@@ -11729,11 +12078,11 @@
           <a:p>
             <a:pPr algn="l"/>
             <a:r>
-              <a:rPr sz="3600" b="1" i="0">
+              <a:rPr sz="3420" b="1" i="0">
                 <a:solidFill>
                   <a:srgbClr val="1A1A1A"/>
                 </a:solidFill>
-                <a:latin typeface="Century Schoolbook"/>
+                <a:latin typeface="Lexend"/>
               </a:rPr>
               <a:t>Warm-Up</a:t>
             </a:r>
@@ -11869,11 +12218,11 @@
           <a:p>
             <a:pPr algn="l"/>
             <a:r>
-              <a:rPr sz="1100" b="0" i="1">
+              <a:rPr sz="1040" b="0" i="0">
                 <a:solidFill>
                   <a:srgbClr val="6B6B6B"/>
                 </a:solidFill>
-                <a:latin typeface="Century Schoolbook"/>
+                <a:latin typeface="Lexend"/>
               </a:rPr>
               <a:t>Grade 7 Accelerated · Unit 3 · Lessons 6–7 — Evaluating and Equivalent Expressions</a:t>
             </a:r>
@@ -11904,11 +12253,11 @@
           <a:p>
             <a:pPr algn="r"/>
             <a:r>
-              <a:rPr sz="1100" b="0" i="0">
+              <a:rPr sz="1040" b="0" i="0">
                 <a:solidFill>
                   <a:srgbClr val="6B6B6B"/>
                 </a:solidFill>
-                <a:latin typeface="Century Schoolbook"/>
+                <a:latin typeface="Lexend"/>
               </a:rPr>
               <a:t>3</a:t>
             </a:r>
@@ -11923,8 +12272,8 @@
         </p:nvSpPr>
         <p:spPr>
           <a:xfrm>
-            <a:off x="1874519" y="1511808"/>
-            <a:ext cx="7804089" cy="457200"/>
+            <a:off x="1874519" y="1505712"/>
+            <a:ext cx="7683225" cy="457200"/>
           </a:xfrm>
           <a:prstGeom prst="rect">
             <a:avLst/>
@@ -11939,11 +12288,11 @@
           <a:p>
             <a:pPr algn="l"/>
             <a:r>
-              <a:rPr sz="2300" b="0" i="0">
+              <a:rPr sz="2180" b="0" i="0">
                 <a:solidFill>
                   <a:srgbClr val="1A1A1A"/>
                 </a:solidFill>
-                <a:latin typeface="Century Schoolbook"/>
+                <a:latin typeface="Lexend"/>
               </a:rPr>
               <a:t>1.   Rewrite with a positive exponent, then evaluate:  </a:t>
             </a:r>
@@ -11952,7 +12301,7 @@
       </p:sp>
       <p:pic>
         <p:nvPicPr>
-          <p:cNvPr id="9" name="Picture 8" descr="70fd4f7c195b27fd.png"/>
+          <p:cNvPr id="9" name="Picture 8" descr="f3c8135f85cfec4f.png"/>
           <p:cNvPicPr>
             <a:picLocks noChangeAspect="1"/>
           </p:cNvPicPr>
@@ -11966,8 +12315,8 @@
         </p:blipFill>
         <p:spPr>
           <a:xfrm>
-            <a:off x="9541449" y="1463040"/>
-            <a:ext cx="795528" cy="554736"/>
+            <a:off x="9420585" y="1463040"/>
+            <a:ext cx="765048" cy="542544"/>
           </a:xfrm>
           <a:prstGeom prst="rect">
             <a:avLst/>
@@ -11976,7 +12325,7 @@
       </p:pic>
       <p:pic>
         <p:nvPicPr>
-          <p:cNvPr id="10" name="Picture 9" descr="b2f9cb953a93e9cc.png"/>
+          <p:cNvPr id="10" name="Picture 9" descr="6caafeea515e2e66.png"/>
           <p:cNvPicPr>
             <a:picLocks noChangeAspect="1"/>
           </p:cNvPicPr>
@@ -11990,8 +12339,8 @@
         </p:blipFill>
         <p:spPr>
           <a:xfrm>
-            <a:off x="2606040" y="2063496"/>
-            <a:ext cx="1152144" cy="557784"/>
+            <a:off x="2606040" y="2051303"/>
+            <a:ext cx="1146048" cy="542544"/>
           </a:xfrm>
           <a:prstGeom prst="rect">
             <a:avLst/>
@@ -12006,8 +12355,8 @@
         </p:nvSpPr>
         <p:spPr>
           <a:xfrm>
-            <a:off x="1874519" y="2897124"/>
-            <a:ext cx="3064939" cy="457200"/>
+            <a:off x="1874519" y="2863596"/>
+            <a:ext cx="2935946" cy="457200"/>
           </a:xfrm>
           <a:prstGeom prst="rect">
             <a:avLst/>
@@ -12022,11 +12371,11 @@
           <a:p>
             <a:pPr algn="l"/>
             <a:r>
-              <a:rPr sz="2300" b="0" i="0">
+              <a:rPr sz="2180" b="0" i="0">
                 <a:solidFill>
                   <a:srgbClr val="1A1A1A"/>
                 </a:solidFill>
-                <a:latin typeface="Century Schoolbook"/>
+                <a:latin typeface="Lexend"/>
               </a:rPr>
               <a:t>2.   Find the value:  </a:t>
             </a:r>
@@ -12035,7 +12384,7 @@
       </p:sp>
       <p:pic>
         <p:nvPicPr>
-          <p:cNvPr id="12" name="Picture 11" descr="a4522c3024ca6567.png"/>
+          <p:cNvPr id="12" name="Picture 11" descr="eb4b098ae3e189d5.png"/>
           <p:cNvPicPr>
             <a:picLocks noChangeAspect="1"/>
           </p:cNvPicPr>
@@ -12049,8 +12398,8 @@
         </p:blipFill>
         <p:spPr>
           <a:xfrm>
-            <a:off x="4802299" y="2822448"/>
-            <a:ext cx="463296" cy="606552"/>
+            <a:off x="4673306" y="2795016"/>
+            <a:ext cx="441960" cy="594360"/>
           </a:xfrm>
           <a:prstGeom prst="rect">
             <a:avLst/>
@@ -12065,8 +12414,8 @@
         </p:nvSpPr>
         <p:spPr>
           <a:xfrm>
-            <a:off x="5814235" y="2799588"/>
-            <a:ext cx="565792" cy="457200"/>
+            <a:off x="5663906" y="2772156"/>
+            <a:ext cx="546819" cy="457200"/>
           </a:xfrm>
           <a:prstGeom prst="rect">
             <a:avLst/>
@@ -12081,11 +12430,11 @@
           <a:p>
             <a:pPr algn="l"/>
             <a:r>
-              <a:rPr sz="2300" b="1" i="0">
+              <a:rPr sz="2180" b="1" i="0">
                 <a:solidFill>
                   <a:srgbClr val="9E1B32"/>
                 </a:solidFill>
-                <a:latin typeface="Century Schoolbook"/>
+                <a:latin typeface="Lexend"/>
               </a:rPr>
               <a:t>25</a:t>
             </a:r>
@@ -12100,8 +12449,8 @@
         </p:nvSpPr>
         <p:spPr>
           <a:xfrm>
-            <a:off x="1874519" y="3735324"/>
-            <a:ext cx="3064939" cy="457200"/>
+            <a:off x="1874519" y="3685032"/>
+            <a:ext cx="2930351" cy="457200"/>
           </a:xfrm>
           <a:prstGeom prst="rect">
             <a:avLst/>
@@ -12116,11 +12465,11 @@
           <a:p>
             <a:pPr algn="l"/>
             <a:r>
-              <a:rPr sz="2300" b="0" i="0">
+              <a:rPr sz="2180" b="0" i="0">
                 <a:solidFill>
                   <a:srgbClr val="1A1A1A"/>
                 </a:solidFill>
-                <a:latin typeface="Century Schoolbook"/>
+                <a:latin typeface="Lexend"/>
               </a:rPr>
               <a:t>3.   Find the value:  </a:t>
             </a:r>
@@ -12129,7 +12478,7 @@
       </p:sp>
       <p:pic>
         <p:nvPicPr>
-          <p:cNvPr id="15" name="Picture 14" descr="574a5d3a612aa104.png"/>
+          <p:cNvPr id="15" name="Picture 14" descr="c39296e5705a45be.png"/>
           <p:cNvPicPr>
             <a:picLocks noChangeAspect="1"/>
           </p:cNvPicPr>
@@ -12143,8 +12492,8 @@
         </p:blipFill>
         <p:spPr>
           <a:xfrm>
-            <a:off x="4802299" y="3630168"/>
-            <a:ext cx="469392" cy="667512"/>
+            <a:off x="4667711" y="3590544"/>
+            <a:ext cx="499871" cy="646176"/>
           </a:xfrm>
           <a:prstGeom prst="rect">
             <a:avLst/>
@@ -12159,8 +12508,8 @@
         </p:nvSpPr>
         <p:spPr>
           <a:xfrm>
-            <a:off x="5820331" y="3607308"/>
-            <a:ext cx="743533" cy="457200"/>
+            <a:off x="5716223" y="3567684"/>
+            <a:ext cx="772374" cy="457200"/>
           </a:xfrm>
           <a:prstGeom prst="rect">
             <a:avLst/>
@@ -12175,11 +12524,11 @@
           <a:p>
             <a:pPr algn="l"/>
             <a:r>
-              <a:rPr sz="2300" b="1" i="0">
+              <a:rPr sz="2180" b="1" i="0">
                 <a:solidFill>
                   <a:srgbClr val="9E1B32"/>
                 </a:solidFill>
-                <a:latin typeface="Century Schoolbook"/>
+                <a:latin typeface="Lexend"/>
               </a:rPr>
               <a:t>100</a:t>
             </a:r>
@@ -12194,8 +12543,8 @@
         </p:nvSpPr>
         <p:spPr>
           <a:xfrm>
-            <a:off x="1874519" y="4475988"/>
-            <a:ext cx="6243654" cy="457200"/>
+            <a:off x="1874519" y="4415028"/>
+            <a:ext cx="6288636" cy="457200"/>
           </a:xfrm>
           <a:prstGeom prst="rect">
             <a:avLst/>
@@ -12210,11 +12559,11 @@
           <a:p>
             <a:pPr algn="l"/>
             <a:r>
-              <a:rPr sz="2300" b="0" i="0">
+              <a:rPr sz="2180" b="0" i="0">
                 <a:solidFill>
                   <a:srgbClr val="1A1A1A"/>
                 </a:solidFill>
-                <a:latin typeface="Century Schoolbook"/>
+                <a:latin typeface="Lexend"/>
               </a:rPr>
               <a:t>4.   Write 64 as a power of 2, of 4, and of 8.</a:t>
             </a:r>
@@ -12223,7 +12572,7 @@
       </p:sp>
       <p:pic>
         <p:nvPicPr>
-          <p:cNvPr id="18" name="Picture 17" descr="b2c477a7a0fb52e7.png"/>
+          <p:cNvPr id="18" name="Picture 17" descr="f9e6eaa0e482393e.png"/>
           <p:cNvPicPr>
             <a:picLocks noChangeAspect="1"/>
           </p:cNvPicPr>
@@ -12237,8 +12586,8 @@
         </p:blipFill>
         <p:spPr>
           <a:xfrm>
-            <a:off x="8529654" y="4567428"/>
-            <a:ext cx="268224" cy="274320"/>
+            <a:off x="8574636" y="4507992"/>
+            <a:ext cx="274320" cy="271272"/>
           </a:xfrm>
           <a:prstGeom prst="rect">
             <a:avLst/>
@@ -12253,8 +12602,8 @@
         </p:nvSpPr>
         <p:spPr>
           <a:xfrm>
-            <a:off x="8797878" y="4475988"/>
-            <a:ext cx="474135" cy="457200"/>
+            <a:off x="8848956" y="4415028"/>
+            <a:ext cx="482975" cy="457200"/>
           </a:xfrm>
           <a:prstGeom prst="rect">
             <a:avLst/>
@@ -12269,11 +12618,11 @@
           <a:p>
             <a:pPr algn="l"/>
             <a:r>
-              <a:rPr sz="2300" b="1" i="0">
+              <a:rPr sz="2180" b="1" i="0">
                 <a:solidFill>
                   <a:srgbClr val="9E1B32"/>
                 </a:solidFill>
-                <a:latin typeface="Century Schoolbook"/>
+                <a:latin typeface="Lexend"/>
               </a:rPr>
               <a:t>,  </a:t>
             </a:r>
@@ -12282,7 +12631,7 @@
       </p:sp>
       <p:pic>
         <p:nvPicPr>
-          <p:cNvPr id="20" name="Picture 19" descr="555a2ab77fff0fec.png"/>
+          <p:cNvPr id="20" name="Picture 19" descr="bde95a28370ef033.png"/>
           <p:cNvPicPr>
             <a:picLocks noChangeAspect="1"/>
           </p:cNvPicPr>
@@ -12296,8 +12645,8 @@
         </p:blipFill>
         <p:spPr>
           <a:xfrm>
-            <a:off x="9134854" y="4567428"/>
-            <a:ext cx="265176" cy="274320"/>
+            <a:off x="9194771" y="4509516"/>
+            <a:ext cx="295656" cy="268224"/>
           </a:xfrm>
           <a:prstGeom prst="rect">
             <a:avLst/>
@@ -12312,8 +12661,8 @@
         </p:nvSpPr>
         <p:spPr>
           <a:xfrm>
-            <a:off x="9400030" y="4475988"/>
-            <a:ext cx="474135" cy="457200"/>
+            <a:off x="9490427" y="4415028"/>
+            <a:ext cx="482975" cy="457200"/>
           </a:xfrm>
           <a:prstGeom prst="rect">
             <a:avLst/>
@@ -12328,11 +12677,11 @@
           <a:p>
             <a:pPr algn="l"/>
             <a:r>
-              <a:rPr sz="2300" b="1" i="0">
+              <a:rPr sz="2180" b="1" i="0">
                 <a:solidFill>
                   <a:srgbClr val="9E1B32"/>
                 </a:solidFill>
-                <a:latin typeface="Century Schoolbook"/>
+                <a:latin typeface="Lexend"/>
               </a:rPr>
               <a:t>,  </a:t>
             </a:r>
@@ -12341,7 +12690,7 @@
       </p:sp>
       <p:pic>
         <p:nvPicPr>
-          <p:cNvPr id="22" name="Picture 21" descr="f2c3dde86c5203ac.png"/>
+          <p:cNvPr id="22" name="Picture 21" descr="dc3644d208527bbe.png"/>
           <p:cNvPicPr>
             <a:picLocks noChangeAspect="1"/>
           </p:cNvPicPr>
@@ -12355,8 +12704,8 @@
         </p:blipFill>
         <p:spPr>
           <a:xfrm>
-            <a:off x="9737005" y="4564380"/>
-            <a:ext cx="259080" cy="280416"/>
+            <a:off x="9836243" y="4506468"/>
+            <a:ext cx="283464" cy="274320"/>
           </a:xfrm>
           <a:prstGeom prst="rect">
             <a:avLst/>
@@ -12405,11 +12754,11 @@
           <a:p>
             <a:pPr algn="l"/>
             <a:r>
-              <a:rPr sz="3400" b="1" i="0">
+              <a:rPr sz="3229" b="1" i="0">
                 <a:solidFill>
                   <a:srgbClr val="1A1A1A"/>
                 </a:solidFill>
-                <a:latin typeface="Century Schoolbook"/>
+                <a:latin typeface="Lexend"/>
               </a:rPr>
               <a:t>Whiteboards   ·   Question 8 of 9</a:t>
             </a:r>
@@ -12545,11 +12894,11 @@
           <a:p>
             <a:pPr algn="l"/>
             <a:r>
-              <a:rPr sz="1100" b="0" i="1">
+              <a:rPr sz="1040" b="0" i="0">
                 <a:solidFill>
                   <a:srgbClr val="6B6B6B"/>
                 </a:solidFill>
-                <a:latin typeface="Century Schoolbook"/>
+                <a:latin typeface="Lexend"/>
               </a:rPr>
               <a:t>Grade 7 Accelerated · Unit 3 · Lessons 6–7 — Evaluating and Equivalent Expressions</a:t>
             </a:r>
@@ -12580,11 +12929,11 @@
           <a:p>
             <a:pPr algn="r"/>
             <a:r>
-              <a:rPr sz="1100" b="0" i="0">
+              <a:rPr sz="1040" b="0" i="0">
                 <a:solidFill>
                   <a:srgbClr val="6B6B6B"/>
                 </a:solidFill>
-                <a:latin typeface="Century Schoolbook"/>
+                <a:latin typeface="Lexend"/>
               </a:rPr>
               <a:t>30</a:t>
             </a:r>
@@ -12593,7 +12942,7 @@
       </p:sp>
       <p:pic>
         <p:nvPicPr>
-          <p:cNvPr id="8" name="Picture 7" descr="cd86dc37fd0c05fc.png"/>
+          <p:cNvPr id="8" name="Picture 7" descr="fabcaa4b09e391b2.png"/>
           <p:cNvPicPr>
             <a:picLocks noChangeAspect="1"/>
           </p:cNvPicPr>
@@ -12607,8 +12956,8 @@
         </p:blipFill>
         <p:spPr>
           <a:xfrm>
-            <a:off x="5369051" y="2194560"/>
-            <a:ext cx="1423416" cy="426720"/>
+            <a:off x="5352287" y="2194560"/>
+            <a:ext cx="1456944" cy="417576"/>
           </a:xfrm>
           <a:prstGeom prst="rect">
             <a:avLst/>
@@ -12639,11 +12988,11 @@
           <a:p>
             <a:pPr algn="ctr"/>
             <a:r>
-              <a:rPr sz="2600" b="1" i="0">
+              <a:rPr sz="2470" b="1" i="0">
                 <a:solidFill>
                   <a:srgbClr val="1A1A1A"/>
                 </a:solidFill>
-                <a:latin typeface="Century Schoolbook"/>
+                <a:latin typeface="Lexend"/>
               </a:rPr>
               <a:t>Answer it.</a:t>
             </a:r>
@@ -12692,11 +13041,11 @@
           <a:p>
             <a:pPr algn="l"/>
             <a:r>
-              <a:rPr sz="3400" b="1" i="0">
+              <a:rPr sz="3229" b="1" i="0">
                 <a:solidFill>
                   <a:srgbClr val="1A1A1A"/>
                 </a:solidFill>
-                <a:latin typeface="Century Schoolbook"/>
+                <a:latin typeface="Lexend"/>
               </a:rPr>
               <a:t>Whiteboards   ·   Question 8 of 9</a:t>
             </a:r>
@@ -12832,11 +13181,11 @@
           <a:p>
             <a:pPr algn="l"/>
             <a:r>
-              <a:rPr sz="1100" b="0" i="1">
+              <a:rPr sz="1040" b="0" i="0">
                 <a:solidFill>
                   <a:srgbClr val="6B6B6B"/>
                 </a:solidFill>
-                <a:latin typeface="Century Schoolbook"/>
+                <a:latin typeface="Lexend"/>
               </a:rPr>
               <a:t>Grade 7 Accelerated · Unit 3 · Lessons 6–7 — Evaluating and Equivalent Expressions</a:t>
             </a:r>
@@ -12867,11 +13216,11 @@
           <a:p>
             <a:pPr algn="r"/>
             <a:r>
-              <a:rPr sz="1100" b="0" i="0">
+              <a:rPr sz="1040" b="0" i="0">
                 <a:solidFill>
                   <a:srgbClr val="6B6B6B"/>
                 </a:solidFill>
-                <a:latin typeface="Century Schoolbook"/>
+                <a:latin typeface="Lexend"/>
               </a:rPr>
               <a:t>31</a:t>
             </a:r>
@@ -12880,7 +13229,7 @@
       </p:sp>
       <p:pic>
         <p:nvPicPr>
-          <p:cNvPr id="8" name="Picture 7" descr="a58ef65a72479a64.png"/>
+          <p:cNvPr id="8" name="Picture 7" descr="cf7aaf90f7175a64.png"/>
           <p:cNvPicPr>
             <a:picLocks noChangeAspect="1"/>
           </p:cNvPicPr>
@@ -12894,52 +13243,17 @@
         </p:blipFill>
         <p:spPr>
           <a:xfrm>
-            <a:off x="5367527" y="2103120"/>
-            <a:ext cx="1426464" cy="423672"/>
+            <a:off x="5352287" y="2103120"/>
+            <a:ext cx="1456944" cy="417576"/>
           </a:xfrm>
           <a:prstGeom prst="rect">
             <a:avLst/>
           </a:prstGeom>
         </p:spPr>
       </p:pic>
-      <p:sp>
-        <p:nvSpPr>
-          <p:cNvPr id="9" name="TextBox 8"/>
-          <p:cNvSpPr txBox="1"/>
-          <p:nvPr/>
-        </p:nvSpPr>
-        <p:spPr>
-          <a:xfrm>
-            <a:off x="4821935" y="4602480"/>
-            <a:ext cx="1920240" cy="548640"/>
-          </a:xfrm>
-          <a:prstGeom prst="rect">
-            <a:avLst/>
-          </a:prstGeom>
-          <a:noFill/>
-        </p:spPr>
-        <p:txBody>
-          <a:bodyPr wrap="square" lIns="45720" rIns="45720" tIns="18288" bIns="18288" anchor="ctr">
-            <a:spAutoFit/>
-          </a:bodyPr>
-          <a:lstStyle/>
-          <a:p>
-            <a:pPr algn="l"/>
-            <a:r>
-              <a:rPr sz="3200" b="1" i="0">
-                <a:solidFill>
-                  <a:srgbClr val="9E1B32"/>
-                </a:solidFill>
-                <a:latin typeface="Century Schoolbook"/>
-              </a:rPr>
-              <a:t>Answer:</a:t>
-            </a:r>
-          </a:p>
-        </p:txBody>
-      </p:sp>
       <p:pic>
         <p:nvPicPr>
-          <p:cNvPr id="10" name="Picture 9" descr="c9101e99983c701b.png"/>
+          <p:cNvPr id="9" name="Picture 8" descr="85f7d1d146f1f2c7.png"/>
           <p:cNvPicPr>
             <a:picLocks noChangeAspect="1"/>
           </p:cNvPicPr>
@@ -12953,8 +13267,91 @@
         </p:blipFill>
         <p:spPr>
           <a:xfrm>
-            <a:off x="6742176" y="4663440"/>
-            <a:ext cx="597408" cy="426720"/>
+            <a:off x="4575047" y="2877312"/>
+            <a:ext cx="3124200" cy="301752"/>
+          </a:xfrm>
+          <a:prstGeom prst="rect">
+            <a:avLst/>
+          </a:prstGeom>
+        </p:spPr>
+      </p:pic>
+      <p:pic>
+        <p:nvPicPr>
+          <p:cNvPr id="10" name="Picture 9" descr="a2e7bc9cfa7f6a32.png"/>
+          <p:cNvPicPr>
+            <a:picLocks noChangeAspect="1"/>
+          </p:cNvPicPr>
+          <p:nvPr/>
+        </p:nvPicPr>
+        <p:blipFill>
+          <a:blip r:embed="rId4"/>
+          <a:stretch>
+            <a:fillRect/>
+          </a:stretch>
+        </p:blipFill>
+        <p:spPr>
+          <a:xfrm>
+            <a:off x="4575047" y="3381756"/>
+            <a:ext cx="2218944" cy="371856"/>
+          </a:xfrm>
+          <a:prstGeom prst="rect">
+            <a:avLst/>
+          </a:prstGeom>
+        </p:spPr>
+      </p:pic>
+      <p:sp>
+        <p:nvSpPr>
+          <p:cNvPr id="11" name="TextBox 10"/>
+          <p:cNvSpPr txBox="1"/>
+          <p:nvPr/>
+        </p:nvSpPr>
+        <p:spPr>
+          <a:xfrm>
+            <a:off x="4818888" y="4599431"/>
+            <a:ext cx="1920240" cy="548640"/>
+          </a:xfrm>
+          <a:prstGeom prst="rect">
+            <a:avLst/>
+          </a:prstGeom>
+          <a:noFill/>
+        </p:spPr>
+        <p:txBody>
+          <a:bodyPr wrap="square" lIns="45720" rIns="45720" tIns="18288" bIns="18288" anchor="ctr">
+            <a:spAutoFit/>
+          </a:bodyPr>
+          <a:lstStyle/>
+          <a:p>
+            <a:pPr algn="l"/>
+            <a:r>
+              <a:rPr sz="3040" b="1" i="0">
+                <a:solidFill>
+                  <a:srgbClr val="9E1B32"/>
+                </a:solidFill>
+                <a:latin typeface="Lexend"/>
+              </a:rPr>
+              <a:t>Answer:</a:t>
+            </a:r>
+          </a:p>
+        </p:txBody>
+      </p:sp>
+      <p:pic>
+        <p:nvPicPr>
+          <p:cNvPr id="12" name="Picture 11" descr="00e3982d4021e9ce.png"/>
+          <p:cNvPicPr>
+            <a:picLocks noChangeAspect="1"/>
+          </p:cNvPicPr>
+          <p:nvPr/>
+        </p:nvPicPr>
+        <p:blipFill>
+          <a:blip r:embed="rId5"/>
+          <a:stretch>
+            <a:fillRect/>
+          </a:stretch>
+        </p:blipFill>
+        <p:spPr>
+          <a:xfrm>
+            <a:off x="6739127" y="4663440"/>
+            <a:ext cx="603504" cy="420624"/>
           </a:xfrm>
           <a:prstGeom prst="rect">
             <a:avLst/>
@@ -13003,11 +13400,11 @@
           <a:p>
             <a:pPr algn="l"/>
             <a:r>
-              <a:rPr sz="3400" b="1" i="0">
+              <a:rPr sz="3229" b="1" i="0">
                 <a:solidFill>
                   <a:srgbClr val="1A1A1A"/>
                 </a:solidFill>
-                <a:latin typeface="Century Schoolbook"/>
+                <a:latin typeface="Lexend"/>
               </a:rPr>
               <a:t>Whiteboards   ·   Question 9 of 9</a:t>
             </a:r>
@@ -13143,11 +13540,11 @@
           <a:p>
             <a:pPr algn="l"/>
             <a:r>
-              <a:rPr sz="1100" b="0" i="1">
+              <a:rPr sz="1040" b="0" i="0">
                 <a:solidFill>
                   <a:srgbClr val="6B6B6B"/>
                 </a:solidFill>
-                <a:latin typeface="Century Schoolbook"/>
+                <a:latin typeface="Lexend"/>
               </a:rPr>
               <a:t>Grade 7 Accelerated · Unit 3 · Lessons 6–7 — Evaluating and Equivalent Expressions</a:t>
             </a:r>
@@ -13178,11 +13575,11 @@
           <a:p>
             <a:pPr algn="r"/>
             <a:r>
-              <a:rPr sz="1100" b="0" i="0">
+              <a:rPr sz="1040" b="0" i="0">
                 <a:solidFill>
                   <a:srgbClr val="6B6B6B"/>
                 </a:solidFill>
-                <a:latin typeface="Century Schoolbook"/>
+                <a:latin typeface="Lexend"/>
               </a:rPr>
               <a:t>32</a:t>
             </a:r>
@@ -13197,8 +13594,8 @@
         </p:nvSpPr>
         <p:spPr>
           <a:xfrm>
-            <a:off x="1627294" y="2304288"/>
-            <a:ext cx="2254011" cy="457200"/>
+            <a:off x="1633663" y="2299715"/>
+            <a:ext cx="2242198" cy="457200"/>
           </a:xfrm>
           <a:prstGeom prst="rect">
             <a:avLst/>
@@ -13213,11 +13610,11 @@
           <a:p>
             <a:pPr algn="l"/>
             <a:r>
-              <a:rPr sz="2600" b="0" i="0">
+              <a:rPr sz="2470" b="0" i="0">
                 <a:solidFill>
                   <a:srgbClr val="1A1A1A"/>
                 </a:solidFill>
-                <a:latin typeface="Century Schoolbook"/>
+                <a:latin typeface="Lexend"/>
               </a:rPr>
               <a:t>Xavier says  </a:t>
             </a:r>
@@ -13226,7 +13623,7 @@
       </p:sp>
       <p:pic>
         <p:nvPicPr>
-          <p:cNvPr id="9" name="Picture 8" descr="928a3b4f052209d4.png"/>
+          <p:cNvPr id="9" name="Picture 8" descr="0cca3298828a0293.png"/>
           <p:cNvPicPr>
             <a:picLocks noChangeAspect="1"/>
           </p:cNvPicPr>
@@ -13240,8 +13637,8 @@
         </p:blipFill>
         <p:spPr>
           <a:xfrm>
-            <a:off x="3744146" y="2194560"/>
-            <a:ext cx="1569720" cy="676656"/>
+            <a:off x="3738701" y="2196083"/>
+            <a:ext cx="1569720" cy="664464"/>
           </a:xfrm>
           <a:prstGeom prst="rect">
             <a:avLst/>
@@ -13256,8 +13653,8 @@
         </p:nvSpPr>
         <p:spPr>
           <a:xfrm>
-            <a:off x="5313866" y="2304288"/>
-            <a:ext cx="1208866" cy="457200"/>
+            <a:off x="5308421" y="2299715"/>
+            <a:ext cx="1201901" cy="457200"/>
           </a:xfrm>
           <a:prstGeom prst="rect">
             <a:avLst/>
@@ -13272,11 +13669,11 @@
           <a:p>
             <a:pPr algn="l"/>
             <a:r>
-              <a:rPr sz="2600" b="0" i="0">
+              <a:rPr sz="2470" b="0" i="0">
                 <a:solidFill>
                   <a:srgbClr val="1A1A1A"/>
                 </a:solidFill>
-                <a:latin typeface="Century Schoolbook"/>
+                <a:latin typeface="Lexend"/>
               </a:rPr>
               <a:t>  and  </a:t>
             </a:r>
@@ -13285,7 +13682,7 @@
       </p:sp>
       <p:pic>
         <p:nvPicPr>
-          <p:cNvPr id="11" name="Picture 10" descr="b84e4faf30935505.png"/>
+          <p:cNvPr id="11" name="Picture 10" descr="410598a25a8c8379.png"/>
           <p:cNvPicPr>
             <a:picLocks noChangeAspect="1"/>
           </p:cNvPicPr>
@@ -13299,8 +13696,8 @@
         </p:blipFill>
         <p:spPr>
           <a:xfrm>
-            <a:off x="6385572" y="2194560"/>
-            <a:ext cx="1557528" cy="676656"/>
+            <a:off x="6373163" y="2194560"/>
+            <a:ext cx="1575816" cy="667512"/>
           </a:xfrm>
           <a:prstGeom prst="rect">
             <a:avLst/>
@@ -13315,8 +13712,8 @@
         </p:nvSpPr>
         <p:spPr>
           <a:xfrm>
-            <a:off x="7943100" y="2304288"/>
-            <a:ext cx="2728284" cy="457200"/>
+            <a:off x="7948979" y="2299715"/>
+            <a:ext cx="2716037" cy="457200"/>
           </a:xfrm>
           <a:prstGeom prst="rect">
             <a:avLst/>
@@ -13331,11 +13728,11 @@
           <a:p>
             <a:pPr algn="l"/>
             <a:r>
-              <a:rPr sz="2600" b="0" i="0">
+              <a:rPr sz="2470" b="0" i="0">
                 <a:solidFill>
                   <a:srgbClr val="1A1A1A"/>
                 </a:solidFill>
-                <a:latin typeface="Century Schoolbook"/>
+                <a:latin typeface="Lexend"/>
               </a:rPr>
               <a:t>  are equivalent</a:t>
             </a:r>
@@ -13350,8 +13747,8 @@
         </p:nvSpPr>
         <p:spPr>
           <a:xfrm>
-            <a:off x="1893296" y="3122675"/>
-            <a:ext cx="5363839" cy="457200"/>
+            <a:off x="1841547" y="3113532"/>
+            <a:ext cx="5445218" cy="457200"/>
           </a:xfrm>
           <a:prstGeom prst="rect">
             <a:avLst/>
@@ -13366,11 +13763,11 @@
           <a:p>
             <a:pPr algn="l"/>
             <a:r>
-              <a:rPr sz="2600" b="0" i="0">
+              <a:rPr sz="2470" b="0" i="0">
                 <a:solidFill>
                   <a:srgbClr val="1A1A1A"/>
                 </a:solidFill>
-                <a:latin typeface="Century Schoolbook"/>
+                <a:latin typeface="Lexend"/>
               </a:rPr>
               <a:t>because both can be written as  </a:t>
             </a:r>
@@ -13379,7 +13776,7 @@
       </p:sp>
       <p:pic>
         <p:nvPicPr>
-          <p:cNvPr id="14" name="Picture 13" descr="c9adefc290aa5b44.png"/>
+          <p:cNvPr id="14" name="Picture 13" descr="d2ebb822973674f1.png"/>
           <p:cNvPicPr>
             <a:picLocks noChangeAspect="1"/>
           </p:cNvPicPr>
@@ -13393,8 +13790,8 @@
         </p:blipFill>
         <p:spPr>
           <a:xfrm>
-            <a:off x="7119975" y="3185159"/>
-            <a:ext cx="521207" cy="332232"/>
+            <a:off x="7149605" y="3174491"/>
+            <a:ext cx="487680" cy="335280"/>
           </a:xfrm>
           <a:prstGeom prst="rect">
             <a:avLst/>
@@ -13409,8 +13806,8 @@
         </p:nvSpPr>
         <p:spPr>
           <a:xfrm>
-            <a:off x="7641183" y="3122675"/>
-            <a:ext cx="2764200" cy="457200"/>
+            <a:off x="7637285" y="3113532"/>
+            <a:ext cx="2819847" cy="457200"/>
           </a:xfrm>
           <a:prstGeom prst="rect">
             <a:avLst/>
@@ -13425,11 +13822,11 @@
           <a:p>
             <a:pPr algn="l"/>
             <a:r>
-              <a:rPr sz="2600" b="0" i="0">
+              <a:rPr sz="2470" b="0" i="0">
                 <a:solidFill>
                   <a:srgbClr val="1A1A1A"/>
                 </a:solidFill>
-                <a:latin typeface="Century Schoolbook"/>
+                <a:latin typeface="Lexend"/>
               </a:rPr>
               <a:t>.  Do you agree?</a:t>
             </a:r>
@@ -13460,11 +13857,11 @@
           <a:p>
             <a:pPr algn="ctr"/>
             <a:r>
-              <a:rPr sz="2600" b="1" i="0">
+              <a:rPr sz="2470" b="1" i="0">
                 <a:solidFill>
                   <a:srgbClr val="1A1A1A"/>
                 </a:solidFill>
-                <a:latin typeface="Century Schoolbook"/>
+                <a:latin typeface="Lexend"/>
               </a:rPr>
               <a:t>Write your answer in sentences.</a:t>
             </a:r>
@@ -13513,11 +13910,11 @@
           <a:p>
             <a:pPr algn="l"/>
             <a:r>
-              <a:rPr sz="3400" b="1" i="0">
+              <a:rPr sz="3229" b="1" i="0">
                 <a:solidFill>
                   <a:srgbClr val="1A1A1A"/>
                 </a:solidFill>
-                <a:latin typeface="Century Schoolbook"/>
+                <a:latin typeface="Lexend"/>
               </a:rPr>
               <a:t>Whiteboards   ·   Question 9 of 9</a:t>
             </a:r>
@@ -13653,11 +14050,11 @@
           <a:p>
             <a:pPr algn="l"/>
             <a:r>
-              <a:rPr sz="1100" b="0" i="1">
+              <a:rPr sz="1040" b="0" i="0">
                 <a:solidFill>
                   <a:srgbClr val="6B6B6B"/>
                 </a:solidFill>
-                <a:latin typeface="Century Schoolbook"/>
+                <a:latin typeface="Lexend"/>
               </a:rPr>
               <a:t>Grade 7 Accelerated · Unit 3 · Lessons 6–7 — Evaluating and Equivalent Expressions</a:t>
             </a:r>
@@ -13688,11 +14085,11 @@
           <a:p>
             <a:pPr algn="r"/>
             <a:r>
-              <a:rPr sz="1100" b="0" i="0">
+              <a:rPr sz="1040" b="0" i="0">
                 <a:solidFill>
                   <a:srgbClr val="6B6B6B"/>
                 </a:solidFill>
-                <a:latin typeface="Century Schoolbook"/>
+                <a:latin typeface="Lexend"/>
               </a:rPr>
               <a:t>33</a:t>
             </a:r>
@@ -13707,8 +14104,8 @@
         </p:nvSpPr>
         <p:spPr>
           <a:xfrm>
-            <a:off x="1624246" y="2212848"/>
-            <a:ext cx="2254011" cy="457200"/>
+            <a:off x="1627567" y="2211323"/>
+            <a:ext cx="2242198" cy="457200"/>
           </a:xfrm>
           <a:prstGeom prst="rect">
             <a:avLst/>
@@ -13723,11 +14120,11 @@
           <a:p>
             <a:pPr algn="l"/>
             <a:r>
-              <a:rPr sz="2600" b="0" i="0">
+              <a:rPr sz="2470" b="0" i="0">
                 <a:solidFill>
                   <a:srgbClr val="1A1A1A"/>
                 </a:solidFill>
-                <a:latin typeface="Century Schoolbook"/>
+                <a:latin typeface="Lexend"/>
               </a:rPr>
               <a:t>Xavier says  </a:t>
             </a:r>
@@ -13736,7 +14133,7 @@
       </p:sp>
       <p:pic>
         <p:nvPicPr>
-          <p:cNvPr id="9" name="Picture 8" descr="5cc8e379c9f0fb79.png"/>
+          <p:cNvPr id="9" name="Picture 8" descr="387b1e44b6216a29.png"/>
           <p:cNvPicPr>
             <a:picLocks noChangeAspect="1"/>
           </p:cNvPicPr>
@@ -13750,8 +14147,8 @@
         </p:blipFill>
         <p:spPr>
           <a:xfrm>
-            <a:off x="3741098" y="2103120"/>
-            <a:ext cx="1572768" cy="676656"/>
+            <a:off x="3732605" y="2106168"/>
+            <a:ext cx="1575816" cy="667512"/>
           </a:xfrm>
           <a:prstGeom prst="rect">
             <a:avLst/>
@@ -13766,8 +14163,8 @@
         </p:nvSpPr>
         <p:spPr>
           <a:xfrm>
-            <a:off x="5313866" y="2212848"/>
-            <a:ext cx="1208866" cy="457200"/>
+            <a:off x="5308421" y="2211323"/>
+            <a:ext cx="1201901" cy="457200"/>
           </a:xfrm>
           <a:prstGeom prst="rect">
             <a:avLst/>
@@ -13782,11 +14179,11 @@
           <a:p>
             <a:pPr algn="l"/>
             <a:r>
-              <a:rPr sz="2600" b="0" i="0">
+              <a:rPr sz="2470" b="0" i="0">
                 <a:solidFill>
                   <a:srgbClr val="1A1A1A"/>
                 </a:solidFill>
-                <a:latin typeface="Century Schoolbook"/>
+                <a:latin typeface="Lexend"/>
               </a:rPr>
               <a:t>  and  </a:t>
             </a:r>
@@ -13795,7 +14192,7 @@
       </p:sp>
       <p:pic>
         <p:nvPicPr>
-          <p:cNvPr id="11" name="Picture 10" descr="3544f9e4eb8bbbf6.png"/>
+          <p:cNvPr id="11" name="Picture 10" descr="5a4b2276e1b02b4e.png"/>
           <p:cNvPicPr>
             <a:picLocks noChangeAspect="1"/>
           </p:cNvPicPr>
@@ -13809,8 +14206,8 @@
         </p:blipFill>
         <p:spPr>
           <a:xfrm>
-            <a:off x="6385572" y="2103120"/>
-            <a:ext cx="1560576" cy="676656"/>
+            <a:off x="6373163" y="2103120"/>
+            <a:ext cx="1581912" cy="673608"/>
           </a:xfrm>
           <a:prstGeom prst="rect">
             <a:avLst/>
@@ -13825,8 +14222,8 @@
         </p:nvSpPr>
         <p:spPr>
           <a:xfrm>
-            <a:off x="7946148" y="2212848"/>
-            <a:ext cx="2728284" cy="457200"/>
+            <a:off x="7955075" y="2211323"/>
+            <a:ext cx="2716037" cy="457200"/>
           </a:xfrm>
           <a:prstGeom prst="rect">
             <a:avLst/>
@@ -13841,11 +14238,11 @@
           <a:p>
             <a:pPr algn="l"/>
             <a:r>
-              <a:rPr sz="2600" b="0" i="0">
+              <a:rPr sz="2470" b="0" i="0">
                 <a:solidFill>
                   <a:srgbClr val="1A1A1A"/>
                 </a:solidFill>
-                <a:latin typeface="Century Schoolbook"/>
+                <a:latin typeface="Lexend"/>
               </a:rPr>
               <a:t>  are equivalent</a:t>
             </a:r>
@@ -13860,8 +14257,8 @@
         </p:nvSpPr>
         <p:spPr>
           <a:xfrm>
-            <a:off x="1891772" y="3031236"/>
-            <a:ext cx="5363839" cy="457200"/>
+            <a:off x="1840023" y="3028188"/>
+            <a:ext cx="5445218" cy="457200"/>
           </a:xfrm>
           <a:prstGeom prst="rect">
             <a:avLst/>
@@ -13876,11 +14273,11 @@
           <a:p>
             <a:pPr algn="l"/>
             <a:r>
-              <a:rPr sz="2600" b="0" i="0">
+              <a:rPr sz="2470" b="0" i="0">
                 <a:solidFill>
                   <a:srgbClr val="1A1A1A"/>
                 </a:solidFill>
-                <a:latin typeface="Century Schoolbook"/>
+                <a:latin typeface="Lexend"/>
               </a:rPr>
               <a:t>because both can be written as  </a:t>
             </a:r>
@@ -13889,7 +14286,7 @@
       </p:sp>
       <p:pic>
         <p:nvPicPr>
-          <p:cNvPr id="14" name="Picture 13" descr="afdbc5b48ef250ed.png"/>
+          <p:cNvPr id="14" name="Picture 13" descr="b57ed0c2af593e60.png"/>
           <p:cNvPicPr>
             <a:picLocks noChangeAspect="1"/>
           </p:cNvPicPr>
@@ -13903,8 +14300,8 @@
         </p:blipFill>
         <p:spPr>
           <a:xfrm>
-            <a:off x="7118451" y="3093720"/>
-            <a:ext cx="524256" cy="332232"/>
+            <a:off x="7148081" y="3090672"/>
+            <a:ext cx="490727" cy="332232"/>
           </a:xfrm>
           <a:prstGeom prst="rect">
             <a:avLst/>
@@ -13919,8 +14316,8 @@
         </p:nvSpPr>
         <p:spPr>
           <a:xfrm>
-            <a:off x="7642707" y="3031236"/>
-            <a:ext cx="2764200" cy="457200"/>
+            <a:off x="7638809" y="3028188"/>
+            <a:ext cx="2819847" cy="457200"/>
           </a:xfrm>
           <a:prstGeom prst="rect">
             <a:avLst/>
@@ -13935,11 +14332,11 @@
           <a:p>
             <a:pPr algn="l"/>
             <a:r>
-              <a:rPr sz="2600" b="0" i="0">
+              <a:rPr sz="2470" b="0" i="0">
                 <a:solidFill>
                   <a:srgbClr val="1A1A1A"/>
                 </a:solidFill>
-                <a:latin typeface="Century Schoolbook"/>
+                <a:latin typeface="Lexend"/>
               </a:rPr>
               <a:t>.  Do you agree?</a:t>
             </a:r>
@@ -13954,7 +14351,125 @@
         </p:nvSpPr>
         <p:spPr>
           <a:xfrm>
-            <a:off x="777240" y="4663440"/>
+            <a:off x="3350348" y="3883152"/>
+            <a:ext cx="1298517" cy="457200"/>
+          </a:xfrm>
+          <a:prstGeom prst="rect">
+            <a:avLst/>
+          </a:prstGeom>
+          <a:noFill/>
+        </p:spPr>
+        <p:txBody>
+          <a:bodyPr wrap="none" lIns="45720" rIns="45720" tIns="18288" bIns="18288" anchor="ctr">
+            <a:noAutofit/>
+          </a:bodyPr>
+          <a:lstStyle/>
+          <a:p>
+            <a:pPr algn="l"/>
+            <a:r>
+              <a:rPr sz="2750" b="0" i="0">
+                <a:solidFill>
+                  <a:srgbClr val="1A1A1A"/>
+                </a:solidFill>
+                <a:latin typeface="Lexend"/>
+              </a:rPr>
+              <a:t>First:  </a:t>
+            </a:r>
+          </a:p>
+        </p:txBody>
+      </p:sp>
+      <p:pic>
+        <p:nvPicPr>
+          <p:cNvPr id="17" name="Picture 16" descr="a54eb59ad31b1d2e.png"/>
+          <p:cNvPicPr>
+            <a:picLocks noChangeAspect="1"/>
+          </p:cNvPicPr>
+          <p:nvPr/>
+        </p:nvPicPr>
+        <p:blipFill>
+          <a:blip r:embed="rId5"/>
+          <a:stretch>
+            <a:fillRect/>
+          </a:stretch>
+        </p:blipFill>
+        <p:spPr>
+          <a:xfrm>
+            <a:off x="4511706" y="3810000"/>
+            <a:ext cx="3749039" cy="603504"/>
+          </a:xfrm>
+          <a:prstGeom prst="rect">
+            <a:avLst/>
+          </a:prstGeom>
+        </p:spPr>
+      </p:pic>
+      <p:sp>
+        <p:nvSpPr>
+          <p:cNvPr id="18" name="TextBox 17"/>
+          <p:cNvSpPr txBox="1"/>
+          <p:nvPr/>
+        </p:nvSpPr>
+        <p:spPr>
+          <a:xfrm>
+            <a:off x="3350348" y="4619244"/>
+            <a:ext cx="1833702" cy="457200"/>
+          </a:xfrm>
+          <a:prstGeom prst="rect">
+            <a:avLst/>
+          </a:prstGeom>
+          <a:noFill/>
+        </p:spPr>
+        <p:txBody>
+          <a:bodyPr wrap="none" lIns="45720" rIns="45720" tIns="18288" bIns="18288" anchor="ctr">
+            <a:noAutofit/>
+          </a:bodyPr>
+          <a:lstStyle/>
+          <a:p>
+            <a:pPr algn="l"/>
+            <a:r>
+              <a:rPr sz="2750" b="0" i="0">
+                <a:solidFill>
+                  <a:srgbClr val="1A1A1A"/>
+                </a:solidFill>
+                <a:latin typeface="Lexend"/>
+              </a:rPr>
+              <a:t>Second:  </a:t>
+            </a:r>
+          </a:p>
+        </p:txBody>
+      </p:sp>
+      <p:pic>
+        <p:nvPicPr>
+          <p:cNvPr id="19" name="Picture 18" descr="a1e5d3fbd0cb369e.png"/>
+          <p:cNvPicPr>
+            <a:picLocks noChangeAspect="1"/>
+          </p:cNvPicPr>
+          <p:nvPr/>
+        </p:nvPicPr>
+        <p:blipFill>
+          <a:blip r:embed="rId6"/>
+          <a:stretch>
+            <a:fillRect/>
+          </a:stretch>
+        </p:blipFill>
+        <p:spPr>
+          <a:xfrm>
+            <a:off x="5046891" y="4541520"/>
+            <a:ext cx="3767328" cy="612648"/>
+          </a:xfrm>
+          <a:prstGeom prst="rect">
+            <a:avLst/>
+          </a:prstGeom>
+        </p:spPr>
+      </p:pic>
+      <p:sp>
+        <p:nvSpPr>
+          <p:cNvPr id="20" name="TextBox 19"/>
+          <p:cNvSpPr txBox="1"/>
+          <p:nvPr/>
+        </p:nvSpPr>
+        <p:spPr>
+          <a:xfrm>
+            <a:off x="777240" y="5291328"/>
             <a:ext cx="10607040" cy="548640"/>
           </a:xfrm>
           <a:prstGeom prst="rect">
@@ -13970,38 +14485,38 @@
           <a:p>
             <a:pPr algn="ctr"/>
             <a:r>
-              <a:rPr sz="3200" b="1" i="0">
+              <a:rPr sz="3040" b="1" i="0">
                 <a:solidFill>
                   <a:srgbClr val="9E1B32"/>
                 </a:solidFill>
-                <a:latin typeface="Century Schoolbook"/>
+                <a:latin typeface="Lexend"/>
               </a:rPr>
               <a:t>Answer:   No — the second is 2</a:t>
             </a:r>
             <a:r>
-              <a:rPr sz="3200" b="1" i="0" baseline="30000">
+              <a:rPr sz="3040" b="1" i="0" baseline="30000">
                 <a:solidFill>
                   <a:srgbClr val="9E1B32"/>
                 </a:solidFill>
-                <a:latin typeface="Century Schoolbook"/>
+                <a:latin typeface="Lexend"/>
               </a:rPr>
               <a:t>-6</a:t>
             </a:r>
             <a:r>
-              <a:rPr sz="3200" b="1" i="0">
+              <a:rPr sz="3040" b="1" i="0">
                 <a:solidFill>
                   <a:srgbClr val="9E1B32"/>
                 </a:solidFill>
-                <a:latin typeface="Century Schoolbook"/>
+                <a:latin typeface="Lexend"/>
               </a:rPr>
               <a:t>, not 2</a:t>
             </a:r>
             <a:r>
-              <a:rPr sz="3200" b="1" i="0" baseline="30000">
+              <a:rPr sz="3040" b="1" i="0" baseline="30000">
                 <a:solidFill>
                   <a:srgbClr val="9E1B32"/>
                 </a:solidFill>
-                <a:latin typeface="Century Schoolbook"/>
+                <a:latin typeface="Lexend"/>
               </a:rPr>
               <a:t>-7</a:t>
             </a:r>
@@ -14050,11 +14565,11 @@
           <a:p>
             <a:pPr algn="l"/>
             <a:r>
-              <a:rPr sz="3600" b="1" i="0">
+              <a:rPr sz="3420" b="1" i="0">
                 <a:solidFill>
                   <a:srgbClr val="1A1A1A"/>
                 </a:solidFill>
-                <a:latin typeface="Century Schoolbook"/>
+                <a:latin typeface="Lexend"/>
               </a:rPr>
               <a:t>Independent Set</a:t>
             </a:r>
@@ -14190,11 +14705,11 @@
           <a:p>
             <a:pPr algn="l"/>
             <a:r>
-              <a:rPr sz="1100" b="0" i="1">
+              <a:rPr sz="1040" b="0" i="0">
                 <a:solidFill>
                   <a:srgbClr val="6B6B6B"/>
                 </a:solidFill>
-                <a:latin typeface="Century Schoolbook"/>
+                <a:latin typeface="Lexend"/>
               </a:rPr>
               <a:t>Grade 7 Accelerated · Unit 3 · Lessons 6–7 — Evaluating and Equivalent Expressions</a:t>
             </a:r>
@@ -14225,11 +14740,11 @@
           <a:p>
             <a:pPr algn="r"/>
             <a:r>
-              <a:rPr sz="1100" b="0" i="0">
+              <a:rPr sz="1040" b="0" i="0">
                 <a:solidFill>
                   <a:srgbClr val="6B6B6B"/>
                 </a:solidFill>
-                <a:latin typeface="Century Schoolbook"/>
+                <a:latin typeface="Lexend"/>
               </a:rPr>
               <a:t>34</a:t>
             </a:r>
@@ -14244,7 +14759,7 @@
         </p:nvSpPr>
         <p:spPr>
           <a:xfrm>
-            <a:off x="960120" y="1677924"/>
+            <a:off x="960120" y="1668780"/>
             <a:ext cx="548640" cy="457200"/>
           </a:xfrm>
           <a:prstGeom prst="rect">
@@ -14260,11 +14775,11 @@
           <a:p>
             <a:pPr algn="l"/>
             <a:r>
-              <a:rPr sz="2300" b="1" i="0">
+              <a:rPr sz="2180" b="1" i="0">
                 <a:solidFill>
                   <a:srgbClr val="0B5394"/>
                 </a:solidFill>
-                <a:latin typeface="Century Schoolbook"/>
+                <a:latin typeface="Lexend"/>
               </a:rPr>
               <a:t>1.</a:t>
             </a:r>
@@ -14279,8 +14794,8 @@
         </p:nvSpPr>
         <p:spPr>
           <a:xfrm>
-            <a:off x="1554480" y="1677924"/>
-            <a:ext cx="2548440" cy="457200"/>
+            <a:off x="1554480" y="1668780"/>
+            <a:ext cx="2460558" cy="457200"/>
           </a:xfrm>
           <a:prstGeom prst="rect">
             <a:avLst/>
@@ -14295,11 +14810,11 @@
           <a:p>
             <a:pPr algn="l"/>
             <a:r>
-              <a:rPr sz="2300" b="0" i="0">
+              <a:rPr sz="2180" b="0" i="0">
                 <a:solidFill>
                   <a:srgbClr val="1A1A1A"/>
                 </a:solidFill>
-                <a:latin typeface="Century Schoolbook"/>
+                <a:latin typeface="Lexend"/>
               </a:rPr>
               <a:t>Find the value.  </a:t>
             </a:r>
@@ -14308,7 +14823,7 @@
       </p:sp>
       <p:pic>
         <p:nvPicPr>
-          <p:cNvPr id="10" name="Picture 9" descr="ea8eebb3a97fa0e6.png"/>
+          <p:cNvPr id="10" name="Picture 9" descr="3554ae34b18383f5.png"/>
           <p:cNvPicPr>
             <a:picLocks noChangeAspect="1"/>
           </p:cNvPicPr>
@@ -14322,8 +14837,8 @@
         </p:blipFill>
         <p:spPr>
           <a:xfrm>
-            <a:off x="3965760" y="1517904"/>
-            <a:ext cx="1688592" cy="777240"/>
+            <a:off x="3877878" y="1517904"/>
+            <a:ext cx="1652016" cy="758952"/>
           </a:xfrm>
           <a:prstGeom prst="rect">
             <a:avLst/>
@@ -14338,7 +14853,7 @@
         </p:nvSpPr>
         <p:spPr>
           <a:xfrm>
-            <a:off x="960120" y="2526792"/>
+            <a:off x="960120" y="2502408"/>
             <a:ext cx="548640" cy="457200"/>
           </a:xfrm>
           <a:prstGeom prst="rect">
@@ -14354,11 +14869,11 @@
           <a:p>
             <a:pPr algn="l"/>
             <a:r>
-              <a:rPr sz="2300" b="1" i="0">
+              <a:rPr sz="2180" b="1" i="0">
                 <a:solidFill>
                   <a:srgbClr val="0B5394"/>
                 </a:solidFill>
-                <a:latin typeface="Century Schoolbook"/>
+                <a:latin typeface="Lexend"/>
               </a:rPr>
               <a:t>2.</a:t>
             </a:r>
@@ -14373,8 +14888,8 @@
         </p:nvSpPr>
         <p:spPr>
           <a:xfrm>
-            <a:off x="1554480" y="2526792"/>
-            <a:ext cx="2548440" cy="457200"/>
+            <a:off x="1554480" y="2502408"/>
+            <a:ext cx="2460558" cy="457200"/>
           </a:xfrm>
           <a:prstGeom prst="rect">
             <a:avLst/>
@@ -14389,11 +14904,11 @@
           <a:p>
             <a:pPr algn="l"/>
             <a:r>
-              <a:rPr sz="2300" b="0" i="0">
+              <a:rPr sz="2180" b="0" i="0">
                 <a:solidFill>
                   <a:srgbClr val="1A1A1A"/>
                 </a:solidFill>
-                <a:latin typeface="Century Schoolbook"/>
+                <a:latin typeface="Lexend"/>
               </a:rPr>
               <a:t>Find the value.  </a:t>
             </a:r>
@@ -14402,7 +14917,7 @@
       </p:sp>
       <p:pic>
         <p:nvPicPr>
-          <p:cNvPr id="13" name="Picture 12" descr="8ac5f19cf038a316.png"/>
+          <p:cNvPr id="13" name="Picture 12" descr="352eb1a88709caf9.png"/>
           <p:cNvPicPr>
             <a:picLocks noChangeAspect="1"/>
           </p:cNvPicPr>
@@ -14416,8 +14931,8 @@
         </p:blipFill>
         <p:spPr>
           <a:xfrm>
-            <a:off x="3965760" y="2478024"/>
-            <a:ext cx="1676400" cy="554736"/>
+            <a:off x="3877878" y="2459736"/>
+            <a:ext cx="1645920" cy="542544"/>
           </a:xfrm>
           <a:prstGeom prst="rect">
             <a:avLst/>
@@ -14432,7 +14947,7 @@
         </p:nvSpPr>
         <p:spPr>
           <a:xfrm>
-            <a:off x="960120" y="3192780"/>
+            <a:off x="960120" y="3162300"/>
             <a:ext cx="548640" cy="457200"/>
           </a:xfrm>
           <a:prstGeom prst="rect">
@@ -14448,11 +14963,11 @@
           <a:p>
             <a:pPr algn="l"/>
             <a:r>
-              <a:rPr sz="2300" b="1" i="0">
+              <a:rPr sz="2180" b="1" i="0">
                 <a:solidFill>
                   <a:srgbClr val="0B5394"/>
                 </a:solidFill>
-                <a:latin typeface="Century Schoolbook"/>
+                <a:latin typeface="Lexend"/>
               </a:rPr>
               <a:t>3.</a:t>
             </a:r>
@@ -14467,8 +14982,8 @@
         </p:nvSpPr>
         <p:spPr>
           <a:xfrm>
-            <a:off x="1554480" y="3192780"/>
-            <a:ext cx="3467011" cy="457200"/>
+            <a:off x="1554480" y="3162300"/>
+            <a:ext cx="3477676" cy="457200"/>
           </a:xfrm>
           <a:prstGeom prst="rect">
             <a:avLst/>
@@ -14483,11 +14998,11 @@
           <a:p>
             <a:pPr algn="l"/>
             <a:r>
-              <a:rPr sz="2300" b="0" i="0">
+              <a:rPr sz="2180" b="0" i="0">
                 <a:solidFill>
                   <a:srgbClr val="1A1A1A"/>
                 </a:solidFill>
-                <a:latin typeface="Century Schoolbook"/>
+                <a:latin typeface="Lexend"/>
               </a:rPr>
               <a:t>Write as a power of 2.  </a:t>
             </a:r>
@@ -14496,7 +15011,7 @@
       </p:sp>
       <p:pic>
         <p:nvPicPr>
-          <p:cNvPr id="16" name="Picture 15" descr="f8e949f0e98d161f.png"/>
+          <p:cNvPr id="16" name="Picture 15" descr="f8a57f68dc51185c.png"/>
           <p:cNvPicPr>
             <a:picLocks noChangeAspect="1"/>
           </p:cNvPicPr>
@@ -14510,8 +15025,8 @@
         </p:blipFill>
         <p:spPr>
           <a:xfrm>
-            <a:off x="4884331" y="3281172"/>
-            <a:ext cx="399288" cy="280416"/>
+            <a:off x="4894996" y="3256788"/>
+            <a:ext cx="417576" cy="268224"/>
           </a:xfrm>
           <a:prstGeom prst="rect">
             <a:avLst/>
@@ -14526,7 +15041,7 @@
         </p:nvSpPr>
         <p:spPr>
           <a:xfrm>
-            <a:off x="960120" y="3787139"/>
+            <a:off x="960120" y="3756659"/>
             <a:ext cx="548640" cy="457200"/>
           </a:xfrm>
           <a:prstGeom prst="rect">
@@ -14542,11 +15057,11 @@
           <a:p>
             <a:pPr algn="l"/>
             <a:r>
-              <a:rPr sz="2300" b="1" i="0">
+              <a:rPr sz="2180" b="1" i="0">
                 <a:solidFill>
                   <a:srgbClr val="0B5394"/>
                 </a:solidFill>
-                <a:latin typeface="Century Schoolbook"/>
+                <a:latin typeface="Lexend"/>
               </a:rPr>
               <a:t>4.</a:t>
             </a:r>
@@ -14561,8 +15076,8 @@
         </p:nvSpPr>
         <p:spPr>
           <a:xfrm>
-            <a:off x="1554480" y="3787139"/>
-            <a:ext cx="3467011" cy="457200"/>
+            <a:off x="1554480" y="3756659"/>
+            <a:ext cx="3472080" cy="457200"/>
           </a:xfrm>
           <a:prstGeom prst="rect">
             <a:avLst/>
@@ -14577,11 +15092,11 @@
           <a:p>
             <a:pPr algn="l"/>
             <a:r>
-              <a:rPr sz="2300" b="0" i="0">
+              <a:rPr sz="2180" b="0" i="0">
                 <a:solidFill>
                   <a:srgbClr val="1A1A1A"/>
                 </a:solidFill>
-                <a:latin typeface="Century Schoolbook"/>
+                <a:latin typeface="Lexend"/>
               </a:rPr>
               <a:t>Write as a power of 3.  </a:t>
             </a:r>
@@ -14590,7 +15105,7 @@
       </p:sp>
       <p:pic>
         <p:nvPicPr>
-          <p:cNvPr id="19" name="Picture 18" descr="7d1829112605dc0a.png"/>
+          <p:cNvPr id="19" name="Picture 18" descr="8991108252781c0c.png"/>
           <p:cNvPicPr>
             <a:picLocks noChangeAspect="1"/>
           </p:cNvPicPr>
@@ -14604,8 +15119,8 @@
         </p:blipFill>
         <p:spPr>
           <a:xfrm>
-            <a:off x="4884331" y="3875531"/>
-            <a:ext cx="798576" cy="280416"/>
+            <a:off x="4889400" y="3848099"/>
+            <a:ext cx="813816" cy="274320"/>
           </a:xfrm>
           <a:prstGeom prst="rect">
             <a:avLst/>
@@ -14620,7 +15135,7 @@
         </p:nvSpPr>
         <p:spPr>
           <a:xfrm>
-            <a:off x="960120" y="4381499"/>
+            <a:off x="960120" y="4351020"/>
             <a:ext cx="548640" cy="457200"/>
           </a:xfrm>
           <a:prstGeom prst="rect">
@@ -14636,11 +15151,11 @@
           <a:p>
             <a:pPr algn="l"/>
             <a:r>
-              <a:rPr sz="2300" b="1" i="0">
+              <a:rPr sz="2180" b="1" i="0">
                 <a:solidFill>
                   <a:srgbClr val="0B5394"/>
                 </a:solidFill>
-                <a:latin typeface="Century Schoolbook"/>
+                <a:latin typeface="Lexend"/>
               </a:rPr>
               <a:t>5.</a:t>
             </a:r>
@@ -14655,8 +15170,8 @@
         </p:nvSpPr>
         <p:spPr>
           <a:xfrm>
-            <a:off x="1554480" y="4381499"/>
-            <a:ext cx="898293" cy="457200"/>
+            <a:off x="1554480" y="4351020"/>
+            <a:ext cx="865393" cy="457200"/>
           </a:xfrm>
           <a:prstGeom prst="rect">
             <a:avLst/>
@@ -14671,11 +15186,11 @@
           <a:p>
             <a:pPr algn="l"/>
             <a:r>
-              <a:rPr sz="2300" b="0" i="0">
+              <a:rPr sz="2180" b="0" i="0">
                 <a:solidFill>
                   <a:srgbClr val="1A1A1A"/>
                 </a:solidFill>
-                <a:latin typeface="Century Schoolbook"/>
+                <a:latin typeface="Lexend"/>
               </a:rPr>
               <a:t>Are  </a:t>
             </a:r>
@@ -14684,7 +15199,7 @@
       </p:sp>
       <p:pic>
         <p:nvPicPr>
-          <p:cNvPr id="22" name="Picture 21" descr="2548b15b1d35bdbd.png"/>
+          <p:cNvPr id="22" name="Picture 21" descr="19f6b2e983220742.png"/>
           <p:cNvPicPr>
             <a:picLocks noChangeAspect="1"/>
           </p:cNvPicPr>
@@ -14698,8 +15213,8 @@
         </p:blipFill>
         <p:spPr>
           <a:xfrm>
-            <a:off x="2315613" y="4472940"/>
-            <a:ext cx="432816" cy="274320"/>
+            <a:off x="2282713" y="4442460"/>
+            <a:ext cx="429768" cy="274320"/>
           </a:xfrm>
           <a:prstGeom prst="rect">
             <a:avLst/>
@@ -14714,8 +15229,8 @@
         </p:nvSpPr>
         <p:spPr>
           <a:xfrm>
-            <a:off x="2748429" y="4381499"/>
-            <a:ext cx="1093755" cy="457200"/>
+            <a:off x="2712481" y="4351020"/>
+            <a:ext cx="1087500" cy="457200"/>
           </a:xfrm>
           <a:prstGeom prst="rect">
             <a:avLst/>
@@ -14730,11 +15245,11 @@
           <a:p>
             <a:pPr algn="l"/>
             <a:r>
-              <a:rPr sz="2300" b="0" i="0">
+              <a:rPr sz="2180" b="0" i="0">
                 <a:solidFill>
                   <a:srgbClr val="1A1A1A"/>
                 </a:solidFill>
-                <a:latin typeface="Century Schoolbook"/>
+                <a:latin typeface="Lexend"/>
               </a:rPr>
               <a:t>  and  </a:t>
             </a:r>
@@ -14743,7 +15258,7 @@
       </p:sp>
       <p:pic>
         <p:nvPicPr>
-          <p:cNvPr id="24" name="Picture 23" descr="08acdadc8f4ac353.png"/>
+          <p:cNvPr id="24" name="Picture 23" descr="f49fd30c1f16e952.png"/>
           <p:cNvPicPr>
             <a:picLocks noChangeAspect="1"/>
           </p:cNvPicPr>
@@ -14757,8 +15272,8 @@
         </p:blipFill>
         <p:spPr>
           <a:xfrm>
-            <a:off x="3705025" y="4471416"/>
-            <a:ext cx="426720" cy="277368"/>
+            <a:off x="3662822" y="4445508"/>
+            <a:ext cx="414528" cy="268224"/>
           </a:xfrm>
           <a:prstGeom prst="rect">
             <a:avLst/>
@@ -14773,8 +15288,8 @@
         </p:nvSpPr>
         <p:spPr>
           <a:xfrm>
-            <a:off x="4131745" y="4381499"/>
-            <a:ext cx="3612937" cy="457200"/>
+            <a:off x="4077350" y="4351020"/>
+            <a:ext cx="3592876" cy="457200"/>
           </a:xfrm>
           <a:prstGeom prst="rect">
             <a:avLst/>
@@ -14789,11 +15304,11 @@
           <a:p>
             <a:pPr algn="l"/>
             <a:r>
-              <a:rPr sz="2300" b="0" i="0">
+              <a:rPr sz="2180" b="0" i="0">
                 <a:solidFill>
                   <a:srgbClr val="1A1A1A"/>
                 </a:solidFill>
-                <a:latin typeface="Century Schoolbook"/>
+                <a:latin typeface="Lexend"/>
               </a:rPr>
               <a:t>  equivalent? Show why.</a:t>
             </a:r>
@@ -14808,7 +15323,7 @@
         </p:nvSpPr>
         <p:spPr>
           <a:xfrm>
-            <a:off x="960120" y="4975860"/>
+            <a:off x="960120" y="4945380"/>
             <a:ext cx="548640" cy="457200"/>
           </a:xfrm>
           <a:prstGeom prst="rect">
@@ -14824,11 +15339,11 @@
           <a:p>
             <a:pPr algn="l"/>
             <a:r>
-              <a:rPr sz="2300" b="1" i="0">
+              <a:rPr sz="2180" b="1" i="0">
                 <a:solidFill>
                   <a:srgbClr val="0B5394"/>
                 </a:solidFill>
-                <a:latin typeface="Century Schoolbook"/>
+                <a:latin typeface="Lexend"/>
               </a:rPr>
               <a:t>6.</a:t>
             </a:r>
@@ -14843,8 +15358,8 @@
         </p:nvSpPr>
         <p:spPr>
           <a:xfrm>
-            <a:off x="1554480" y="4975860"/>
-            <a:ext cx="2548440" cy="457200"/>
+            <a:off x="1554480" y="4945380"/>
+            <a:ext cx="2460558" cy="457200"/>
           </a:xfrm>
           <a:prstGeom prst="rect">
             <a:avLst/>
@@ -14859,11 +15374,11 @@
           <a:p>
             <a:pPr algn="l"/>
             <a:r>
-              <a:rPr sz="2300" b="0" i="0">
+              <a:rPr sz="2180" b="0" i="0">
                 <a:solidFill>
                   <a:srgbClr val="1A1A1A"/>
                 </a:solidFill>
-                <a:latin typeface="Century Schoolbook"/>
+                <a:latin typeface="Lexend"/>
               </a:rPr>
               <a:t>Find the value.  </a:t>
             </a:r>
@@ -14872,7 +15387,7 @@
       </p:sp>
       <p:pic>
         <p:nvPicPr>
-          <p:cNvPr id="28" name="Picture 27" descr="eb89b2f91444568a.png"/>
+          <p:cNvPr id="28" name="Picture 27" descr="272bae85e8b361c9.png"/>
           <p:cNvPicPr>
             <a:picLocks noChangeAspect="1"/>
           </p:cNvPicPr>
@@ -14886,8 +15401,8 @@
         </p:blipFill>
         <p:spPr>
           <a:xfrm>
-            <a:off x="3965760" y="5036820"/>
-            <a:ext cx="1261872" cy="335280"/>
+            <a:off x="3877878" y="5007864"/>
+            <a:ext cx="1213104" cy="332232"/>
           </a:xfrm>
           <a:prstGeom prst="rect">
             <a:avLst/>
@@ -14936,11 +15451,11 @@
           <a:p>
             <a:pPr algn="l"/>
             <a:r>
-              <a:rPr sz="3600" b="1" i="0">
+              <a:rPr sz="3420" b="1" i="0">
                 <a:solidFill>
                   <a:srgbClr val="1A1A1A"/>
                 </a:solidFill>
-                <a:latin typeface="Century Schoolbook"/>
+                <a:latin typeface="Lexend"/>
               </a:rPr>
               <a:t>IXL</a:t>
             </a:r>
@@ -15076,11 +15591,11 @@
           <a:p>
             <a:pPr algn="l"/>
             <a:r>
-              <a:rPr sz="1100" b="0" i="1">
+              <a:rPr sz="1040" b="0" i="0">
                 <a:solidFill>
                   <a:srgbClr val="6B6B6B"/>
                 </a:solidFill>
-                <a:latin typeface="Century Schoolbook"/>
+                <a:latin typeface="Lexend"/>
               </a:rPr>
               <a:t>Grade 7 Accelerated · Unit 3 · Lessons 6–7 — Evaluating and Equivalent Expressions</a:t>
             </a:r>
@@ -15111,11 +15626,11 @@
           <a:p>
             <a:pPr algn="r"/>
             <a:r>
-              <a:rPr sz="1100" b="0" i="0">
+              <a:rPr sz="1040" b="0" i="0">
                 <a:solidFill>
                   <a:srgbClr val="6B6B6B"/>
                 </a:solidFill>
-                <a:latin typeface="Century Schoolbook"/>
+                <a:latin typeface="Lexend"/>
               </a:rPr>
               <a:t>35</a:t>
             </a:r>
@@ -15146,11 +15661,11 @@
           <a:p>
             <a:pPr algn="l"/>
             <a:r>
-              <a:rPr sz="2100" b="1" i="0">
+              <a:rPr sz="1989" b="1" i="0">
                 <a:solidFill>
                   <a:srgbClr val="0B5394"/>
                 </a:solidFill>
-                <a:latin typeface="Century Schoolbook"/>
+                <a:latin typeface="Lexend"/>
               </a:rPr>
               <a:t>1.</a:t>
             </a:r>
@@ -15181,11 +15696,11 @@
           <a:p>
             <a:pPr algn="l"/>
             <a:r>
-              <a:rPr sz="2100" b="0" i="0">
+              <a:rPr sz="1989" b="0" i="0">
                 <a:solidFill>
                   <a:srgbClr val="1A1A1A"/>
                 </a:solidFill>
-                <a:latin typeface="Century Schoolbook"/>
+                <a:latin typeface="Lexend"/>
               </a:rPr>
               <a:t>Open IXL and start today's skills.</a:t>
             </a:r>
@@ -15216,11 +15731,11 @@
           <a:p>
             <a:pPr algn="l"/>
             <a:r>
-              <a:rPr sz="2100" b="1" i="0">
+              <a:rPr sz="1989" b="1" i="0">
                 <a:solidFill>
                   <a:srgbClr val="0B5394"/>
                 </a:solidFill>
-                <a:latin typeface="Century Schoolbook"/>
+                <a:latin typeface="Lexend"/>
               </a:rPr>
               <a:t>2.</a:t>
             </a:r>
@@ -15251,11 +15766,11 @@
           <a:p>
             <a:pPr algn="l"/>
             <a:r>
-              <a:rPr sz="2100" b="0" i="0">
+              <a:rPr sz="1989" b="0" i="0">
                 <a:solidFill>
                   <a:srgbClr val="1A1A1A"/>
                 </a:solidFill>
-                <a:latin typeface="Century Schoolbook"/>
+                <a:latin typeface="Lexend"/>
               </a:rPr>
               <a:t>Work on paper where the question needs work. The answer box does not show it.</a:t>
             </a:r>
@@ -15286,11 +15801,11 @@
           <a:p>
             <a:pPr algn="l"/>
             <a:r>
-              <a:rPr sz="2100" b="1" i="0">
+              <a:rPr sz="1989" b="1" i="0">
                 <a:solidFill>
                   <a:srgbClr val="0B5394"/>
                 </a:solidFill>
-                <a:latin typeface="Century Schoolbook"/>
+                <a:latin typeface="Lexend"/>
               </a:rPr>
               <a:t>3.</a:t>
             </a:r>
@@ -15321,11 +15836,11 @@
           <a:p>
             <a:pPr algn="l"/>
             <a:r>
-              <a:rPr sz="2100" b="0" i="0">
+              <a:rPr sz="1989" b="0" i="0">
                 <a:solidFill>
                   <a:srgbClr val="1A1A1A"/>
                 </a:solidFill>
-                <a:latin typeface="Century Schoolbook"/>
+                <a:latin typeface="Lexend"/>
               </a:rPr>
               <a:t>Every skill listed is required, to a SmartScore of 67. Due at the start of the next class.</a:t>
             </a:r>
@@ -15356,11 +15871,11 @@
           <a:p>
             <a:pPr algn="l"/>
             <a:r>
-              <a:rPr sz="2100" b="1" i="0">
+              <a:rPr sz="1989" b="1" i="0">
                 <a:solidFill>
                   <a:srgbClr val="1A1A1A"/>
                 </a:solidFill>
-                <a:latin typeface="Century Schoolbook"/>
+                <a:latin typeface="Lexend"/>
               </a:rPr>
               <a:t>Today's skills — all required</a:t>
             </a:r>
@@ -15391,11 +15906,11 @@
           <a:p>
             <a:pPr algn="l"/>
             <a:r>
-              <a:rPr sz="1900" b="0" i="0">
+              <a:rPr sz="1810" b="0" i="0">
                 <a:solidFill>
                   <a:srgbClr val="1A1A1A"/>
                 </a:solidFill>
-                <a:latin typeface="Century Schoolbook"/>
+                <a:latin typeface="Lexend"/>
               </a:rPr>
               <a:t>Evaluate expressions using properties of exponents — 6T7</a:t>
             </a:r>
@@ -15426,11 +15941,11 @@
           <a:p>
             <a:pPr algn="l"/>
             <a:r>
-              <a:rPr sz="1900" b="0" i="0">
+              <a:rPr sz="1810" b="0" i="0">
                 <a:solidFill>
                   <a:srgbClr val="1A1A1A"/>
                 </a:solidFill>
-                <a:latin typeface="Century Schoolbook"/>
+                <a:latin typeface="Lexend"/>
               </a:rPr>
               <a:t>Identify equivalent expressions involving exponents II — QDM</a:t>
             </a:r>
@@ -15479,11 +15994,11 @@
           <a:p>
             <a:pPr algn="l"/>
             <a:r>
-              <a:rPr sz="3600" b="1" i="0">
+              <a:rPr sz="3420" b="1" i="0">
                 <a:solidFill>
                   <a:srgbClr val="1A1A1A"/>
                 </a:solidFill>
-                <a:latin typeface="Century Schoolbook"/>
+                <a:latin typeface="Lexend"/>
               </a:rPr>
               <a:t>Notes</a:t>
             </a:r>
@@ -15619,11 +16134,11 @@
           <a:p>
             <a:pPr algn="l"/>
             <a:r>
-              <a:rPr sz="1100" b="0" i="1">
+              <a:rPr sz="1040" b="0" i="0">
                 <a:solidFill>
                   <a:srgbClr val="6B6B6B"/>
                 </a:solidFill>
-                <a:latin typeface="Century Schoolbook"/>
+                <a:latin typeface="Lexend"/>
               </a:rPr>
               <a:t>Grade 7 Accelerated · Unit 3 · Lessons 6–7 — Evaluating and Equivalent Expressions</a:t>
             </a:r>
@@ -15654,11 +16169,11 @@
           <a:p>
             <a:pPr algn="r"/>
             <a:r>
-              <a:rPr sz="1100" b="0" i="0">
+              <a:rPr sz="1040" b="0" i="0">
                 <a:solidFill>
                   <a:srgbClr val="6B6B6B"/>
                 </a:solidFill>
-                <a:latin typeface="Century Schoolbook"/>
+                <a:latin typeface="Lexend"/>
               </a:rPr>
               <a:t>4</a:t>
             </a:r>
@@ -15689,11 +16204,11 @@
           <a:p>
             <a:pPr algn="l"/>
             <a:r>
-              <a:rPr sz="2500" b="1" i="0">
+              <a:rPr sz="2380" b="1" i="0">
                 <a:solidFill>
                   <a:srgbClr val="1A1A1A"/>
                 </a:solidFill>
-                <a:latin typeface="Century Schoolbook"/>
+                <a:latin typeface="Lexend"/>
               </a:rPr>
               <a:t>I.  Two students, two plans, one value</a:t>
             </a:r>
@@ -15743,8 +16258,8 @@
         </p:nvSpPr>
         <p:spPr>
           <a:xfrm>
-            <a:off x="3452836" y="2144268"/>
-            <a:ext cx="1811606" cy="457200"/>
+            <a:off x="3530119" y="2132076"/>
+            <a:ext cx="1730192" cy="457200"/>
           </a:xfrm>
           <a:prstGeom prst="rect">
             <a:avLst/>
@@ -15759,11 +16274,11 @@
           <a:p>
             <a:pPr algn="l"/>
             <a:r>
-              <a:rPr sz="2600" b="0" i="0">
+              <a:rPr sz="2470" b="0" i="0">
                 <a:solidFill>
                   <a:srgbClr val="1A1A1A"/>
                 </a:solidFill>
-                <a:latin typeface="Century Schoolbook"/>
+                <a:latin typeface="Lexend"/>
               </a:rPr>
               <a:t>Melanie:  </a:t>
             </a:r>
@@ -15772,7 +16287,7 @@
       </p:sp>
       <p:pic>
         <p:nvPicPr>
-          <p:cNvPr id="11" name="Picture 10" descr="071da3cb12a3a9b3.png"/>
+          <p:cNvPr id="11" name="Picture 10" descr="00df267b117cf984.png"/>
           <p:cNvPicPr>
             <a:picLocks noChangeAspect="1"/>
           </p:cNvPicPr>
@@ -15786,8 +16301,8 @@
         </p:blipFill>
         <p:spPr>
           <a:xfrm>
-            <a:off x="5127283" y="1993392"/>
-            <a:ext cx="3581400" cy="758952"/>
+            <a:off x="5123152" y="1993392"/>
+            <a:ext cx="3508248" cy="734568"/>
           </a:xfrm>
           <a:prstGeom prst="rect">
             <a:avLst/>
@@ -15802,8 +16317,8 @@
         </p:nvSpPr>
         <p:spPr>
           <a:xfrm>
-            <a:off x="2790638" y="3346704"/>
-            <a:ext cx="1712587" cy="457200"/>
+            <a:off x="2838540" y="3307080"/>
+            <a:ext cx="1656406" cy="457200"/>
           </a:xfrm>
           <a:prstGeom prst="rect">
             <a:avLst/>
@@ -15818,11 +16333,11 @@
           <a:p>
             <a:pPr algn="l"/>
             <a:r>
-              <a:rPr sz="2600" b="0" i="0">
+              <a:rPr sz="2470" b="0" i="0">
                 <a:solidFill>
                   <a:srgbClr val="1A1A1A"/>
                 </a:solidFill>
-                <a:latin typeface="Century Schoolbook"/>
+                <a:latin typeface="Lexend"/>
               </a:rPr>
               <a:t>Adonis:   </a:t>
             </a:r>
@@ -15831,7 +16346,7 @@
       </p:sp>
       <p:pic>
         <p:nvPicPr>
-          <p:cNvPr id="13" name="Picture 12" descr="76734bcd012bfd6f.png"/>
+          <p:cNvPr id="13" name="Picture 12" descr="d967a2b39e147d9f.png"/>
           <p:cNvPicPr>
             <a:picLocks noChangeAspect="1"/>
           </p:cNvPicPr>
@@ -15845,8 +16360,8 @@
         </p:blipFill>
         <p:spPr>
           <a:xfrm>
-            <a:off x="4366065" y="3026664"/>
-            <a:ext cx="5004816" cy="1097280"/>
+            <a:off x="4357787" y="3002280"/>
+            <a:ext cx="4965192" cy="1066800"/>
           </a:xfrm>
           <a:prstGeom prst="rect">
             <a:avLst/>
@@ -15861,7 +16376,7 @@
         </p:nvSpPr>
         <p:spPr>
           <a:xfrm>
-            <a:off x="987552" y="4462272"/>
+            <a:off x="987552" y="4407408"/>
             <a:ext cx="10131551" cy="950976"/>
           </a:xfrm>
           <a:prstGeom prst="rect">
@@ -15877,11 +16392,11 @@
           <a:p>
             <a:pPr algn="l"/>
             <a:r>
-              <a:rPr sz="2300" b="1" i="0">
+              <a:rPr sz="2180" b="1" i="0">
                 <a:solidFill>
                   <a:srgbClr val="1A1A1A"/>
                 </a:solidFill>
-                <a:latin typeface="Century Schoolbook"/>
+                <a:latin typeface="Lexend"/>
               </a:rPr>
               <a:t>Apply the laws first, evaluate last. The value is the same; the arithmetic is smaller.</a:t>
             </a:r>
@@ -15930,11 +16445,11 @@
           <a:p>
             <a:pPr algn="l"/>
             <a:r>
-              <a:rPr sz="3600" b="1" i="0">
+              <a:rPr sz="3420" b="1" i="0">
                 <a:solidFill>
                   <a:srgbClr val="1A1A1A"/>
                 </a:solidFill>
-                <a:latin typeface="Century Schoolbook"/>
+                <a:latin typeface="Lexend"/>
               </a:rPr>
               <a:t>Notes</a:t>
             </a:r>
@@ -16070,11 +16585,11 @@
           <a:p>
             <a:pPr algn="l"/>
             <a:r>
-              <a:rPr sz="1100" b="0" i="1">
+              <a:rPr sz="1040" b="0" i="0">
                 <a:solidFill>
                   <a:srgbClr val="6B6B6B"/>
                 </a:solidFill>
-                <a:latin typeface="Century Schoolbook"/>
+                <a:latin typeface="Lexend"/>
               </a:rPr>
               <a:t>Grade 7 Accelerated · Unit 3 · Lessons 6–7 — Evaluating and Equivalent Expressions</a:t>
             </a:r>
@@ -16105,11 +16620,11 @@
           <a:p>
             <a:pPr algn="r"/>
             <a:r>
-              <a:rPr sz="1100" b="0" i="0">
+              <a:rPr sz="1040" b="0" i="0">
                 <a:solidFill>
                   <a:srgbClr val="6B6B6B"/>
                 </a:solidFill>
-                <a:latin typeface="Century Schoolbook"/>
+                <a:latin typeface="Lexend"/>
               </a:rPr>
               <a:t>5</a:t>
             </a:r>
@@ -16140,11 +16655,11 @@
           <a:p>
             <a:pPr algn="l"/>
             <a:r>
-              <a:rPr sz="2500" b="1" i="0">
+              <a:rPr sz="2380" b="1" i="0">
                 <a:solidFill>
                   <a:srgbClr val="1A1A1A"/>
                 </a:solidFill>
-                <a:latin typeface="Century Schoolbook"/>
+                <a:latin typeface="Lexend"/>
               </a:rPr>
               <a:t>II.  Every law, one expression</a:t>
             </a:r>
@@ -16188,7 +16703,7 @@
       </p:cxnSp>
       <p:pic>
         <p:nvPicPr>
-          <p:cNvPr id="10" name="Picture 9" descr="059ee1a209667ed2.png"/>
+          <p:cNvPr id="10" name="Picture 9" descr="5b27ed10ad0337db.png"/>
           <p:cNvPicPr>
             <a:picLocks noChangeAspect="1"/>
           </p:cNvPicPr>
@@ -16202,8 +16717,8 @@
         </p:blipFill>
         <p:spPr>
           <a:xfrm>
-            <a:off x="3386328" y="1993392"/>
-            <a:ext cx="5388864" cy="880872"/>
+            <a:off x="3550920" y="1993392"/>
+            <a:ext cx="5059680" cy="859536"/>
           </a:xfrm>
           <a:prstGeom prst="rect">
             <a:avLst/>
@@ -16218,7 +16733,7 @@
         </p:nvSpPr>
         <p:spPr>
           <a:xfrm>
-            <a:off x="987552" y="3212592"/>
+            <a:off x="987552" y="3191256"/>
             <a:ext cx="10131551" cy="475488"/>
           </a:xfrm>
           <a:prstGeom prst="rect">
@@ -16234,11 +16749,11 @@
           <a:p>
             <a:pPr algn="l"/>
             <a:r>
-              <a:rPr sz="2100" b="1" i="0">
+              <a:rPr sz="1989" b="1" i="0">
                 <a:solidFill>
                   <a:srgbClr val="1A1A1A"/>
                 </a:solidFill>
-                <a:latin typeface="Century Schoolbook"/>
+                <a:latin typeface="Lexend"/>
               </a:rPr>
               <a:t>Find the step that broke:</a:t>
             </a:r>
@@ -16247,7 +16762,7 @@
       </p:sp>
       <p:pic>
         <p:nvPicPr>
-          <p:cNvPr id="12" name="Picture 11" descr="6c3d06b279be60fc.png"/>
+          <p:cNvPr id="12" name="Picture 11" descr="bbf7af9496478362.png"/>
           <p:cNvPicPr>
             <a:picLocks noChangeAspect="1"/>
           </p:cNvPicPr>
@@ -16261,8 +16776,8 @@
         </p:blipFill>
         <p:spPr>
           <a:xfrm>
-            <a:off x="987552" y="3925823"/>
-            <a:ext cx="3535680" cy="685800"/>
+            <a:off x="987552" y="3904487"/>
+            <a:ext cx="3453384" cy="673608"/>
           </a:xfrm>
           <a:prstGeom prst="rect">
             <a:avLst/>
@@ -16277,8 +16792,8 @@
         </p:nvSpPr>
         <p:spPr>
           <a:xfrm>
-            <a:off x="4523232" y="4040123"/>
-            <a:ext cx="4614173" cy="457200"/>
+            <a:off x="4440936" y="4012691"/>
+            <a:ext cx="4463920" cy="457200"/>
           </a:xfrm>
           <a:prstGeom prst="rect">
             <a:avLst/>
@@ -16293,11 +16808,11 @@
           <a:p>
             <a:pPr algn="l"/>
             <a:r>
-              <a:rPr sz="2100" b="0" i="0">
+              <a:rPr sz="1989" b="0" i="0">
                 <a:solidFill>
                   <a:srgbClr val="1A1A1A"/>
                 </a:solidFill>
-                <a:latin typeface="Century Schoolbook"/>
+                <a:latin typeface="Lexend"/>
               </a:rPr>
               <a:t>   — wrong: multiplied; should be </a:t>
             </a:r>
@@ -16306,7 +16821,7 @@
       </p:sp>
       <p:pic>
         <p:nvPicPr>
-          <p:cNvPr id="14" name="Picture 13" descr="e9e6240f6a5ac6c4.png"/>
+          <p:cNvPr id="14" name="Picture 13" descr="16b6a750bacccc0e.png"/>
           <p:cNvPicPr>
             <a:picLocks noChangeAspect="1"/>
           </p:cNvPicPr>
@@ -16320,8 +16835,8 @@
         </p:blipFill>
         <p:spPr>
           <a:xfrm>
-            <a:off x="9000245" y="3925823"/>
-            <a:ext cx="792480" cy="685800"/>
+            <a:off x="8767696" y="3904487"/>
+            <a:ext cx="795528" cy="673608"/>
           </a:xfrm>
           <a:prstGeom prst="rect">
             <a:avLst/>
@@ -16330,7 +16845,7 @@
       </p:pic>
       <p:pic>
         <p:nvPicPr>
-          <p:cNvPr id="15" name="Picture 14" descr="b45588bb7e9f0712.png"/>
+          <p:cNvPr id="15" name="Picture 14" descr="d085f6d1f5151fa0.png"/>
           <p:cNvPicPr>
             <a:picLocks noChangeAspect="1"/>
           </p:cNvPicPr>
@@ -16344,8 +16859,8 @@
         </p:blipFill>
         <p:spPr>
           <a:xfrm>
-            <a:off x="987552" y="4867656"/>
-            <a:ext cx="1965960" cy="804672"/>
+            <a:off x="987552" y="4834128"/>
+            <a:ext cx="1844040" cy="789432"/>
           </a:xfrm>
           <a:prstGeom prst="rect">
             <a:avLst/>
@@ -16360,8 +16875,8 @@
         </p:nvSpPr>
         <p:spPr>
           <a:xfrm>
-            <a:off x="2953512" y="5041392"/>
-            <a:ext cx="6270420" cy="457200"/>
+            <a:off x="2831592" y="5000244"/>
+            <a:ext cx="6151805" cy="457200"/>
           </a:xfrm>
           <a:prstGeom prst="rect">
             <a:avLst/>
@@ -16376,11 +16891,11 @@
           <a:p>
             <a:pPr algn="l"/>
             <a:r>
-              <a:rPr sz="2100" b="0" i="0">
+              <a:rPr sz="1989" b="0" i="0">
                 <a:solidFill>
                   <a:srgbClr val="1A1A1A"/>
                 </a:solidFill>
-                <a:latin typeface="Century Schoolbook"/>
+                <a:latin typeface="Lexend"/>
               </a:rPr>
               <a:t>   — wrong: flipped, kept the minus; should be </a:t>
             </a:r>
@@ -16389,7 +16904,7 @@
       </p:sp>
       <p:pic>
         <p:nvPicPr>
-          <p:cNvPr id="17" name="Picture 16" descr="d631bf12f968ff99.png"/>
+          <p:cNvPr id="17" name="Picture 16" descr="60c0141e8aad4c37.png"/>
           <p:cNvPicPr>
             <a:picLocks noChangeAspect="1"/>
           </p:cNvPicPr>
@@ -16403,8 +16918,8 @@
         </p:blipFill>
         <p:spPr>
           <a:xfrm>
-            <a:off x="9086772" y="4928616"/>
-            <a:ext cx="777240" cy="682752"/>
+            <a:off x="8846237" y="4892040"/>
+            <a:ext cx="783336" cy="673608"/>
           </a:xfrm>
           <a:prstGeom prst="rect">
             <a:avLst/>
@@ -16453,11 +16968,11 @@
           <a:p>
             <a:pPr algn="l"/>
             <a:r>
-              <a:rPr sz="3600" b="1" i="0">
+              <a:rPr sz="3420" b="1" i="0">
                 <a:solidFill>
                   <a:srgbClr val="1A1A1A"/>
                 </a:solidFill>
-                <a:latin typeface="Century Schoolbook"/>
+                <a:latin typeface="Lexend"/>
               </a:rPr>
               <a:t>Notes</a:t>
             </a:r>
@@ -16593,11 +17108,11 @@
           <a:p>
             <a:pPr algn="l"/>
             <a:r>
-              <a:rPr sz="1100" b="0" i="1">
+              <a:rPr sz="1040" b="0" i="0">
                 <a:solidFill>
                   <a:srgbClr val="6B6B6B"/>
                 </a:solidFill>
-                <a:latin typeface="Century Schoolbook"/>
+                <a:latin typeface="Lexend"/>
               </a:rPr>
               <a:t>Grade 7 Accelerated · Unit 3 · Lessons 6–7 — Evaluating and Equivalent Expressions</a:t>
             </a:r>
@@ -16628,11 +17143,11 @@
           <a:p>
             <a:pPr algn="r"/>
             <a:r>
-              <a:rPr sz="1100" b="0" i="0">
+              <a:rPr sz="1040" b="0" i="0">
                 <a:solidFill>
                   <a:srgbClr val="6B6B6B"/>
                 </a:solidFill>
-                <a:latin typeface="Century Schoolbook"/>
+                <a:latin typeface="Lexend"/>
               </a:rPr>
               <a:t>6</a:t>
             </a:r>
@@ -16663,11 +17178,11 @@
           <a:p>
             <a:pPr algn="l"/>
             <a:r>
-              <a:rPr sz="2500" b="1" i="0">
+              <a:rPr sz="2380" b="1" i="0">
                 <a:solidFill>
                   <a:srgbClr val="1A1A1A"/>
                 </a:solidFill>
-                <a:latin typeface="Century Schoolbook"/>
+                <a:latin typeface="Lexend"/>
               </a:rPr>
               <a:t>III.  Different bases, same value — rewrite to a common base</a:t>
             </a:r>
@@ -16741,11 +17256,11 @@
                     <a:p>
                       <a:pPr algn="ctr"/>
                       <a:r>
-                        <a:rPr sz="1600" b="1">
+                        <a:rPr sz="1520" b="1">
                           <a:solidFill>
                             <a:srgbClr val="1A1A1A"/>
                           </a:solidFill>
-                          <a:latin typeface="Century Schoolbook"/>
+                          <a:latin typeface="Lexend"/>
                         </a:rPr>
                         <a:t>Base</a:t>
                       </a:r>
@@ -16788,11 +17303,11 @@
                     <a:p>
                       <a:pPr algn="ctr"/>
                       <a:r>
-                        <a:rPr sz="1600" b="1">
+                        <a:rPr sz="1520" b="1">
                           <a:solidFill>
                             <a:srgbClr val="1A1A1A"/>
                           </a:solidFill>
-                          <a:latin typeface="Century Schoolbook"/>
+                          <a:latin typeface="Lexend"/>
                         </a:rPr>
                         <a:t>Square</a:t>
                       </a:r>
@@ -16835,11 +17350,11 @@
                     <a:p>
                       <a:pPr algn="ctr"/>
                       <a:r>
-                        <a:rPr sz="1600" b="1">
+                        <a:rPr sz="1520" b="1">
                           <a:solidFill>
                             <a:srgbClr val="1A1A1A"/>
                           </a:solidFill>
-                          <a:latin typeface="Century Schoolbook"/>
+                          <a:latin typeface="Lexend"/>
                         </a:rPr>
                         <a:t>Cube</a:t>
                       </a:r>
@@ -16882,11 +17397,11 @@
                     <a:p>
                       <a:pPr algn="ctr"/>
                       <a:r>
-                        <a:rPr sz="1600" b="1">
+                        <a:rPr sz="1520" b="1">
                           <a:solidFill>
                             <a:srgbClr val="1A1A1A"/>
                           </a:solidFill>
-                          <a:latin typeface="Century Schoolbook"/>
+                          <a:latin typeface="Lexend"/>
                         </a:rPr>
                         <a:t>Fourth</a:t>
                       </a:r>
@@ -16931,11 +17446,11 @@
                     <a:p>
                       <a:pPr algn="ctr"/>
                       <a:r>
-                        <a:rPr sz="1600" b="0">
+                        <a:rPr sz="1520" b="0">
                           <a:solidFill>
                             <a:srgbClr val="1A1A1A"/>
                           </a:solidFill>
-                          <a:latin typeface="Century Schoolbook"/>
+                          <a:latin typeface="Lexend"/>
                         </a:rPr>
                         <a:t>2</a:t>
                       </a:r>
@@ -16978,29 +17493,29 @@
                     <a:p>
                       <a:pPr algn="ctr"/>
                       <a:r>
-                        <a:rPr sz="1600" b="0">
+                        <a:rPr sz="1520" b="0">
                           <a:solidFill>
                             <a:srgbClr val="1A1A1A"/>
                           </a:solidFill>
-                          <a:latin typeface="Century Schoolbook"/>
+                          <a:latin typeface="Lexend"/>
                         </a:rPr>
                         <a:t>2</a:t>
                       </a:r>
                       <a:r>
-                        <a:rPr sz="1600" b="0" baseline="30000">
+                        <a:rPr sz="1520" b="0" baseline="30000">
                           <a:solidFill>
                             <a:srgbClr val="1A1A1A"/>
                           </a:solidFill>
-                          <a:latin typeface="Century Schoolbook"/>
+                          <a:latin typeface="Lexend"/>
                         </a:rPr>
                         <a:t>2</a:t>
                       </a:r>
                       <a:r>
-                        <a:rPr sz="1600" b="0">
+                        <a:rPr sz="1520" b="0">
                           <a:solidFill>
                             <a:srgbClr val="1A1A1A"/>
                           </a:solidFill>
-                          <a:latin typeface="Century Schoolbook"/>
+                          <a:latin typeface="Lexend"/>
                         </a:rPr>
                         <a:t> = 4</a:t>
                       </a:r>
@@ -17043,29 +17558,29 @@
                     <a:p>
                       <a:pPr algn="ctr"/>
                       <a:r>
-                        <a:rPr sz="1600" b="0">
+                        <a:rPr sz="1520" b="0">
                           <a:solidFill>
                             <a:srgbClr val="1A1A1A"/>
                           </a:solidFill>
-                          <a:latin typeface="Century Schoolbook"/>
+                          <a:latin typeface="Lexend"/>
                         </a:rPr>
                         <a:t>2</a:t>
                       </a:r>
                       <a:r>
-                        <a:rPr sz="1600" b="0" baseline="30000">
+                        <a:rPr sz="1520" b="0" baseline="30000">
                           <a:solidFill>
                             <a:srgbClr val="1A1A1A"/>
                           </a:solidFill>
-                          <a:latin typeface="Century Schoolbook"/>
+                          <a:latin typeface="Lexend"/>
                         </a:rPr>
                         <a:t>3</a:t>
                       </a:r>
                       <a:r>
-                        <a:rPr sz="1600" b="0">
+                        <a:rPr sz="1520" b="0">
                           <a:solidFill>
                             <a:srgbClr val="1A1A1A"/>
                           </a:solidFill>
-                          <a:latin typeface="Century Schoolbook"/>
+                          <a:latin typeface="Lexend"/>
                         </a:rPr>
                         <a:t> = 8</a:t>
                       </a:r>
@@ -17108,29 +17623,29 @@
                     <a:p>
                       <a:pPr algn="ctr"/>
                       <a:r>
-                        <a:rPr sz="1600" b="0">
+                        <a:rPr sz="1520" b="0">
                           <a:solidFill>
                             <a:srgbClr val="1A1A1A"/>
                           </a:solidFill>
-                          <a:latin typeface="Century Schoolbook"/>
+                          <a:latin typeface="Lexend"/>
                         </a:rPr>
                         <a:t>2</a:t>
                       </a:r>
                       <a:r>
-                        <a:rPr sz="1600" b="0" baseline="30000">
+                        <a:rPr sz="1520" b="0" baseline="30000">
                           <a:solidFill>
                             <a:srgbClr val="1A1A1A"/>
                           </a:solidFill>
-                          <a:latin typeface="Century Schoolbook"/>
+                          <a:latin typeface="Lexend"/>
                         </a:rPr>
                         <a:t>4</a:t>
                       </a:r>
                       <a:r>
-                        <a:rPr sz="1600" b="0">
+                        <a:rPr sz="1520" b="0">
                           <a:solidFill>
                             <a:srgbClr val="1A1A1A"/>
                           </a:solidFill>
-                          <a:latin typeface="Century Schoolbook"/>
+                          <a:latin typeface="Lexend"/>
                         </a:rPr>
                         <a:t> = 16</a:t>
                       </a:r>
@@ -17175,11 +17690,11 @@
                     <a:p>
                       <a:pPr algn="ctr"/>
                       <a:r>
-                        <a:rPr sz="1600" b="0">
+                        <a:rPr sz="1520" b="0">
                           <a:solidFill>
                             <a:srgbClr val="1A1A1A"/>
                           </a:solidFill>
-                          <a:latin typeface="Century Schoolbook"/>
+                          <a:latin typeface="Lexend"/>
                         </a:rPr>
                         <a:t>3</a:t>
                       </a:r>
@@ -17222,29 +17737,29 @@
                     <a:p>
                       <a:pPr algn="ctr"/>
                       <a:r>
-                        <a:rPr sz="1600" b="0">
+                        <a:rPr sz="1520" b="0">
                           <a:solidFill>
                             <a:srgbClr val="1A1A1A"/>
                           </a:solidFill>
-                          <a:latin typeface="Century Schoolbook"/>
+                          <a:latin typeface="Lexend"/>
                         </a:rPr>
                         <a:t>3</a:t>
                       </a:r>
                       <a:r>
-                        <a:rPr sz="1600" b="0" baseline="30000">
+                        <a:rPr sz="1520" b="0" baseline="30000">
                           <a:solidFill>
                             <a:srgbClr val="1A1A1A"/>
                           </a:solidFill>
-                          <a:latin typeface="Century Schoolbook"/>
+                          <a:latin typeface="Lexend"/>
                         </a:rPr>
                         <a:t>2</a:t>
                       </a:r>
                       <a:r>
-                        <a:rPr sz="1600" b="0">
+                        <a:rPr sz="1520" b="0">
                           <a:solidFill>
                             <a:srgbClr val="1A1A1A"/>
                           </a:solidFill>
-                          <a:latin typeface="Century Schoolbook"/>
+                          <a:latin typeface="Lexend"/>
                         </a:rPr>
                         <a:t> = 9</a:t>
                       </a:r>
@@ -17287,29 +17802,29 @@
                     <a:p>
                       <a:pPr algn="ctr"/>
                       <a:r>
-                        <a:rPr sz="1600" b="0">
+                        <a:rPr sz="1520" b="0">
                           <a:solidFill>
                             <a:srgbClr val="1A1A1A"/>
                           </a:solidFill>
-                          <a:latin typeface="Century Schoolbook"/>
+                          <a:latin typeface="Lexend"/>
                         </a:rPr>
                         <a:t>3</a:t>
                       </a:r>
                       <a:r>
-                        <a:rPr sz="1600" b="0" baseline="30000">
+                        <a:rPr sz="1520" b="0" baseline="30000">
                           <a:solidFill>
                             <a:srgbClr val="1A1A1A"/>
                           </a:solidFill>
-                          <a:latin typeface="Century Schoolbook"/>
+                          <a:latin typeface="Lexend"/>
                         </a:rPr>
                         <a:t>3</a:t>
                       </a:r>
                       <a:r>
-                        <a:rPr sz="1600" b="0">
+                        <a:rPr sz="1520" b="0">
                           <a:solidFill>
                             <a:srgbClr val="1A1A1A"/>
                           </a:solidFill>
-                          <a:latin typeface="Century Schoolbook"/>
+                          <a:latin typeface="Lexend"/>
                         </a:rPr>
                         <a:t> = 27</a:t>
                       </a:r>
@@ -17352,29 +17867,29 @@
                     <a:p>
                       <a:pPr algn="ctr"/>
                       <a:r>
-                        <a:rPr sz="1600" b="0">
+                        <a:rPr sz="1520" b="0">
                           <a:solidFill>
                             <a:srgbClr val="1A1A1A"/>
                           </a:solidFill>
-                          <a:latin typeface="Century Schoolbook"/>
+                          <a:latin typeface="Lexend"/>
                         </a:rPr>
                         <a:t>3</a:t>
                       </a:r>
                       <a:r>
-                        <a:rPr sz="1600" b="0" baseline="30000">
+                        <a:rPr sz="1520" b="0" baseline="30000">
                           <a:solidFill>
                             <a:srgbClr val="1A1A1A"/>
                           </a:solidFill>
-                          <a:latin typeface="Century Schoolbook"/>
+                          <a:latin typeface="Lexend"/>
                         </a:rPr>
                         <a:t>4</a:t>
                       </a:r>
                       <a:r>
-                        <a:rPr sz="1600" b="0">
+                        <a:rPr sz="1520" b="0">
                           <a:solidFill>
                             <a:srgbClr val="1A1A1A"/>
                           </a:solidFill>
-                          <a:latin typeface="Century Schoolbook"/>
+                          <a:latin typeface="Lexend"/>
                         </a:rPr>
                         <a:t> = 81</a:t>
                       </a:r>
@@ -17419,11 +17934,11 @@
                     <a:p>
                       <a:pPr algn="ctr"/>
                       <a:r>
-                        <a:rPr sz="1600" b="0">
+                        <a:rPr sz="1520" b="0">
                           <a:solidFill>
                             <a:srgbClr val="1A1A1A"/>
                           </a:solidFill>
-                          <a:latin typeface="Century Schoolbook"/>
+                          <a:latin typeface="Lexend"/>
                         </a:rPr>
                         <a:t>5</a:t>
                       </a:r>
@@ -17466,29 +17981,29 @@
                     <a:p>
                       <a:pPr algn="ctr"/>
                       <a:r>
-                        <a:rPr sz="1600" b="0">
+                        <a:rPr sz="1520" b="0">
                           <a:solidFill>
                             <a:srgbClr val="1A1A1A"/>
                           </a:solidFill>
-                          <a:latin typeface="Century Schoolbook"/>
+                          <a:latin typeface="Lexend"/>
                         </a:rPr>
                         <a:t>5</a:t>
                       </a:r>
                       <a:r>
-                        <a:rPr sz="1600" b="0" baseline="30000">
+                        <a:rPr sz="1520" b="0" baseline="30000">
                           <a:solidFill>
                             <a:srgbClr val="1A1A1A"/>
                           </a:solidFill>
-                          <a:latin typeface="Century Schoolbook"/>
+                          <a:latin typeface="Lexend"/>
                         </a:rPr>
                         <a:t>2</a:t>
                       </a:r>
                       <a:r>
-                        <a:rPr sz="1600" b="0">
+                        <a:rPr sz="1520" b="0">
                           <a:solidFill>
                             <a:srgbClr val="1A1A1A"/>
                           </a:solidFill>
-                          <a:latin typeface="Century Schoolbook"/>
+                          <a:latin typeface="Lexend"/>
                         </a:rPr>
                         <a:t> = 25</a:t>
                       </a:r>
@@ -17531,29 +18046,29 @@
                     <a:p>
                       <a:pPr algn="ctr"/>
                       <a:r>
-                        <a:rPr sz="1600" b="0">
+                        <a:rPr sz="1520" b="0">
                           <a:solidFill>
                             <a:srgbClr val="1A1A1A"/>
                           </a:solidFill>
-                          <a:latin typeface="Century Schoolbook"/>
+                          <a:latin typeface="Lexend"/>
                         </a:rPr>
                         <a:t>5</a:t>
                       </a:r>
                       <a:r>
-                        <a:rPr sz="1600" b="0" baseline="30000">
+                        <a:rPr sz="1520" b="0" baseline="30000">
                           <a:solidFill>
                             <a:srgbClr val="1A1A1A"/>
                           </a:solidFill>
-                          <a:latin typeface="Century Schoolbook"/>
+                          <a:latin typeface="Lexend"/>
                         </a:rPr>
                         <a:t>3</a:t>
                       </a:r>
                       <a:r>
-                        <a:rPr sz="1600" b="0">
+                        <a:rPr sz="1520" b="0">
                           <a:solidFill>
                             <a:srgbClr val="1A1A1A"/>
                           </a:solidFill>
-                          <a:latin typeface="Century Schoolbook"/>
+                          <a:latin typeface="Lexend"/>
                         </a:rPr>
                         <a:t> = 125</a:t>
                       </a:r>
@@ -17596,29 +18111,29 @@
                     <a:p>
                       <a:pPr algn="ctr"/>
                       <a:r>
-                        <a:rPr sz="1600" b="0">
+                        <a:rPr sz="1520" b="0">
                           <a:solidFill>
                             <a:srgbClr val="1A1A1A"/>
                           </a:solidFill>
-                          <a:latin typeface="Century Schoolbook"/>
+                          <a:latin typeface="Lexend"/>
                         </a:rPr>
                         <a:t>5</a:t>
                       </a:r>
                       <a:r>
-                        <a:rPr sz="1600" b="0" baseline="30000">
+                        <a:rPr sz="1520" b="0" baseline="30000">
                           <a:solidFill>
                             <a:srgbClr val="1A1A1A"/>
                           </a:solidFill>
-                          <a:latin typeface="Century Schoolbook"/>
+                          <a:latin typeface="Lexend"/>
                         </a:rPr>
                         <a:t>4</a:t>
                       </a:r>
                       <a:r>
-                        <a:rPr sz="1600" b="0">
+                        <a:rPr sz="1520" b="0">
                           <a:solidFill>
                             <a:srgbClr val="1A1A1A"/>
                           </a:solidFill>
-                          <a:latin typeface="Century Schoolbook"/>
+                          <a:latin typeface="Lexend"/>
                         </a:rPr>
                         <a:t> = 625</a:t>
                       </a:r>
@@ -17661,7 +18176,7 @@
       </p:graphicFrame>
       <p:pic>
         <p:nvPicPr>
-          <p:cNvPr id="11" name="Picture 10" descr="8c34f90c6fc7d47a.png"/>
+          <p:cNvPr id="11" name="Picture 10" descr="77b6fa4d0b8ffaf1.png"/>
           <p:cNvPicPr>
             <a:picLocks noChangeAspect="1"/>
           </p:cNvPicPr>
@@ -17675,8 +18190,8 @@
         </p:blipFill>
         <p:spPr>
           <a:xfrm>
-            <a:off x="3295896" y="3758184"/>
-            <a:ext cx="2423160" cy="411480"/>
+            <a:off x="3355227" y="3761232"/>
+            <a:ext cx="2371344" cy="405384"/>
           </a:xfrm>
           <a:prstGeom prst="rect">
             <a:avLst/>
@@ -17691,8 +18206,8 @@
         </p:nvSpPr>
         <p:spPr>
           <a:xfrm>
-            <a:off x="5719056" y="3735324"/>
-            <a:ext cx="988583" cy="457200"/>
+            <a:off x="5726571" y="3735324"/>
+            <a:ext cx="955265" cy="457200"/>
           </a:xfrm>
           <a:prstGeom prst="rect">
             <a:avLst/>
@@ -17707,11 +18222,11 @@
           <a:p>
             <a:pPr algn="l"/>
             <a:r>
-              <a:rPr sz="2600" b="0" i="0">
+              <a:rPr sz="2470" b="0" i="0">
                 <a:solidFill>
                   <a:srgbClr val="1A1A1A"/>
                 </a:solidFill>
-                <a:latin typeface="Century Schoolbook"/>
+                <a:latin typeface="Lexend"/>
               </a:rPr>
               <a:t>        </a:t>
             </a:r>
@@ -17720,7 +18235,7 @@
       </p:sp>
       <p:pic>
         <p:nvPicPr>
-          <p:cNvPr id="13" name="Picture 12" descr="9053d689824c5cdb.png"/>
+          <p:cNvPr id="13" name="Picture 12" descr="ae135669eeaf1953.png"/>
           <p:cNvPicPr>
             <a:picLocks noChangeAspect="1"/>
           </p:cNvPicPr>
@@ -17734,8 +18249,8 @@
         </p:blipFill>
         <p:spPr>
           <a:xfrm>
-            <a:off x="6570479" y="3758184"/>
-            <a:ext cx="2295144" cy="411480"/>
+            <a:off x="6544676" y="3761232"/>
+            <a:ext cx="2261616" cy="405384"/>
           </a:xfrm>
           <a:prstGeom prst="rect">
             <a:avLst/>
@@ -17744,7 +18259,7 @@
       </p:pic>
       <p:pic>
         <p:nvPicPr>
-          <p:cNvPr id="14" name="Picture 13" descr="a561d3e29393bcc1.png"/>
+          <p:cNvPr id="14" name="Picture 13" descr="452a14f090d2241e.png"/>
           <p:cNvPicPr>
             <a:picLocks noChangeAspect="1"/>
           </p:cNvPicPr>
@@ -17758,8 +18273,8 @@
         </p:blipFill>
         <p:spPr>
           <a:xfrm>
-            <a:off x="3643884" y="4443984"/>
-            <a:ext cx="4873752" cy="411480"/>
+            <a:off x="3685031" y="4445508"/>
+            <a:ext cx="4791456" cy="408432"/>
           </a:xfrm>
           <a:prstGeom prst="rect">
             <a:avLst/>
@@ -17808,11 +18323,11 @@
           <a:p>
             <a:pPr algn="l"/>
             <a:r>
-              <a:rPr sz="3600" b="1" i="0">
+              <a:rPr sz="3420" b="1" i="0">
                 <a:solidFill>
                   <a:srgbClr val="1A1A1A"/>
                 </a:solidFill>
-                <a:latin typeface="Century Schoolbook"/>
+                <a:latin typeface="Lexend"/>
               </a:rPr>
               <a:t>Notes</a:t>
             </a:r>
@@ -17948,11 +18463,11 @@
           <a:p>
             <a:pPr algn="l"/>
             <a:r>
-              <a:rPr sz="1100" b="0" i="1">
+              <a:rPr sz="1040" b="0" i="0">
                 <a:solidFill>
                   <a:srgbClr val="6B6B6B"/>
                 </a:solidFill>
-                <a:latin typeface="Century Schoolbook"/>
+                <a:latin typeface="Lexend"/>
               </a:rPr>
               <a:t>Grade 7 Accelerated · Unit 3 · Lessons 6–7 — Evaluating and Equivalent Expressions</a:t>
             </a:r>
@@ -17983,11 +18498,11 @@
           <a:p>
             <a:pPr algn="r"/>
             <a:r>
-              <a:rPr sz="1100" b="0" i="0">
+              <a:rPr sz="1040" b="0" i="0">
                 <a:solidFill>
                   <a:srgbClr val="6B6B6B"/>
                 </a:solidFill>
-                <a:latin typeface="Century Schoolbook"/>
+                <a:latin typeface="Lexend"/>
               </a:rPr>
               <a:t>7</a:t>
             </a:r>
@@ -18018,11 +18533,11 @@
           <a:p>
             <a:pPr algn="l"/>
             <a:r>
-              <a:rPr sz="2500" b="1" i="0">
+              <a:rPr sz="2380" b="1" i="0">
                 <a:solidFill>
                   <a:srgbClr val="1A1A1A"/>
                 </a:solidFill>
-                <a:latin typeface="Century Schoolbook"/>
+                <a:latin typeface="Lexend"/>
               </a:rPr>
               <a:t>IV.  Testing equivalence: Xavier's claim</a:t>
             </a:r>
@@ -18066,7 +18581,7 @@
       </p:cxnSp>
       <p:pic>
         <p:nvPicPr>
-          <p:cNvPr id="10" name="Picture 9" descr="8fba7ecf87f384ec.png"/>
+          <p:cNvPr id="10" name="Picture 9" descr="0f1f92d6ecfd5492.png"/>
           <p:cNvPicPr>
             <a:picLocks noChangeAspect="1"/>
           </p:cNvPicPr>
@@ -18080,8 +18595,8 @@
         </p:blipFill>
         <p:spPr>
           <a:xfrm>
-            <a:off x="1260084" y="1993392"/>
-            <a:ext cx="4294632" cy="676656"/>
+            <a:off x="1430260" y="1996440"/>
+            <a:ext cx="4136136" cy="667512"/>
           </a:xfrm>
           <a:prstGeom prst="rect">
             <a:avLst/>
@@ -18096,8 +18611,8 @@
         </p:nvSpPr>
         <p:spPr>
           <a:xfrm>
-            <a:off x="5554716" y="2103120"/>
-            <a:ext cx="1183151" cy="457200"/>
+            <a:off x="5566396" y="2101596"/>
+            <a:ext cx="1141503" cy="457200"/>
           </a:xfrm>
           <a:prstGeom prst="rect">
             <a:avLst/>
@@ -18112,11 +18627,11 @@
           <a:p>
             <a:pPr algn="l"/>
             <a:r>
-              <a:rPr sz="2600" b="0" i="0">
+              <a:rPr sz="2470" b="0" i="0">
                 <a:solidFill>
                   <a:srgbClr val="1A1A1A"/>
                 </a:solidFill>
-                <a:latin typeface="Century Schoolbook"/>
+                <a:latin typeface="Lexend"/>
               </a:rPr>
               <a:t>          </a:t>
             </a:r>
@@ -18125,7 +18640,7 @@
       </p:sp>
       <p:pic>
         <p:nvPicPr>
-          <p:cNvPr id="12" name="Picture 11" descr="505da5ea0c261bcf.png"/>
+          <p:cNvPr id="12" name="Picture 11" descr="a226c4dacfbe2efb.png"/>
           <p:cNvPicPr>
             <a:picLocks noChangeAspect="1"/>
           </p:cNvPicPr>
@@ -18139,8 +18654,8 @@
         </p:blipFill>
         <p:spPr>
           <a:xfrm>
-            <a:off x="6600707" y="1993392"/>
-            <a:ext cx="4300728" cy="676656"/>
+            <a:off x="6570739" y="1993392"/>
+            <a:ext cx="4160520" cy="673608"/>
           </a:xfrm>
           <a:prstGeom prst="rect">
             <a:avLst/>
@@ -18155,7 +18670,7 @@
         </p:nvSpPr>
         <p:spPr>
           <a:xfrm>
-            <a:off x="987552" y="3008375"/>
+            <a:off x="987552" y="3005328"/>
             <a:ext cx="10131551" cy="475488"/>
           </a:xfrm>
           <a:prstGeom prst="rect">
@@ -18171,11 +18686,11 @@
           <a:p>
             <a:pPr algn="l"/>
             <a:r>
-              <a:rPr sz="2300" b="1" i="0">
+              <a:rPr sz="2180" b="1" i="0">
                 <a:solidFill>
                   <a:srgbClr val="1A1A1A"/>
                 </a:solidFill>
-                <a:latin typeface="Century Schoolbook"/>
+                <a:latin typeface="Lexend"/>
               </a:rPr>
               <a:t>Same base, then compare exponents.</a:t>
             </a:r>
@@ -18184,7 +18699,7 @@
       </p:sp>
       <p:pic>
         <p:nvPicPr>
-          <p:cNvPr id="14" name="Picture 13" descr="5954d94571e7ef73.png"/>
+          <p:cNvPr id="14" name="Picture 13" descr="da5364dfc120c72e.png"/>
           <p:cNvPicPr>
             <a:picLocks noChangeAspect="1"/>
           </p:cNvPicPr>
@@ -18198,8 +18713,8 @@
         </p:blipFill>
         <p:spPr>
           <a:xfrm>
-            <a:off x="987552" y="3726179"/>
-            <a:ext cx="1487424" cy="402336"/>
+            <a:off x="987552" y="3755136"/>
+            <a:ext cx="1386840" cy="338328"/>
           </a:xfrm>
           <a:prstGeom prst="rect">
             <a:avLst/>
@@ -18214,8 +18729,8 @@
         </p:nvSpPr>
         <p:spPr>
           <a:xfrm>
-            <a:off x="2474976" y="3698747"/>
-            <a:ext cx="3404171" cy="457200"/>
+            <a:off x="2374392" y="3695699"/>
+            <a:ext cx="3301129" cy="457200"/>
           </a:xfrm>
           <a:prstGeom prst="rect">
             <a:avLst/>
@@ -18230,11 +18745,11 @@
           <a:p>
             <a:pPr algn="l"/>
             <a:r>
-              <a:rPr sz="2300" b="0" i="0">
+              <a:rPr sz="2180" b="0" i="0">
                 <a:solidFill>
                   <a:srgbClr val="1A1A1A"/>
                 </a:solidFill>
-                <a:latin typeface="Century Schoolbook"/>
+                <a:latin typeface="Lexend"/>
               </a:rPr>
               <a:t> — so Xavier is wrong.</a:t>
             </a:r>
@@ -18283,11 +18798,11 @@
           <a:p>
             <a:pPr algn="l"/>
             <a:r>
-              <a:rPr sz="3600" b="1" i="0">
+              <a:rPr sz="3420" b="1" i="0">
                 <a:solidFill>
                   <a:srgbClr val="1A1A1A"/>
                 </a:solidFill>
-                <a:latin typeface="Century Schoolbook"/>
+                <a:latin typeface="Lexend"/>
               </a:rPr>
               <a:t>Example 1</a:t>
             </a:r>
@@ -18423,11 +18938,11 @@
           <a:p>
             <a:pPr algn="l"/>
             <a:r>
-              <a:rPr sz="1100" b="0" i="1">
+              <a:rPr sz="1040" b="0" i="0">
                 <a:solidFill>
                   <a:srgbClr val="6B6B6B"/>
                 </a:solidFill>
-                <a:latin typeface="Century Schoolbook"/>
+                <a:latin typeface="Lexend"/>
               </a:rPr>
               <a:t>Grade 7 Accelerated · Unit 3 · Lessons 6–7 — Evaluating and Equivalent Expressions</a:t>
             </a:r>
@@ -18458,11 +18973,11 @@
           <a:p>
             <a:pPr algn="r"/>
             <a:r>
-              <a:rPr sz="1100" b="0" i="0">
+              <a:rPr sz="1040" b="0" i="0">
                 <a:solidFill>
                   <a:srgbClr val="6B6B6B"/>
                 </a:solidFill>
-                <a:latin typeface="Century Schoolbook"/>
+                <a:latin typeface="Lexend"/>
               </a:rPr>
               <a:t>8</a:t>
             </a:r>
@@ -18471,7 +18986,7 @@
       </p:sp>
       <p:pic>
         <p:nvPicPr>
-          <p:cNvPr id="8" name="Picture 7" descr="2d16e4daaa9b6d11.png"/>
+          <p:cNvPr id="8" name="Picture 7" descr="ad4c645122a3fc8a.png"/>
           <p:cNvPicPr>
             <a:picLocks noChangeAspect="1"/>
           </p:cNvPicPr>
@@ -18486,7 +19001,7 @@
         <p:spPr>
           <a:xfrm>
             <a:off x="5373623" y="2103120"/>
-            <a:ext cx="1414272" cy="676656"/>
+            <a:ext cx="1414272" cy="664464"/>
           </a:xfrm>
           <a:prstGeom prst="rect">
             <a:avLst/>
@@ -18501,7 +19016,7 @@
         </p:nvSpPr>
         <p:spPr>
           <a:xfrm>
-            <a:off x="777240" y="3282696"/>
+            <a:off x="777240" y="3270504"/>
             <a:ext cx="10607040" cy="429370"/>
           </a:xfrm>
           <a:prstGeom prst="rect">
@@ -18517,11 +19032,11 @@
           <a:p>
             <a:pPr algn="ctr"/>
             <a:r>
-              <a:rPr sz="2400" b="1" i="0">
+              <a:rPr sz="2280" b="1" i="0">
                 <a:solidFill>
                   <a:srgbClr val="1A1A1A"/>
                 </a:solidFill>
-                <a:latin typeface="Century Schoolbook"/>
+                <a:latin typeface="Lexend"/>
               </a:rPr>
               <a:t>Find the value.</a:t>
             </a:r>
@@ -18570,11 +19085,11 @@
           <a:p>
             <a:pPr algn="l"/>
             <a:r>
-              <a:rPr sz="3600" b="1" i="0">
+              <a:rPr sz="3420" b="1" i="0">
                 <a:solidFill>
                   <a:srgbClr val="1A1A1A"/>
                 </a:solidFill>
-                <a:latin typeface="Century Schoolbook"/>
+                <a:latin typeface="Lexend"/>
               </a:rPr>
               <a:t>Example 1</a:t>
             </a:r>
@@ -18710,11 +19225,11 @@
           <a:p>
             <a:pPr algn="l"/>
             <a:r>
-              <a:rPr sz="1100" b="0" i="1">
+              <a:rPr sz="1040" b="0" i="0">
                 <a:solidFill>
                   <a:srgbClr val="6B6B6B"/>
                 </a:solidFill>
-                <a:latin typeface="Century Schoolbook"/>
+                <a:latin typeface="Lexend"/>
               </a:rPr>
               <a:t>Grade 7 Accelerated · Unit 3 · Lessons 6–7 — Evaluating and Equivalent Expressions</a:t>
             </a:r>
@@ -18745,11 +19260,11 @@
           <a:p>
             <a:pPr algn="r"/>
             <a:r>
-              <a:rPr sz="1100" b="0" i="0">
+              <a:rPr sz="1040" b="0" i="0">
                 <a:solidFill>
                   <a:srgbClr val="6B6B6B"/>
                 </a:solidFill>
-                <a:latin typeface="Century Schoolbook"/>
+                <a:latin typeface="Lexend"/>
               </a:rPr>
               <a:t>9</a:t>
             </a:r>
@@ -18758,7 +19273,7 @@
       </p:sp>
       <p:pic>
         <p:nvPicPr>
-          <p:cNvPr id="8" name="Picture 7" descr="1ca1397ffa03d47c.png"/>
+          <p:cNvPr id="8" name="Picture 7" descr="6395c789165e951f.png"/>
           <p:cNvPicPr>
             <a:picLocks noChangeAspect="1"/>
           </p:cNvPicPr>
@@ -18773,7 +19288,7 @@
         <p:spPr>
           <a:xfrm>
             <a:off x="1828800" y="1920240"/>
-            <a:ext cx="3112008" cy="688848"/>
+            <a:ext cx="3099816" cy="670560"/>
           </a:xfrm>
           <a:prstGeom prst="rect">
             <a:avLst/>
@@ -18782,7 +19297,7 @@
       </p:pic>
       <p:pic>
         <p:nvPicPr>
-          <p:cNvPr id="9" name="Picture 8" descr="f25419565ed35dc9.png"/>
+          <p:cNvPr id="9" name="Picture 8" descr="670bdda2de14defc.png"/>
           <p:cNvPicPr>
             <a:picLocks noChangeAspect="1"/>
           </p:cNvPicPr>
@@ -18796,8 +19311,8 @@
         </p:blipFill>
         <p:spPr>
           <a:xfrm>
-            <a:off x="1828800" y="2883408"/>
-            <a:ext cx="1697736" cy="697992"/>
+            <a:off x="1828800" y="2865120"/>
+            <a:ext cx="1664208" cy="673608"/>
           </a:xfrm>
           <a:prstGeom prst="rect">
             <a:avLst/>
@@ -18828,11 +19343,11 @@
           <a:p>
             <a:pPr algn="ctr"/>
             <a:r>
-              <a:rPr sz="3200" b="1" i="0">
+              <a:rPr sz="3040" b="1" i="0">
                 <a:solidFill>
                   <a:srgbClr val="9E1B32"/>
                 </a:solidFill>
-                <a:latin typeface="Century Schoolbook"/>
+                <a:latin typeface="Lexend"/>
               </a:rPr>
               <a:t>Answer:   16/3</a:t>
             </a:r>

--- a/a7/packages/A7 Unit 3 - Exponents and Scientific Notation/Lessons/3.06/A7 3.06 Evaluating and Equivalent Expressions - Slides.pptx
+++ b/a7/packages/A7 Unit 3 - Exponents and Scientific Notation/Lessons/3.06/A7 3.06 Evaluating and Equivalent Expressions - Slides.pptx
@@ -8746,7 +8746,7 @@
       </p:sp>
       <p:pic>
         <p:nvPicPr>
-          <p:cNvPr id="9" name="Picture 8" descr="467b1d14e5da28ce.png"/>
+          <p:cNvPr id="9" name="Picture 8" descr="7365b91e0a0f6be1.png"/>
           <p:cNvPicPr>
             <a:picLocks noChangeAspect="1"/>
           </p:cNvPicPr>
@@ -8761,7 +8761,7 @@
         <p:spPr>
           <a:xfrm>
             <a:off x="4600084" y="1943100"/>
-            <a:ext cx="381000" cy="274320"/>
+            <a:ext cx="402336" cy="274320"/>
           </a:xfrm>
           <a:prstGeom prst="rect">
             <a:avLst/>
@@ -8776,7 +8776,7 @@
         </p:nvSpPr>
         <p:spPr>
           <a:xfrm>
-            <a:off x="4981084" y="1851660"/>
+            <a:off x="5002420" y="1851660"/>
             <a:ext cx="2115358" cy="457200"/>
           </a:xfrm>
           <a:prstGeom prst="rect">
@@ -8840,7 +8840,7 @@
       </p:sp>
       <p:pic>
         <p:nvPicPr>
-          <p:cNvPr id="12" name="Picture 11" descr="30913582715e4230.png"/>
+          <p:cNvPr id="12" name="Picture 11" descr="7fd1db2cf8c50649.png"/>
           <p:cNvPicPr>
             <a:picLocks noChangeAspect="1"/>
           </p:cNvPicPr>
@@ -8855,7 +8855,7 @@
         <p:spPr>
           <a:xfrm>
             <a:off x="3542702" y="2558796"/>
-            <a:ext cx="280416" cy="268224"/>
+            <a:ext cx="420624" cy="268224"/>
           </a:xfrm>
           <a:prstGeom prst="rect">
             <a:avLst/>
@@ -8870,7 +8870,7 @@
         </p:nvSpPr>
         <p:spPr>
           <a:xfrm>
-            <a:off x="3823118" y="2464308"/>
+            <a:off x="3963326" y="2464308"/>
             <a:ext cx="6521034" cy="457200"/>
           </a:xfrm>
           <a:prstGeom prst="rect">
@@ -9232,7 +9232,7 @@
       </p:sp>
       <p:pic>
         <p:nvPicPr>
-          <p:cNvPr id="9" name="Picture 8" descr="ae046867a8f4e70e.png"/>
+          <p:cNvPr id="9" name="Picture 8" descr="5d60df96ac6a5d6e.png"/>
           <p:cNvPicPr>
             <a:picLocks noChangeAspect="1"/>
           </p:cNvPicPr>
@@ -9247,7 +9247,7 @@
         <p:spPr>
           <a:xfrm>
             <a:off x="4600084" y="1943100"/>
-            <a:ext cx="384048" cy="274320"/>
+            <a:ext cx="405384" cy="274320"/>
           </a:xfrm>
           <a:prstGeom prst="rect">
             <a:avLst/>
@@ -9262,7 +9262,7 @@
         </p:nvSpPr>
         <p:spPr>
           <a:xfrm>
-            <a:off x="4984132" y="1851660"/>
+            <a:off x="5005468" y="1851660"/>
             <a:ext cx="2115358" cy="457200"/>
           </a:xfrm>
           <a:prstGeom prst="rect">
@@ -9326,7 +9326,7 @@
       </p:sp>
       <p:pic>
         <p:nvPicPr>
-          <p:cNvPr id="12" name="Picture 11" descr="4b0d991037dffa6c.png"/>
+          <p:cNvPr id="12" name="Picture 11" descr="01ba1addb14af469.png"/>
           <p:cNvPicPr>
             <a:picLocks noChangeAspect="1"/>
           </p:cNvPicPr>
@@ -9341,7 +9341,7 @@
         <p:spPr>
           <a:xfrm>
             <a:off x="3542702" y="2558796"/>
-            <a:ext cx="280416" cy="268224"/>
+            <a:ext cx="420624" cy="268224"/>
           </a:xfrm>
           <a:prstGeom prst="rect">
             <a:avLst/>
@@ -9356,7 +9356,7 @@
         </p:nvSpPr>
         <p:spPr>
           <a:xfrm>
-            <a:off x="3823118" y="2464308"/>
+            <a:off x="3963326" y="2464308"/>
             <a:ext cx="6521034" cy="457200"/>
           </a:xfrm>
           <a:prstGeom prst="rect">
@@ -9420,7 +9420,7 @@
       </p:sp>
       <p:pic>
         <p:nvPicPr>
-          <p:cNvPr id="15" name="Picture 14" descr="4d73f60d98d62787.png"/>
+          <p:cNvPr id="15" name="Picture 14" descr="f534f4da616d64bd.png"/>
           <p:cNvPicPr>
             <a:picLocks noChangeAspect="1"/>
           </p:cNvPicPr>
@@ -9434,8 +9434,8 @@
         </p:blipFill>
         <p:spPr>
           <a:xfrm>
-            <a:off x="4575047" y="3812650"/>
-            <a:ext cx="829056" cy="301752"/>
+            <a:off x="4460747" y="3812650"/>
+            <a:ext cx="1005840" cy="301752"/>
           </a:xfrm>
           <a:prstGeom prst="rect">
             <a:avLst/>
@@ -9444,7 +9444,7 @@
       </p:pic>
       <p:pic>
         <p:nvPicPr>
-          <p:cNvPr id="16" name="Picture 15" descr="5fb5e30ab5054cad.png"/>
+          <p:cNvPr id="16" name="Picture 15" descr="32a554851bde6109.png"/>
           <p:cNvPicPr>
             <a:picLocks noChangeAspect="1"/>
           </p:cNvPicPr>
@@ -9458,8 +9458,8 @@
         </p:blipFill>
         <p:spPr>
           <a:xfrm>
-            <a:off x="4575047" y="4317094"/>
-            <a:ext cx="3121152" cy="371856"/>
+            <a:off x="4460747" y="4317094"/>
+            <a:ext cx="3349752" cy="371856"/>
           </a:xfrm>
           <a:prstGeom prst="rect">
             <a:avLst/>
@@ -9496,7 +9496,7 @@
                 </a:solidFill>
                 <a:latin typeface="Lexend"/>
               </a:rPr>
-              <a:t>Answer:   The same: 8</a:t>
+              <a:t>Answer:   The same: 16</a:t>
             </a:r>
             <a:r>
               <a:rPr sz="3040" b="1" i="0" baseline="30000">
@@ -9523,7 +9523,7 @@
                 </a:solidFill>
                 <a:latin typeface="Lexend"/>
               </a:rPr>
-              <a:t>3</a:t>
+              <a:t>4</a:t>
             </a:r>
             <a:r>
               <a:rPr sz="3040" b="1" i="0">
@@ -9559,7 +9559,7 @@
                 </a:solidFill>
                 <a:latin typeface="Lexend"/>
               </a:rPr>
-              <a:t>15</a:t>
+              <a:t>20</a:t>
             </a:r>
           </a:p>
         </p:txBody>
@@ -9794,7 +9794,7 @@
       </p:sp>
       <p:pic>
         <p:nvPicPr>
-          <p:cNvPr id="8" name="Picture 7" descr="d4c29a874424d7fe.png"/>
+          <p:cNvPr id="8" name="Picture 7" descr="a834fafe1e7c827e.png"/>
           <p:cNvPicPr>
             <a:picLocks noChangeAspect="1"/>
           </p:cNvPicPr>
@@ -9808,8 +9808,8 @@
         </p:blipFill>
         <p:spPr>
           <a:xfrm>
-            <a:off x="5855207" y="2194560"/>
-            <a:ext cx="451104" cy="414528"/>
+            <a:off x="5734812" y="2194560"/>
+            <a:ext cx="691896" cy="417576"/>
           </a:xfrm>
           <a:prstGeom prst="rect">
             <a:avLst/>
@@ -9824,7 +9824,7 @@
         </p:nvSpPr>
         <p:spPr>
           <a:xfrm>
-            <a:off x="777240" y="2837687"/>
+            <a:off x="777240" y="2840736"/>
             <a:ext cx="10607040" cy="465151"/>
           </a:xfrm>
           <a:prstGeom prst="rect">
@@ -9859,7 +9859,7 @@
         </p:nvSpPr>
         <p:spPr>
           <a:xfrm>
-            <a:off x="1874519" y="3504007"/>
+            <a:off x="1874519" y="3507055"/>
             <a:ext cx="4572000" cy="548640"/>
           </a:xfrm>
           <a:prstGeom prst="rect">
@@ -9890,7 +9890,7 @@
                 </a:solidFill>
                 <a:latin typeface="Lexend"/>
               </a:rPr>
-              <a:t>3</a:t>
+              <a:t>5</a:t>
             </a:r>
             <a:r>
               <a:rPr sz="2280" b="0" i="0" baseline="30000">
@@ -9899,7 +9899,7 @@
                 </a:solidFill>
                 <a:latin typeface="Lexend"/>
               </a:rPr>
-              <a:t>16</a:t>
+              <a:t>49</a:t>
             </a:r>
           </a:p>
         </p:txBody>
@@ -9912,7 +9912,7 @@
         </p:nvSpPr>
         <p:spPr>
           <a:xfrm>
-            <a:off x="6629400" y="3504007"/>
+            <a:off x="6629400" y="3507055"/>
             <a:ext cx="4572000" cy="548640"/>
           </a:xfrm>
           <a:prstGeom prst="rect">
@@ -9943,7 +9943,7 @@
                 </a:solidFill>
                 <a:latin typeface="Lexend"/>
               </a:rPr>
-              <a:t>3</a:t>
+              <a:t>5</a:t>
             </a:r>
             <a:r>
               <a:rPr sz="2280" b="0" i="0" baseline="30000">
@@ -9952,7 +9952,7 @@
                 </a:solidFill>
                 <a:latin typeface="Lexend"/>
               </a:rPr>
-              <a:t>4</a:t>
+              <a:t>7</a:t>
             </a:r>
           </a:p>
         </p:txBody>
@@ -9965,7 +9965,7 @@
         </p:nvSpPr>
         <p:spPr>
           <a:xfrm>
-            <a:off x="1874519" y="4189807"/>
+            <a:off x="1874519" y="4192855"/>
             <a:ext cx="4572000" cy="548640"/>
           </a:xfrm>
           <a:prstGeom prst="rect">
@@ -9996,7 +9996,7 @@
                 </a:solidFill>
                 <a:latin typeface="Lexend"/>
               </a:rPr>
-              <a:t>3</a:t>
+              <a:t>5</a:t>
             </a:r>
             <a:r>
               <a:rPr sz="2280" b="0" i="0" baseline="30000">
@@ -10005,7 +10005,7 @@
                 </a:solidFill>
                 <a:latin typeface="Lexend"/>
               </a:rPr>
-              <a:t>8</a:t>
+              <a:t>14</a:t>
             </a:r>
           </a:p>
         </p:txBody>
@@ -10018,7 +10018,7 @@
         </p:nvSpPr>
         <p:spPr>
           <a:xfrm>
-            <a:off x="6629400" y="4189807"/>
+            <a:off x="6629400" y="4192855"/>
             <a:ext cx="4572000" cy="548640"/>
           </a:xfrm>
           <a:prstGeom prst="rect">
@@ -10049,7 +10049,7 @@
                 </a:solidFill>
                 <a:latin typeface="Lexend"/>
               </a:rPr>
-              <a:t>3</a:t>
+              <a:t>5</a:t>
             </a:r>
             <a:r>
               <a:rPr sz="2280" b="0" i="0" baseline="30000">
@@ -10058,7 +10058,7 @@
                 </a:solidFill>
                 <a:latin typeface="Lexend"/>
               </a:rPr>
-              <a:t>6</a:t>
+              <a:t>9</a:t>
             </a:r>
           </a:p>
         </p:txBody>
@@ -10071,7 +10071,7 @@
         </p:nvSpPr>
         <p:spPr>
           <a:xfrm>
-            <a:off x="777240" y="5195647"/>
+            <a:off x="777240" y="5198695"/>
             <a:ext cx="10607040" cy="457200"/>
           </a:xfrm>
           <a:prstGeom prst="rect">
@@ -10328,7 +10328,7 @@
       </p:sp>
       <p:pic>
         <p:nvPicPr>
-          <p:cNvPr id="8" name="Picture 7" descr="ed2e8b94db7fa1f5.png"/>
+          <p:cNvPr id="8" name="Picture 7" descr="889972c2e26fe7b8.png"/>
           <p:cNvPicPr>
             <a:picLocks noChangeAspect="1"/>
           </p:cNvPicPr>
@@ -10342,8 +10342,8 @@
         </p:blipFill>
         <p:spPr>
           <a:xfrm>
-            <a:off x="5855207" y="2103120"/>
-            <a:ext cx="451104" cy="417576"/>
+            <a:off x="5733288" y="2103120"/>
+            <a:ext cx="694944" cy="417576"/>
           </a:xfrm>
           <a:prstGeom prst="rect">
             <a:avLst/>
@@ -10387,7 +10387,7 @@
       </p:sp>
       <p:pic>
         <p:nvPicPr>
-          <p:cNvPr id="10" name="Picture 9" descr="78aebac338759846.png"/>
+          <p:cNvPr id="10" name="Picture 9" descr="53e0e696fae7cdd2.png"/>
           <p:cNvPicPr>
             <a:picLocks noChangeAspect="1"/>
           </p:cNvPicPr>
@@ -10401,8 +10401,8 @@
         </p:blipFill>
         <p:spPr>
           <a:xfrm>
-            <a:off x="4619243" y="3450667"/>
-            <a:ext cx="822960" cy="304800"/>
+            <a:off x="4465320" y="3450667"/>
+            <a:ext cx="1030224" cy="304800"/>
           </a:xfrm>
           <a:prstGeom prst="rect">
             <a:avLst/>
@@ -10411,7 +10411,7 @@
       </p:pic>
       <p:pic>
         <p:nvPicPr>
-          <p:cNvPr id="11" name="Picture 10" descr="04672528a36f35f8.png"/>
+          <p:cNvPr id="11" name="Picture 10" descr="addec46f494d81ac.png"/>
           <p:cNvPicPr>
             <a:picLocks noChangeAspect="1"/>
           </p:cNvPicPr>
@@ -10425,8 +10425,8 @@
         </p:blipFill>
         <p:spPr>
           <a:xfrm>
-            <a:off x="4619243" y="3956635"/>
-            <a:ext cx="3029712" cy="371856"/>
+            <a:off x="4465320" y="3956635"/>
+            <a:ext cx="3340608" cy="371856"/>
           </a:xfrm>
           <a:prstGeom prst="rect">
             <a:avLst/>
@@ -10463,7 +10463,7 @@
                 </a:solidFill>
                 <a:latin typeface="Lexend"/>
               </a:rPr>
-              <a:t>Answer:   C — 3</a:t>
+              <a:t>Answer:   C — 5</a:t>
             </a:r>
             <a:r>
               <a:rPr sz="3040" b="1" i="0" baseline="30000">
@@ -10472,7 +10472,7 @@
                 </a:solidFill>
                 <a:latin typeface="Lexend"/>
               </a:rPr>
-              <a:t>8</a:t>
+              <a:t>14</a:t>
             </a:r>
           </a:p>
         </p:txBody>
@@ -10707,7 +10707,7 @@
       </p:sp>
       <p:pic>
         <p:nvPicPr>
-          <p:cNvPr id="8" name="Picture 7" descr="6f49059bfeda6959.png"/>
+          <p:cNvPr id="8" name="Picture 7" descr="b0d7aaeb31fb59c7.png"/>
           <p:cNvPicPr>
             <a:picLocks noChangeAspect="1"/>
           </p:cNvPicPr>
@@ -10721,8 +10721,8 @@
         </p:blipFill>
         <p:spPr>
           <a:xfrm>
-            <a:off x="5097779" y="2194560"/>
-            <a:ext cx="1965960" cy="835152"/>
+            <a:off x="5082539" y="2194560"/>
+            <a:ext cx="1996439" cy="835152"/>
           </a:xfrm>
           <a:prstGeom prst="rect">
             <a:avLst/>
@@ -10812,7 +10812,7 @@
                 </a:solidFill>
                 <a:latin typeface="Lexend"/>
               </a:rPr>
-              <a:t>-7</a:t>
+              <a:t>-13</a:t>
             </a:r>
           </a:p>
         </p:txBody>
@@ -10865,7 +10865,7 @@
                 </a:solidFill>
                 <a:latin typeface="Lexend"/>
               </a:rPr>
-              <a:t>7</a:t>
+              <a:t>13</a:t>
             </a:r>
           </a:p>
         </p:txBody>
@@ -10918,7 +10918,7 @@
                 </a:solidFill>
                 <a:latin typeface="Lexend"/>
               </a:rPr>
-              <a:t>-5</a:t>
+              <a:t>-9</a:t>
             </a:r>
           </a:p>
         </p:txBody>
@@ -10971,7 +10971,7 @@
                 </a:solidFill>
                 <a:latin typeface="Lexend"/>
               </a:rPr>
-              <a:t>-12</a:t>
+              <a:t>-40</a:t>
             </a:r>
           </a:p>
         </p:txBody>
@@ -11241,7 +11241,7 @@
       </p:sp>
       <p:pic>
         <p:nvPicPr>
-          <p:cNvPr id="8" name="Picture 7" descr="2e484734d8312e16.png"/>
+          <p:cNvPr id="8" name="Picture 7" descr="359f836e76d10803.png"/>
           <p:cNvPicPr>
             <a:picLocks noChangeAspect="1"/>
           </p:cNvPicPr>
@@ -11255,8 +11255,8 @@
         </p:blipFill>
         <p:spPr>
           <a:xfrm>
-            <a:off x="5096255" y="2103120"/>
-            <a:ext cx="1969008" cy="835152"/>
+            <a:off x="5081016" y="2103120"/>
+            <a:ext cx="1999487" cy="835152"/>
           </a:xfrm>
           <a:prstGeom prst="rect">
             <a:avLst/>
@@ -11300,7 +11300,7 @@
       </p:sp>
       <p:pic>
         <p:nvPicPr>
-          <p:cNvPr id="10" name="Picture 9" descr="88e579fcfc3dcf6c.png"/>
+          <p:cNvPr id="10" name="Picture 9" descr="f705f97336b486f0.png"/>
           <p:cNvPicPr>
             <a:picLocks noChangeAspect="1"/>
           </p:cNvPicPr>
@@ -11314,8 +11314,8 @@
         </p:blipFill>
         <p:spPr>
           <a:xfrm>
-            <a:off x="4399787" y="3814903"/>
-            <a:ext cx="2770632" cy="603504"/>
+            <a:off x="4341875" y="3814903"/>
+            <a:ext cx="2791968" cy="603504"/>
           </a:xfrm>
           <a:prstGeom prst="rect">
             <a:avLst/>
@@ -11324,7 +11324,7 @@
       </p:pic>
       <p:pic>
         <p:nvPicPr>
-          <p:cNvPr id="11" name="Picture 10" descr="76ebb55f9259b000.png"/>
+          <p:cNvPr id="11" name="Picture 10" descr="4967ca317ddbfd57.png"/>
           <p:cNvPicPr>
             <a:picLocks noChangeAspect="1"/>
           </p:cNvPicPr>
@@ -11338,8 +11338,8 @@
         </p:blipFill>
         <p:spPr>
           <a:xfrm>
-            <a:off x="4399787" y="4599763"/>
-            <a:ext cx="3471672" cy="304800"/>
+            <a:off x="4341875" y="4601287"/>
+            <a:ext cx="3587496" cy="301752"/>
           </a:xfrm>
           <a:prstGeom prst="rect">
             <a:avLst/>
@@ -11385,7 +11385,7 @@
                 </a:solidFill>
                 <a:latin typeface="Lexend"/>
               </a:rPr>
-              <a:t>-7</a:t>
+              <a:t>-13</a:t>
             </a:r>
           </a:p>
         </p:txBody>
@@ -11620,7 +11620,7 @@
       </p:sp>
       <p:pic>
         <p:nvPicPr>
-          <p:cNvPr id="8" name="Picture 7" descr="8aa79e338eec268d.png"/>
+          <p:cNvPr id="8" name="Picture 7" descr="656e9da10d728f17.png"/>
           <p:cNvPicPr>
             <a:picLocks noChangeAspect="1"/>
           </p:cNvPicPr>
@@ -11634,8 +11634,8 @@
         </p:blipFill>
         <p:spPr>
           <a:xfrm>
-            <a:off x="5480304" y="2194560"/>
-            <a:ext cx="1200912" cy="414528"/>
+            <a:off x="5468112" y="2194560"/>
+            <a:ext cx="1225296" cy="417576"/>
           </a:xfrm>
           <a:prstGeom prst="rect">
             <a:avLst/>
@@ -11907,7 +11907,7 @@
       </p:sp>
       <p:pic>
         <p:nvPicPr>
-          <p:cNvPr id="8" name="Picture 7" descr="955eff3a17c3a975.png"/>
+          <p:cNvPr id="8" name="Picture 7" descr="eaa3e79b08e350c4.png"/>
           <p:cNvPicPr>
             <a:picLocks noChangeAspect="1"/>
           </p:cNvPicPr>
@@ -11921,8 +11921,8 @@
         </p:blipFill>
         <p:spPr>
           <a:xfrm>
-            <a:off x="5478780" y="2103120"/>
-            <a:ext cx="1203960" cy="414528"/>
+            <a:off x="5465064" y="2103120"/>
+            <a:ext cx="1231392" cy="417576"/>
           </a:xfrm>
           <a:prstGeom prst="rect">
             <a:avLst/>
@@ -11931,7 +11931,7 @@
       </p:pic>
       <p:pic>
         <p:nvPicPr>
-          <p:cNvPr id="9" name="Picture 8" descr="9b88a36b8746eb67.png"/>
+          <p:cNvPr id="9" name="Picture 8" descr="40efc5fe73000335.png"/>
           <p:cNvPicPr>
             <a:picLocks noChangeAspect="1"/>
           </p:cNvPicPr>
@@ -11945,8 +11945,8 @@
         </p:blipFill>
         <p:spPr>
           <a:xfrm>
-            <a:off x="4858511" y="2839211"/>
-            <a:ext cx="2063496" cy="371856"/>
+            <a:off x="4669535" y="2842259"/>
+            <a:ext cx="2209800" cy="371856"/>
           </a:xfrm>
           <a:prstGeom prst="rect">
             <a:avLst/>
@@ -11955,7 +11955,7 @@
       </p:pic>
       <p:pic>
         <p:nvPicPr>
-          <p:cNvPr id="10" name="Picture 9" descr="73f533a4d1835daa.png"/>
+          <p:cNvPr id="10" name="Picture 9" descr="f47aa3c800adc49f.png"/>
           <p:cNvPicPr>
             <a:picLocks noChangeAspect="1"/>
           </p:cNvPicPr>
@@ -11969,8 +11969,8 @@
         </p:blipFill>
         <p:spPr>
           <a:xfrm>
-            <a:off x="4858511" y="3410711"/>
-            <a:ext cx="2551176" cy="307848"/>
+            <a:off x="4669535" y="3415284"/>
+            <a:ext cx="2935224" cy="304800"/>
           </a:xfrm>
           <a:prstGeom prst="rect">
             <a:avLst/>
@@ -11985,7 +11985,7 @@
         </p:nvSpPr>
         <p:spPr>
           <a:xfrm>
-            <a:off x="4910327" y="4597908"/>
+            <a:off x="4832603" y="4599431"/>
             <a:ext cx="1920240" cy="548640"/>
           </a:xfrm>
           <a:prstGeom prst="rect">
@@ -12014,7 +12014,7 @@
       </p:sp>
       <p:pic>
         <p:nvPicPr>
-          <p:cNvPr id="12" name="Picture 11" descr="340250b80ab72834.png"/>
+          <p:cNvPr id="12" name="Picture 11" descr="0cb920e6a32bf966.png"/>
           <p:cNvPicPr>
             <a:picLocks noChangeAspect="1"/>
           </p:cNvPicPr>
@@ -12028,8 +12028,8 @@
         </p:blipFill>
         <p:spPr>
           <a:xfrm>
-            <a:off x="6830567" y="4663440"/>
-            <a:ext cx="420624" cy="417576"/>
+            <a:off x="6752844" y="4663440"/>
+            <a:ext cx="576072" cy="420624"/>
           </a:xfrm>
           <a:prstGeom prst="rect">
             <a:avLst/>
@@ -13594,7 +13594,7 @@
         </p:nvSpPr>
         <p:spPr>
           <a:xfrm>
-            <a:off x="1633663" y="2299715"/>
+            <a:off x="1670239" y="2302764"/>
             <a:ext cx="2242198" cy="457200"/>
           </a:xfrm>
           <a:prstGeom prst="rect">
@@ -13623,7 +13623,7 @@
       </p:sp>
       <p:pic>
         <p:nvPicPr>
-          <p:cNvPr id="9" name="Picture 8" descr="0cca3298828a0293.png"/>
+          <p:cNvPr id="9" name="Picture 8" descr="0664013df43bb1f5.png"/>
           <p:cNvPicPr>
             <a:picLocks noChangeAspect="1"/>
           </p:cNvPicPr>
@@ -13637,8 +13637,8 @@
         </p:blipFill>
         <p:spPr>
           <a:xfrm>
-            <a:off x="3738701" y="2196083"/>
-            <a:ext cx="1569720" cy="664464"/>
+            <a:off x="3775277" y="2194560"/>
+            <a:ext cx="1545336" cy="673608"/>
           </a:xfrm>
           <a:prstGeom prst="rect">
             <a:avLst/>
@@ -13653,7 +13653,7 @@
         </p:nvSpPr>
         <p:spPr>
           <a:xfrm>
-            <a:off x="5308421" y="2299715"/>
+            <a:off x="5320613" y="2302764"/>
             <a:ext cx="1201901" cy="457200"/>
           </a:xfrm>
           <a:prstGeom prst="rect">
@@ -13682,7 +13682,7 @@
       </p:sp>
       <p:pic>
         <p:nvPicPr>
-          <p:cNvPr id="11" name="Picture 10" descr="410598a25a8c8379.png"/>
+          <p:cNvPr id="11" name="Picture 10" descr="6d3dba428ef905c2.png"/>
           <p:cNvPicPr>
             <a:picLocks noChangeAspect="1"/>
           </p:cNvPicPr>
@@ -13696,8 +13696,8 @@
         </p:blipFill>
         <p:spPr>
           <a:xfrm>
-            <a:off x="6373163" y="2194560"/>
-            <a:ext cx="1575816" cy="667512"/>
+            <a:off x="6385355" y="2197608"/>
+            <a:ext cx="1527048" cy="667512"/>
           </a:xfrm>
           <a:prstGeom prst="rect">
             <a:avLst/>
@@ -13712,7 +13712,7 @@
         </p:nvSpPr>
         <p:spPr>
           <a:xfrm>
-            <a:off x="7948979" y="2299715"/>
+            <a:off x="7912403" y="2302764"/>
             <a:ext cx="2716037" cy="457200"/>
           </a:xfrm>
           <a:prstGeom prst="rect">
@@ -13747,7 +13747,7 @@
         </p:nvSpPr>
         <p:spPr>
           <a:xfrm>
-            <a:off x="1841547" y="3113532"/>
+            <a:off x="1836975" y="3119628"/>
             <a:ext cx="5445218" cy="457200"/>
           </a:xfrm>
           <a:prstGeom prst="rect">
@@ -13776,7 +13776,7 @@
       </p:sp>
       <p:pic>
         <p:nvPicPr>
-          <p:cNvPr id="14" name="Picture 13" descr="d2ebb822973674f1.png"/>
+          <p:cNvPr id="14" name="Picture 13" descr="5409fbe234c1f4dc.png"/>
           <p:cNvPicPr>
             <a:picLocks noChangeAspect="1"/>
           </p:cNvPicPr>
@@ -13790,8 +13790,8 @@
         </p:blipFill>
         <p:spPr>
           <a:xfrm>
-            <a:off x="7149605" y="3174491"/>
-            <a:ext cx="487680" cy="335280"/>
+            <a:off x="7145033" y="3179064"/>
+            <a:ext cx="496824" cy="338328"/>
           </a:xfrm>
           <a:prstGeom prst="rect">
             <a:avLst/>
@@ -13806,7 +13806,7 @@
         </p:nvSpPr>
         <p:spPr>
           <a:xfrm>
-            <a:off x="7637285" y="3113532"/>
+            <a:off x="7641857" y="3119628"/>
             <a:ext cx="2819847" cy="457200"/>
           </a:xfrm>
           <a:prstGeom prst="rect">
@@ -14104,7 +14104,7 @@
         </p:nvSpPr>
         <p:spPr>
           <a:xfrm>
-            <a:off x="1627567" y="2211323"/>
+            <a:off x="1665667" y="2211323"/>
             <a:ext cx="2242198" cy="457200"/>
           </a:xfrm>
           <a:prstGeom prst="rect">
@@ -14133,7 +14133,7 @@
       </p:sp>
       <p:pic>
         <p:nvPicPr>
-          <p:cNvPr id="9" name="Picture 8" descr="387b1e44b6216a29.png"/>
+          <p:cNvPr id="9" name="Picture 8" descr="3c5660d2a81795c6.png"/>
           <p:cNvPicPr>
             <a:picLocks noChangeAspect="1"/>
           </p:cNvPicPr>
@@ -14147,8 +14147,8 @@
         </p:blipFill>
         <p:spPr>
           <a:xfrm>
-            <a:off x="3732605" y="2106168"/>
-            <a:ext cx="1575816" cy="667512"/>
+            <a:off x="3770705" y="2103120"/>
+            <a:ext cx="1548384" cy="673608"/>
           </a:xfrm>
           <a:prstGeom prst="rect">
             <a:avLst/>
@@ -14163,7 +14163,7 @@
         </p:nvSpPr>
         <p:spPr>
           <a:xfrm>
-            <a:off x="5308421" y="2211323"/>
+            <a:off x="5319089" y="2211323"/>
             <a:ext cx="1201901" cy="457200"/>
           </a:xfrm>
           <a:prstGeom prst="rect">
@@ -14192,7 +14192,7 @@
       </p:sp>
       <p:pic>
         <p:nvPicPr>
-          <p:cNvPr id="11" name="Picture 10" descr="5a4b2276e1b02b4e.png"/>
+          <p:cNvPr id="11" name="Picture 10" descr="53a7bdac80b14304.png"/>
           <p:cNvPicPr>
             <a:picLocks noChangeAspect="1"/>
           </p:cNvPicPr>
@@ -14206,8 +14206,8 @@
         </p:blipFill>
         <p:spPr>
           <a:xfrm>
-            <a:off x="6373163" y="2103120"/>
-            <a:ext cx="1581912" cy="673608"/>
+            <a:off x="6383831" y="2103120"/>
+            <a:ext cx="1533144" cy="673608"/>
           </a:xfrm>
           <a:prstGeom prst="rect">
             <a:avLst/>
@@ -14222,7 +14222,7 @@
         </p:nvSpPr>
         <p:spPr>
           <a:xfrm>
-            <a:off x="7955075" y="2211323"/>
+            <a:off x="7916975" y="2211323"/>
             <a:ext cx="2716037" cy="457200"/>
           </a:xfrm>
           <a:prstGeom prst="rect">
@@ -14257,7 +14257,7 @@
         </p:nvSpPr>
         <p:spPr>
           <a:xfrm>
-            <a:off x="1840023" y="3028188"/>
+            <a:off x="1835451" y="3028188"/>
             <a:ext cx="5445218" cy="457200"/>
           </a:xfrm>
           <a:prstGeom prst="rect">
@@ -14286,7 +14286,7 @@
       </p:sp>
       <p:pic>
         <p:nvPicPr>
-          <p:cNvPr id="14" name="Picture 13" descr="b57ed0c2af593e60.png"/>
+          <p:cNvPr id="14" name="Picture 13" descr="8d9dc5c0e5cd5b28.png"/>
           <p:cNvPicPr>
             <a:picLocks noChangeAspect="1"/>
           </p:cNvPicPr>
@@ -14300,8 +14300,8 @@
         </p:blipFill>
         <p:spPr>
           <a:xfrm>
-            <a:off x="7148081" y="3090672"/>
-            <a:ext cx="490727" cy="332232"/>
+            <a:off x="7143509" y="3086100"/>
+            <a:ext cx="499871" cy="341376"/>
           </a:xfrm>
           <a:prstGeom prst="rect">
             <a:avLst/>
@@ -14316,7 +14316,7 @@
         </p:nvSpPr>
         <p:spPr>
           <a:xfrm>
-            <a:off x="7638809" y="3028188"/>
+            <a:off x="7643381" y="3028188"/>
             <a:ext cx="2819847" cy="457200"/>
           </a:xfrm>
           <a:prstGeom prst="rect">
@@ -14351,7 +14351,7 @@
         </p:nvSpPr>
         <p:spPr>
           <a:xfrm>
-            <a:off x="3350348" y="3883152"/>
+            <a:off x="3388448" y="3887724"/>
             <a:ext cx="1298517" cy="457200"/>
           </a:xfrm>
           <a:prstGeom prst="rect">
@@ -14380,7 +14380,7 @@
       </p:sp>
       <p:pic>
         <p:nvPicPr>
-          <p:cNvPr id="17" name="Picture 16" descr="a54eb59ad31b1d2e.png"/>
+          <p:cNvPr id="17" name="Picture 16" descr="b8f6ab93db3df89b.png"/>
           <p:cNvPicPr>
             <a:picLocks noChangeAspect="1"/>
           </p:cNvPicPr>
@@ -14394,8 +14394,8 @@
         </p:blipFill>
         <p:spPr>
           <a:xfrm>
-            <a:off x="4511706" y="3810000"/>
-            <a:ext cx="3749039" cy="603504"/>
+            <a:off x="4549806" y="3810000"/>
+            <a:ext cx="3721608" cy="612648"/>
           </a:xfrm>
           <a:prstGeom prst="rect">
             <a:avLst/>
@@ -14410,7 +14410,7 @@
         </p:nvSpPr>
         <p:spPr>
           <a:xfrm>
-            <a:off x="3350348" y="4619244"/>
+            <a:off x="3388448" y="4628388"/>
             <a:ext cx="1833702" cy="457200"/>
           </a:xfrm>
           <a:prstGeom prst="rect">
@@ -14439,7 +14439,7 @@
       </p:sp>
       <p:pic>
         <p:nvPicPr>
-          <p:cNvPr id="19" name="Picture 18" descr="a1e5d3fbd0cb369e.png"/>
+          <p:cNvPr id="19" name="Picture 18" descr="12a68962e6720dc0.png"/>
           <p:cNvPicPr>
             <a:picLocks noChangeAspect="1"/>
           </p:cNvPicPr>
@@ -14453,8 +14453,8 @@
         </p:blipFill>
         <p:spPr>
           <a:xfrm>
-            <a:off x="5046891" y="4541520"/>
-            <a:ext cx="3767328" cy="612648"/>
+            <a:off x="5084991" y="4550664"/>
+            <a:ext cx="3688080" cy="612648"/>
           </a:xfrm>
           <a:prstGeom prst="rect">
             <a:avLst/>
@@ -14469,7 +14469,7 @@
         </p:nvSpPr>
         <p:spPr>
           <a:xfrm>
-            <a:off x="777240" y="5291328"/>
+            <a:off x="777240" y="5300472"/>
             <a:ext cx="10607040" cy="548640"/>
           </a:xfrm>
           <a:prstGeom prst="rect">
@@ -14491,7 +14491,7 @@
                 </a:solidFill>
                 <a:latin typeface="Lexend"/>
               </a:rPr>
-              <a:t>Answer:   No — the second is 2</a:t>
+              <a:t>Answer:   No — the second is 3</a:t>
             </a:r>
             <a:r>
               <a:rPr sz="3040" b="1" i="0" baseline="30000">
@@ -14500,7 +14500,7 @@
                 </a:solidFill>
                 <a:latin typeface="Lexend"/>
               </a:rPr>
-              <a:t>-6</a:t>
+              <a:t>-8</a:t>
             </a:r>
             <a:r>
               <a:rPr sz="3040" b="1" i="0">
@@ -14509,7 +14509,7 @@
                 </a:solidFill>
                 <a:latin typeface="Lexend"/>
               </a:rPr>
-              <a:t>, not 2</a:t>
+              <a:t>, not 3</a:t>
             </a:r>
             <a:r>
               <a:rPr sz="3040" b="1" i="0" baseline="30000">
@@ -14518,7 +14518,7 @@
                 </a:solidFill>
                 <a:latin typeface="Lexend"/>
               </a:rPr>
-              <a:t>-7</a:t>
+              <a:t>-9</a:t>
             </a:r>
           </a:p>
         </p:txBody>
